--- a/marl_opp_aware_results.pptx
+++ b/marl_opp_aware_results.pptx
@@ -2,20 +2,25 @@
 <file path=ppt/presentation.xml><?xml version="1.0" encoding="utf-8"?>
 <p:presentation xmlns:p="http://schemas.openxmlformats.org/presentationml/2006/main">
   <p:sldMasterIdLst>
-    <p:sldMasterId xmlns:r="http://schemas.openxmlformats.org/officeDocument/2006/relationships" id="2147483648" r:id="Rd92b93ce81204696"/>
+    <p:sldMasterId xmlns:r="http://schemas.openxmlformats.org/officeDocument/2006/relationships" id="2147483648" r:id="Rc9f64235cecd495e"/>
   </p:sldMasterIdLst>
   <p:notesMasterIdLst>
-    <p:notesMasterId xmlns:r="http://schemas.openxmlformats.org/officeDocument/2006/relationships" r:id="Rb0667f06523647b7"/>
+    <p:notesMasterId xmlns:r="http://schemas.openxmlformats.org/officeDocument/2006/relationships" r:id="R998293e07d554763"/>
   </p:notesMasterIdLst>
   <p:sldIdLst>
-    <p:sldId xmlns:r="http://schemas.openxmlformats.org/officeDocument/2006/relationships" id="256" r:id="Ra848c826f57941d2"/>
-    <p:sldId xmlns:r="http://schemas.openxmlformats.org/officeDocument/2006/relationships" id="257" r:id="R10c9034ee9c241be"/>
-    <p:sldId xmlns:r="http://schemas.openxmlformats.org/officeDocument/2006/relationships" id="258" r:id="R0355999fc63e410d"/>
-    <p:sldId xmlns:r="http://schemas.openxmlformats.org/officeDocument/2006/relationships" id="259" r:id="R84f6c22130c140f0"/>
-    <p:sldId xmlns:r="http://schemas.openxmlformats.org/officeDocument/2006/relationships" id="260" r:id="R6e3f50ff315d4107"/>
-    <p:sldId xmlns:r="http://schemas.openxmlformats.org/officeDocument/2006/relationships" id="261" r:id="R1ef3c586b5e047a2"/>
-    <p:sldId xmlns:r="http://schemas.openxmlformats.org/officeDocument/2006/relationships" id="262" r:id="Rc0618191ff6140ec"/>
-    <p:sldId xmlns:r="http://schemas.openxmlformats.org/officeDocument/2006/relationships" id="263" r:id="R475958042b724408"/>
+    <p:sldId xmlns:r="http://schemas.openxmlformats.org/officeDocument/2006/relationships" id="256" r:id="R11d5e7f84e0949a3"/>
+    <p:sldId xmlns:r="http://schemas.openxmlformats.org/officeDocument/2006/relationships" id="257" r:id="Rb5c08fd9155040e6"/>
+    <p:sldId xmlns:r="http://schemas.openxmlformats.org/officeDocument/2006/relationships" id="258" r:id="Re80dc489d72744ff"/>
+    <p:sldId xmlns:r="http://schemas.openxmlformats.org/officeDocument/2006/relationships" id="259" r:id="R0484d0b685b94dce"/>
+    <p:sldId xmlns:r="http://schemas.openxmlformats.org/officeDocument/2006/relationships" id="260" r:id="Rdb68792c8a8d497f"/>
+    <p:sldId xmlns:r="http://schemas.openxmlformats.org/officeDocument/2006/relationships" id="261" r:id="Ra8fe374139ed47c7"/>
+    <p:sldId xmlns:r="http://schemas.openxmlformats.org/officeDocument/2006/relationships" id="262" r:id="Re0161b6a59664b52"/>
+    <p:sldId xmlns:r="http://schemas.openxmlformats.org/officeDocument/2006/relationships" id="263" r:id="R24a68b7bf0764e9d"/>
+    <p:sldId xmlns:r="http://schemas.openxmlformats.org/officeDocument/2006/relationships" id="264" r:id="Rc7a52020e65342f1"/>
+    <p:sldId xmlns:r="http://schemas.openxmlformats.org/officeDocument/2006/relationships" id="265" r:id="R9465503e35b948b4"/>
+    <p:sldId xmlns:r="http://schemas.openxmlformats.org/officeDocument/2006/relationships" id="266" r:id="R1046cbeb9cad44b7"/>
+    <p:sldId xmlns:r="http://schemas.openxmlformats.org/officeDocument/2006/relationships" id="267" r:id="R6477cc398057411f"/>
+    <p:sldId xmlns:r="http://schemas.openxmlformats.org/officeDocument/2006/relationships" id="268" r:id="R8f0c6f2daac34f28"/>
   </p:sldIdLst>
   <p:sldSz cx="12192000" cy="6858000"/>
   <p:notesSz cx="6858000" cy="9144000"/>
@@ -544,7 +549,287 @@
           <a:lstStyle xmlns:a="http://schemas.openxmlformats.org/drawingml/2006/main"/>
           <a:p xmlns:a="http://schemas.openxmlformats.org/drawingml/2006/main">
             <a:r>
-              <a:t>Open with the one-sentence thesis: infer the opponent's hidden strategy as a calibrated belief, then plan against that belief. Be precise that this is a controlled MARL study, not yet a broad SOTA model-based MARL claim. The deck is intentionally minimal; the defense lives in the speaker notes and repo artifacts.</a:t>
+              <a:t>Open slowly. The whole talk is about one controlled question: can a team measure an opponent's hidden strategy, keep uncertainty in the loop, and use that belief during planning?</a:t>
+            </a:r>
+          </a:p>
+        </p:txBody>
+      </p:sp>
+      <p:sp>
+        <p:nvSpPr>
+          <p:cNvPr id="4" name="Slide Number Placeholder 3"/>
+          <p:cNvSpPr>
+            <a:spLocks xmlns:a="http://schemas.openxmlformats.org/drawingml/2006/main" noGrp="1"/>
+          </p:cNvSpPr>
+          <p:nvPr>
+            <p:ph type="sldNum" idx="5"/>
+          </p:nvPr>
+        </p:nvSpPr>
+        <p:spPr/>
+        <p:txBody>
+          <a:bodyPr xmlns:a="http://schemas.openxmlformats.org/drawingml/2006/main"/>
+          <a:lstStyle xmlns:a="http://schemas.openxmlformats.org/drawingml/2006/main"/>
+          <a:p xmlns:a="http://schemas.openxmlformats.org/drawingml/2006/main"/>
+        </p:txBody>
+      </p:sp>
+    </p:spTree>
+  </p:cSld>
+  <p:clrMapOvr>
+    <a:masterClrMapping xmlns:a="http://schemas.openxmlformats.org/drawingml/2006/main"/>
+  </p:clrMapOvr>
+</p:notes>
+</file>
+
+<file path=ppt/notesSlides/notesSlide10.xml><?xml version="1.0" encoding="utf-8"?>
+<p:notes xmlns:p="http://schemas.openxmlformats.org/presentationml/2006/main">
+  <p:cSld>
+    <p:spTree>
+      <p:nvGrpSpPr>
+        <p:cNvPr id="1" name=""/>
+        <p:cNvGrpSpPr/>
+        <p:nvPr/>
+      </p:nvGrpSpPr>
+      <p:grpSpPr>
+        <a:xfrm xmlns:a="http://schemas.openxmlformats.org/drawingml/2006/main"/>
+      </p:grpSpPr>
+      <p:sp>
+        <p:nvSpPr>
+          <p:cNvPr id="2" name="Slide Image Placeholder 1"/>
+          <p:cNvSpPr>
+            <a:spLocks xmlns:a="http://schemas.openxmlformats.org/drawingml/2006/main" noGrp="1"/>
+          </p:cNvSpPr>
+          <p:nvPr>
+            <p:ph type="sldImg" idx="0"/>
+          </p:nvPr>
+        </p:nvSpPr>
+        <p:spPr/>
+      </p:sp>
+      <p:sp>
+        <p:nvSpPr>
+          <p:cNvPr id="3" name="Notes Placeholder 2"/>
+          <p:cNvSpPr>
+            <a:spLocks xmlns:a="http://schemas.openxmlformats.org/drawingml/2006/main" noGrp="1"/>
+          </p:cNvSpPr>
+          <p:nvPr>
+            <p:ph type="body" idx="1"/>
+          </p:nvPr>
+        </p:nvSpPr>
+        <p:spPr/>
+        <p:txBody>
+          <a:bodyPr xmlns:a="http://schemas.openxmlformats.org/drawingml/2006/main"/>
+          <a:lstStyle xmlns:a="http://schemas.openxmlformats.org/drawingml/2006/main"/>
+          <a:p xmlns:a="http://schemas.openxmlformats.org/drawingml/2006/main">
+            <a:r>
+              <a:t>Use this as a sanity check. A poor clone would make the latent experiment hard to read. Here the clone is close enough to MAPPO that placement information can be evaluated in deployed captures.</a:t>
+            </a:r>
+          </a:p>
+        </p:txBody>
+      </p:sp>
+      <p:sp>
+        <p:nvSpPr>
+          <p:cNvPr id="4" name="Slide Number Placeholder 3"/>
+          <p:cNvSpPr>
+            <a:spLocks xmlns:a="http://schemas.openxmlformats.org/drawingml/2006/main" noGrp="1"/>
+          </p:cNvSpPr>
+          <p:nvPr>
+            <p:ph type="sldNum" idx="5"/>
+          </p:nvPr>
+        </p:nvSpPr>
+        <p:spPr/>
+        <p:txBody>
+          <a:bodyPr xmlns:a="http://schemas.openxmlformats.org/drawingml/2006/main"/>
+          <a:lstStyle xmlns:a="http://schemas.openxmlformats.org/drawingml/2006/main"/>
+          <a:p xmlns:a="http://schemas.openxmlformats.org/drawingml/2006/main"/>
+        </p:txBody>
+      </p:sp>
+    </p:spTree>
+  </p:cSld>
+  <p:clrMapOvr>
+    <a:masterClrMapping xmlns:a="http://schemas.openxmlformats.org/drawingml/2006/main"/>
+  </p:clrMapOvr>
+</p:notes>
+</file>
+
+<file path=ppt/notesSlides/notesSlide11.xml><?xml version="1.0" encoding="utf-8"?>
+<p:notes xmlns:p="http://schemas.openxmlformats.org/presentationml/2006/main">
+  <p:cSld>
+    <p:spTree>
+      <p:nvGrpSpPr>
+        <p:cNvPr id="1" name=""/>
+        <p:cNvGrpSpPr/>
+        <p:nvPr/>
+      </p:nvGrpSpPr>
+      <p:grpSpPr>
+        <a:xfrm xmlns:a="http://schemas.openxmlformats.org/drawingml/2006/main"/>
+      </p:grpSpPr>
+      <p:sp>
+        <p:nvSpPr>
+          <p:cNvPr id="2" name="Slide Image Placeholder 1"/>
+          <p:cNvSpPr>
+            <a:spLocks xmlns:a="http://schemas.openxmlformats.org/drawingml/2006/main" noGrp="1"/>
+          </p:cNvSpPr>
+          <p:nvPr>
+            <p:ph type="sldImg" idx="0"/>
+          </p:nvPr>
+        </p:nvSpPr>
+        <p:spPr/>
+      </p:sp>
+      <p:sp>
+        <p:nvSpPr>
+          <p:cNvPr id="3" name="Notes Placeholder 2"/>
+          <p:cNvSpPr>
+            <a:spLocks xmlns:a="http://schemas.openxmlformats.org/drawingml/2006/main" noGrp="1"/>
+          </p:cNvSpPr>
+          <p:nvPr>
+            <p:ph type="body" idx="1"/>
+          </p:nvPr>
+        </p:nvSpPr>
+        <p:spPr/>
+        <p:txBody>
+          <a:bodyPr xmlns:a="http://schemas.openxmlformats.org/drawingml/2006/main"/>
+          <a:lstStyle xmlns:a="http://schemas.openxmlformats.org/drawingml/2006/main"/>
+          <a:p xmlns:a="http://schemas.openxmlformats.org/drawingml/2006/main">
+            <a:r>
+              <a:t>This slide gives the careful BC interpretation. True placement information matters. The current unsupervised latent has headroom. Do not sell this as the main paper win; sell it as evidence that a better strategy code could matter.</a:t>
+            </a:r>
+          </a:p>
+        </p:txBody>
+      </p:sp>
+      <p:sp>
+        <p:nvSpPr>
+          <p:cNvPr id="4" name="Slide Number Placeholder 3"/>
+          <p:cNvSpPr>
+            <a:spLocks xmlns:a="http://schemas.openxmlformats.org/drawingml/2006/main" noGrp="1"/>
+          </p:cNvSpPr>
+          <p:nvPr>
+            <p:ph type="sldNum" idx="5"/>
+          </p:nvPr>
+        </p:nvSpPr>
+        <p:spPr/>
+        <p:txBody>
+          <a:bodyPr xmlns:a="http://schemas.openxmlformats.org/drawingml/2006/main"/>
+          <a:lstStyle xmlns:a="http://schemas.openxmlformats.org/drawingml/2006/main"/>
+          <a:p xmlns:a="http://schemas.openxmlformats.org/drawingml/2006/main"/>
+        </p:txBody>
+      </p:sp>
+    </p:spTree>
+  </p:cSld>
+  <p:clrMapOvr>
+    <a:masterClrMapping xmlns:a="http://schemas.openxmlformats.org/drawingml/2006/main"/>
+  </p:clrMapOvr>
+</p:notes>
+</file>
+
+<file path=ppt/notesSlides/notesSlide12.xml><?xml version="1.0" encoding="utf-8"?>
+<p:notes xmlns:p="http://schemas.openxmlformats.org/presentationml/2006/main">
+  <p:cSld>
+    <p:spTree>
+      <p:nvGrpSpPr>
+        <p:cNvPr id="1" name=""/>
+        <p:cNvGrpSpPr/>
+        <p:nvPr/>
+      </p:nvGrpSpPr>
+      <p:grpSpPr>
+        <a:xfrm xmlns:a="http://schemas.openxmlformats.org/drawingml/2006/main"/>
+      </p:grpSpPr>
+      <p:sp>
+        <p:nvSpPr>
+          <p:cNvPr id="2" name="Slide Image Placeholder 1"/>
+          <p:cNvSpPr>
+            <a:spLocks xmlns:a="http://schemas.openxmlformats.org/drawingml/2006/main" noGrp="1"/>
+          </p:cNvSpPr>
+          <p:nvPr>
+            <p:ph type="sldImg" idx="0"/>
+          </p:nvPr>
+        </p:nvSpPr>
+        <p:spPr/>
+      </p:sp>
+      <p:sp>
+        <p:nvSpPr>
+          <p:cNvPr id="3" name="Notes Placeholder 2"/>
+          <p:cNvSpPr>
+            <a:spLocks xmlns:a="http://schemas.openxmlformats.org/drawingml/2006/main" noGrp="1"/>
+          </p:cNvSpPr>
+          <p:nvPr>
+            <p:ph type="body" idx="1"/>
+          </p:nvPr>
+        </p:nvSpPr>
+        <p:spPr/>
+        <p:txBody>
+          <a:bodyPr xmlns:a="http://schemas.openxmlformats.org/drawingml/2006/main"/>
+          <a:lstStyle xmlns:a="http://schemas.openxmlformats.org/drawingml/2006/main"/>
+          <a:p xmlns:a="http://schemas.openxmlformats.org/drawingml/2006/main">
+            <a:r>
+              <a:t>This slide arms the literature answer. HOP is the cleanest first comparison. The model-based MARL line tests world-model quality. The opponent-modeling line tests whether belief adds more than conditioning on opponent history.</a:t>
+            </a:r>
+          </a:p>
+        </p:txBody>
+      </p:sp>
+      <p:sp>
+        <p:nvSpPr>
+          <p:cNvPr id="4" name="Slide Number Placeholder 3"/>
+          <p:cNvSpPr>
+            <a:spLocks xmlns:a="http://schemas.openxmlformats.org/drawingml/2006/main" noGrp="1"/>
+          </p:cNvSpPr>
+          <p:nvPr>
+            <p:ph type="sldNum" idx="5"/>
+          </p:nvPr>
+        </p:nvSpPr>
+        <p:spPr/>
+        <p:txBody>
+          <a:bodyPr xmlns:a="http://schemas.openxmlformats.org/drawingml/2006/main"/>
+          <a:lstStyle xmlns:a="http://schemas.openxmlformats.org/drawingml/2006/main"/>
+          <a:p xmlns:a="http://schemas.openxmlformats.org/drawingml/2006/main"/>
+        </p:txBody>
+      </p:sp>
+    </p:spTree>
+  </p:cSld>
+  <p:clrMapOvr>
+    <a:masterClrMapping xmlns:a="http://schemas.openxmlformats.org/drawingml/2006/main"/>
+  </p:clrMapOvr>
+</p:notes>
+</file>
+
+<file path=ppt/notesSlides/notesSlide13.xml><?xml version="1.0" encoding="utf-8"?>
+<p:notes xmlns:p="http://schemas.openxmlformats.org/presentationml/2006/main">
+  <p:cSld>
+    <p:spTree>
+      <p:nvGrpSpPr>
+        <p:cNvPr id="1" name=""/>
+        <p:cNvGrpSpPr/>
+        <p:nvPr/>
+      </p:nvGrpSpPr>
+      <p:grpSpPr>
+        <a:xfrm xmlns:a="http://schemas.openxmlformats.org/drawingml/2006/main"/>
+      </p:grpSpPr>
+      <p:sp>
+        <p:nvSpPr>
+          <p:cNvPr id="2" name="Slide Image Placeholder 1"/>
+          <p:cNvSpPr>
+            <a:spLocks xmlns:a="http://schemas.openxmlformats.org/drawingml/2006/main" noGrp="1"/>
+          </p:cNvSpPr>
+          <p:nvPr>
+            <p:ph type="sldImg" idx="0"/>
+          </p:nvPr>
+        </p:nvSpPr>
+        <p:spPr/>
+      </p:sp>
+      <p:sp>
+        <p:nvSpPr>
+          <p:cNvPr id="3" name="Notes Placeholder 2"/>
+          <p:cNvSpPr>
+            <a:spLocks xmlns:a="http://schemas.openxmlformats.org/drawingml/2006/main" noGrp="1"/>
+          </p:cNvSpPr>
+          <p:nvPr>
+            <p:ph type="body" idx="1"/>
+          </p:nvPr>
+        </p:nvSpPr>
+        <p:spPr/>
+        <p:txBody>
+          <a:bodyPr xmlns:a="http://schemas.openxmlformats.org/drawingml/2006/main"/>
+          <a:lstStyle xmlns:a="http://schemas.openxmlformats.org/drawingml/2006/main"/>
+          <a:p xmlns:a="http://schemas.openxmlformats.org/drawingml/2006/main">
+            <a:r>
+              <a:t>Close on specific work. The repo now has code hygiene, tests, result checks, and a deck. The scientific gap is the next experiment set: oracle planner, switching prey, HOP, and archived raw runs.</a:t>
             </a:r>
           </a:p>
         </p:txBody>
@@ -614,7 +899,7 @@
           <a:lstStyle xmlns:a="http://schemas.openxmlformats.org/drawingml/2006/main"/>
           <a:p xmlns:a="http://schemas.openxmlformats.org/drawingml/2006/main">
             <a:r>
-              <a:t>This slide prevents overclaiming. The environment is deliberately controlled: same map, hidden per-episode strategy, and measurable ground truth. The value is causal clarity: if performance moves, we know whether it came from inference, uncertainty, or lookahead.</a:t>
+              <a:t>Use this slide to state the exact claim. The evidence comes from captures, not action accuracy. The 4.31 result is the main positive result. The 1.42 result explains why hard labels can hurt control.</a:t>
             </a:r>
           </a:p>
         </p:txBody>
@@ -684,7 +969,7 @@
           <a:lstStyle xmlns:a="http://schemas.openxmlformats.org/drawingml/2006/main"/>
           <a:p xmlns:a="http://schemas.openxmlformats.org/drawingml/2006/main">
             <a:r>
-              <a:t>Read the plot as two claims. First, intent is inferable from behavior. Second, compressing the posterior into the wrong point estimate is actively harmful. That is why the planner should consume the belief distribution, not just argmax intent.</a:t>
+              <a:t>Explain the lived detail: three blue predators chase one red prey in the JaxMARL simple-tag arena. The prey knows the intent. The predators infer it from motion. This design isolates opponent modeling from map perception.</a:t>
             </a:r>
           </a:p>
         </p:txBody>
@@ -754,7 +1039,7 @@
           <a:lstStyle xmlns:a="http://schemas.openxmlformats.org/drawingml/2006/main"/>
           <a:p xmlns:a="http://schemas.openxmlformats.org/drawingml/2006/main">
             <a:r>
-              <a:t>This is the slide to linger on. The fair phrasing is that inferred-belief planning beats the flat-belief ablation and matches or slightly exceeds a reactive oracle. Do not say it beats an oracle planner; that should be run before submission.</a:t>
+              <a:t>Read the plot from left to right. The encoder starts uncertain, then locks onto the intent as the prey commits. This matters because the planner can act before the final steps, when interception still has value.</a:t>
             </a:r>
           </a:p>
         </p:txBody>
@@ -824,7 +1109,7 @@
           <a:lstStyle xmlns:a="http://schemas.openxmlformats.org/drawingml/2006/main"/>
           <a:p xmlns:a="http://schemas.openxmlformats.org/drawingml/2006/main">
             <a:r>
-              <a:t>This is the literature bridge: JEPA-style predictive learning is a better fit than reconstruction when the important variable is the stable cause of future behavior. It gives the paper a label-free path while preserving the central belief-planning story.</a:t>
+              <a:t>This slide explains why the method carries a distribution. The wrong hard-intent condition is a stress test. It measured 1.42 captures, far below 2.68 for the blind policy. That failure supports uncertainty-aware control.</a:t>
             </a:r>
           </a:p>
         </p:txBody>
@@ -894,7 +1179,7 @@
           <a:lstStyle xmlns:a="http://schemas.openxmlformats.org/drawingml/2006/main"/>
           <a:p xmlns:a="http://schemas.openxmlformats.org/drawingml/2006/main">
             <a:r>
-              <a:t>Use this slide to earn trust. The representation is strong enough to guide planning, but the learned dynamics model is not reliable enough yet. That makes the submission story sharper, not weaker, because it separates representation evidence from model-based control evidence.</a:t>
+              <a:t>This is the central evidence slide. The flat planner controls for generic lookahead. The inferred-belief planner improves on it, which points to opponent inference as the source of the lift.</a:t>
             </a:r>
           </a:p>
         </p:txBody>
@@ -964,7 +1249,7 @@
           <a:lstStyle xmlns:a="http://schemas.openxmlformats.org/drawingml/2006/main"/>
           <a:p xmlns:a="http://schemas.openxmlformats.org/drawingml/2006/main">
             <a:r>
-              <a:t>This slide is supporting evidence, not the main claim. The clone is good enough that imitation is not the bottleneck. True strategy information helps, but the unsupervised resource-axis latent is not yet a clean paper-level win.</a:t>
+              <a:t>This is a defense slide. The planner has lookahead, while the oracle policy reacts. That difference explains why 4.31 can sit above 4.05 without claiming a stronger result than the experiment supports.</a:t>
             </a:r>
           </a:p>
         </p:txBody>
@@ -1034,7 +1319,77 @@
           <a:lstStyle xmlns:a="http://schemas.openxmlformats.org/drawingml/2006/main"/>
           <a:p xmlns:a="http://schemas.openxmlformats.org/drawingml/2006/main">
             <a:r>
-              <a:t>Close by tying the paper to the literature. HOP is the closest belief-plus-planning comparison. MAZero, MAMBA, MARIE, and MATWM cover model-based MARL. MBOM and AORPO cover opponent modeling. The repo is now packaged like a paper artifact; the remaining risk is scientific comparison breadth.</a:t>
+              <a:t>This slide connects the supervised belief result to a label-free route. JEPA performs better because the prediction task rewards features that explain future motion. The VAE spends capacity on reconstruction detail that does less for intent.</a:t>
+            </a:r>
+          </a:p>
+        </p:txBody>
+      </p:sp>
+      <p:sp>
+        <p:nvSpPr>
+          <p:cNvPr id="4" name="Slide Number Placeholder 3"/>
+          <p:cNvSpPr>
+            <a:spLocks xmlns:a="http://schemas.openxmlformats.org/drawingml/2006/main" noGrp="1"/>
+          </p:cNvSpPr>
+          <p:nvPr>
+            <p:ph type="sldNum" idx="5"/>
+          </p:nvPr>
+        </p:nvSpPr>
+        <p:spPr/>
+        <p:txBody>
+          <a:bodyPr xmlns:a="http://schemas.openxmlformats.org/drawingml/2006/main"/>
+          <a:lstStyle xmlns:a="http://schemas.openxmlformats.org/drawingml/2006/main"/>
+          <a:p xmlns:a="http://schemas.openxmlformats.org/drawingml/2006/main"/>
+        </p:txBody>
+      </p:sp>
+    </p:spTree>
+  </p:cSld>
+  <p:clrMapOvr>
+    <a:masterClrMapping xmlns:a="http://schemas.openxmlformats.org/drawingml/2006/main"/>
+  </p:clrMapOvr>
+</p:notes>
+</file>
+
+<file path=ppt/notesSlides/notesSlide9.xml><?xml version="1.0" encoding="utf-8"?>
+<p:notes xmlns:p="http://schemas.openxmlformats.org/presentationml/2006/main">
+  <p:cSld>
+    <p:spTree>
+      <p:nvGrpSpPr>
+        <p:cNvPr id="1" name=""/>
+        <p:cNvGrpSpPr/>
+        <p:nvPr/>
+      </p:nvGrpSpPr>
+      <p:grpSpPr>
+        <a:xfrm xmlns:a="http://schemas.openxmlformats.org/drawingml/2006/main"/>
+      </p:grpSpPr>
+      <p:sp>
+        <p:nvSpPr>
+          <p:cNvPr id="2" name="Slide Image Placeholder 1"/>
+          <p:cNvSpPr>
+            <a:spLocks xmlns:a="http://schemas.openxmlformats.org/drawingml/2006/main" noGrp="1"/>
+          </p:cNvSpPr>
+          <p:nvPr>
+            <p:ph type="sldImg" idx="0"/>
+          </p:nvPr>
+        </p:nvSpPr>
+        <p:spPr/>
+      </p:sp>
+      <p:sp>
+        <p:nvSpPr>
+          <p:cNvPr id="3" name="Notes Placeholder 2"/>
+          <p:cNvSpPr>
+            <a:spLocks xmlns:a="http://schemas.openxmlformats.org/drawingml/2006/main" noGrp="1"/>
+          </p:cNvSpPr>
+          <p:nvPr>
+            <p:ph type="body" idx="1"/>
+          </p:nvPr>
+        </p:nvSpPr>
+        <p:spPr/>
+        <p:txBody>
+          <a:bodyPr xmlns:a="http://schemas.openxmlformats.org/drawingml/2006/main"/>
+          <a:lstStyle xmlns:a="http://schemas.openxmlformats.org/drawingml/2006/main"/>
+          <a:p xmlns:a="http://schemas.openxmlformats.org/drawingml/2006/main">
+            <a:r>
+              <a:t>This is the honest boundary. The encoder can discard nuisance motion, while a dynamics model must preserve details that affect control. The current data supports belief planning with simulator dynamics.</a:t>
             </a:r>
           </a:p>
         </p:txBody>
@@ -1102,7 +1457,7 @@
   </p:cSld>
   <p:clrMap bg1="lt1" tx1="dk1" bg2="lt2" tx2="dk2" accent1="accent1" accent2="accent2" accent3="accent3" accent4="accent4" accent5="accent5" accent6="accent6" hlink="hlink" folHlink="folHlink"/>
   <p:sldLayoutIdLst>
-    <p:sldLayoutId xmlns:r="http://schemas.openxmlformats.org/officeDocument/2006/relationships" id="2147483649" r:id="R8bcb4d91c99a470a"/>
+    <p:sldLayoutId xmlns:r="http://schemas.openxmlformats.org/officeDocument/2006/relationships" id="2147483649" r:id="R9d466f6ef8094be9"/>
   </p:sldLayoutIdLst>
   <p:txStyles>
     <p:titleStyle>
@@ -1653,34 +2008,34 @@
           <p:cNvPr id="1" name="">
             <a:extLst xmlns:a="http://schemas.openxmlformats.org/drawingml/2006/main">
               <a:ext uri="{FF2B5EF4-FFF2-40B4-BE49-F238E27FC236}">
-                <a16:creationId xmlns:a16="http://schemas.microsoft.com/office/drawing/2014/main" id="{7EE6C92A-FDC1-4E57-A482-01FA6FBCC4E3}"/>
-              </a:ext>
-            </a:extLst>
-          </p:cNvPr>
-          <p:cNvSpPr>
-            <a:spLocks xmlns:a="http://schemas.openxmlformats.org/drawingml/2006/main" noGrp="1"/>
-          </p:cNvSpPr>
-          <p:nvPr/>
-        </p:nvSpPr>
-        <p:spPr>
-          <a:xfrm xmlns:a="http://schemas.openxmlformats.org/drawingml/2006/main">
-            <a:off x="533400" y="742950"/>
-            <a:ext cx="7905750" cy="1619250"/>
-          </a:xfrm>
-          <a:prstGeom xmlns:a="http://schemas.openxmlformats.org/drawingml/2006/main" prst="rect">
-            <a:avLst/>
-          </a:prstGeom>
-          <a:noFill xmlns:a="http://schemas.openxmlformats.org/drawingml/2006/main"/>
-          <a:ln xmlns:a="http://schemas.openxmlformats.org/drawingml/2006/main" w="0">
-            <a:noFill/>
-            <a:prstDash val="solid"/>
-          </a:ln>
-        </p:spPr>
-        <p:txBody>
-          <a:bodyPr xmlns:a="http://schemas.openxmlformats.org/drawingml/2006/main"/>
-          <a:lstStyle xmlns:a="http://schemas.openxmlformats.org/drawingml/2006/main"/>
-          <a:p xmlns:a="http://schemas.openxmlformats.org/drawingml/2006/main">
-            <a:pPr>
+                <a16:creationId xmlns:a16="http://schemas.microsoft.com/office/drawing/2014/main" id="{7F11801F-9F31-41B0-8842-12C2D38992F9}"/>
+              </a:ext>
+            </a:extLst>
+          </p:cNvPr>
+          <p:cNvSpPr>
+            <a:spLocks xmlns:a="http://schemas.openxmlformats.org/drawingml/2006/main" noGrp="1"/>
+          </p:cNvSpPr>
+          <p:nvPr/>
+        </p:nvSpPr>
+        <p:spPr>
+          <a:xfrm xmlns:a="http://schemas.openxmlformats.org/drawingml/2006/main">
+            <a:off x="1428750" y="2286000"/>
+            <a:ext cx="9334500" cy="1619250"/>
+          </a:xfrm>
+          <a:prstGeom xmlns:a="http://schemas.openxmlformats.org/drawingml/2006/main" prst="rect">
+            <a:avLst/>
+          </a:prstGeom>
+          <a:noFill xmlns:a="http://schemas.openxmlformats.org/drawingml/2006/main"/>
+          <a:ln xmlns:a="http://schemas.openxmlformats.org/drawingml/2006/main" w="0">
+            <a:noFill/>
+            <a:prstDash val="solid"/>
+          </a:ln>
+        </p:spPr>
+        <p:txBody>
+          <a:bodyPr xmlns:a="http://schemas.openxmlformats.org/drawingml/2006/main"/>
+          <a:lstStyle xmlns:a="http://schemas.openxmlformats.org/drawingml/2006/main"/>
+          <a:p xmlns:a="http://schemas.openxmlformats.org/drawingml/2006/main">
+            <a:pPr algn="ctr">
               <a:defRPr sz="4800" b="1">
                 <a:solidFill>
                   <a:srgbClr val="0A0A0A"/>
@@ -1697,7 +2052,7 @@
             </a:r>
           </a:p>
           <a:p xmlns:a="http://schemas.openxmlformats.org/drawingml/2006/main">
-            <a:pPr>
+            <a:pPr algn="ctr">
               <a:defRPr sz="4800" b="1">
                 <a:solidFill>
                   <a:srgbClr val="0A0A0A"/>
@@ -1715,52 +2070,131 @@
           </a:p>
         </p:txBody>
       </p:sp>
+    </p:spTree>
+    <p:extLst>
+      <p:ext uri="{BB962C8B-B14F-4D97-AF65-F5344CB8AC3E}">
+        <p14:creationId xmlns:p14="http://schemas.microsoft.com/office/powerpoint/2010/main" val="1048384603"/>
+      </p:ext>
+    </p:extLst>
+  </p:cSld>
+</p:sld>
+</file>
+
+<file path=ppt/slides/slide10.xml><?xml version="1.0" encoding="utf-8"?>
+<p:sld xmlns:p="http://schemas.openxmlformats.org/presentationml/2006/main">
+  <p:cSld>
+    <p:bg>
+      <p:bgPr>
+        <a:solidFill xmlns:a="http://schemas.openxmlformats.org/drawingml/2006/main">
+          <a:srgbClr val="FFFFFF"/>
+        </a:solidFill>
+      </p:bgPr>
+    </p:bg>
+    <p:spTree>
+      <p:nvGrpSpPr>
+        <p:cNvPr id="1" name=""/>
+        <p:cNvGrpSpPr/>
+        <p:nvPr/>
+      </p:nvGrpSpPr>
+      <p:grpSpPr>
+        <a:xfrm xmlns:a="http://schemas.openxmlformats.org/drawingml/2006/main"/>
+      </p:grpSpPr>
+      <p:sp>
+        <p:nvSpPr>
+          <p:cNvPr id="1" name="">
+            <a:extLst xmlns:a="http://schemas.openxmlformats.org/drawingml/2006/main">
+              <a:ext uri="{FF2B5EF4-FFF2-40B4-BE49-F238E27FC236}">
+                <a16:creationId xmlns:a16="http://schemas.microsoft.com/office/drawing/2014/main" id="{FE1D2947-5E02-4E12-A37B-00DC7236AA3F}"/>
+              </a:ext>
+            </a:extLst>
+          </p:cNvPr>
+          <p:cNvSpPr>
+            <a:spLocks xmlns:a="http://schemas.openxmlformats.org/drawingml/2006/main" noGrp="1"/>
+          </p:cNvSpPr>
+          <p:nvPr/>
+        </p:nvSpPr>
+        <p:spPr>
+          <a:xfrm xmlns:a="http://schemas.openxmlformats.org/drawingml/2006/main">
+            <a:off x="533400" y="323850"/>
+            <a:ext cx="6858000" cy="228600"/>
+          </a:xfrm>
+          <a:prstGeom xmlns:a="http://schemas.openxmlformats.org/drawingml/2006/main" prst="rect">
+            <a:avLst/>
+          </a:prstGeom>
+          <a:noFill xmlns:a="http://schemas.openxmlformats.org/drawingml/2006/main"/>
+          <a:ln xmlns:a="http://schemas.openxmlformats.org/drawingml/2006/main" w="0">
+            <a:noFill/>
+            <a:prstDash val="solid"/>
+          </a:ln>
+        </p:spPr>
+        <p:txBody>
+          <a:bodyPr xmlns:a="http://schemas.openxmlformats.org/drawingml/2006/main"/>
+          <a:lstStyle xmlns:a="http://schemas.openxmlformats.org/drawingml/2006/main"/>
+          <a:p xmlns:a="http://schemas.openxmlformats.org/drawingml/2006/main">
+            <a:pPr>
+              <a:defRPr sz="975" b="1">
+                <a:solidFill>
+                  <a:srgbClr val="4F5661"/>
+                </a:solidFill>
+              </a:defRPr>
+            </a:pPr>
+            <a:r>
+              <a:rPr sz="975" b="1">
+                <a:solidFill>
+                  <a:srgbClr val="4F5661"/>
+                </a:solidFill>
+              </a:rPr>
+              <a:t>FOLLOW-UP</a:t>
+            </a:r>
+          </a:p>
+        </p:txBody>
+      </p:sp>
       <p:sp>
         <p:nvSpPr>
           <p:cNvPr id="2" name="">
             <a:extLst xmlns:a="http://schemas.openxmlformats.org/drawingml/2006/main">
               <a:ext uri="{FF2B5EF4-FFF2-40B4-BE49-F238E27FC236}">
-                <a16:creationId xmlns:a16="http://schemas.microsoft.com/office/drawing/2014/main" id="{D0F2B427-B797-4F44-9E17-1D0512E28D0C}"/>
-              </a:ext>
-            </a:extLst>
-          </p:cNvPr>
-          <p:cNvSpPr>
-            <a:spLocks xmlns:a="http://schemas.openxmlformats.org/drawingml/2006/main" noGrp="1"/>
-          </p:cNvSpPr>
-          <p:nvPr/>
-        </p:nvSpPr>
-        <p:spPr>
-          <a:xfrm xmlns:a="http://schemas.openxmlformats.org/drawingml/2006/main">
-            <a:off x="533400" y="2647950"/>
-            <a:ext cx="8096250" cy="666750"/>
-          </a:xfrm>
-          <a:prstGeom xmlns:a="http://schemas.openxmlformats.org/drawingml/2006/main" prst="rect">
-            <a:avLst/>
-          </a:prstGeom>
-          <a:noFill xmlns:a="http://schemas.openxmlformats.org/drawingml/2006/main"/>
-          <a:ln xmlns:a="http://schemas.openxmlformats.org/drawingml/2006/main" w="0">
-            <a:noFill/>
-            <a:prstDash val="solid"/>
-          </a:ln>
-        </p:spPr>
-        <p:txBody>
-          <a:bodyPr xmlns:a="http://schemas.openxmlformats.org/drawingml/2006/main"/>
-          <a:lstStyle xmlns:a="http://schemas.openxmlformats.org/drawingml/2006/main"/>
-          <a:p xmlns:a="http://schemas.openxmlformats.org/drawingml/2006/main">
-            <a:pPr>
-              <a:defRPr sz="1950">
-                <a:solidFill>
-                  <a:srgbClr val="4F5661"/>
-                </a:solidFill>
-              </a:defRPr>
-            </a:pPr>
-            <a:r>
-              <a:rPr sz="1950">
-                <a:solidFill>
-                  <a:srgbClr val="4F5661"/>
-                </a:solidFill>
-              </a:rPr>
-              <a:t>A controlled study of hidden opponent intent, calibrated belief, and belief-conditioned planning.</a:t>
+                <a16:creationId xmlns:a16="http://schemas.microsoft.com/office/drawing/2014/main" id="{EC94E838-567F-43DC-A40B-0FD07A1EB6CE}"/>
+              </a:ext>
+            </a:extLst>
+          </p:cNvPr>
+          <p:cNvSpPr>
+            <a:spLocks xmlns:a="http://schemas.openxmlformats.org/drawingml/2006/main" noGrp="1"/>
+          </p:cNvSpPr>
+          <p:nvPr/>
+        </p:nvSpPr>
+        <p:spPr>
+          <a:xfrm xmlns:a="http://schemas.openxmlformats.org/drawingml/2006/main">
+            <a:off x="533400" y="590550"/>
+            <a:ext cx="10287000" cy="933450"/>
+          </a:xfrm>
+          <a:prstGeom xmlns:a="http://schemas.openxmlformats.org/drawingml/2006/main" prst="rect">
+            <a:avLst/>
+          </a:prstGeom>
+          <a:noFill xmlns:a="http://schemas.openxmlformats.org/drawingml/2006/main"/>
+          <a:ln xmlns:a="http://schemas.openxmlformats.org/drawingml/2006/main" w="0">
+            <a:noFill/>
+            <a:prstDash val="solid"/>
+          </a:ln>
+        </p:spPr>
+        <p:txBody>
+          <a:bodyPr xmlns:a="http://schemas.openxmlformats.org/drawingml/2006/main"/>
+          <a:lstStyle xmlns:a="http://schemas.openxmlformats.org/drawingml/2006/main"/>
+          <a:p xmlns:a="http://schemas.openxmlformats.org/drawingml/2006/main">
+            <a:pPr>
+              <a:defRPr sz="3150" b="1">
+                <a:solidFill>
+                  <a:srgbClr val="0A0A0A"/>
+                </a:solidFill>
+              </a:defRPr>
+            </a:pPr>
+            <a:r>
+              <a:rPr sz="3150" b="1">
+                <a:solidFill>
+                  <a:srgbClr val="0A0A0A"/>
+                </a:solidFill>
+              </a:rPr>
+              <a:t>BC is strong enough to test strategy inputs</a:t>
             </a:r>
           </a:p>
         </p:txBody>
@@ -1770,19 +2204,69 @@
           <p:cNvPr id="3" name="">
             <a:extLst xmlns:a="http://schemas.openxmlformats.org/drawingml/2006/main">
               <a:ext uri="{FF2B5EF4-FFF2-40B4-BE49-F238E27FC236}">
-                <a16:creationId xmlns:a16="http://schemas.microsoft.com/office/drawing/2014/main" id="{F93FE661-61BC-49C3-9247-FA5013160AD0}"/>
-              </a:ext>
-            </a:extLst>
-          </p:cNvPr>
-          <p:cNvSpPr>
-            <a:spLocks xmlns:a="http://schemas.openxmlformats.org/drawingml/2006/main" noGrp="1"/>
-          </p:cNvSpPr>
-          <p:nvPr/>
-        </p:nvSpPr>
-        <p:spPr>
-          <a:xfrm xmlns:a="http://schemas.openxmlformats.org/drawingml/2006/main">
-            <a:off x="533400" y="4248150"/>
-            <a:ext cx="11125200" cy="1371600"/>
+                <a16:creationId xmlns:a16="http://schemas.microsoft.com/office/drawing/2014/main" id="{6F289AEA-D886-4989-A71C-D279E0CE910E}"/>
+              </a:ext>
+            </a:extLst>
+          </p:cNvPr>
+          <p:cNvSpPr>
+            <a:spLocks xmlns:a="http://schemas.openxmlformats.org/drawingml/2006/main" noGrp="1"/>
+          </p:cNvSpPr>
+          <p:nvPr/>
+        </p:nvSpPr>
+        <p:spPr>
+          <a:xfrm xmlns:a="http://schemas.openxmlformats.org/drawingml/2006/main">
+            <a:off x="11277600" y="6267450"/>
+            <a:ext cx="457200" cy="228600"/>
+          </a:xfrm>
+          <a:prstGeom xmlns:a="http://schemas.openxmlformats.org/drawingml/2006/main" prst="rect">
+            <a:avLst/>
+          </a:prstGeom>
+          <a:noFill xmlns:a="http://schemas.openxmlformats.org/drawingml/2006/main"/>
+          <a:ln xmlns:a="http://schemas.openxmlformats.org/drawingml/2006/main" w="0">
+            <a:noFill/>
+            <a:prstDash val="solid"/>
+          </a:ln>
+        </p:spPr>
+        <p:txBody>
+          <a:bodyPr xmlns:a="http://schemas.openxmlformats.org/drawingml/2006/main"/>
+          <a:lstStyle xmlns:a="http://schemas.openxmlformats.org/drawingml/2006/main"/>
+          <a:p xmlns:a="http://schemas.openxmlformats.org/drawingml/2006/main">
+            <a:pPr algn="r">
+              <a:defRPr sz="1050">
+                <a:solidFill>
+                  <a:srgbClr val="4F5661"/>
+                </a:solidFill>
+              </a:defRPr>
+            </a:pPr>
+            <a:r>
+              <a:rPr sz="1050">
+                <a:solidFill>
+                  <a:srgbClr val="4F5661"/>
+                </a:solidFill>
+              </a:rPr>
+              <a:t>10</a:t>
+            </a:r>
+          </a:p>
+        </p:txBody>
+      </p:sp>
+      <p:sp>
+        <p:nvSpPr>
+          <p:cNvPr id="4" name="">
+            <a:extLst xmlns:a="http://schemas.openxmlformats.org/drawingml/2006/main">
+              <a:ext uri="{FF2B5EF4-FFF2-40B4-BE49-F238E27FC236}">
+                <a16:creationId xmlns:a16="http://schemas.microsoft.com/office/drawing/2014/main" id="{13E2AB4C-B295-4F91-8D57-BFC0F96C4816}"/>
+              </a:ext>
+            </a:extLst>
+          </p:cNvPr>
+          <p:cNvSpPr>
+            <a:spLocks xmlns:a="http://schemas.openxmlformats.org/drawingml/2006/main" noGrp="1"/>
+          </p:cNvSpPr>
+          <p:nvPr/>
+        </p:nvSpPr>
+        <p:spPr>
+          <a:xfrm xmlns:a="http://schemas.openxmlformats.org/drawingml/2006/main">
+            <a:off x="533400" y="1581150"/>
+            <a:ext cx="6572250" cy="4114800"/>
           </a:xfrm>
           <a:prstGeom xmlns:a="http://schemas.openxmlformats.org/drawingml/2006/main" prst="rect">
             <a:avLst/>
@@ -1798,202 +2282,141 @@
           </a:ln>
         </p:spPr>
       </p:sp>
-      <p:sp>
-        <p:nvSpPr>
-          <p:cNvPr id="4" name="">
-            <a:extLst xmlns:a="http://schemas.openxmlformats.org/drawingml/2006/main">
-              <a:ext uri="{FF2B5EF4-FFF2-40B4-BE49-F238E27FC236}">
-                <a16:creationId xmlns:a16="http://schemas.microsoft.com/office/drawing/2014/main" id="{E550AD16-4EBE-44CF-8579-96041D24B3E3}"/>
-              </a:ext>
-            </a:extLst>
-          </p:cNvPr>
-          <p:cNvSpPr>
-            <a:spLocks xmlns:a="http://schemas.openxmlformats.org/drawingml/2006/main" noGrp="1"/>
-          </p:cNvSpPr>
-          <p:nvPr/>
-        </p:nvSpPr>
-        <p:spPr>
-          <a:xfrm xmlns:a="http://schemas.openxmlformats.org/drawingml/2006/main">
-            <a:off x="838200" y="4514850"/>
-            <a:ext cx="3048000" cy="609600"/>
-          </a:xfrm>
-          <a:prstGeom xmlns:a="http://schemas.openxmlformats.org/drawingml/2006/main" prst="rect">
-            <a:avLst/>
-          </a:prstGeom>
-          <a:noFill xmlns:a="http://schemas.openxmlformats.org/drawingml/2006/main"/>
-          <a:ln xmlns:a="http://schemas.openxmlformats.org/drawingml/2006/main" w="0">
-            <a:noFill/>
-            <a:prstDash val="solid"/>
-          </a:ln>
-        </p:spPr>
-        <p:txBody>
-          <a:bodyPr xmlns:a="http://schemas.openxmlformats.org/drawingml/2006/main"/>
-          <a:lstStyle xmlns:a="http://schemas.openxmlformats.org/drawingml/2006/main"/>
-          <a:p xmlns:a="http://schemas.openxmlformats.org/drawingml/2006/main">
-            <a:pPr>
-              <a:defRPr sz="4050" b="1">
-                <a:solidFill>
-                  <a:srgbClr val="0D6E7A"/>
-                </a:solidFill>
-              </a:defRPr>
-            </a:pPr>
-            <a:r>
-              <a:rPr sz="4050" b="1">
-                <a:solidFill>
-                  <a:srgbClr val="0D6E7A"/>
-                </a:solidFill>
-              </a:rPr>
-              <a:t>4.31</a:t>
-            </a:r>
-          </a:p>
-        </p:txBody>
-      </p:sp>
-      <p:sp>
-        <p:nvSpPr>
-          <p:cNvPr id="5" name="">
-            <a:extLst xmlns:a="http://schemas.openxmlformats.org/drawingml/2006/main">
-              <a:ext uri="{FF2B5EF4-FFF2-40B4-BE49-F238E27FC236}">
-                <a16:creationId xmlns:a16="http://schemas.microsoft.com/office/drawing/2014/main" id="{13D4EC12-F613-41B2-A1FC-BA6927F5ED97}"/>
-              </a:ext>
-            </a:extLst>
-          </p:cNvPr>
-          <p:cNvSpPr>
-            <a:spLocks xmlns:a="http://schemas.openxmlformats.org/drawingml/2006/main" noGrp="1"/>
-          </p:cNvSpPr>
-          <p:nvPr/>
-        </p:nvSpPr>
-        <p:spPr>
-          <a:xfrm xmlns:a="http://schemas.openxmlformats.org/drawingml/2006/main">
-            <a:off x="838200" y="5143500"/>
-            <a:ext cx="3048000" cy="514350"/>
-          </a:xfrm>
-          <a:prstGeom xmlns:a="http://schemas.openxmlformats.org/drawingml/2006/main" prst="rect">
-            <a:avLst/>
-          </a:prstGeom>
-          <a:noFill xmlns:a="http://schemas.openxmlformats.org/drawingml/2006/main"/>
-          <a:ln xmlns:a="http://schemas.openxmlformats.org/drawingml/2006/main" w="0">
-            <a:noFill/>
-            <a:prstDash val="solid"/>
-          </a:ln>
-        </p:spPr>
-        <p:txBody>
-          <a:bodyPr xmlns:a="http://schemas.openxmlformats.org/drawingml/2006/main"/>
-          <a:lstStyle xmlns:a="http://schemas.openxmlformats.org/drawingml/2006/main"/>
-          <a:p xmlns:a="http://schemas.openxmlformats.org/drawingml/2006/main">
-            <a:pPr>
-              <a:defRPr sz="1350">
-                <a:solidFill>
-                  <a:srgbClr val="4F5661"/>
-                </a:solidFill>
-              </a:defRPr>
-            </a:pPr>
-            <a:r>
-              <a:rPr sz="1350">
-                <a:solidFill>
-                  <a:srgbClr val="4F5661"/>
-                </a:solidFill>
-              </a:rPr>
-              <a:t>captures/episode with inferred-belief planning</a:t>
-            </a:r>
-          </a:p>
-        </p:txBody>
-      </p:sp>
+      <p:pic>
+        <p:nvPicPr>
+          <p:cNvPr id="13" name=""/>
+          <p:cNvPicPr>
+            <a:picLocks xmlns:a="http://schemas.openxmlformats.org/drawingml/2006/main" noChangeAspect="1"/>
+          </p:cNvPicPr>
+          <p:nvPr/>
+        </p:nvPicPr>
+        <p:blipFill>
+          <a:blip xmlns:r="http://schemas.openxmlformats.org/officeDocument/2006/relationships" xmlns:a="http://schemas.openxmlformats.org/drawingml/2006/main" r:embed="Rce2ab90fe64940a3"/>
+          <a:stretch xmlns:a="http://schemas.openxmlformats.org/drawingml/2006/main"/>
+        </p:blipFill>
+        <p:spPr>
+          <a:xfrm xmlns:a="http://schemas.openxmlformats.org/drawingml/2006/main">
+            <a:off x="685800" y="1741822"/>
+            <a:ext cx="6267450" cy="3793457"/>
+          </a:xfrm>
+          <a:prstGeom xmlns:a="http://schemas.openxmlformats.org/drawingml/2006/main" prst="rect">
+            <a:avLst/>
+          </a:prstGeom>
+        </p:spPr>
+      </p:pic>
       <p:sp>
         <p:nvSpPr>
           <p:cNvPr id="6" name="">
             <a:extLst xmlns:a="http://schemas.openxmlformats.org/drawingml/2006/main">
               <a:ext uri="{FF2B5EF4-FFF2-40B4-BE49-F238E27FC236}">
-                <a16:creationId xmlns:a16="http://schemas.microsoft.com/office/drawing/2014/main" id="{901ADBC0-04A7-446F-B584-46AB5EAF1AEA}"/>
-              </a:ext>
-            </a:extLst>
-          </p:cNvPr>
-          <p:cNvSpPr>
-            <a:spLocks xmlns:a="http://schemas.openxmlformats.org/drawingml/2006/main" noGrp="1"/>
-          </p:cNvSpPr>
-          <p:nvPr/>
-        </p:nvSpPr>
-        <p:spPr>
-          <a:xfrm xmlns:a="http://schemas.openxmlformats.org/drawingml/2006/main">
-            <a:off x="4457700" y="4514850"/>
-            <a:ext cx="3143250" cy="609600"/>
-          </a:xfrm>
-          <a:prstGeom xmlns:a="http://schemas.openxmlformats.org/drawingml/2006/main" prst="rect">
-            <a:avLst/>
-          </a:prstGeom>
-          <a:noFill xmlns:a="http://schemas.openxmlformats.org/drawingml/2006/main"/>
-          <a:ln xmlns:a="http://schemas.openxmlformats.org/drawingml/2006/main" w="0">
-            <a:noFill/>
-            <a:prstDash val="solid"/>
-          </a:ln>
-        </p:spPr>
-        <p:txBody>
-          <a:bodyPr xmlns:a="http://schemas.openxmlformats.org/drawingml/2006/main"/>
-          <a:lstStyle xmlns:a="http://schemas.openxmlformats.org/drawingml/2006/main"/>
-          <a:p xmlns:a="http://schemas.openxmlformats.org/drawingml/2006/main">
-            <a:pPr>
-              <a:defRPr sz="4050" b="1">
-                <a:solidFill>
-                  <a:srgbClr val="C84C2A"/>
-                </a:solidFill>
-              </a:defRPr>
-            </a:pPr>
-            <a:r>
-              <a:rPr sz="4050" b="1">
-                <a:solidFill>
-                  <a:srgbClr val="C84C2A"/>
-                </a:solidFill>
-              </a:rPr>
-              <a:t>-47%</a:t>
-            </a:r>
-          </a:p>
-        </p:txBody>
+                <a16:creationId xmlns:a16="http://schemas.microsoft.com/office/drawing/2014/main" id="{67B7DDDE-5CC7-4293-B17E-7EFA091B1409}"/>
+              </a:ext>
+            </a:extLst>
+          </p:cNvPr>
+          <p:cNvSpPr>
+            <a:spLocks xmlns:a="http://schemas.openxmlformats.org/drawingml/2006/main" noGrp="1"/>
+          </p:cNvSpPr>
+          <p:nvPr/>
+        </p:nvSpPr>
+        <p:spPr>
+          <a:xfrm xmlns:a="http://schemas.openxmlformats.org/drawingml/2006/main">
+            <a:off x="7524750" y="1752600"/>
+            <a:ext cx="57150" cy="2266950"/>
+          </a:xfrm>
+          <a:prstGeom xmlns:a="http://schemas.openxmlformats.org/drawingml/2006/main" prst="rect">
+            <a:avLst/>
+          </a:prstGeom>
+          <a:solidFill xmlns:a="http://schemas.openxmlformats.org/drawingml/2006/main">
+            <a:srgbClr val="0D6E7A"/>
+          </a:solidFill>
+          <a:ln xmlns:a="http://schemas.openxmlformats.org/drawingml/2006/main" w="0">
+            <a:solidFill>
+              <a:srgbClr val="0D6E7A"/>
+            </a:solidFill>
+            <a:prstDash val="solid"/>
+          </a:ln>
+        </p:spPr>
       </p:sp>
       <p:sp>
         <p:nvSpPr>
           <p:cNvPr id="7" name="">
             <a:extLst xmlns:a="http://schemas.openxmlformats.org/drawingml/2006/main">
               <a:ext uri="{FF2B5EF4-FFF2-40B4-BE49-F238E27FC236}">
-                <a16:creationId xmlns:a16="http://schemas.microsoft.com/office/drawing/2014/main" id="{399350FB-FEE7-40E8-A397-DA5F68A3E44E}"/>
-              </a:ext>
-            </a:extLst>
-          </p:cNvPr>
-          <p:cNvSpPr>
-            <a:spLocks xmlns:a="http://schemas.openxmlformats.org/drawingml/2006/main" noGrp="1"/>
-          </p:cNvSpPr>
-          <p:nvPr/>
-        </p:nvSpPr>
-        <p:spPr>
-          <a:xfrm xmlns:a="http://schemas.openxmlformats.org/drawingml/2006/main">
-            <a:off x="4457700" y="5143500"/>
-            <a:ext cx="3143250" cy="514350"/>
-          </a:xfrm>
-          <a:prstGeom xmlns:a="http://schemas.openxmlformats.org/drawingml/2006/main" prst="rect">
-            <a:avLst/>
-          </a:prstGeom>
-          <a:noFill xmlns:a="http://schemas.openxmlformats.org/drawingml/2006/main"/>
-          <a:ln xmlns:a="http://schemas.openxmlformats.org/drawingml/2006/main" w="0">
-            <a:noFill/>
-            <a:prstDash val="solid"/>
-          </a:ln>
-        </p:spPr>
-        <p:txBody>
-          <a:bodyPr xmlns:a="http://schemas.openxmlformats.org/drawingml/2006/main"/>
-          <a:lstStyle xmlns:a="http://schemas.openxmlformats.org/drawingml/2006/main"/>
-          <a:p xmlns:a="http://schemas.openxmlformats.org/drawingml/2006/main">
-            <a:pPr>
-              <a:defRPr sz="1350">
-                <a:solidFill>
-                  <a:srgbClr val="4F5661"/>
-                </a:solidFill>
-              </a:defRPr>
-            </a:pPr>
-            <a:r>
-              <a:rPr sz="1350">
-                <a:solidFill>
-                  <a:srgbClr val="4F5661"/>
-                </a:solidFill>
-              </a:rPr>
-              <a:t>wrong hard intent vs. opponent-blind policy</a:t>
+                <a16:creationId xmlns:a16="http://schemas.microsoft.com/office/drawing/2014/main" id="{ED15EF91-7702-47AA-9437-1ECFDB6F99C1}"/>
+              </a:ext>
+            </a:extLst>
+          </p:cNvPr>
+          <p:cNvSpPr>
+            <a:spLocks xmlns:a="http://schemas.openxmlformats.org/drawingml/2006/main" noGrp="1"/>
+          </p:cNvSpPr>
+          <p:nvPr/>
+        </p:nvSpPr>
+        <p:spPr>
+          <a:xfrm xmlns:a="http://schemas.openxmlformats.org/drawingml/2006/main">
+            <a:off x="7734300" y="1733550"/>
+            <a:ext cx="3467100" cy="2266950"/>
+          </a:xfrm>
+          <a:prstGeom xmlns:a="http://schemas.openxmlformats.org/drawingml/2006/main" prst="rect">
+            <a:avLst/>
+          </a:prstGeom>
+          <a:noFill xmlns:a="http://schemas.openxmlformats.org/drawingml/2006/main"/>
+          <a:ln xmlns:a="http://schemas.openxmlformats.org/drawingml/2006/main" w="0">
+            <a:noFill/>
+            <a:prstDash val="solid"/>
+          </a:ln>
+        </p:spPr>
+        <p:txBody>
+          <a:bodyPr xmlns:a="http://schemas.openxmlformats.org/drawingml/2006/main"/>
+          <a:lstStyle xmlns:a="http://schemas.openxmlformats.org/drawingml/2006/main"/>
+          <a:p xmlns:a="http://schemas.openxmlformats.org/drawingml/2006/main">
+            <a:pPr>
+              <a:defRPr sz="1650">
+                <a:solidFill>
+                  <a:srgbClr val="4F5661"/>
+                </a:solidFill>
+              </a:defRPr>
+            </a:pPr>
+            <a:r>
+              <a:rPr sz="1650">
+                <a:solidFill>
+                  <a:srgbClr val="4F5661"/>
+                </a:solidFill>
+              </a:rPr>
+              <a:t>- Random policy: 0.40 captures/episode.</a:t>
+            </a:r>
+          </a:p>
+          <a:p xmlns:a="http://schemas.openxmlformats.org/drawingml/2006/main">
+            <a:pPr>
+              <a:defRPr sz="1650">
+                <a:solidFill>
+                  <a:srgbClr val="4F5661"/>
+                </a:solidFill>
+              </a:defRPr>
+            </a:pPr>
+            <a:r>
+              <a:rPr sz="1650">
+                <a:solidFill>
+                  <a:srgbClr val="4F5661"/>
+                </a:solidFill>
+              </a:rPr>
+              <a:t>- Vanilla BC: 1.22 captures/episode.</a:t>
+            </a:r>
+          </a:p>
+          <a:p xmlns:a="http://schemas.openxmlformats.org/drawingml/2006/main">
+            <a:pPr>
+              <a:defRPr sz="1650">
+                <a:solidFill>
+                  <a:srgbClr val="4F5661"/>
+                </a:solidFill>
+              </a:defRPr>
+            </a:pPr>
+            <a:r>
+              <a:rPr sz="1650">
+                <a:solidFill>
+                  <a:srgbClr val="4F5661"/>
+                </a:solidFill>
+              </a:rPr>
+              <a:t>- MAPPO expert: 1.35 captures/episode.</a:t>
             </a:r>
           </a:p>
         </p:txBody>
@@ -2003,147 +2426,47 @@
           <p:cNvPr id="8" name="">
             <a:extLst xmlns:a="http://schemas.openxmlformats.org/drawingml/2006/main">
               <a:ext uri="{FF2B5EF4-FFF2-40B4-BE49-F238E27FC236}">
-                <a16:creationId xmlns:a16="http://schemas.microsoft.com/office/drawing/2014/main" id="{310B07C6-6A8B-4915-9A1B-ED1B9A025FEE}"/>
-              </a:ext>
-            </a:extLst>
-          </p:cNvPr>
-          <p:cNvSpPr>
-            <a:spLocks xmlns:a="http://schemas.openxmlformats.org/drawingml/2006/main" noGrp="1"/>
-          </p:cNvSpPr>
-          <p:nvPr/>
-        </p:nvSpPr>
-        <p:spPr>
-          <a:xfrm xmlns:a="http://schemas.openxmlformats.org/drawingml/2006/main">
-            <a:off x="8096250" y="4514850"/>
-            <a:ext cx="2857500" cy="609600"/>
-          </a:xfrm>
-          <a:prstGeom xmlns:a="http://schemas.openxmlformats.org/drawingml/2006/main" prst="rect">
-            <a:avLst/>
-          </a:prstGeom>
-          <a:noFill xmlns:a="http://schemas.openxmlformats.org/drawingml/2006/main"/>
-          <a:ln xmlns:a="http://schemas.openxmlformats.org/drawingml/2006/main" w="0">
-            <a:noFill/>
-            <a:prstDash val="solid"/>
-          </a:ln>
-        </p:spPr>
-        <p:txBody>
-          <a:bodyPr xmlns:a="http://schemas.openxmlformats.org/drawingml/2006/main"/>
-          <a:lstStyle xmlns:a="http://schemas.openxmlformats.org/drawingml/2006/main"/>
-          <a:p xmlns:a="http://schemas.openxmlformats.org/drawingml/2006/main">
-            <a:pPr>
-              <a:defRPr sz="4050" b="1">
+                <a16:creationId xmlns:a16="http://schemas.microsoft.com/office/drawing/2014/main" id="{A971ADF7-8AC6-493D-92FE-0614E6E4F6E6}"/>
+              </a:ext>
+            </a:extLst>
+          </p:cNvPr>
+          <p:cNvSpPr>
+            <a:spLocks xmlns:a="http://schemas.openxmlformats.org/drawingml/2006/main" noGrp="1"/>
+          </p:cNvSpPr>
+          <p:nvPr/>
+        </p:nvSpPr>
+        <p:spPr>
+          <a:xfrm xmlns:a="http://schemas.openxmlformats.org/drawingml/2006/main">
+            <a:off x="7524750" y="4648200"/>
+            <a:ext cx="3676650" cy="704850"/>
+          </a:xfrm>
+          <a:prstGeom xmlns:a="http://schemas.openxmlformats.org/drawingml/2006/main" prst="rect">
+            <a:avLst/>
+          </a:prstGeom>
+          <a:noFill xmlns:a="http://schemas.openxmlformats.org/drawingml/2006/main"/>
+          <a:ln xmlns:a="http://schemas.openxmlformats.org/drawingml/2006/main" w="0">
+            <a:noFill/>
+            <a:prstDash val="solid"/>
+          </a:ln>
+        </p:spPr>
+        <p:txBody>
+          <a:bodyPr xmlns:a="http://schemas.openxmlformats.org/drawingml/2006/main"/>
+          <a:lstStyle xmlns:a="http://schemas.openxmlformats.org/drawingml/2006/main"/>
+          <a:p xmlns:a="http://schemas.openxmlformats.org/drawingml/2006/main">
+            <a:pPr>
+              <a:defRPr sz="1875" b="1">
                 <a:solidFill>
                   <a:srgbClr val="0A0A0A"/>
                 </a:solidFill>
               </a:defRPr>
             </a:pPr>
             <a:r>
-              <a:rPr sz="4050" b="1">
+              <a:rPr sz="1875" b="1">
                 <a:solidFill>
                   <a:srgbClr val="0A0A0A"/>
                 </a:solidFill>
               </a:rPr>
-              <a:t>0 labels</a:t>
-            </a:r>
-          </a:p>
-        </p:txBody>
-      </p:sp>
-      <p:sp>
-        <p:nvSpPr>
-          <p:cNvPr id="9" name="">
-            <a:extLst xmlns:a="http://schemas.openxmlformats.org/drawingml/2006/main">
-              <a:ext uri="{FF2B5EF4-FFF2-40B4-BE49-F238E27FC236}">
-                <a16:creationId xmlns:a16="http://schemas.microsoft.com/office/drawing/2014/main" id="{6C56091E-5278-4EE7-8203-B6686809BC86}"/>
-              </a:ext>
-            </a:extLst>
-          </p:cNvPr>
-          <p:cNvSpPr>
-            <a:spLocks xmlns:a="http://schemas.openxmlformats.org/drawingml/2006/main" noGrp="1"/>
-          </p:cNvSpPr>
-          <p:nvPr/>
-        </p:nvSpPr>
-        <p:spPr>
-          <a:xfrm xmlns:a="http://schemas.openxmlformats.org/drawingml/2006/main">
-            <a:off x="8096250" y="5143500"/>
-            <a:ext cx="2857500" cy="514350"/>
-          </a:xfrm>
-          <a:prstGeom xmlns:a="http://schemas.openxmlformats.org/drawingml/2006/main" prst="rect">
-            <a:avLst/>
-          </a:prstGeom>
-          <a:noFill xmlns:a="http://schemas.openxmlformats.org/drawingml/2006/main"/>
-          <a:ln xmlns:a="http://schemas.openxmlformats.org/drawingml/2006/main" w="0">
-            <a:noFill/>
-            <a:prstDash val="solid"/>
-          </a:ln>
-        </p:spPr>
-        <p:txBody>
-          <a:bodyPr xmlns:a="http://schemas.openxmlformats.org/drawingml/2006/main"/>
-          <a:lstStyle xmlns:a="http://schemas.openxmlformats.org/drawingml/2006/main"/>
-          <a:p xmlns:a="http://schemas.openxmlformats.org/drawingml/2006/main">
-            <a:pPr>
-              <a:defRPr sz="1350">
-                <a:solidFill>
-                  <a:srgbClr val="4F5661"/>
-                </a:solidFill>
-              </a:defRPr>
-            </a:pPr>
-            <a:r>
-              <a:rPr sz="1350">
-                <a:solidFill>
-                  <a:srgbClr val="4F5661"/>
-                </a:solidFill>
-              </a:rPr>
-              <a:t>JEPA belief recovers the intent signal</a:t>
-            </a:r>
-          </a:p>
-        </p:txBody>
-      </p:sp>
-      <p:sp>
-        <p:nvSpPr>
-          <p:cNvPr id="10" name="">
-            <a:extLst xmlns:a="http://schemas.openxmlformats.org/drawingml/2006/main">
-              <a:ext uri="{FF2B5EF4-FFF2-40B4-BE49-F238E27FC236}">
-                <a16:creationId xmlns:a16="http://schemas.microsoft.com/office/drawing/2014/main" id="{E42B5CA1-E826-4713-83E7-40666D3F500A}"/>
-              </a:ext>
-            </a:extLst>
-          </p:cNvPr>
-          <p:cNvSpPr>
-            <a:spLocks xmlns:a="http://schemas.openxmlformats.org/drawingml/2006/main" noGrp="1"/>
-          </p:cNvSpPr>
-          <p:nvPr/>
-        </p:nvSpPr>
-        <p:spPr>
-          <a:xfrm xmlns:a="http://schemas.openxmlformats.org/drawingml/2006/main">
-            <a:off x="11277600" y="6267450"/>
-            <a:ext cx="457200" cy="228600"/>
-          </a:xfrm>
-          <a:prstGeom xmlns:a="http://schemas.openxmlformats.org/drawingml/2006/main" prst="rect">
-            <a:avLst/>
-          </a:prstGeom>
-          <a:noFill xmlns:a="http://schemas.openxmlformats.org/drawingml/2006/main"/>
-          <a:ln xmlns:a="http://schemas.openxmlformats.org/drawingml/2006/main" w="0">
-            <a:noFill/>
-            <a:prstDash val="solid"/>
-          </a:ln>
-        </p:spPr>
-        <p:txBody>
-          <a:bodyPr xmlns:a="http://schemas.openxmlformats.org/drawingml/2006/main"/>
-          <a:lstStyle xmlns:a="http://schemas.openxmlformats.org/drawingml/2006/main"/>
-          <a:p xmlns:a="http://schemas.openxmlformats.org/drawingml/2006/main">
-            <a:pPr algn="r">
-              <a:defRPr sz="1050">
-                <a:solidFill>
-                  <a:srgbClr val="4F5661"/>
-                </a:solidFill>
-              </a:defRPr>
-            </a:pPr>
-            <a:r>
-              <a:rPr sz="1050">
-                <a:solidFill>
-                  <a:srgbClr val="4F5661"/>
-                </a:solidFill>
-              </a:rPr>
-              <a:t>01</a:t>
+              <a:t>The clone recovers most of the expert edge, so the follow-up can test strategy information.</a:t>
             </a:r>
           </a:p>
         </p:txBody>
@@ -2151,7 +2474,1769 @@
     </p:spTree>
     <p:extLst>
       <p:ext uri="{BB962C8B-B14F-4D97-AF65-F5344CB8AC3E}">
-        <p14:creationId xmlns:p14="http://schemas.microsoft.com/office/powerpoint/2010/main" val="505919412"/>
+        <p14:creationId xmlns:p14="http://schemas.microsoft.com/office/powerpoint/2010/main" val="1416370026"/>
+      </p:ext>
+    </p:extLst>
+  </p:cSld>
+</p:sld>
+</file>
+
+<file path=ppt/slides/slide11.xml><?xml version="1.0" encoding="utf-8"?>
+<p:sld xmlns:p="http://schemas.openxmlformats.org/presentationml/2006/main">
+  <p:cSld>
+    <p:bg>
+      <p:bgPr>
+        <a:solidFill xmlns:a="http://schemas.openxmlformats.org/drawingml/2006/main">
+          <a:srgbClr val="FFFFFF"/>
+        </a:solidFill>
+      </p:bgPr>
+    </p:bg>
+    <p:spTree>
+      <p:nvGrpSpPr>
+        <p:cNvPr id="1" name=""/>
+        <p:cNvGrpSpPr/>
+        <p:nvPr/>
+      </p:nvGrpSpPr>
+      <p:grpSpPr>
+        <a:xfrm xmlns:a="http://schemas.openxmlformats.org/drawingml/2006/main"/>
+      </p:grpSpPr>
+      <p:sp>
+        <p:nvSpPr>
+          <p:cNvPr id="1" name="">
+            <a:extLst xmlns:a="http://schemas.openxmlformats.org/drawingml/2006/main">
+              <a:ext uri="{FF2B5EF4-FFF2-40B4-BE49-F238E27FC236}">
+                <a16:creationId xmlns:a16="http://schemas.microsoft.com/office/drawing/2014/main" id="{C9045915-F36A-4D68-AC55-4DA18F48562C}"/>
+              </a:ext>
+            </a:extLst>
+          </p:cNvPr>
+          <p:cNvSpPr>
+            <a:spLocks xmlns:a="http://schemas.openxmlformats.org/drawingml/2006/main" noGrp="1"/>
+          </p:cNvSpPr>
+          <p:nvPr/>
+        </p:nvSpPr>
+        <p:spPr>
+          <a:xfrm xmlns:a="http://schemas.openxmlformats.org/drawingml/2006/main">
+            <a:off x="533400" y="323850"/>
+            <a:ext cx="6858000" cy="228600"/>
+          </a:xfrm>
+          <a:prstGeom xmlns:a="http://schemas.openxmlformats.org/drawingml/2006/main" prst="rect">
+            <a:avLst/>
+          </a:prstGeom>
+          <a:noFill xmlns:a="http://schemas.openxmlformats.org/drawingml/2006/main"/>
+          <a:ln xmlns:a="http://schemas.openxmlformats.org/drawingml/2006/main" w="0">
+            <a:noFill/>
+            <a:prstDash val="solid"/>
+          </a:ln>
+        </p:spPr>
+        <p:txBody>
+          <a:bodyPr xmlns:a="http://schemas.openxmlformats.org/drawingml/2006/main"/>
+          <a:lstStyle xmlns:a="http://schemas.openxmlformats.org/drawingml/2006/main"/>
+          <a:p xmlns:a="http://schemas.openxmlformats.org/drawingml/2006/main">
+            <a:pPr>
+              <a:defRPr sz="975" b="1">
+                <a:solidFill>
+                  <a:srgbClr val="4F5661"/>
+                </a:solidFill>
+              </a:defRPr>
+            </a:pPr>
+            <a:r>
+              <a:rPr sz="975" b="1">
+                <a:solidFill>
+                  <a:srgbClr val="4F5661"/>
+                </a:solidFill>
+              </a:rPr>
+              <a:t>FOLLOW-UP</a:t>
+            </a:r>
+          </a:p>
+        </p:txBody>
+      </p:sp>
+      <p:sp>
+        <p:nvSpPr>
+          <p:cNvPr id="2" name="">
+            <a:extLst xmlns:a="http://schemas.openxmlformats.org/drawingml/2006/main">
+              <a:ext uri="{FF2B5EF4-FFF2-40B4-BE49-F238E27FC236}">
+                <a16:creationId xmlns:a16="http://schemas.microsoft.com/office/drawing/2014/main" id="{9628C34A-1027-4F82-A001-43DAC87CA93E}"/>
+              </a:ext>
+            </a:extLst>
+          </p:cNvPr>
+          <p:cNvSpPr>
+            <a:spLocks xmlns:a="http://schemas.openxmlformats.org/drawingml/2006/main" noGrp="1"/>
+          </p:cNvSpPr>
+          <p:nvPr/>
+        </p:nvSpPr>
+        <p:spPr>
+          <a:xfrm xmlns:a="http://schemas.openxmlformats.org/drawingml/2006/main">
+            <a:off x="533400" y="590550"/>
+            <a:ext cx="10287000" cy="933450"/>
+          </a:xfrm>
+          <a:prstGeom xmlns:a="http://schemas.openxmlformats.org/drawingml/2006/main" prst="rect">
+            <a:avLst/>
+          </a:prstGeom>
+          <a:noFill xmlns:a="http://schemas.openxmlformats.org/drawingml/2006/main"/>
+          <a:ln xmlns:a="http://schemas.openxmlformats.org/drawingml/2006/main" w="0">
+            <a:noFill/>
+            <a:prstDash val="solid"/>
+          </a:ln>
+        </p:spPr>
+        <p:txBody>
+          <a:bodyPr xmlns:a="http://schemas.openxmlformats.org/drawingml/2006/main"/>
+          <a:lstStyle xmlns:a="http://schemas.openxmlformats.org/drawingml/2006/main"/>
+          <a:p xmlns:a="http://schemas.openxmlformats.org/drawingml/2006/main">
+            <a:pPr>
+              <a:defRPr sz="3150" b="1">
+                <a:solidFill>
+                  <a:srgbClr val="0A0A0A"/>
+                </a:solidFill>
+              </a:defRPr>
+            </a:pPr>
+            <a:r>
+              <a:rPr sz="3150" b="1">
+                <a:solidFill>
+                  <a:srgbClr val="0A0A0A"/>
+                </a:solidFill>
+              </a:rPr>
+              <a:t>Strategy information has value, even when the latent is weak</a:t>
+            </a:r>
+          </a:p>
+        </p:txBody>
+      </p:sp>
+      <p:sp>
+        <p:nvSpPr>
+          <p:cNvPr id="3" name="">
+            <a:extLst xmlns:a="http://schemas.openxmlformats.org/drawingml/2006/main">
+              <a:ext uri="{FF2B5EF4-FFF2-40B4-BE49-F238E27FC236}">
+                <a16:creationId xmlns:a16="http://schemas.microsoft.com/office/drawing/2014/main" id="{425B4CA9-AFDC-40D6-A0CC-99CAE034DFAA}"/>
+              </a:ext>
+            </a:extLst>
+          </p:cNvPr>
+          <p:cNvSpPr>
+            <a:spLocks xmlns:a="http://schemas.openxmlformats.org/drawingml/2006/main" noGrp="1"/>
+          </p:cNvSpPr>
+          <p:nvPr/>
+        </p:nvSpPr>
+        <p:spPr>
+          <a:xfrm xmlns:a="http://schemas.openxmlformats.org/drawingml/2006/main">
+            <a:off x="533400" y="1581150"/>
+            <a:ext cx="5143500" cy="3295650"/>
+          </a:xfrm>
+          <a:prstGeom xmlns:a="http://schemas.openxmlformats.org/drawingml/2006/main" prst="rect">
+            <a:avLst/>
+          </a:prstGeom>
+          <a:solidFill xmlns:a="http://schemas.openxmlformats.org/drawingml/2006/main">
+            <a:srgbClr val="F4F5F7"/>
+          </a:solidFill>
+          <a:ln xmlns:a="http://schemas.openxmlformats.org/drawingml/2006/main" w="0">
+            <a:solidFill>
+              <a:srgbClr val="F4F5F7"/>
+            </a:solidFill>
+            <a:prstDash val="solid"/>
+          </a:ln>
+        </p:spPr>
+      </p:sp>
+      <p:sp>
+        <p:nvSpPr>
+          <p:cNvPr id="4" name="">
+            <a:extLst xmlns:a="http://schemas.openxmlformats.org/drawingml/2006/main">
+              <a:ext uri="{FF2B5EF4-FFF2-40B4-BE49-F238E27FC236}">
+                <a16:creationId xmlns:a16="http://schemas.microsoft.com/office/drawing/2014/main" id="{D634F86E-D6FF-448C-B3CC-59FCE12DB951}"/>
+              </a:ext>
+            </a:extLst>
+          </p:cNvPr>
+          <p:cNvSpPr>
+            <a:spLocks xmlns:a="http://schemas.openxmlformats.org/drawingml/2006/main" noGrp="1"/>
+          </p:cNvSpPr>
+          <p:nvPr/>
+        </p:nvSpPr>
+        <p:spPr>
+          <a:xfrm xmlns:a="http://schemas.openxmlformats.org/drawingml/2006/main">
+            <a:off x="6229350" y="1581150"/>
+            <a:ext cx="5143500" cy="3295650"/>
+          </a:xfrm>
+          <a:prstGeom xmlns:a="http://schemas.openxmlformats.org/drawingml/2006/main" prst="rect">
+            <a:avLst/>
+          </a:prstGeom>
+          <a:solidFill xmlns:a="http://schemas.openxmlformats.org/drawingml/2006/main">
+            <a:srgbClr val="F4F5F7"/>
+          </a:solidFill>
+          <a:ln xmlns:a="http://schemas.openxmlformats.org/drawingml/2006/main" w="0">
+            <a:solidFill>
+              <a:srgbClr val="F4F5F7"/>
+            </a:solidFill>
+            <a:prstDash val="solid"/>
+          </a:ln>
+        </p:spPr>
+      </p:sp>
+      <p:pic>
+        <p:nvPicPr>
+          <p:cNvPr id="13" name=""/>
+          <p:cNvPicPr>
+            <a:picLocks xmlns:a="http://schemas.openxmlformats.org/drawingml/2006/main" noChangeAspect="1"/>
+          </p:cNvPicPr>
+          <p:nvPr/>
+        </p:nvPicPr>
+        <p:blipFill>
+          <a:blip xmlns:r="http://schemas.openxmlformats.org/officeDocument/2006/relationships" xmlns:a="http://schemas.openxmlformats.org/drawingml/2006/main" r:embed="Rbd2fb01058ca46f9"/>
+          <a:stretch xmlns:a="http://schemas.openxmlformats.org/drawingml/2006/main"/>
+        </p:blipFill>
+        <p:spPr>
+          <a:xfrm xmlns:a="http://schemas.openxmlformats.org/drawingml/2006/main">
+            <a:off x="685800" y="1842274"/>
+            <a:ext cx="4838700" cy="2773401"/>
+          </a:xfrm>
+          <a:prstGeom xmlns:a="http://schemas.openxmlformats.org/drawingml/2006/main" prst="rect">
+            <a:avLst/>
+          </a:prstGeom>
+        </p:spPr>
+      </p:pic>
+      <p:pic>
+        <p:nvPicPr>
+          <p:cNvPr id="14" name=""/>
+          <p:cNvPicPr>
+            <a:picLocks xmlns:a="http://schemas.openxmlformats.org/drawingml/2006/main" noChangeAspect="1"/>
+          </p:cNvPicPr>
+          <p:nvPr/>
+        </p:nvPicPr>
+        <p:blipFill>
+          <a:blip xmlns:r="http://schemas.openxmlformats.org/officeDocument/2006/relationships" xmlns:a="http://schemas.openxmlformats.org/drawingml/2006/main" r:embed="Rd1db85b84ffe4010"/>
+          <a:stretch xmlns:a="http://schemas.openxmlformats.org/drawingml/2006/main"/>
+        </p:blipFill>
+        <p:spPr>
+          <a:xfrm xmlns:a="http://schemas.openxmlformats.org/drawingml/2006/main">
+            <a:off x="6381750" y="1850508"/>
+            <a:ext cx="4838700" cy="2756934"/>
+          </a:xfrm>
+          <a:prstGeom xmlns:a="http://schemas.openxmlformats.org/drawingml/2006/main" prst="rect">
+            <a:avLst/>
+          </a:prstGeom>
+        </p:spPr>
+      </p:pic>
+      <p:sp>
+        <p:nvSpPr>
+          <p:cNvPr id="7" name="">
+            <a:extLst xmlns:a="http://schemas.openxmlformats.org/drawingml/2006/main">
+              <a:ext uri="{FF2B5EF4-FFF2-40B4-BE49-F238E27FC236}">
+                <a16:creationId xmlns:a16="http://schemas.microsoft.com/office/drawing/2014/main" id="{F328CD49-F261-424F-867A-27FF99448169}"/>
+              </a:ext>
+            </a:extLst>
+          </p:cNvPr>
+          <p:cNvSpPr>
+            <a:spLocks xmlns:a="http://schemas.openxmlformats.org/drawingml/2006/main" noGrp="1"/>
+          </p:cNvSpPr>
+          <p:nvPr/>
+        </p:nvSpPr>
+        <p:spPr>
+          <a:xfrm xmlns:a="http://schemas.openxmlformats.org/drawingml/2006/main">
+            <a:off x="781050" y="5219700"/>
+            <a:ext cx="9334500" cy="819150"/>
+          </a:xfrm>
+          <a:prstGeom xmlns:a="http://schemas.openxmlformats.org/drawingml/2006/main" prst="rect">
+            <a:avLst/>
+          </a:prstGeom>
+          <a:noFill xmlns:a="http://schemas.openxmlformats.org/drawingml/2006/main"/>
+          <a:ln xmlns:a="http://schemas.openxmlformats.org/drawingml/2006/main" w="0">
+            <a:noFill/>
+            <a:prstDash val="solid"/>
+          </a:ln>
+        </p:spPr>
+        <p:txBody>
+          <a:bodyPr xmlns:a="http://schemas.openxmlformats.org/drawingml/2006/main"/>
+          <a:lstStyle xmlns:a="http://schemas.openxmlformats.org/drawingml/2006/main"/>
+          <a:p xmlns:a="http://schemas.openxmlformats.org/drawingml/2006/main">
+            <a:pPr>
+              <a:defRPr sz="1575">
+                <a:solidFill>
+                  <a:srgbClr val="4F5661"/>
+                </a:solidFill>
+              </a:defRPr>
+            </a:pPr>
+            <a:r>
+              <a:rPr sz="1575">
+                <a:solidFill>
+                  <a:srgbClr val="4F5661"/>
+                </a:solidFill>
+              </a:rPr>
+              <a:t>- Oracle placement closes most of the deployed capture gap.</a:t>
+            </a:r>
+          </a:p>
+          <a:p xmlns:a="http://schemas.openxmlformats.org/drawingml/2006/main">
+            <a:pPr>
+              <a:defRPr sz="1575">
+                <a:solidFill>
+                  <a:srgbClr val="4F5661"/>
+                </a:solidFill>
+              </a:defRPr>
+            </a:pPr>
+            <a:r>
+              <a:rPr sz="1575">
+                <a:solidFill>
+                  <a:srgbClr val="4F5661"/>
+                </a:solidFill>
+              </a:rPr>
+              <a:t>- The unsupervised latent gives a small deployed lift today.</a:t>
+            </a:r>
+          </a:p>
+          <a:p xmlns:a="http://schemas.openxmlformats.org/drawingml/2006/main">
+            <a:pPr>
+              <a:defRPr sz="1575">
+                <a:solidFill>
+                  <a:srgbClr val="4F5661"/>
+                </a:solidFill>
+              </a:defRPr>
+            </a:pPr>
+            <a:r>
+              <a:rPr sz="1575">
+                <a:solidFill>
+                  <a:srgbClr val="4F5661"/>
+                </a:solidFill>
+              </a:rPr>
+              <a:t>- The sweep shows better probes can improve BC accuracy.</a:t>
+            </a:r>
+          </a:p>
+        </p:txBody>
+      </p:sp>
+      <p:sp>
+        <p:nvSpPr>
+          <p:cNvPr id="8" name="">
+            <a:extLst xmlns:a="http://schemas.openxmlformats.org/drawingml/2006/main">
+              <a:ext uri="{FF2B5EF4-FFF2-40B4-BE49-F238E27FC236}">
+                <a16:creationId xmlns:a16="http://schemas.microsoft.com/office/drawing/2014/main" id="{1BFB6CC5-1941-4D01-B1BB-0C168D4291D3}"/>
+              </a:ext>
+            </a:extLst>
+          </p:cNvPr>
+          <p:cNvSpPr>
+            <a:spLocks xmlns:a="http://schemas.openxmlformats.org/drawingml/2006/main" noGrp="1"/>
+          </p:cNvSpPr>
+          <p:nvPr/>
+        </p:nvSpPr>
+        <p:spPr>
+          <a:xfrm xmlns:a="http://schemas.openxmlformats.org/drawingml/2006/main">
+            <a:off x="11277600" y="6267450"/>
+            <a:ext cx="457200" cy="228600"/>
+          </a:xfrm>
+          <a:prstGeom xmlns:a="http://schemas.openxmlformats.org/drawingml/2006/main" prst="rect">
+            <a:avLst/>
+          </a:prstGeom>
+          <a:noFill xmlns:a="http://schemas.openxmlformats.org/drawingml/2006/main"/>
+          <a:ln xmlns:a="http://schemas.openxmlformats.org/drawingml/2006/main" w="0">
+            <a:noFill/>
+            <a:prstDash val="solid"/>
+          </a:ln>
+        </p:spPr>
+        <p:txBody>
+          <a:bodyPr xmlns:a="http://schemas.openxmlformats.org/drawingml/2006/main"/>
+          <a:lstStyle xmlns:a="http://schemas.openxmlformats.org/drawingml/2006/main"/>
+          <a:p xmlns:a="http://schemas.openxmlformats.org/drawingml/2006/main">
+            <a:pPr algn="r">
+              <a:defRPr sz="1050">
+                <a:solidFill>
+                  <a:srgbClr val="4F5661"/>
+                </a:solidFill>
+              </a:defRPr>
+            </a:pPr>
+            <a:r>
+              <a:rPr sz="1050">
+                <a:solidFill>
+                  <a:srgbClr val="4F5661"/>
+                </a:solidFill>
+              </a:rPr>
+              <a:t>11</a:t>
+            </a:r>
+          </a:p>
+        </p:txBody>
+      </p:sp>
+    </p:spTree>
+    <p:extLst>
+      <p:ext uri="{BB962C8B-B14F-4D97-AF65-F5344CB8AC3E}">
+        <p14:creationId xmlns:p14="http://schemas.microsoft.com/office/powerpoint/2010/main" val="326329594"/>
+      </p:ext>
+    </p:extLst>
+  </p:cSld>
+</p:sld>
+</file>
+
+<file path=ppt/slides/slide12.xml><?xml version="1.0" encoding="utf-8"?>
+<p:sld xmlns:p="http://schemas.openxmlformats.org/presentationml/2006/main">
+  <p:cSld>
+    <p:bg>
+      <p:bgPr>
+        <a:solidFill xmlns:a="http://schemas.openxmlformats.org/drawingml/2006/main">
+          <a:srgbClr val="FFFFFF"/>
+        </a:solidFill>
+      </p:bgPr>
+    </p:bg>
+    <p:spTree>
+      <p:nvGrpSpPr>
+        <p:cNvPr id="1" name=""/>
+        <p:cNvGrpSpPr/>
+        <p:nvPr/>
+      </p:nvGrpSpPr>
+      <p:grpSpPr>
+        <a:xfrm xmlns:a="http://schemas.openxmlformats.org/drawingml/2006/main"/>
+      </p:grpSpPr>
+      <p:sp>
+        <p:nvSpPr>
+          <p:cNvPr id="1" name="">
+            <a:extLst xmlns:a="http://schemas.openxmlformats.org/drawingml/2006/main">
+              <a:ext uri="{FF2B5EF4-FFF2-40B4-BE49-F238E27FC236}">
+                <a16:creationId xmlns:a16="http://schemas.microsoft.com/office/drawing/2014/main" id="{F906F549-D058-4363-BFCB-B1F8A514114D}"/>
+              </a:ext>
+            </a:extLst>
+          </p:cNvPr>
+          <p:cNvSpPr>
+            <a:spLocks xmlns:a="http://schemas.openxmlformats.org/drawingml/2006/main" noGrp="1"/>
+          </p:cNvSpPr>
+          <p:nvPr/>
+        </p:nvSpPr>
+        <p:spPr>
+          <a:xfrm xmlns:a="http://schemas.openxmlformats.org/drawingml/2006/main">
+            <a:off x="533400" y="323850"/>
+            <a:ext cx="6858000" cy="228600"/>
+          </a:xfrm>
+          <a:prstGeom xmlns:a="http://schemas.openxmlformats.org/drawingml/2006/main" prst="rect">
+            <a:avLst/>
+          </a:prstGeom>
+          <a:noFill xmlns:a="http://schemas.openxmlformats.org/drawingml/2006/main"/>
+          <a:ln xmlns:a="http://schemas.openxmlformats.org/drawingml/2006/main" w="0">
+            <a:noFill/>
+            <a:prstDash val="solid"/>
+          </a:ln>
+        </p:spPr>
+        <p:txBody>
+          <a:bodyPr xmlns:a="http://schemas.openxmlformats.org/drawingml/2006/main"/>
+          <a:lstStyle xmlns:a="http://schemas.openxmlformats.org/drawingml/2006/main"/>
+          <a:p xmlns:a="http://schemas.openxmlformats.org/drawingml/2006/main">
+            <a:pPr>
+              <a:defRPr sz="975" b="1">
+                <a:solidFill>
+                  <a:srgbClr val="4F5661"/>
+                </a:solidFill>
+              </a:defRPr>
+            </a:pPr>
+            <a:r>
+              <a:rPr sz="975" b="1">
+                <a:solidFill>
+                  <a:srgbClr val="4F5661"/>
+                </a:solidFill>
+              </a:rPr>
+              <a:t>POSITIONING</a:t>
+            </a:r>
+          </a:p>
+        </p:txBody>
+      </p:sp>
+      <p:sp>
+        <p:nvSpPr>
+          <p:cNvPr id="2" name="">
+            <a:extLst xmlns:a="http://schemas.openxmlformats.org/drawingml/2006/main">
+              <a:ext uri="{FF2B5EF4-FFF2-40B4-BE49-F238E27FC236}">
+                <a16:creationId xmlns:a16="http://schemas.microsoft.com/office/drawing/2014/main" id="{B2D4CF85-A780-45D5-8834-A3AD9E482D67}"/>
+              </a:ext>
+            </a:extLst>
+          </p:cNvPr>
+          <p:cNvSpPr>
+            <a:spLocks xmlns:a="http://schemas.openxmlformats.org/drawingml/2006/main" noGrp="1"/>
+          </p:cNvSpPr>
+          <p:nvPr/>
+        </p:nvSpPr>
+        <p:spPr>
+          <a:xfrm xmlns:a="http://schemas.openxmlformats.org/drawingml/2006/main">
+            <a:off x="533400" y="590550"/>
+            <a:ext cx="10287000" cy="933450"/>
+          </a:xfrm>
+          <a:prstGeom xmlns:a="http://schemas.openxmlformats.org/drawingml/2006/main" prst="rect">
+            <a:avLst/>
+          </a:prstGeom>
+          <a:noFill xmlns:a="http://schemas.openxmlformats.org/drawingml/2006/main"/>
+          <a:ln xmlns:a="http://schemas.openxmlformats.org/drawingml/2006/main" w="0">
+            <a:noFill/>
+            <a:prstDash val="solid"/>
+          </a:ln>
+        </p:spPr>
+        <p:txBody>
+          <a:bodyPr xmlns:a="http://schemas.openxmlformats.org/drawingml/2006/main"/>
+          <a:lstStyle xmlns:a="http://schemas.openxmlformats.org/drawingml/2006/main"/>
+          <a:p xmlns:a="http://schemas.openxmlformats.org/drawingml/2006/main">
+            <a:pPr>
+              <a:defRPr sz="3150" b="1">
+                <a:solidFill>
+                  <a:srgbClr val="0A0A0A"/>
+                </a:solidFill>
+              </a:defRPr>
+            </a:pPr>
+            <a:r>
+              <a:rPr sz="3150" b="1">
+                <a:solidFill>
+                  <a:srgbClr val="0A0A0A"/>
+                </a:solidFill>
+              </a:rPr>
+              <a:t>The literature slot is belief plus planning</a:t>
+            </a:r>
+          </a:p>
+        </p:txBody>
+      </p:sp>
+      <p:sp>
+        <p:nvSpPr>
+          <p:cNvPr id="3" name="">
+            <a:extLst xmlns:a="http://schemas.openxmlformats.org/drawingml/2006/main">
+              <a:ext uri="{FF2B5EF4-FFF2-40B4-BE49-F238E27FC236}">
+                <a16:creationId xmlns:a16="http://schemas.microsoft.com/office/drawing/2014/main" id="{A5A7C764-1C9D-4C1E-B434-65945F8DEDC9}"/>
+              </a:ext>
+            </a:extLst>
+          </p:cNvPr>
+          <p:cNvSpPr>
+            <a:spLocks xmlns:a="http://schemas.openxmlformats.org/drawingml/2006/main" noGrp="1"/>
+          </p:cNvSpPr>
+          <p:nvPr/>
+        </p:nvSpPr>
+        <p:spPr>
+          <a:xfrm xmlns:a="http://schemas.openxmlformats.org/drawingml/2006/main">
+            <a:off x="685800" y="1809750"/>
+            <a:ext cx="800100" cy="57150"/>
+          </a:xfrm>
+          <a:prstGeom xmlns:a="http://schemas.openxmlformats.org/drawingml/2006/main" prst="rect">
+            <a:avLst/>
+          </a:prstGeom>
+          <a:solidFill xmlns:a="http://schemas.openxmlformats.org/drawingml/2006/main">
+            <a:srgbClr val="0D6E7A"/>
+          </a:solidFill>
+          <a:ln xmlns:a="http://schemas.openxmlformats.org/drawingml/2006/main" w="0">
+            <a:solidFill>
+              <a:srgbClr val="0D6E7A"/>
+            </a:solidFill>
+            <a:prstDash val="solid"/>
+          </a:ln>
+        </p:spPr>
+      </p:sp>
+      <p:sp>
+        <p:nvSpPr>
+          <p:cNvPr id="4" name="">
+            <a:extLst xmlns:a="http://schemas.openxmlformats.org/drawingml/2006/main">
+              <a:ext uri="{FF2B5EF4-FFF2-40B4-BE49-F238E27FC236}">
+                <a16:creationId xmlns:a16="http://schemas.microsoft.com/office/drawing/2014/main" id="{D05D2C96-AAFC-4ECD-B152-B35AB732C62C}"/>
+              </a:ext>
+            </a:extLst>
+          </p:cNvPr>
+          <p:cNvSpPr>
+            <a:spLocks xmlns:a="http://schemas.openxmlformats.org/drawingml/2006/main" noGrp="1"/>
+          </p:cNvSpPr>
+          <p:nvPr/>
+        </p:nvSpPr>
+        <p:spPr>
+          <a:xfrm xmlns:a="http://schemas.openxmlformats.org/drawingml/2006/main">
+            <a:off x="685800" y="2076450"/>
+            <a:ext cx="3028950" cy="419100"/>
+          </a:xfrm>
+          <a:prstGeom xmlns:a="http://schemas.openxmlformats.org/drawingml/2006/main" prst="rect">
+            <a:avLst/>
+          </a:prstGeom>
+          <a:noFill xmlns:a="http://schemas.openxmlformats.org/drawingml/2006/main"/>
+          <a:ln xmlns:a="http://schemas.openxmlformats.org/drawingml/2006/main" w="0">
+            <a:noFill/>
+            <a:prstDash val="solid"/>
+          </a:ln>
+        </p:spPr>
+        <p:txBody>
+          <a:bodyPr xmlns:a="http://schemas.openxmlformats.org/drawingml/2006/main"/>
+          <a:lstStyle xmlns:a="http://schemas.openxmlformats.org/drawingml/2006/main"/>
+          <a:p xmlns:a="http://schemas.openxmlformats.org/drawingml/2006/main">
+            <a:pPr>
+              <a:defRPr sz="1875" b="1">
+                <a:solidFill>
+                  <a:srgbClr val="0A0A0A"/>
+                </a:solidFill>
+              </a:defRPr>
+            </a:pPr>
+            <a:r>
+              <a:rPr sz="1875" b="1">
+                <a:solidFill>
+                  <a:srgbClr val="0A0A0A"/>
+                </a:solidFill>
+              </a:rPr>
+              <a:t>Closest comparator</a:t>
+            </a:r>
+          </a:p>
+        </p:txBody>
+      </p:sp>
+      <p:sp>
+        <p:nvSpPr>
+          <p:cNvPr id="5" name="">
+            <a:extLst xmlns:a="http://schemas.openxmlformats.org/drawingml/2006/main">
+              <a:ext uri="{FF2B5EF4-FFF2-40B4-BE49-F238E27FC236}">
+                <a16:creationId xmlns:a16="http://schemas.microsoft.com/office/drawing/2014/main" id="{7E6948DD-5348-481D-8460-AE163943D112}"/>
+              </a:ext>
+            </a:extLst>
+          </p:cNvPr>
+          <p:cNvSpPr>
+            <a:spLocks xmlns:a="http://schemas.openxmlformats.org/drawingml/2006/main" noGrp="1"/>
+          </p:cNvSpPr>
+          <p:nvPr/>
+        </p:nvSpPr>
+        <p:spPr>
+          <a:xfrm xmlns:a="http://schemas.openxmlformats.org/drawingml/2006/main">
+            <a:off x="685800" y="2628900"/>
+            <a:ext cx="3028950" cy="2000250"/>
+          </a:xfrm>
+          <a:prstGeom xmlns:a="http://schemas.openxmlformats.org/drawingml/2006/main" prst="rect">
+            <a:avLst/>
+          </a:prstGeom>
+          <a:noFill xmlns:a="http://schemas.openxmlformats.org/drawingml/2006/main"/>
+          <a:ln xmlns:a="http://schemas.openxmlformats.org/drawingml/2006/main" w="0">
+            <a:noFill/>
+            <a:prstDash val="solid"/>
+          </a:ln>
+        </p:spPr>
+        <p:txBody>
+          <a:bodyPr xmlns:a="http://schemas.openxmlformats.org/drawingml/2006/main"/>
+          <a:lstStyle xmlns:a="http://schemas.openxmlformats.org/drawingml/2006/main"/>
+          <a:p xmlns:a="http://schemas.openxmlformats.org/drawingml/2006/main">
+            <a:pPr>
+              <a:defRPr sz="1575">
+                <a:solidFill>
+                  <a:srgbClr val="4F5661"/>
+                </a:solidFill>
+              </a:defRPr>
+            </a:pPr>
+            <a:r>
+              <a:rPr sz="1575">
+                <a:solidFill>
+                  <a:srgbClr val="4F5661"/>
+                </a:solidFill>
+              </a:rPr>
+              <a:t>HOP couples goal belief with tree search. It is the most direct system-level baseline to run.</a:t>
+            </a:r>
+          </a:p>
+        </p:txBody>
+      </p:sp>
+      <p:sp>
+        <p:nvSpPr>
+          <p:cNvPr id="6" name="">
+            <a:extLst xmlns:a="http://schemas.openxmlformats.org/drawingml/2006/main">
+              <a:ext uri="{FF2B5EF4-FFF2-40B4-BE49-F238E27FC236}">
+                <a16:creationId xmlns:a16="http://schemas.microsoft.com/office/drawing/2014/main" id="{5FDC5F6E-1375-44DC-886E-2A79A7E9C0C2}"/>
+              </a:ext>
+            </a:extLst>
+          </p:cNvPr>
+          <p:cNvSpPr>
+            <a:spLocks xmlns:a="http://schemas.openxmlformats.org/drawingml/2006/main" noGrp="1"/>
+          </p:cNvSpPr>
+          <p:nvPr/>
+        </p:nvSpPr>
+        <p:spPr>
+          <a:xfrm xmlns:a="http://schemas.openxmlformats.org/drawingml/2006/main">
+            <a:off x="4514850" y="1809750"/>
+            <a:ext cx="800100" cy="57150"/>
+          </a:xfrm>
+          <a:prstGeom xmlns:a="http://schemas.openxmlformats.org/drawingml/2006/main" prst="rect">
+            <a:avLst/>
+          </a:prstGeom>
+          <a:solidFill xmlns:a="http://schemas.openxmlformats.org/drawingml/2006/main">
+            <a:srgbClr val="0A0A0A"/>
+          </a:solidFill>
+          <a:ln xmlns:a="http://schemas.openxmlformats.org/drawingml/2006/main" w="0">
+            <a:solidFill>
+              <a:srgbClr val="0A0A0A"/>
+            </a:solidFill>
+            <a:prstDash val="solid"/>
+          </a:ln>
+        </p:spPr>
+      </p:sp>
+      <p:sp>
+        <p:nvSpPr>
+          <p:cNvPr id="7" name="">
+            <a:extLst xmlns:a="http://schemas.openxmlformats.org/drawingml/2006/main">
+              <a:ext uri="{FF2B5EF4-FFF2-40B4-BE49-F238E27FC236}">
+                <a16:creationId xmlns:a16="http://schemas.microsoft.com/office/drawing/2014/main" id="{8017372B-A151-4250-8475-AD1AB1144699}"/>
+              </a:ext>
+            </a:extLst>
+          </p:cNvPr>
+          <p:cNvSpPr>
+            <a:spLocks xmlns:a="http://schemas.openxmlformats.org/drawingml/2006/main" noGrp="1"/>
+          </p:cNvSpPr>
+          <p:nvPr/>
+        </p:nvSpPr>
+        <p:spPr>
+          <a:xfrm xmlns:a="http://schemas.openxmlformats.org/drawingml/2006/main">
+            <a:off x="4514850" y="2076450"/>
+            <a:ext cx="3028950" cy="419100"/>
+          </a:xfrm>
+          <a:prstGeom xmlns:a="http://schemas.openxmlformats.org/drawingml/2006/main" prst="rect">
+            <a:avLst/>
+          </a:prstGeom>
+          <a:noFill xmlns:a="http://schemas.openxmlformats.org/drawingml/2006/main"/>
+          <a:ln xmlns:a="http://schemas.openxmlformats.org/drawingml/2006/main" w="0">
+            <a:noFill/>
+            <a:prstDash val="solid"/>
+          </a:ln>
+        </p:spPr>
+        <p:txBody>
+          <a:bodyPr xmlns:a="http://schemas.openxmlformats.org/drawingml/2006/main"/>
+          <a:lstStyle xmlns:a="http://schemas.openxmlformats.org/drawingml/2006/main"/>
+          <a:p xmlns:a="http://schemas.openxmlformats.org/drawingml/2006/main">
+            <a:pPr>
+              <a:defRPr sz="1875" b="1">
+                <a:solidFill>
+                  <a:srgbClr val="0A0A0A"/>
+                </a:solidFill>
+              </a:defRPr>
+            </a:pPr>
+            <a:r>
+              <a:rPr sz="1875" b="1">
+                <a:solidFill>
+                  <a:srgbClr val="0A0A0A"/>
+                </a:solidFill>
+              </a:rPr>
+              <a:t>Model-based MARL</a:t>
+            </a:r>
+          </a:p>
+        </p:txBody>
+      </p:sp>
+      <p:sp>
+        <p:nvSpPr>
+          <p:cNvPr id="8" name="">
+            <a:extLst xmlns:a="http://schemas.openxmlformats.org/drawingml/2006/main">
+              <a:ext uri="{FF2B5EF4-FFF2-40B4-BE49-F238E27FC236}">
+                <a16:creationId xmlns:a16="http://schemas.microsoft.com/office/drawing/2014/main" id="{4192B330-0833-4526-9489-81C6843C7EAA}"/>
+              </a:ext>
+            </a:extLst>
+          </p:cNvPr>
+          <p:cNvSpPr>
+            <a:spLocks xmlns:a="http://schemas.openxmlformats.org/drawingml/2006/main" noGrp="1"/>
+          </p:cNvSpPr>
+          <p:nvPr/>
+        </p:nvSpPr>
+        <p:spPr>
+          <a:xfrm xmlns:a="http://schemas.openxmlformats.org/drawingml/2006/main">
+            <a:off x="4514850" y="2628900"/>
+            <a:ext cx="3028950" cy="2000250"/>
+          </a:xfrm>
+          <a:prstGeom xmlns:a="http://schemas.openxmlformats.org/drawingml/2006/main" prst="rect">
+            <a:avLst/>
+          </a:prstGeom>
+          <a:noFill xmlns:a="http://schemas.openxmlformats.org/drawingml/2006/main"/>
+          <a:ln xmlns:a="http://schemas.openxmlformats.org/drawingml/2006/main" w="0">
+            <a:noFill/>
+            <a:prstDash val="solid"/>
+          </a:ln>
+        </p:spPr>
+        <p:txBody>
+          <a:bodyPr xmlns:a="http://schemas.openxmlformats.org/drawingml/2006/main"/>
+          <a:lstStyle xmlns:a="http://schemas.openxmlformats.org/drawingml/2006/main"/>
+          <a:p xmlns:a="http://schemas.openxmlformats.org/drawingml/2006/main">
+            <a:pPr>
+              <a:defRPr sz="1575">
+                <a:solidFill>
+                  <a:srgbClr val="4F5661"/>
+                </a:solidFill>
+              </a:defRPr>
+            </a:pPr>
+            <a:r>
+              <a:rPr sz="1575">
+                <a:solidFill>
+                  <a:srgbClr val="4F5661"/>
+                </a:solidFill>
+              </a:rPr>
+              <a:t>MAZero, MAMBA, MARIE, and MATWM test the planning and dynamics side of the story.</a:t>
+            </a:r>
+          </a:p>
+        </p:txBody>
+      </p:sp>
+      <p:sp>
+        <p:nvSpPr>
+          <p:cNvPr id="9" name="">
+            <a:extLst xmlns:a="http://schemas.openxmlformats.org/drawingml/2006/main">
+              <a:ext uri="{FF2B5EF4-FFF2-40B4-BE49-F238E27FC236}">
+                <a16:creationId xmlns:a16="http://schemas.microsoft.com/office/drawing/2014/main" id="{72D9F7E1-EBFA-44F9-A0B6-0F1FC3BCCCB8}"/>
+              </a:ext>
+            </a:extLst>
+          </p:cNvPr>
+          <p:cNvSpPr>
+            <a:spLocks xmlns:a="http://schemas.openxmlformats.org/drawingml/2006/main" noGrp="1"/>
+          </p:cNvSpPr>
+          <p:nvPr/>
+        </p:nvSpPr>
+        <p:spPr>
+          <a:xfrm xmlns:a="http://schemas.openxmlformats.org/drawingml/2006/main">
+            <a:off x="8343900" y="1809750"/>
+            <a:ext cx="800100" cy="57150"/>
+          </a:xfrm>
+          <a:prstGeom xmlns:a="http://schemas.openxmlformats.org/drawingml/2006/main" prst="rect">
+            <a:avLst/>
+          </a:prstGeom>
+          <a:solidFill xmlns:a="http://schemas.openxmlformats.org/drawingml/2006/main">
+            <a:srgbClr val="C84C2A"/>
+          </a:solidFill>
+          <a:ln xmlns:a="http://schemas.openxmlformats.org/drawingml/2006/main" w="0">
+            <a:solidFill>
+              <a:srgbClr val="C84C2A"/>
+            </a:solidFill>
+            <a:prstDash val="solid"/>
+          </a:ln>
+        </p:spPr>
+      </p:sp>
+      <p:sp>
+        <p:nvSpPr>
+          <p:cNvPr id="10" name="">
+            <a:extLst xmlns:a="http://schemas.openxmlformats.org/drawingml/2006/main">
+              <a:ext uri="{FF2B5EF4-FFF2-40B4-BE49-F238E27FC236}">
+                <a16:creationId xmlns:a16="http://schemas.microsoft.com/office/drawing/2014/main" id="{8F8BEBD9-DA91-47D2-9E53-B9C34FC03D64}"/>
+              </a:ext>
+            </a:extLst>
+          </p:cNvPr>
+          <p:cNvSpPr>
+            <a:spLocks xmlns:a="http://schemas.openxmlformats.org/drawingml/2006/main" noGrp="1"/>
+          </p:cNvSpPr>
+          <p:nvPr/>
+        </p:nvSpPr>
+        <p:spPr>
+          <a:xfrm xmlns:a="http://schemas.openxmlformats.org/drawingml/2006/main">
+            <a:off x="8343900" y="2076450"/>
+            <a:ext cx="3028950" cy="419100"/>
+          </a:xfrm>
+          <a:prstGeom xmlns:a="http://schemas.openxmlformats.org/drawingml/2006/main" prst="rect">
+            <a:avLst/>
+          </a:prstGeom>
+          <a:noFill xmlns:a="http://schemas.openxmlformats.org/drawingml/2006/main"/>
+          <a:ln xmlns:a="http://schemas.openxmlformats.org/drawingml/2006/main" w="0">
+            <a:noFill/>
+            <a:prstDash val="solid"/>
+          </a:ln>
+        </p:spPr>
+        <p:txBody>
+          <a:bodyPr xmlns:a="http://schemas.openxmlformats.org/drawingml/2006/main"/>
+          <a:lstStyle xmlns:a="http://schemas.openxmlformats.org/drawingml/2006/main"/>
+          <a:p xmlns:a="http://schemas.openxmlformats.org/drawingml/2006/main">
+            <a:pPr>
+              <a:defRPr sz="1875" b="1">
+                <a:solidFill>
+                  <a:srgbClr val="0A0A0A"/>
+                </a:solidFill>
+              </a:defRPr>
+            </a:pPr>
+            <a:r>
+              <a:rPr sz="1875" b="1">
+                <a:solidFill>
+                  <a:srgbClr val="0A0A0A"/>
+                </a:solidFill>
+              </a:rPr>
+              <a:t>Opponent modeling</a:t>
+            </a:r>
+          </a:p>
+        </p:txBody>
+      </p:sp>
+      <p:sp>
+        <p:nvSpPr>
+          <p:cNvPr id="11" name="">
+            <a:extLst xmlns:a="http://schemas.openxmlformats.org/drawingml/2006/main">
+              <a:ext uri="{FF2B5EF4-FFF2-40B4-BE49-F238E27FC236}">
+                <a16:creationId xmlns:a16="http://schemas.microsoft.com/office/drawing/2014/main" id="{5299B202-E9B4-4979-B53D-EFA8E069270C}"/>
+              </a:ext>
+            </a:extLst>
+          </p:cNvPr>
+          <p:cNvSpPr>
+            <a:spLocks xmlns:a="http://schemas.openxmlformats.org/drawingml/2006/main" noGrp="1"/>
+          </p:cNvSpPr>
+          <p:nvPr/>
+        </p:nvSpPr>
+        <p:spPr>
+          <a:xfrm xmlns:a="http://schemas.openxmlformats.org/drawingml/2006/main">
+            <a:off x="8343900" y="2628900"/>
+            <a:ext cx="3028950" cy="2000250"/>
+          </a:xfrm>
+          <a:prstGeom xmlns:a="http://schemas.openxmlformats.org/drawingml/2006/main" prst="rect">
+            <a:avLst/>
+          </a:prstGeom>
+          <a:noFill xmlns:a="http://schemas.openxmlformats.org/drawingml/2006/main"/>
+          <a:ln xmlns:a="http://schemas.openxmlformats.org/drawingml/2006/main" w="0">
+            <a:noFill/>
+            <a:prstDash val="solid"/>
+          </a:ln>
+        </p:spPr>
+        <p:txBody>
+          <a:bodyPr xmlns:a="http://schemas.openxmlformats.org/drawingml/2006/main"/>
+          <a:lstStyle xmlns:a="http://schemas.openxmlformats.org/drawingml/2006/main"/>
+          <a:p xmlns:a="http://schemas.openxmlformats.org/drawingml/2006/main">
+            <a:pPr>
+              <a:defRPr sz="1575">
+                <a:solidFill>
+                  <a:srgbClr val="4F5661"/>
+                </a:solidFill>
+              </a:defRPr>
+            </a:pPr>
+            <a:r>
+              <a:rPr sz="1575">
+                <a:solidFill>
+                  <a:srgbClr val="4F5661"/>
+                </a:solidFill>
+              </a:rPr>
+              <a:t>MBOM and AORPO test whether the opponent model adds value beyond policy conditioning.</a:t>
+            </a:r>
+          </a:p>
+        </p:txBody>
+      </p:sp>
+      <p:sp>
+        <p:nvSpPr>
+          <p:cNvPr id="12" name="">
+            <a:extLst xmlns:a="http://schemas.openxmlformats.org/drawingml/2006/main">
+              <a:ext uri="{FF2B5EF4-FFF2-40B4-BE49-F238E27FC236}">
+                <a16:creationId xmlns:a16="http://schemas.microsoft.com/office/drawing/2014/main" id="{FEAB580D-8801-4E20-92D1-B487AF5F18C4}"/>
+              </a:ext>
+            </a:extLst>
+          </p:cNvPr>
+          <p:cNvSpPr>
+            <a:spLocks xmlns:a="http://schemas.openxmlformats.org/drawingml/2006/main" noGrp="1"/>
+          </p:cNvSpPr>
+          <p:nvPr/>
+        </p:nvSpPr>
+        <p:spPr>
+          <a:xfrm xmlns:a="http://schemas.openxmlformats.org/drawingml/2006/main">
+            <a:off x="685800" y="5448300"/>
+            <a:ext cx="9906000" cy="590550"/>
+          </a:xfrm>
+          <a:prstGeom xmlns:a="http://schemas.openxmlformats.org/drawingml/2006/main" prst="rect">
+            <a:avLst/>
+          </a:prstGeom>
+          <a:noFill xmlns:a="http://schemas.openxmlformats.org/drawingml/2006/main"/>
+          <a:ln xmlns:a="http://schemas.openxmlformats.org/drawingml/2006/main" w="0">
+            <a:noFill/>
+            <a:prstDash val="solid"/>
+          </a:ln>
+        </p:spPr>
+        <p:txBody>
+          <a:bodyPr xmlns:a="http://schemas.openxmlformats.org/drawingml/2006/main"/>
+          <a:lstStyle xmlns:a="http://schemas.openxmlformats.org/drawingml/2006/main"/>
+          <a:p xmlns:a="http://schemas.openxmlformats.org/drawingml/2006/main">
+            <a:pPr>
+              <a:defRPr sz="1875" b="1">
+                <a:solidFill>
+                  <a:srgbClr val="0A0A0A"/>
+                </a:solidFill>
+              </a:defRPr>
+            </a:pPr>
+            <a:r>
+              <a:rPr sz="1875" b="1">
+                <a:solidFill>
+                  <a:srgbClr val="0A0A0A"/>
+                </a:solidFill>
+              </a:rPr>
+              <a:t>Paper line: calibrated opponent belief improves planning in a controlled hidden-intent task. Broader claims need adaptive opponents and external baselines.</a:t>
+            </a:r>
+          </a:p>
+        </p:txBody>
+      </p:sp>
+      <p:sp>
+        <p:nvSpPr>
+          <p:cNvPr id="13" name="">
+            <a:extLst xmlns:a="http://schemas.openxmlformats.org/drawingml/2006/main">
+              <a:ext uri="{FF2B5EF4-FFF2-40B4-BE49-F238E27FC236}">
+                <a16:creationId xmlns:a16="http://schemas.microsoft.com/office/drawing/2014/main" id="{C8BA62A8-9E7D-4341-AE55-304ADB7922BB}"/>
+              </a:ext>
+            </a:extLst>
+          </p:cNvPr>
+          <p:cNvSpPr>
+            <a:spLocks xmlns:a="http://schemas.openxmlformats.org/drawingml/2006/main" noGrp="1"/>
+          </p:cNvSpPr>
+          <p:nvPr/>
+        </p:nvSpPr>
+        <p:spPr>
+          <a:xfrm xmlns:a="http://schemas.openxmlformats.org/drawingml/2006/main">
+            <a:off x="11277600" y="6267450"/>
+            <a:ext cx="457200" cy="228600"/>
+          </a:xfrm>
+          <a:prstGeom xmlns:a="http://schemas.openxmlformats.org/drawingml/2006/main" prst="rect">
+            <a:avLst/>
+          </a:prstGeom>
+          <a:noFill xmlns:a="http://schemas.openxmlformats.org/drawingml/2006/main"/>
+          <a:ln xmlns:a="http://schemas.openxmlformats.org/drawingml/2006/main" w="0">
+            <a:noFill/>
+            <a:prstDash val="solid"/>
+          </a:ln>
+        </p:spPr>
+        <p:txBody>
+          <a:bodyPr xmlns:a="http://schemas.openxmlformats.org/drawingml/2006/main"/>
+          <a:lstStyle xmlns:a="http://schemas.openxmlformats.org/drawingml/2006/main"/>
+          <a:p xmlns:a="http://schemas.openxmlformats.org/drawingml/2006/main">
+            <a:pPr algn="r">
+              <a:defRPr sz="1050">
+                <a:solidFill>
+                  <a:srgbClr val="4F5661"/>
+                </a:solidFill>
+              </a:defRPr>
+            </a:pPr>
+            <a:r>
+              <a:rPr sz="1050">
+                <a:solidFill>
+                  <a:srgbClr val="4F5661"/>
+                </a:solidFill>
+              </a:rPr>
+              <a:t>12</a:t>
+            </a:r>
+          </a:p>
+        </p:txBody>
+      </p:sp>
+    </p:spTree>
+    <p:extLst>
+      <p:ext uri="{BB962C8B-B14F-4D97-AF65-F5344CB8AC3E}">
+        <p14:creationId xmlns:p14="http://schemas.microsoft.com/office/powerpoint/2010/main" val="1605731888"/>
+      </p:ext>
+    </p:extLst>
+  </p:cSld>
+</p:sld>
+</file>
+
+<file path=ppt/slides/slide13.xml><?xml version="1.0" encoding="utf-8"?>
+<p:sld xmlns:p="http://schemas.openxmlformats.org/presentationml/2006/main">
+  <p:cSld>
+    <p:bg>
+      <p:bgPr>
+        <a:solidFill xmlns:a="http://schemas.openxmlformats.org/drawingml/2006/main">
+          <a:srgbClr val="FFFFFF"/>
+        </a:solidFill>
+      </p:bgPr>
+    </p:bg>
+    <p:spTree>
+      <p:nvGrpSpPr>
+        <p:cNvPr id="1" name=""/>
+        <p:cNvGrpSpPr/>
+        <p:nvPr/>
+      </p:nvGrpSpPr>
+      <p:grpSpPr>
+        <a:xfrm xmlns:a="http://schemas.openxmlformats.org/drawingml/2006/main"/>
+      </p:grpSpPr>
+      <p:sp>
+        <p:nvSpPr>
+          <p:cNvPr id="1" name="">
+            <a:extLst xmlns:a="http://schemas.openxmlformats.org/drawingml/2006/main">
+              <a:ext uri="{FF2B5EF4-FFF2-40B4-BE49-F238E27FC236}">
+                <a16:creationId xmlns:a16="http://schemas.microsoft.com/office/drawing/2014/main" id="{84440947-C3C4-44CE-B8E9-A7A292416417}"/>
+              </a:ext>
+            </a:extLst>
+          </p:cNvPr>
+          <p:cNvSpPr>
+            <a:spLocks xmlns:a="http://schemas.openxmlformats.org/drawingml/2006/main" noGrp="1"/>
+          </p:cNvSpPr>
+          <p:nvPr/>
+        </p:nvSpPr>
+        <p:spPr>
+          <a:xfrm xmlns:a="http://schemas.openxmlformats.org/drawingml/2006/main">
+            <a:off x="533400" y="323850"/>
+            <a:ext cx="6858000" cy="228600"/>
+          </a:xfrm>
+          <a:prstGeom xmlns:a="http://schemas.openxmlformats.org/drawingml/2006/main" prst="rect">
+            <a:avLst/>
+          </a:prstGeom>
+          <a:noFill xmlns:a="http://schemas.openxmlformats.org/drawingml/2006/main"/>
+          <a:ln xmlns:a="http://schemas.openxmlformats.org/drawingml/2006/main" w="0">
+            <a:noFill/>
+            <a:prstDash val="solid"/>
+          </a:ln>
+        </p:spPr>
+        <p:txBody>
+          <a:bodyPr xmlns:a="http://schemas.openxmlformats.org/drawingml/2006/main"/>
+          <a:lstStyle xmlns:a="http://schemas.openxmlformats.org/drawingml/2006/main"/>
+          <a:p xmlns:a="http://schemas.openxmlformats.org/drawingml/2006/main">
+            <a:pPr>
+              <a:defRPr sz="975" b="1">
+                <a:solidFill>
+                  <a:srgbClr val="4F5661"/>
+                </a:solidFill>
+              </a:defRPr>
+            </a:pPr>
+            <a:r>
+              <a:rPr sz="975" b="1">
+                <a:solidFill>
+                  <a:srgbClr val="4F5661"/>
+                </a:solidFill>
+              </a:rPr>
+              <a:t>CLOSE</a:t>
+            </a:r>
+          </a:p>
+        </p:txBody>
+      </p:sp>
+      <p:sp>
+        <p:nvSpPr>
+          <p:cNvPr id="2" name="">
+            <a:extLst xmlns:a="http://schemas.openxmlformats.org/drawingml/2006/main">
+              <a:ext uri="{FF2B5EF4-FFF2-40B4-BE49-F238E27FC236}">
+                <a16:creationId xmlns:a16="http://schemas.microsoft.com/office/drawing/2014/main" id="{4B4F4D6A-F2FD-48EC-BFEF-4E006E69193F}"/>
+              </a:ext>
+            </a:extLst>
+          </p:cNvPr>
+          <p:cNvSpPr>
+            <a:spLocks xmlns:a="http://schemas.openxmlformats.org/drawingml/2006/main" noGrp="1"/>
+          </p:cNvSpPr>
+          <p:nvPr/>
+        </p:nvSpPr>
+        <p:spPr>
+          <a:xfrm xmlns:a="http://schemas.openxmlformats.org/drawingml/2006/main">
+            <a:off x="533400" y="590550"/>
+            <a:ext cx="10287000" cy="933450"/>
+          </a:xfrm>
+          <a:prstGeom xmlns:a="http://schemas.openxmlformats.org/drawingml/2006/main" prst="rect">
+            <a:avLst/>
+          </a:prstGeom>
+          <a:noFill xmlns:a="http://schemas.openxmlformats.org/drawingml/2006/main"/>
+          <a:ln xmlns:a="http://schemas.openxmlformats.org/drawingml/2006/main" w="0">
+            <a:noFill/>
+            <a:prstDash val="solid"/>
+          </a:ln>
+        </p:spPr>
+        <p:txBody>
+          <a:bodyPr xmlns:a="http://schemas.openxmlformats.org/drawingml/2006/main"/>
+          <a:lstStyle xmlns:a="http://schemas.openxmlformats.org/drawingml/2006/main"/>
+          <a:p xmlns:a="http://schemas.openxmlformats.org/drawingml/2006/main">
+            <a:pPr>
+              <a:defRPr sz="3150" b="1">
+                <a:solidFill>
+                  <a:srgbClr val="0A0A0A"/>
+                </a:solidFill>
+              </a:defRPr>
+            </a:pPr>
+            <a:r>
+              <a:rPr sz="3150" b="1">
+                <a:solidFill>
+                  <a:srgbClr val="0A0A0A"/>
+                </a:solidFill>
+              </a:rPr>
+              <a:t>Before submission, run the missing tests</a:t>
+            </a:r>
+          </a:p>
+        </p:txBody>
+      </p:sp>
+      <p:sp>
+        <p:nvSpPr>
+          <p:cNvPr id="3" name="">
+            <a:extLst xmlns:a="http://schemas.openxmlformats.org/drawingml/2006/main">
+              <a:ext uri="{FF2B5EF4-FFF2-40B4-BE49-F238E27FC236}">
+                <a16:creationId xmlns:a16="http://schemas.microsoft.com/office/drawing/2014/main" id="{AF65F7B3-D303-46DF-B4DF-2F296A886E75}"/>
+              </a:ext>
+            </a:extLst>
+          </p:cNvPr>
+          <p:cNvSpPr>
+            <a:spLocks xmlns:a="http://schemas.openxmlformats.org/drawingml/2006/main" noGrp="1"/>
+          </p:cNvSpPr>
+          <p:nvPr/>
+        </p:nvSpPr>
+        <p:spPr>
+          <a:xfrm xmlns:a="http://schemas.openxmlformats.org/drawingml/2006/main">
+            <a:off x="685800" y="1905000"/>
+            <a:ext cx="685800" cy="47625"/>
+          </a:xfrm>
+          <a:prstGeom xmlns:a="http://schemas.openxmlformats.org/drawingml/2006/main" prst="rect">
+            <a:avLst/>
+          </a:prstGeom>
+          <a:solidFill xmlns:a="http://schemas.openxmlformats.org/drawingml/2006/main">
+            <a:srgbClr val="0D6E7A"/>
+          </a:solidFill>
+          <a:ln xmlns:a="http://schemas.openxmlformats.org/drawingml/2006/main" w="0">
+            <a:solidFill>
+              <a:srgbClr val="0D6E7A"/>
+            </a:solidFill>
+            <a:prstDash val="solid"/>
+          </a:ln>
+        </p:spPr>
+      </p:sp>
+      <p:sp>
+        <p:nvSpPr>
+          <p:cNvPr id="4" name="">
+            <a:extLst xmlns:a="http://schemas.openxmlformats.org/drawingml/2006/main">
+              <a:ext uri="{FF2B5EF4-FFF2-40B4-BE49-F238E27FC236}">
+                <a16:creationId xmlns:a16="http://schemas.microsoft.com/office/drawing/2014/main" id="{D50C8514-57FD-45F2-BAD3-C63EC979B774}"/>
+              </a:ext>
+            </a:extLst>
+          </p:cNvPr>
+          <p:cNvSpPr>
+            <a:spLocks xmlns:a="http://schemas.openxmlformats.org/drawingml/2006/main" noGrp="1"/>
+          </p:cNvSpPr>
+          <p:nvPr/>
+        </p:nvSpPr>
+        <p:spPr>
+          <a:xfrm xmlns:a="http://schemas.openxmlformats.org/drawingml/2006/main">
+            <a:off x="1657350" y="1752600"/>
+            <a:ext cx="2667000" cy="361950"/>
+          </a:xfrm>
+          <a:prstGeom xmlns:a="http://schemas.openxmlformats.org/drawingml/2006/main" prst="rect">
+            <a:avLst/>
+          </a:prstGeom>
+          <a:noFill xmlns:a="http://schemas.openxmlformats.org/drawingml/2006/main"/>
+          <a:ln xmlns:a="http://schemas.openxmlformats.org/drawingml/2006/main" w="0">
+            <a:noFill/>
+            <a:prstDash val="solid"/>
+          </a:ln>
+        </p:spPr>
+        <p:txBody>
+          <a:bodyPr xmlns:a="http://schemas.openxmlformats.org/drawingml/2006/main"/>
+          <a:lstStyle xmlns:a="http://schemas.openxmlformats.org/drawingml/2006/main"/>
+          <a:p xmlns:a="http://schemas.openxmlformats.org/drawingml/2006/main">
+            <a:pPr>
+              <a:defRPr sz="1875" b="1">
+                <a:solidFill>
+                  <a:srgbClr val="0A0A0A"/>
+                </a:solidFill>
+              </a:defRPr>
+            </a:pPr>
+            <a:r>
+              <a:rPr sz="1875" b="1">
+                <a:solidFill>
+                  <a:srgbClr val="0A0A0A"/>
+                </a:solidFill>
+              </a:rPr>
+              <a:t>Oracle planner</a:t>
+            </a:r>
+          </a:p>
+        </p:txBody>
+      </p:sp>
+      <p:sp>
+        <p:nvSpPr>
+          <p:cNvPr id="5" name="">
+            <a:extLst xmlns:a="http://schemas.openxmlformats.org/drawingml/2006/main">
+              <a:ext uri="{FF2B5EF4-FFF2-40B4-BE49-F238E27FC236}">
+                <a16:creationId xmlns:a16="http://schemas.microsoft.com/office/drawing/2014/main" id="{871FE08E-DFF7-4E0A-8DB4-20EC610831D0}"/>
+              </a:ext>
+            </a:extLst>
+          </p:cNvPr>
+          <p:cNvSpPr>
+            <a:spLocks xmlns:a="http://schemas.openxmlformats.org/drawingml/2006/main" noGrp="1"/>
+          </p:cNvSpPr>
+          <p:nvPr/>
+        </p:nvSpPr>
+        <p:spPr>
+          <a:xfrm xmlns:a="http://schemas.openxmlformats.org/drawingml/2006/main">
+            <a:off x="4762500" y="1752600"/>
+            <a:ext cx="6191250" cy="419100"/>
+          </a:xfrm>
+          <a:prstGeom xmlns:a="http://schemas.openxmlformats.org/drawingml/2006/main" prst="rect">
+            <a:avLst/>
+          </a:prstGeom>
+          <a:noFill xmlns:a="http://schemas.openxmlformats.org/drawingml/2006/main"/>
+          <a:ln xmlns:a="http://schemas.openxmlformats.org/drawingml/2006/main" w="0">
+            <a:noFill/>
+            <a:prstDash val="solid"/>
+          </a:ln>
+        </p:spPr>
+        <p:txBody>
+          <a:bodyPr xmlns:a="http://schemas.openxmlformats.org/drawingml/2006/main"/>
+          <a:lstStyle xmlns:a="http://schemas.openxmlformats.org/drawingml/2006/main"/>
+          <a:p xmlns:a="http://schemas.openxmlformats.org/drawingml/2006/main">
+            <a:pPr>
+              <a:defRPr sz="1800">
+                <a:solidFill>
+                  <a:srgbClr val="4F5661"/>
+                </a:solidFill>
+              </a:defRPr>
+            </a:pPr>
+            <a:r>
+              <a:rPr sz="1800">
+                <a:solidFill>
+                  <a:srgbClr val="4F5661"/>
+                </a:solidFill>
+              </a:rPr>
+              <a:t>Measures the true planning ceiling with known intent.</a:t>
+            </a:r>
+          </a:p>
+        </p:txBody>
+      </p:sp>
+      <p:sp>
+        <p:nvSpPr>
+          <p:cNvPr id="6" name="">
+            <a:extLst xmlns:a="http://schemas.openxmlformats.org/drawingml/2006/main">
+              <a:ext uri="{FF2B5EF4-FFF2-40B4-BE49-F238E27FC236}">
+                <a16:creationId xmlns:a16="http://schemas.microsoft.com/office/drawing/2014/main" id="{6AAE4148-156E-4E34-84B5-7D24CA04CF96}"/>
+              </a:ext>
+            </a:extLst>
+          </p:cNvPr>
+          <p:cNvSpPr>
+            <a:spLocks xmlns:a="http://schemas.openxmlformats.org/drawingml/2006/main" noGrp="1"/>
+          </p:cNvSpPr>
+          <p:nvPr/>
+        </p:nvSpPr>
+        <p:spPr>
+          <a:xfrm xmlns:a="http://schemas.openxmlformats.org/drawingml/2006/main">
+            <a:off x="685800" y="2724150"/>
+            <a:ext cx="685800" cy="47625"/>
+          </a:xfrm>
+          <a:prstGeom xmlns:a="http://schemas.openxmlformats.org/drawingml/2006/main" prst="rect">
+            <a:avLst/>
+          </a:prstGeom>
+          <a:solidFill xmlns:a="http://schemas.openxmlformats.org/drawingml/2006/main">
+            <a:srgbClr val="0D6E7A"/>
+          </a:solidFill>
+          <a:ln xmlns:a="http://schemas.openxmlformats.org/drawingml/2006/main" w="0">
+            <a:solidFill>
+              <a:srgbClr val="0D6E7A"/>
+            </a:solidFill>
+            <a:prstDash val="solid"/>
+          </a:ln>
+        </p:spPr>
+      </p:sp>
+      <p:sp>
+        <p:nvSpPr>
+          <p:cNvPr id="7" name="">
+            <a:extLst xmlns:a="http://schemas.openxmlformats.org/drawingml/2006/main">
+              <a:ext uri="{FF2B5EF4-FFF2-40B4-BE49-F238E27FC236}">
+                <a16:creationId xmlns:a16="http://schemas.microsoft.com/office/drawing/2014/main" id="{57BF0422-EF1A-4011-9540-E6F9FDF844F7}"/>
+              </a:ext>
+            </a:extLst>
+          </p:cNvPr>
+          <p:cNvSpPr>
+            <a:spLocks xmlns:a="http://schemas.openxmlformats.org/drawingml/2006/main" noGrp="1"/>
+          </p:cNvSpPr>
+          <p:nvPr/>
+        </p:nvSpPr>
+        <p:spPr>
+          <a:xfrm xmlns:a="http://schemas.openxmlformats.org/drawingml/2006/main">
+            <a:off x="1657350" y="2571750"/>
+            <a:ext cx="2667000" cy="361950"/>
+          </a:xfrm>
+          <a:prstGeom xmlns:a="http://schemas.openxmlformats.org/drawingml/2006/main" prst="rect">
+            <a:avLst/>
+          </a:prstGeom>
+          <a:noFill xmlns:a="http://schemas.openxmlformats.org/drawingml/2006/main"/>
+          <a:ln xmlns:a="http://schemas.openxmlformats.org/drawingml/2006/main" w="0">
+            <a:noFill/>
+            <a:prstDash val="solid"/>
+          </a:ln>
+        </p:spPr>
+        <p:txBody>
+          <a:bodyPr xmlns:a="http://schemas.openxmlformats.org/drawingml/2006/main"/>
+          <a:lstStyle xmlns:a="http://schemas.openxmlformats.org/drawingml/2006/main"/>
+          <a:p xmlns:a="http://schemas.openxmlformats.org/drawingml/2006/main">
+            <a:pPr>
+              <a:defRPr sz="1875" b="1">
+                <a:solidFill>
+                  <a:srgbClr val="0A0A0A"/>
+                </a:solidFill>
+              </a:defRPr>
+            </a:pPr>
+            <a:r>
+              <a:rPr sz="1875" b="1">
+                <a:solidFill>
+                  <a:srgbClr val="0A0A0A"/>
+                </a:solidFill>
+              </a:rPr>
+              <a:t>Switching prey</a:t>
+            </a:r>
+          </a:p>
+        </p:txBody>
+      </p:sp>
+      <p:sp>
+        <p:nvSpPr>
+          <p:cNvPr id="8" name="">
+            <a:extLst xmlns:a="http://schemas.openxmlformats.org/drawingml/2006/main">
+              <a:ext uri="{FF2B5EF4-FFF2-40B4-BE49-F238E27FC236}">
+                <a16:creationId xmlns:a16="http://schemas.microsoft.com/office/drawing/2014/main" id="{FCEC6203-AC65-4869-AE91-53EFB91503A6}"/>
+              </a:ext>
+            </a:extLst>
+          </p:cNvPr>
+          <p:cNvSpPr>
+            <a:spLocks xmlns:a="http://schemas.openxmlformats.org/drawingml/2006/main" noGrp="1"/>
+          </p:cNvSpPr>
+          <p:nvPr/>
+        </p:nvSpPr>
+        <p:spPr>
+          <a:xfrm xmlns:a="http://schemas.openxmlformats.org/drawingml/2006/main">
+            <a:off x="4762500" y="2571750"/>
+            <a:ext cx="6191250" cy="419100"/>
+          </a:xfrm>
+          <a:prstGeom xmlns:a="http://schemas.openxmlformats.org/drawingml/2006/main" prst="rect">
+            <a:avLst/>
+          </a:prstGeom>
+          <a:noFill xmlns:a="http://schemas.openxmlformats.org/drawingml/2006/main"/>
+          <a:ln xmlns:a="http://schemas.openxmlformats.org/drawingml/2006/main" w="0">
+            <a:noFill/>
+            <a:prstDash val="solid"/>
+          </a:ln>
+        </p:spPr>
+        <p:txBody>
+          <a:bodyPr xmlns:a="http://schemas.openxmlformats.org/drawingml/2006/main"/>
+          <a:lstStyle xmlns:a="http://schemas.openxmlformats.org/drawingml/2006/main"/>
+          <a:p xmlns:a="http://schemas.openxmlformats.org/drawingml/2006/main">
+            <a:pPr>
+              <a:defRPr sz="1800">
+                <a:solidFill>
+                  <a:srgbClr val="4F5661"/>
+                </a:solidFill>
+              </a:defRPr>
+            </a:pPr>
+            <a:r>
+              <a:rPr sz="1800">
+                <a:solidFill>
+                  <a:srgbClr val="4F5661"/>
+                </a:solidFill>
+              </a:rPr>
+              <a:t>Tests whether the belief tracks a strategy change during an episode.</a:t>
+            </a:r>
+          </a:p>
+        </p:txBody>
+      </p:sp>
+      <p:sp>
+        <p:nvSpPr>
+          <p:cNvPr id="9" name="">
+            <a:extLst xmlns:a="http://schemas.openxmlformats.org/drawingml/2006/main">
+              <a:ext uri="{FF2B5EF4-FFF2-40B4-BE49-F238E27FC236}">
+                <a16:creationId xmlns:a16="http://schemas.microsoft.com/office/drawing/2014/main" id="{1266620C-BD77-4397-ADD4-4666A14F41C4}"/>
+              </a:ext>
+            </a:extLst>
+          </p:cNvPr>
+          <p:cNvSpPr>
+            <a:spLocks xmlns:a="http://schemas.openxmlformats.org/drawingml/2006/main" noGrp="1"/>
+          </p:cNvSpPr>
+          <p:nvPr/>
+        </p:nvSpPr>
+        <p:spPr>
+          <a:xfrm xmlns:a="http://schemas.openxmlformats.org/drawingml/2006/main">
+            <a:off x="685800" y="3543300"/>
+            <a:ext cx="685800" cy="47625"/>
+          </a:xfrm>
+          <a:prstGeom xmlns:a="http://schemas.openxmlformats.org/drawingml/2006/main" prst="rect">
+            <a:avLst/>
+          </a:prstGeom>
+          <a:solidFill xmlns:a="http://schemas.openxmlformats.org/drawingml/2006/main">
+            <a:srgbClr val="0D6E7A"/>
+          </a:solidFill>
+          <a:ln xmlns:a="http://schemas.openxmlformats.org/drawingml/2006/main" w="0">
+            <a:solidFill>
+              <a:srgbClr val="0D6E7A"/>
+            </a:solidFill>
+            <a:prstDash val="solid"/>
+          </a:ln>
+        </p:spPr>
+      </p:sp>
+      <p:sp>
+        <p:nvSpPr>
+          <p:cNvPr id="10" name="">
+            <a:extLst xmlns:a="http://schemas.openxmlformats.org/drawingml/2006/main">
+              <a:ext uri="{FF2B5EF4-FFF2-40B4-BE49-F238E27FC236}">
+                <a16:creationId xmlns:a16="http://schemas.microsoft.com/office/drawing/2014/main" id="{1C571232-1E3D-4A2D-A5CF-5D434F7BD8FD}"/>
+              </a:ext>
+            </a:extLst>
+          </p:cNvPr>
+          <p:cNvSpPr>
+            <a:spLocks xmlns:a="http://schemas.openxmlformats.org/drawingml/2006/main" noGrp="1"/>
+          </p:cNvSpPr>
+          <p:nvPr/>
+        </p:nvSpPr>
+        <p:spPr>
+          <a:xfrm xmlns:a="http://schemas.openxmlformats.org/drawingml/2006/main">
+            <a:off x="1657350" y="3390900"/>
+            <a:ext cx="2667000" cy="361950"/>
+          </a:xfrm>
+          <a:prstGeom xmlns:a="http://schemas.openxmlformats.org/drawingml/2006/main" prst="rect">
+            <a:avLst/>
+          </a:prstGeom>
+          <a:noFill xmlns:a="http://schemas.openxmlformats.org/drawingml/2006/main"/>
+          <a:ln xmlns:a="http://schemas.openxmlformats.org/drawingml/2006/main" w="0">
+            <a:noFill/>
+            <a:prstDash val="solid"/>
+          </a:ln>
+        </p:spPr>
+        <p:txBody>
+          <a:bodyPr xmlns:a="http://schemas.openxmlformats.org/drawingml/2006/main"/>
+          <a:lstStyle xmlns:a="http://schemas.openxmlformats.org/drawingml/2006/main"/>
+          <a:p xmlns:a="http://schemas.openxmlformats.org/drawingml/2006/main">
+            <a:pPr>
+              <a:defRPr sz="1875" b="1">
+                <a:solidFill>
+                  <a:srgbClr val="0A0A0A"/>
+                </a:solidFill>
+              </a:defRPr>
+            </a:pPr>
+            <a:r>
+              <a:rPr sz="1875" b="1">
+                <a:solidFill>
+                  <a:srgbClr val="0A0A0A"/>
+                </a:solidFill>
+              </a:rPr>
+              <a:t>HOP baseline</a:t>
+            </a:r>
+          </a:p>
+        </p:txBody>
+      </p:sp>
+      <p:sp>
+        <p:nvSpPr>
+          <p:cNvPr id="11" name="">
+            <a:extLst xmlns:a="http://schemas.openxmlformats.org/drawingml/2006/main">
+              <a:ext uri="{FF2B5EF4-FFF2-40B4-BE49-F238E27FC236}">
+                <a16:creationId xmlns:a16="http://schemas.microsoft.com/office/drawing/2014/main" id="{536F095E-C9B4-40DF-A4D3-F6BAD3DE3926}"/>
+              </a:ext>
+            </a:extLst>
+          </p:cNvPr>
+          <p:cNvSpPr>
+            <a:spLocks xmlns:a="http://schemas.openxmlformats.org/drawingml/2006/main" noGrp="1"/>
+          </p:cNvSpPr>
+          <p:nvPr/>
+        </p:nvSpPr>
+        <p:spPr>
+          <a:xfrm xmlns:a="http://schemas.openxmlformats.org/drawingml/2006/main">
+            <a:off x="4762500" y="3390900"/>
+            <a:ext cx="6191250" cy="419100"/>
+          </a:xfrm>
+          <a:prstGeom xmlns:a="http://schemas.openxmlformats.org/drawingml/2006/main" prst="rect">
+            <a:avLst/>
+          </a:prstGeom>
+          <a:noFill xmlns:a="http://schemas.openxmlformats.org/drawingml/2006/main"/>
+          <a:ln xmlns:a="http://schemas.openxmlformats.org/drawingml/2006/main" w="0">
+            <a:noFill/>
+            <a:prstDash val="solid"/>
+          </a:ln>
+        </p:spPr>
+        <p:txBody>
+          <a:bodyPr xmlns:a="http://schemas.openxmlformats.org/drawingml/2006/main"/>
+          <a:lstStyle xmlns:a="http://schemas.openxmlformats.org/drawingml/2006/main"/>
+          <a:p xmlns:a="http://schemas.openxmlformats.org/drawingml/2006/main">
+            <a:pPr>
+              <a:defRPr sz="1800">
+                <a:solidFill>
+                  <a:srgbClr val="4F5661"/>
+                </a:solidFill>
+              </a:defRPr>
+            </a:pPr>
+            <a:r>
+              <a:rPr sz="1800">
+                <a:solidFill>
+                  <a:srgbClr val="4F5661"/>
+                </a:solidFill>
+              </a:rPr>
+              <a:t>Checks the closest belief-search comparator.</a:t>
+            </a:r>
+          </a:p>
+        </p:txBody>
+      </p:sp>
+      <p:sp>
+        <p:nvSpPr>
+          <p:cNvPr id="12" name="">
+            <a:extLst xmlns:a="http://schemas.openxmlformats.org/drawingml/2006/main">
+              <a:ext uri="{FF2B5EF4-FFF2-40B4-BE49-F238E27FC236}">
+                <a16:creationId xmlns:a16="http://schemas.microsoft.com/office/drawing/2014/main" id="{A6BA9617-B09F-4EA1-BE21-3DD26088092A}"/>
+              </a:ext>
+            </a:extLst>
+          </p:cNvPr>
+          <p:cNvSpPr>
+            <a:spLocks xmlns:a="http://schemas.openxmlformats.org/drawingml/2006/main" noGrp="1"/>
+          </p:cNvSpPr>
+          <p:nvPr/>
+        </p:nvSpPr>
+        <p:spPr>
+          <a:xfrm xmlns:a="http://schemas.openxmlformats.org/drawingml/2006/main">
+            <a:off x="685800" y="4362450"/>
+            <a:ext cx="685800" cy="47625"/>
+          </a:xfrm>
+          <a:prstGeom xmlns:a="http://schemas.openxmlformats.org/drawingml/2006/main" prst="rect">
+            <a:avLst/>
+          </a:prstGeom>
+          <a:solidFill xmlns:a="http://schemas.openxmlformats.org/drawingml/2006/main">
+            <a:srgbClr val="C84C2A"/>
+          </a:solidFill>
+          <a:ln xmlns:a="http://schemas.openxmlformats.org/drawingml/2006/main" w="0">
+            <a:solidFill>
+              <a:srgbClr val="C84C2A"/>
+            </a:solidFill>
+            <a:prstDash val="solid"/>
+          </a:ln>
+        </p:spPr>
+      </p:sp>
+      <p:sp>
+        <p:nvSpPr>
+          <p:cNvPr id="13" name="">
+            <a:extLst xmlns:a="http://schemas.openxmlformats.org/drawingml/2006/main">
+              <a:ext uri="{FF2B5EF4-FFF2-40B4-BE49-F238E27FC236}">
+                <a16:creationId xmlns:a16="http://schemas.microsoft.com/office/drawing/2014/main" id="{3C9516CF-6D28-4DFF-BAE0-0FF59B2EF5DA}"/>
+              </a:ext>
+            </a:extLst>
+          </p:cNvPr>
+          <p:cNvSpPr>
+            <a:spLocks xmlns:a="http://schemas.openxmlformats.org/drawingml/2006/main" noGrp="1"/>
+          </p:cNvSpPr>
+          <p:nvPr/>
+        </p:nvSpPr>
+        <p:spPr>
+          <a:xfrm xmlns:a="http://schemas.openxmlformats.org/drawingml/2006/main">
+            <a:off x="1657350" y="4210050"/>
+            <a:ext cx="2667000" cy="361950"/>
+          </a:xfrm>
+          <a:prstGeom xmlns:a="http://schemas.openxmlformats.org/drawingml/2006/main" prst="rect">
+            <a:avLst/>
+          </a:prstGeom>
+          <a:noFill xmlns:a="http://schemas.openxmlformats.org/drawingml/2006/main"/>
+          <a:ln xmlns:a="http://schemas.openxmlformats.org/drawingml/2006/main" w="0">
+            <a:noFill/>
+            <a:prstDash val="solid"/>
+          </a:ln>
+        </p:spPr>
+        <p:txBody>
+          <a:bodyPr xmlns:a="http://schemas.openxmlformats.org/drawingml/2006/main"/>
+          <a:lstStyle xmlns:a="http://schemas.openxmlformats.org/drawingml/2006/main"/>
+          <a:p xmlns:a="http://schemas.openxmlformats.org/drawingml/2006/main">
+            <a:pPr>
+              <a:defRPr sz="1875" b="1">
+                <a:solidFill>
+                  <a:srgbClr val="0A0A0A"/>
+                </a:solidFill>
+              </a:defRPr>
+            </a:pPr>
+            <a:r>
+              <a:rPr sz="1875" b="1">
+                <a:solidFill>
+                  <a:srgbClr val="0A0A0A"/>
+                </a:solidFill>
+              </a:rPr>
+              <a:t>Raw artifact archive</a:t>
+            </a:r>
+          </a:p>
+        </p:txBody>
+      </p:sp>
+      <p:sp>
+        <p:nvSpPr>
+          <p:cNvPr id="14" name="">
+            <a:extLst xmlns:a="http://schemas.openxmlformats.org/drawingml/2006/main">
+              <a:ext uri="{FF2B5EF4-FFF2-40B4-BE49-F238E27FC236}">
+                <a16:creationId xmlns:a16="http://schemas.microsoft.com/office/drawing/2014/main" id="{7CBA6F08-2D92-4497-A6C6-31588F11BCD0}"/>
+              </a:ext>
+            </a:extLst>
+          </p:cNvPr>
+          <p:cNvSpPr>
+            <a:spLocks xmlns:a="http://schemas.openxmlformats.org/drawingml/2006/main" noGrp="1"/>
+          </p:cNvSpPr>
+          <p:nvPr/>
+        </p:nvSpPr>
+        <p:spPr>
+          <a:xfrm xmlns:a="http://schemas.openxmlformats.org/drawingml/2006/main">
+            <a:off x="4762500" y="4210050"/>
+            <a:ext cx="6191250" cy="419100"/>
+          </a:xfrm>
+          <a:prstGeom xmlns:a="http://schemas.openxmlformats.org/drawingml/2006/main" prst="rect">
+            <a:avLst/>
+          </a:prstGeom>
+          <a:noFill xmlns:a="http://schemas.openxmlformats.org/drawingml/2006/main"/>
+          <a:ln xmlns:a="http://schemas.openxmlformats.org/drawingml/2006/main" w="0">
+            <a:noFill/>
+            <a:prstDash val="solid"/>
+          </a:ln>
+        </p:spPr>
+        <p:txBody>
+          <a:bodyPr xmlns:a="http://schemas.openxmlformats.org/drawingml/2006/main"/>
+          <a:lstStyle xmlns:a="http://schemas.openxmlformats.org/drawingml/2006/main"/>
+          <a:p xmlns:a="http://schemas.openxmlformats.org/drawingml/2006/main">
+            <a:pPr>
+              <a:defRPr sz="1800">
+                <a:solidFill>
+                  <a:srgbClr val="4F5661"/>
+                </a:solidFill>
+              </a:defRPr>
+            </a:pPr>
+            <a:r>
+              <a:rPr sz="1800">
+                <a:solidFill>
+                  <a:srgbClr val="4F5661"/>
+                </a:solidFill>
+              </a:rPr>
+              <a:t>Pins checkpoints, logs, and metrics to a release DOI.</a:t>
+            </a:r>
+          </a:p>
+        </p:txBody>
+      </p:sp>
+      <p:sp>
+        <p:nvSpPr>
+          <p:cNvPr id="15" name="">
+            <a:extLst xmlns:a="http://schemas.openxmlformats.org/drawingml/2006/main">
+              <a:ext uri="{FF2B5EF4-FFF2-40B4-BE49-F238E27FC236}">
+                <a16:creationId xmlns:a16="http://schemas.microsoft.com/office/drawing/2014/main" id="{DCF3C1AA-7D08-410D-BB75-AB69D367339F}"/>
+              </a:ext>
+            </a:extLst>
+          </p:cNvPr>
+          <p:cNvSpPr>
+            <a:spLocks xmlns:a="http://schemas.openxmlformats.org/drawingml/2006/main" noGrp="1"/>
+          </p:cNvSpPr>
+          <p:nvPr/>
+        </p:nvSpPr>
+        <p:spPr>
+          <a:xfrm xmlns:a="http://schemas.openxmlformats.org/drawingml/2006/main">
+            <a:off x="685800" y="5600700"/>
+            <a:ext cx="9810750" cy="419100"/>
+          </a:xfrm>
+          <a:prstGeom xmlns:a="http://schemas.openxmlformats.org/drawingml/2006/main" prst="rect">
+            <a:avLst/>
+          </a:prstGeom>
+          <a:noFill xmlns:a="http://schemas.openxmlformats.org/drawingml/2006/main"/>
+          <a:ln xmlns:a="http://schemas.openxmlformats.org/drawingml/2006/main" w="0">
+            <a:noFill/>
+            <a:prstDash val="solid"/>
+          </a:ln>
+        </p:spPr>
+        <p:txBody>
+          <a:bodyPr xmlns:a="http://schemas.openxmlformats.org/drawingml/2006/main"/>
+          <a:lstStyle xmlns:a="http://schemas.openxmlformats.org/drawingml/2006/main"/>
+          <a:p xmlns:a="http://schemas.openxmlformats.org/drawingml/2006/main">
+            <a:pPr>
+              <a:defRPr sz="1875" b="1">
+                <a:solidFill>
+                  <a:srgbClr val="0A0A0A"/>
+                </a:solidFill>
+              </a:defRPr>
+            </a:pPr>
+            <a:r>
+              <a:rPr sz="1875" b="1">
+                <a:solidFill>
+                  <a:srgbClr val="0A0A0A"/>
+                </a:solidFill>
+              </a:rPr>
+              <a:t>End with a concrete ask: accept the controlled result, then fund the baseline and switching-opponent run.</a:t>
+            </a:r>
+          </a:p>
+        </p:txBody>
+      </p:sp>
+      <p:sp>
+        <p:nvSpPr>
+          <p:cNvPr id="16" name="">
+            <a:extLst xmlns:a="http://schemas.openxmlformats.org/drawingml/2006/main">
+              <a:ext uri="{FF2B5EF4-FFF2-40B4-BE49-F238E27FC236}">
+                <a16:creationId xmlns:a16="http://schemas.microsoft.com/office/drawing/2014/main" id="{CCA805A4-6A4B-49E8-ACDD-EF730C95FDFD}"/>
+              </a:ext>
+            </a:extLst>
+          </p:cNvPr>
+          <p:cNvSpPr>
+            <a:spLocks xmlns:a="http://schemas.openxmlformats.org/drawingml/2006/main" noGrp="1"/>
+          </p:cNvSpPr>
+          <p:nvPr/>
+        </p:nvSpPr>
+        <p:spPr>
+          <a:xfrm xmlns:a="http://schemas.openxmlformats.org/drawingml/2006/main">
+            <a:off x="11277600" y="6267450"/>
+            <a:ext cx="457200" cy="228600"/>
+          </a:xfrm>
+          <a:prstGeom xmlns:a="http://schemas.openxmlformats.org/drawingml/2006/main" prst="rect">
+            <a:avLst/>
+          </a:prstGeom>
+          <a:noFill xmlns:a="http://schemas.openxmlformats.org/drawingml/2006/main"/>
+          <a:ln xmlns:a="http://schemas.openxmlformats.org/drawingml/2006/main" w="0">
+            <a:noFill/>
+            <a:prstDash val="solid"/>
+          </a:ln>
+        </p:spPr>
+        <p:txBody>
+          <a:bodyPr xmlns:a="http://schemas.openxmlformats.org/drawingml/2006/main"/>
+          <a:lstStyle xmlns:a="http://schemas.openxmlformats.org/drawingml/2006/main"/>
+          <a:p xmlns:a="http://schemas.openxmlformats.org/drawingml/2006/main">
+            <a:pPr algn="r">
+              <a:defRPr sz="1050">
+                <a:solidFill>
+                  <a:srgbClr val="4F5661"/>
+                </a:solidFill>
+              </a:defRPr>
+            </a:pPr>
+            <a:r>
+              <a:rPr sz="1050">
+                <a:solidFill>
+                  <a:srgbClr val="4F5661"/>
+                </a:solidFill>
+              </a:rPr>
+              <a:t>13</a:t>
+            </a:r>
+          </a:p>
+        </p:txBody>
+      </p:sp>
+    </p:spTree>
+    <p:extLst>
+      <p:ext uri="{BB962C8B-B14F-4D97-AF65-F5344CB8AC3E}">
+        <p14:creationId xmlns:p14="http://schemas.microsoft.com/office/powerpoint/2010/main" val="121959062"/>
       </p:ext>
     </p:extLst>
   </p:cSld>
@@ -2182,7 +4267,7 @@
           <p:cNvPr id="1" name="">
             <a:extLst xmlns:a="http://schemas.openxmlformats.org/drawingml/2006/main">
               <a:ext uri="{FF2B5EF4-FFF2-40B4-BE49-F238E27FC236}">
-                <a16:creationId xmlns:a16="http://schemas.microsoft.com/office/drawing/2014/main" id="{0976083E-134F-4D46-895C-EF57D6038E3D}"/>
+                <a16:creationId xmlns:a16="http://schemas.microsoft.com/office/drawing/2014/main" id="{0A9DA591-3285-4517-846B-720F809562BF}"/>
               </a:ext>
             </a:extLst>
           </p:cNvPr>
@@ -2222,7 +4307,7 @@
                   <a:srgbClr val="4F5661"/>
                 </a:solidFill>
               </a:rPr>
-              <a:t>SETUP</a:t>
+              <a:t>CLAIM</a:t>
             </a:r>
           </a:p>
         </p:txBody>
@@ -2232,7 +4317,7 @@
           <p:cNvPr id="2" name="">
             <a:extLst xmlns:a="http://schemas.openxmlformats.org/drawingml/2006/main">
               <a:ext uri="{FF2B5EF4-FFF2-40B4-BE49-F238E27FC236}">
-                <a16:creationId xmlns:a16="http://schemas.microsoft.com/office/drawing/2014/main" id="{AB30B690-1E62-4D88-9428-C2DCCB4E89FC}"/>
+                <a16:creationId xmlns:a16="http://schemas.microsoft.com/office/drawing/2014/main" id="{1A5AAC05-E69D-43A6-8AFF-0B2D9D78B52B}"/>
               </a:ext>
             </a:extLst>
           </p:cNvPr>
@@ -2244,7 +4329,7 @@
         <p:spPr>
           <a:xfrm xmlns:a="http://schemas.openxmlformats.org/drawingml/2006/main">
             <a:off x="533400" y="590550"/>
-            <a:ext cx="10287000" cy="914400"/>
+            <a:ext cx="10287000" cy="933450"/>
           </a:xfrm>
           <a:prstGeom xmlns:a="http://schemas.openxmlformats.org/drawingml/2006/main" prst="rect">
             <a:avLst/>
@@ -2272,7 +4357,7 @@
                   <a:srgbClr val="0A0A0A"/>
                 </a:solidFill>
               </a:rPr>
-              <a:t>The experiment isolates one question</a:t>
+              <a:t>The paper claim is narrow enough to defend</a:t>
             </a:r>
           </a:p>
         </p:txBody>
@@ -2282,47 +4367,47 @@
           <p:cNvPr id="3" name="">
             <a:extLst xmlns:a="http://schemas.openxmlformats.org/drawingml/2006/main">
               <a:ext uri="{FF2B5EF4-FFF2-40B4-BE49-F238E27FC236}">
-                <a16:creationId xmlns:a16="http://schemas.microsoft.com/office/drawing/2014/main" id="{4227933E-ACD9-4FB8-890D-38E9926BF5A2}"/>
-              </a:ext>
-            </a:extLst>
-          </p:cNvPr>
-          <p:cNvSpPr>
-            <a:spLocks xmlns:a="http://schemas.openxmlformats.org/drawingml/2006/main" noGrp="1"/>
-          </p:cNvSpPr>
-          <p:nvPr/>
-        </p:nvSpPr>
-        <p:spPr>
-          <a:xfrm xmlns:a="http://schemas.openxmlformats.org/drawingml/2006/main">
-            <a:off x="533400" y="1695450"/>
-            <a:ext cx="7239000" cy="819150"/>
-          </a:xfrm>
-          <a:prstGeom xmlns:a="http://schemas.openxmlformats.org/drawingml/2006/main" prst="rect">
-            <a:avLst/>
-          </a:prstGeom>
-          <a:noFill xmlns:a="http://schemas.openxmlformats.org/drawingml/2006/main"/>
-          <a:ln xmlns:a="http://schemas.openxmlformats.org/drawingml/2006/main" w="0">
-            <a:noFill/>
-            <a:prstDash val="solid"/>
-          </a:ln>
-        </p:spPr>
-        <p:txBody>
-          <a:bodyPr xmlns:a="http://schemas.openxmlformats.org/drawingml/2006/main"/>
-          <a:lstStyle xmlns:a="http://schemas.openxmlformats.org/drawingml/2006/main"/>
-          <a:p xmlns:a="http://schemas.openxmlformats.org/drawingml/2006/main">
-            <a:pPr>
-              <a:defRPr sz="2250" b="1">
+                <a16:creationId xmlns:a16="http://schemas.microsoft.com/office/drawing/2014/main" id="{F646C037-A378-4349-9A66-9B04082778EE}"/>
+              </a:ext>
+            </a:extLst>
+          </p:cNvPr>
+          <p:cNvSpPr>
+            <a:spLocks xmlns:a="http://schemas.openxmlformats.org/drawingml/2006/main" noGrp="1"/>
+          </p:cNvSpPr>
+          <p:nvPr/>
+        </p:nvSpPr>
+        <p:spPr>
+          <a:xfrm xmlns:a="http://schemas.openxmlformats.org/drawingml/2006/main">
+            <a:off x="533400" y="1733550"/>
+            <a:ext cx="8191500" cy="800100"/>
+          </a:xfrm>
+          <a:prstGeom xmlns:a="http://schemas.openxmlformats.org/drawingml/2006/main" prst="rect">
+            <a:avLst/>
+          </a:prstGeom>
+          <a:noFill xmlns:a="http://schemas.openxmlformats.org/drawingml/2006/main"/>
+          <a:ln xmlns:a="http://schemas.openxmlformats.org/drawingml/2006/main" w="0">
+            <a:noFill/>
+            <a:prstDash val="solid"/>
+          </a:ln>
+        </p:spPr>
+        <p:txBody>
+          <a:bodyPr xmlns:a="http://schemas.openxmlformats.org/drawingml/2006/main"/>
+          <a:lstStyle xmlns:a="http://schemas.openxmlformats.org/drawingml/2006/main"/>
+          <a:p xmlns:a="http://schemas.openxmlformats.org/drawingml/2006/main">
+            <a:pPr>
+              <a:defRPr sz="2400" b="1">
                 <a:solidFill>
                   <a:srgbClr val="0A0A0A"/>
                 </a:solidFill>
               </a:defRPr>
             </a:pPr>
             <a:r>
-              <a:rPr sz="2250" b="1">
+              <a:rPr sz="2400" b="1">
                 <a:solidFill>
                   <a:srgbClr val="0A0A0A"/>
                 </a:solidFill>
               </a:rPr>
-              <a:t>Can a predator team use early opponent behavior to plan better than a team that reacts to a point estimate?</a:t>
+              <a:t>A predator team performs better when it plans against a calibrated belief over the prey's hidden intent.</a:t>
             </a:r>
           </a:p>
         </p:txBody>
@@ -2332,213 +4417,247 @@
           <p:cNvPr id="4" name="">
             <a:extLst xmlns:a="http://schemas.openxmlformats.org/drawingml/2006/main">
               <a:ext uri="{FF2B5EF4-FFF2-40B4-BE49-F238E27FC236}">
-                <a16:creationId xmlns:a16="http://schemas.microsoft.com/office/drawing/2014/main" id="{FDA16A81-6B8D-4D05-BBED-37595B5D0A25}"/>
-              </a:ext>
-            </a:extLst>
-          </p:cNvPr>
-          <p:cNvSpPr>
-            <a:spLocks xmlns:a="http://schemas.openxmlformats.org/drawingml/2006/main" noGrp="1"/>
-          </p:cNvSpPr>
-          <p:nvPr/>
-        </p:nvSpPr>
-        <p:spPr>
-          <a:xfrm xmlns:a="http://schemas.openxmlformats.org/drawingml/2006/main">
-            <a:off x="533400" y="3028950"/>
-            <a:ext cx="685800" cy="38100"/>
-          </a:xfrm>
-          <a:prstGeom xmlns:a="http://schemas.openxmlformats.org/drawingml/2006/main" prst="rect">
-            <a:avLst/>
-          </a:prstGeom>
-          <a:solidFill xmlns:a="http://schemas.openxmlformats.org/drawingml/2006/main">
-            <a:srgbClr val="0D6E7A"/>
-          </a:solidFill>
-          <a:ln xmlns:a="http://schemas.openxmlformats.org/drawingml/2006/main" w="0">
-            <a:solidFill>
-              <a:srgbClr val="0D6E7A"/>
-            </a:solidFill>
-            <a:prstDash val="solid"/>
-          </a:ln>
-        </p:spPr>
+                <a16:creationId xmlns:a16="http://schemas.microsoft.com/office/drawing/2014/main" id="{BE5D460E-B5C9-4202-A85D-AC1FEA996D92}"/>
+              </a:ext>
+            </a:extLst>
+          </p:cNvPr>
+          <p:cNvSpPr>
+            <a:spLocks xmlns:a="http://schemas.openxmlformats.org/drawingml/2006/main" noGrp="1"/>
+          </p:cNvSpPr>
+          <p:nvPr/>
+        </p:nvSpPr>
+        <p:spPr>
+          <a:xfrm xmlns:a="http://schemas.openxmlformats.org/drawingml/2006/main">
+            <a:off x="685800" y="3467100"/>
+            <a:ext cx="2952750" cy="666750"/>
+          </a:xfrm>
+          <a:prstGeom xmlns:a="http://schemas.openxmlformats.org/drawingml/2006/main" prst="rect">
+            <a:avLst/>
+          </a:prstGeom>
+          <a:noFill xmlns:a="http://schemas.openxmlformats.org/drawingml/2006/main"/>
+          <a:ln xmlns:a="http://schemas.openxmlformats.org/drawingml/2006/main" w="0">
+            <a:noFill/>
+            <a:prstDash val="solid"/>
+          </a:ln>
+        </p:spPr>
+        <p:txBody>
+          <a:bodyPr xmlns:a="http://schemas.openxmlformats.org/drawingml/2006/main"/>
+          <a:lstStyle xmlns:a="http://schemas.openxmlformats.org/drawingml/2006/main"/>
+          <a:p xmlns:a="http://schemas.openxmlformats.org/drawingml/2006/main">
+            <a:pPr>
+              <a:defRPr sz="4200" b="1">
+                <a:solidFill>
+                  <a:srgbClr val="0D6E7A"/>
+                </a:solidFill>
+              </a:defRPr>
+            </a:pPr>
+            <a:r>
+              <a:rPr sz="4200" b="1">
+                <a:solidFill>
+                  <a:srgbClr val="0D6E7A"/>
+                </a:solidFill>
+              </a:rPr>
+              <a:t>4.31</a:t>
+            </a:r>
+          </a:p>
+        </p:txBody>
       </p:sp>
       <p:sp>
         <p:nvSpPr>
           <p:cNvPr id="5" name="">
             <a:extLst xmlns:a="http://schemas.openxmlformats.org/drawingml/2006/main">
               <a:ext uri="{FF2B5EF4-FFF2-40B4-BE49-F238E27FC236}">
-                <a16:creationId xmlns:a16="http://schemas.microsoft.com/office/drawing/2014/main" id="{1520D208-F1BD-4C2A-B81F-EF42FC995BCF}"/>
-              </a:ext>
-            </a:extLst>
-          </p:cNvPr>
-          <p:cNvSpPr>
-            <a:spLocks xmlns:a="http://schemas.openxmlformats.org/drawingml/2006/main" noGrp="1"/>
-          </p:cNvSpPr>
-          <p:nvPr/>
-        </p:nvSpPr>
-        <p:spPr>
-          <a:xfrm xmlns:a="http://schemas.openxmlformats.org/drawingml/2006/main">
-            <a:off x="1466850" y="2895600"/>
-            <a:ext cx="2095500" cy="323850"/>
-          </a:xfrm>
-          <a:prstGeom xmlns:a="http://schemas.openxmlformats.org/drawingml/2006/main" prst="rect">
-            <a:avLst/>
-          </a:prstGeom>
-          <a:noFill xmlns:a="http://schemas.openxmlformats.org/drawingml/2006/main"/>
-          <a:ln xmlns:a="http://schemas.openxmlformats.org/drawingml/2006/main" w="0">
-            <a:noFill/>
-            <a:prstDash val="solid"/>
-          </a:ln>
-        </p:spPr>
-        <p:txBody>
-          <a:bodyPr xmlns:a="http://schemas.openxmlformats.org/drawingml/2006/main"/>
-          <a:lstStyle xmlns:a="http://schemas.openxmlformats.org/drawingml/2006/main"/>
-          <a:p xmlns:a="http://schemas.openxmlformats.org/drawingml/2006/main">
-            <a:pPr>
-              <a:defRPr sz="1650" b="1">
+                <a16:creationId xmlns:a16="http://schemas.microsoft.com/office/drawing/2014/main" id="{64B395BB-22CD-4822-A64B-63F1887067ED}"/>
+              </a:ext>
+            </a:extLst>
+          </p:cNvPr>
+          <p:cNvSpPr>
+            <a:spLocks xmlns:a="http://schemas.openxmlformats.org/drawingml/2006/main" noGrp="1"/>
+          </p:cNvSpPr>
+          <p:nvPr/>
+        </p:nvSpPr>
+        <p:spPr>
+          <a:xfrm xmlns:a="http://schemas.openxmlformats.org/drawingml/2006/main">
+            <a:off x="685800" y="4133850"/>
+            <a:ext cx="2952750" cy="666750"/>
+          </a:xfrm>
+          <a:prstGeom xmlns:a="http://schemas.openxmlformats.org/drawingml/2006/main" prst="rect">
+            <a:avLst/>
+          </a:prstGeom>
+          <a:noFill xmlns:a="http://schemas.openxmlformats.org/drawingml/2006/main"/>
+          <a:ln xmlns:a="http://schemas.openxmlformats.org/drawingml/2006/main" w="0">
+            <a:noFill/>
+            <a:prstDash val="solid"/>
+          </a:ln>
+        </p:spPr>
+        <p:txBody>
+          <a:bodyPr xmlns:a="http://schemas.openxmlformats.org/drawingml/2006/main"/>
+          <a:lstStyle xmlns:a="http://schemas.openxmlformats.org/drawingml/2006/main"/>
+          <a:p xmlns:a="http://schemas.openxmlformats.org/drawingml/2006/main">
+            <a:pPr>
+              <a:defRPr sz="1425">
+                <a:solidFill>
+                  <a:srgbClr val="4F5661"/>
+                </a:solidFill>
+              </a:defRPr>
+            </a:pPr>
+            <a:r>
+              <a:rPr sz="1425">
+                <a:solidFill>
+                  <a:srgbClr val="4F5661"/>
+                </a:solidFill>
+              </a:rPr>
+              <a:t>captures/episode with inferred-belief planning</a:t>
+            </a:r>
+          </a:p>
+        </p:txBody>
+      </p:sp>
+      <p:sp>
+        <p:nvSpPr>
+          <p:cNvPr id="6" name="">
+            <a:extLst xmlns:a="http://schemas.openxmlformats.org/drawingml/2006/main">
+              <a:ext uri="{FF2B5EF4-FFF2-40B4-BE49-F238E27FC236}">
+                <a16:creationId xmlns:a16="http://schemas.microsoft.com/office/drawing/2014/main" id="{4E1FDD65-371B-421C-9336-346A5F757FBE}"/>
+              </a:ext>
+            </a:extLst>
+          </p:cNvPr>
+          <p:cNvSpPr>
+            <a:spLocks xmlns:a="http://schemas.openxmlformats.org/drawingml/2006/main" noGrp="1"/>
+          </p:cNvSpPr>
+          <p:nvPr/>
+        </p:nvSpPr>
+        <p:spPr>
+          <a:xfrm xmlns:a="http://schemas.openxmlformats.org/drawingml/2006/main">
+            <a:off x="4533900" y="3467100"/>
+            <a:ext cx="3143250" cy="666750"/>
+          </a:xfrm>
+          <a:prstGeom xmlns:a="http://schemas.openxmlformats.org/drawingml/2006/main" prst="rect">
+            <a:avLst/>
+          </a:prstGeom>
+          <a:noFill xmlns:a="http://schemas.openxmlformats.org/drawingml/2006/main"/>
+          <a:ln xmlns:a="http://schemas.openxmlformats.org/drawingml/2006/main" w="0">
+            <a:noFill/>
+            <a:prstDash val="solid"/>
+          </a:ln>
+        </p:spPr>
+        <p:txBody>
+          <a:bodyPr xmlns:a="http://schemas.openxmlformats.org/drawingml/2006/main"/>
+          <a:lstStyle xmlns:a="http://schemas.openxmlformats.org/drawingml/2006/main"/>
+          <a:p xmlns:a="http://schemas.openxmlformats.org/drawingml/2006/main">
+            <a:pPr>
+              <a:defRPr sz="4200" b="1">
+                <a:solidFill>
+                  <a:srgbClr val="C84C2A"/>
+                </a:solidFill>
+              </a:defRPr>
+            </a:pPr>
+            <a:r>
+              <a:rPr sz="4200" b="1">
+                <a:solidFill>
+                  <a:srgbClr val="C84C2A"/>
+                </a:solidFill>
+              </a:rPr>
+              <a:t>1.42</a:t>
+            </a:r>
+          </a:p>
+        </p:txBody>
+      </p:sp>
+      <p:sp>
+        <p:nvSpPr>
+          <p:cNvPr id="7" name="">
+            <a:extLst xmlns:a="http://schemas.openxmlformats.org/drawingml/2006/main">
+              <a:ext uri="{FF2B5EF4-FFF2-40B4-BE49-F238E27FC236}">
+                <a16:creationId xmlns:a16="http://schemas.microsoft.com/office/drawing/2014/main" id="{13BC3492-5C32-4724-926C-CC6B1285F91B}"/>
+              </a:ext>
+            </a:extLst>
+          </p:cNvPr>
+          <p:cNvSpPr>
+            <a:spLocks xmlns:a="http://schemas.openxmlformats.org/drawingml/2006/main" noGrp="1"/>
+          </p:cNvSpPr>
+          <p:nvPr/>
+        </p:nvSpPr>
+        <p:spPr>
+          <a:xfrm xmlns:a="http://schemas.openxmlformats.org/drawingml/2006/main">
+            <a:off x="4533900" y="4133850"/>
+            <a:ext cx="3143250" cy="666750"/>
+          </a:xfrm>
+          <a:prstGeom xmlns:a="http://schemas.openxmlformats.org/drawingml/2006/main" prst="rect">
+            <a:avLst/>
+          </a:prstGeom>
+          <a:noFill xmlns:a="http://schemas.openxmlformats.org/drawingml/2006/main"/>
+          <a:ln xmlns:a="http://schemas.openxmlformats.org/drawingml/2006/main" w="0">
+            <a:noFill/>
+            <a:prstDash val="solid"/>
+          </a:ln>
+        </p:spPr>
+        <p:txBody>
+          <a:bodyPr xmlns:a="http://schemas.openxmlformats.org/drawingml/2006/main"/>
+          <a:lstStyle xmlns:a="http://schemas.openxmlformats.org/drawingml/2006/main"/>
+          <a:p xmlns:a="http://schemas.openxmlformats.org/drawingml/2006/main">
+            <a:pPr>
+              <a:defRPr sz="1425">
+                <a:solidFill>
+                  <a:srgbClr val="4F5661"/>
+                </a:solidFill>
+              </a:defRPr>
+            </a:pPr>
+            <a:r>
+              <a:rPr sz="1425">
+                <a:solidFill>
+                  <a:srgbClr val="4F5661"/>
+                </a:solidFill>
+              </a:rPr>
+              <a:t>captures/episode when the model uses a wrong hard intent</a:t>
+            </a:r>
+          </a:p>
+        </p:txBody>
+      </p:sp>
+      <p:sp>
+        <p:nvSpPr>
+          <p:cNvPr id="8" name="">
+            <a:extLst xmlns:a="http://schemas.openxmlformats.org/drawingml/2006/main">
+              <a:ext uri="{FF2B5EF4-FFF2-40B4-BE49-F238E27FC236}">
+                <a16:creationId xmlns:a16="http://schemas.microsoft.com/office/drawing/2014/main" id="{2C974229-238B-46FA-94D6-0A5CE76FBF7B}"/>
+              </a:ext>
+            </a:extLst>
+          </p:cNvPr>
+          <p:cNvSpPr>
+            <a:spLocks xmlns:a="http://schemas.openxmlformats.org/drawingml/2006/main" noGrp="1"/>
+          </p:cNvSpPr>
+          <p:nvPr/>
+        </p:nvSpPr>
+        <p:spPr>
+          <a:xfrm xmlns:a="http://schemas.openxmlformats.org/drawingml/2006/main">
+            <a:off x="8458200" y="3467100"/>
+            <a:ext cx="2857500" cy="666750"/>
+          </a:xfrm>
+          <a:prstGeom xmlns:a="http://schemas.openxmlformats.org/drawingml/2006/main" prst="rect">
+            <a:avLst/>
+          </a:prstGeom>
+          <a:noFill xmlns:a="http://schemas.openxmlformats.org/drawingml/2006/main"/>
+          <a:ln xmlns:a="http://schemas.openxmlformats.org/drawingml/2006/main" w="0">
+            <a:noFill/>
+            <a:prstDash val="solid"/>
+          </a:ln>
+        </p:spPr>
+        <p:txBody>
+          <a:bodyPr xmlns:a="http://schemas.openxmlformats.org/drawingml/2006/main"/>
+          <a:lstStyle xmlns:a="http://schemas.openxmlformats.org/drawingml/2006/main"/>
+          <a:p xmlns:a="http://schemas.openxmlformats.org/drawingml/2006/main">
+            <a:pPr>
+              <a:defRPr sz="4200" b="1">
                 <a:solidFill>
                   <a:srgbClr val="0A0A0A"/>
                 </a:solidFill>
               </a:defRPr>
             </a:pPr>
             <a:r>
-              <a:rPr sz="1650" b="1">
+              <a:rPr sz="4200" b="1">
                 <a:solidFill>
                   <a:srgbClr val="0A0A0A"/>
                 </a:solidFill>
               </a:rPr>
-              <a:t>Hidden state</a:t>
-            </a:r>
-          </a:p>
-        </p:txBody>
-      </p:sp>
-      <p:sp>
-        <p:nvSpPr>
-          <p:cNvPr id="6" name="">
-            <a:extLst xmlns:a="http://schemas.openxmlformats.org/drawingml/2006/main">
-              <a:ext uri="{FF2B5EF4-FFF2-40B4-BE49-F238E27FC236}">
-                <a16:creationId xmlns:a16="http://schemas.microsoft.com/office/drawing/2014/main" id="{470E2075-4E5D-4131-98CC-47A960B1B2E6}"/>
-              </a:ext>
-            </a:extLst>
-          </p:cNvPr>
-          <p:cNvSpPr>
-            <a:spLocks xmlns:a="http://schemas.openxmlformats.org/drawingml/2006/main" noGrp="1"/>
-          </p:cNvSpPr>
-          <p:nvPr/>
-        </p:nvSpPr>
-        <p:spPr>
-          <a:xfrm xmlns:a="http://schemas.openxmlformats.org/drawingml/2006/main">
-            <a:off x="3790950" y="2895600"/>
-            <a:ext cx="6858000" cy="514350"/>
-          </a:xfrm>
-          <a:prstGeom xmlns:a="http://schemas.openxmlformats.org/drawingml/2006/main" prst="rect">
-            <a:avLst/>
-          </a:prstGeom>
-          <a:noFill xmlns:a="http://schemas.openxmlformats.org/drawingml/2006/main"/>
-          <a:ln xmlns:a="http://schemas.openxmlformats.org/drawingml/2006/main" w="0">
-            <a:noFill/>
-            <a:prstDash val="solid"/>
-          </a:ln>
-        </p:spPr>
-        <p:txBody>
-          <a:bodyPr xmlns:a="http://schemas.openxmlformats.org/drawingml/2006/main"/>
-          <a:lstStyle xmlns:a="http://schemas.openxmlformats.org/drawingml/2006/main"/>
-          <a:p xmlns:a="http://schemas.openxmlformats.org/drawingml/2006/main">
-            <a:pPr>
-              <a:defRPr sz="1650">
-                <a:solidFill>
-                  <a:srgbClr val="4F5661"/>
-                </a:solidFill>
-              </a:defRPr>
-            </a:pPr>
-            <a:r>
-              <a:rPr sz="1650">
-                <a:solidFill>
-                  <a:srgbClr val="4F5661"/>
-                </a:solidFill>
-              </a:rPr>
-              <a:t>The prey draws a corner intent each episode; predators never observe it directly.</a:t>
-            </a:r>
-          </a:p>
-        </p:txBody>
-      </p:sp>
-      <p:sp>
-        <p:nvSpPr>
-          <p:cNvPr id="7" name="">
-            <a:extLst xmlns:a="http://schemas.openxmlformats.org/drawingml/2006/main">
-              <a:ext uri="{FF2B5EF4-FFF2-40B4-BE49-F238E27FC236}">
-                <a16:creationId xmlns:a16="http://schemas.microsoft.com/office/drawing/2014/main" id="{39F26D81-3D7B-4A5B-9D56-2A58571D9E23}"/>
-              </a:ext>
-            </a:extLst>
-          </p:cNvPr>
-          <p:cNvSpPr>
-            <a:spLocks xmlns:a="http://schemas.openxmlformats.org/drawingml/2006/main" noGrp="1"/>
-          </p:cNvSpPr>
-          <p:nvPr/>
-        </p:nvSpPr>
-        <p:spPr>
-          <a:xfrm xmlns:a="http://schemas.openxmlformats.org/drawingml/2006/main">
-            <a:off x="533400" y="3752850"/>
-            <a:ext cx="685800" cy="38100"/>
-          </a:xfrm>
-          <a:prstGeom xmlns:a="http://schemas.openxmlformats.org/drawingml/2006/main" prst="rect">
-            <a:avLst/>
-          </a:prstGeom>
-          <a:solidFill xmlns:a="http://schemas.openxmlformats.org/drawingml/2006/main">
-            <a:srgbClr val="0D6E7A"/>
-          </a:solidFill>
-          <a:ln xmlns:a="http://schemas.openxmlformats.org/drawingml/2006/main" w="0">
-            <a:solidFill>
-              <a:srgbClr val="0D6E7A"/>
-            </a:solidFill>
-            <a:prstDash val="solid"/>
-          </a:ln>
-        </p:spPr>
-      </p:sp>
-      <p:sp>
-        <p:nvSpPr>
-          <p:cNvPr id="8" name="">
-            <a:extLst xmlns:a="http://schemas.openxmlformats.org/drawingml/2006/main">
-              <a:ext uri="{FF2B5EF4-FFF2-40B4-BE49-F238E27FC236}">
-                <a16:creationId xmlns:a16="http://schemas.microsoft.com/office/drawing/2014/main" id="{621067E1-E3F6-4504-BF0A-B64F5E2D349A}"/>
-              </a:ext>
-            </a:extLst>
-          </p:cNvPr>
-          <p:cNvSpPr>
-            <a:spLocks xmlns:a="http://schemas.openxmlformats.org/drawingml/2006/main" noGrp="1"/>
-          </p:cNvSpPr>
-          <p:nvPr/>
-        </p:nvSpPr>
-        <p:spPr>
-          <a:xfrm xmlns:a="http://schemas.openxmlformats.org/drawingml/2006/main">
-            <a:off x="1466850" y="3619500"/>
-            <a:ext cx="2095500" cy="323850"/>
-          </a:xfrm>
-          <a:prstGeom xmlns:a="http://schemas.openxmlformats.org/drawingml/2006/main" prst="rect">
-            <a:avLst/>
-          </a:prstGeom>
-          <a:noFill xmlns:a="http://schemas.openxmlformats.org/drawingml/2006/main"/>
-          <a:ln xmlns:a="http://schemas.openxmlformats.org/drawingml/2006/main" w="0">
-            <a:noFill/>
-            <a:prstDash val="solid"/>
-          </a:ln>
-        </p:spPr>
-        <p:txBody>
-          <a:bodyPr xmlns:a="http://schemas.openxmlformats.org/drawingml/2006/main"/>
-          <a:lstStyle xmlns:a="http://schemas.openxmlformats.org/drawingml/2006/main"/>
-          <a:p xmlns:a="http://schemas.openxmlformats.org/drawingml/2006/main">
-            <a:pPr>
-              <a:defRPr sz="1650" b="1">
-                <a:solidFill>
-                  <a:srgbClr val="0A0A0A"/>
-                </a:solidFill>
-              </a:defRPr>
-            </a:pPr>
-            <a:r>
-              <a:rPr sz="1650" b="1">
-                <a:solidFill>
-                  <a:srgbClr val="0A0A0A"/>
-                </a:solidFill>
-              </a:rPr>
-              <a:t>Evidence</a:t>
+              <a:t>4.08</a:t>
             </a:r>
           </a:p>
         </p:txBody>
@@ -2548,47 +4667,47 @@
           <p:cNvPr id="9" name="">
             <a:extLst xmlns:a="http://schemas.openxmlformats.org/drawingml/2006/main">
               <a:ext uri="{FF2B5EF4-FFF2-40B4-BE49-F238E27FC236}">
-                <a16:creationId xmlns:a16="http://schemas.microsoft.com/office/drawing/2014/main" id="{B4E49668-D938-4261-9424-EF2E710E0EDE}"/>
-              </a:ext>
-            </a:extLst>
-          </p:cNvPr>
-          <p:cNvSpPr>
-            <a:spLocks xmlns:a="http://schemas.openxmlformats.org/drawingml/2006/main" noGrp="1"/>
-          </p:cNvSpPr>
-          <p:nvPr/>
-        </p:nvSpPr>
-        <p:spPr>
-          <a:xfrm xmlns:a="http://schemas.openxmlformats.org/drawingml/2006/main">
-            <a:off x="3790950" y="3619500"/>
-            <a:ext cx="6858000" cy="514350"/>
-          </a:xfrm>
-          <a:prstGeom xmlns:a="http://schemas.openxmlformats.org/drawingml/2006/main" prst="rect">
-            <a:avLst/>
-          </a:prstGeom>
-          <a:noFill xmlns:a="http://schemas.openxmlformats.org/drawingml/2006/main"/>
-          <a:ln xmlns:a="http://schemas.openxmlformats.org/drawingml/2006/main" w="0">
-            <a:noFill/>
-            <a:prstDash val="solid"/>
-          </a:ln>
-        </p:spPr>
-        <p:txBody>
-          <a:bodyPr xmlns:a="http://schemas.openxmlformats.org/drawingml/2006/main"/>
-          <a:lstStyle xmlns:a="http://schemas.openxmlformats.org/drawingml/2006/main"/>
-          <a:p xmlns:a="http://schemas.openxmlformats.org/drawingml/2006/main">
-            <a:pPr>
-              <a:defRPr sz="1650">
-                <a:solidFill>
-                  <a:srgbClr val="4F5661"/>
-                </a:solidFill>
-              </a:defRPr>
-            </a:pPr>
-            <a:r>
-              <a:rPr sz="1650">
-                <a:solidFill>
-                  <a:srgbClr val="4F5661"/>
-                </a:solidFill>
-              </a:rPr>
-              <a:t>The first k prey steps become a posterior belief over four intents.</a:t>
+                <a16:creationId xmlns:a16="http://schemas.microsoft.com/office/drawing/2014/main" id="{D7AB6BFE-DE90-4363-9463-8FA7F9410556}"/>
+              </a:ext>
+            </a:extLst>
+          </p:cNvPr>
+          <p:cNvSpPr>
+            <a:spLocks xmlns:a="http://schemas.openxmlformats.org/drawingml/2006/main" noGrp="1"/>
+          </p:cNvSpPr>
+          <p:nvPr/>
+        </p:nvSpPr>
+        <p:spPr>
+          <a:xfrm xmlns:a="http://schemas.openxmlformats.org/drawingml/2006/main">
+            <a:off x="8458200" y="4133850"/>
+            <a:ext cx="2857500" cy="666750"/>
+          </a:xfrm>
+          <a:prstGeom xmlns:a="http://schemas.openxmlformats.org/drawingml/2006/main" prst="rect">
+            <a:avLst/>
+          </a:prstGeom>
+          <a:noFill xmlns:a="http://schemas.openxmlformats.org/drawingml/2006/main"/>
+          <a:ln xmlns:a="http://schemas.openxmlformats.org/drawingml/2006/main" w="0">
+            <a:noFill/>
+            <a:prstDash val="solid"/>
+          </a:ln>
+        </p:spPr>
+        <p:txBody>
+          <a:bodyPr xmlns:a="http://schemas.openxmlformats.org/drawingml/2006/main"/>
+          <a:lstStyle xmlns:a="http://schemas.openxmlformats.org/drawingml/2006/main"/>
+          <a:p xmlns:a="http://schemas.openxmlformats.org/drawingml/2006/main">
+            <a:pPr>
+              <a:defRPr sz="1425">
+                <a:solidFill>
+                  <a:srgbClr val="4F5661"/>
+                </a:solidFill>
+              </a:defRPr>
+            </a:pPr>
+            <a:r>
+              <a:rPr sz="1425">
+                <a:solidFill>
+                  <a:srgbClr val="4F5661"/>
+                </a:solidFill>
+              </a:rPr>
+              <a:t>captures/episode with the label-free JEPA belief</a:t>
             </a:r>
           </a:p>
         </p:txBody>
@@ -2598,273 +4717,7 @@
           <p:cNvPr id="10" name="">
             <a:extLst xmlns:a="http://schemas.openxmlformats.org/drawingml/2006/main">
               <a:ext uri="{FF2B5EF4-FFF2-40B4-BE49-F238E27FC236}">
-                <a16:creationId xmlns:a16="http://schemas.microsoft.com/office/drawing/2014/main" id="{070332C6-B918-4A61-A086-6CCF46215271}"/>
-              </a:ext>
-            </a:extLst>
-          </p:cNvPr>
-          <p:cNvSpPr>
-            <a:spLocks xmlns:a="http://schemas.openxmlformats.org/drawingml/2006/main" noGrp="1"/>
-          </p:cNvSpPr>
-          <p:nvPr/>
-        </p:nvSpPr>
-        <p:spPr>
-          <a:xfrm xmlns:a="http://schemas.openxmlformats.org/drawingml/2006/main">
-            <a:off x="533400" y="4476750"/>
-            <a:ext cx="685800" cy="38100"/>
-          </a:xfrm>
-          <a:prstGeom xmlns:a="http://schemas.openxmlformats.org/drawingml/2006/main" prst="rect">
-            <a:avLst/>
-          </a:prstGeom>
-          <a:solidFill xmlns:a="http://schemas.openxmlformats.org/drawingml/2006/main">
-            <a:srgbClr val="0D6E7A"/>
-          </a:solidFill>
-          <a:ln xmlns:a="http://schemas.openxmlformats.org/drawingml/2006/main" w="0">
-            <a:solidFill>
-              <a:srgbClr val="0D6E7A"/>
-            </a:solidFill>
-            <a:prstDash val="solid"/>
-          </a:ln>
-        </p:spPr>
-      </p:sp>
-      <p:sp>
-        <p:nvSpPr>
-          <p:cNvPr id="11" name="">
-            <a:extLst xmlns:a="http://schemas.openxmlformats.org/drawingml/2006/main">
-              <a:ext uri="{FF2B5EF4-FFF2-40B4-BE49-F238E27FC236}">
-                <a16:creationId xmlns:a16="http://schemas.microsoft.com/office/drawing/2014/main" id="{66AFCC60-379E-47FF-A2B7-29EE9EF73979}"/>
-              </a:ext>
-            </a:extLst>
-          </p:cNvPr>
-          <p:cNvSpPr>
-            <a:spLocks xmlns:a="http://schemas.openxmlformats.org/drawingml/2006/main" noGrp="1"/>
-          </p:cNvSpPr>
-          <p:nvPr/>
-        </p:nvSpPr>
-        <p:spPr>
-          <a:xfrm xmlns:a="http://schemas.openxmlformats.org/drawingml/2006/main">
-            <a:off x="1466850" y="4343400"/>
-            <a:ext cx="2095500" cy="323850"/>
-          </a:xfrm>
-          <a:prstGeom xmlns:a="http://schemas.openxmlformats.org/drawingml/2006/main" prst="rect">
-            <a:avLst/>
-          </a:prstGeom>
-          <a:noFill xmlns:a="http://schemas.openxmlformats.org/drawingml/2006/main"/>
-          <a:ln xmlns:a="http://schemas.openxmlformats.org/drawingml/2006/main" w="0">
-            <a:noFill/>
-            <a:prstDash val="solid"/>
-          </a:ln>
-        </p:spPr>
-        <p:txBody>
-          <a:bodyPr xmlns:a="http://schemas.openxmlformats.org/drawingml/2006/main"/>
-          <a:lstStyle xmlns:a="http://schemas.openxmlformats.org/drawingml/2006/main"/>
-          <a:p xmlns:a="http://schemas.openxmlformats.org/drawingml/2006/main">
-            <a:pPr>
-              <a:defRPr sz="1650" b="1">
-                <a:solidFill>
-                  <a:srgbClr val="0A0A0A"/>
-                </a:solidFill>
-              </a:defRPr>
-            </a:pPr>
-            <a:r>
-              <a:rPr sz="1650" b="1">
-                <a:solidFill>
-                  <a:srgbClr val="0A0A0A"/>
-                </a:solidFill>
-              </a:rPr>
-              <a:t>Planner</a:t>
-            </a:r>
-          </a:p>
-        </p:txBody>
-      </p:sp>
-      <p:sp>
-        <p:nvSpPr>
-          <p:cNvPr id="12" name="">
-            <a:extLst xmlns:a="http://schemas.openxmlformats.org/drawingml/2006/main">
-              <a:ext uri="{FF2B5EF4-FFF2-40B4-BE49-F238E27FC236}">
-                <a16:creationId xmlns:a16="http://schemas.microsoft.com/office/drawing/2014/main" id="{99027E40-CA46-4A8C-9ECB-C81A39012ACB}"/>
-              </a:ext>
-            </a:extLst>
-          </p:cNvPr>
-          <p:cNvSpPr>
-            <a:spLocks xmlns:a="http://schemas.openxmlformats.org/drawingml/2006/main" noGrp="1"/>
-          </p:cNvSpPr>
-          <p:nvPr/>
-        </p:nvSpPr>
-        <p:spPr>
-          <a:xfrm xmlns:a="http://schemas.openxmlformats.org/drawingml/2006/main">
-            <a:off x="3790950" y="4343400"/>
-            <a:ext cx="6858000" cy="514350"/>
-          </a:xfrm>
-          <a:prstGeom xmlns:a="http://schemas.openxmlformats.org/drawingml/2006/main" prst="rect">
-            <a:avLst/>
-          </a:prstGeom>
-          <a:noFill xmlns:a="http://schemas.openxmlformats.org/drawingml/2006/main"/>
-          <a:ln xmlns:a="http://schemas.openxmlformats.org/drawingml/2006/main" w="0">
-            <a:noFill/>
-            <a:prstDash val="solid"/>
-          </a:ln>
-        </p:spPr>
-        <p:txBody>
-          <a:bodyPr xmlns:a="http://schemas.openxmlformats.org/drawingml/2006/main"/>
-          <a:lstStyle xmlns:a="http://schemas.openxmlformats.org/drawingml/2006/main"/>
-          <a:p xmlns:a="http://schemas.openxmlformats.org/drawingml/2006/main">
-            <a:pPr>
-              <a:defRPr sz="1650">
-                <a:solidFill>
-                  <a:srgbClr val="4F5661"/>
-                </a:solidFill>
-              </a:defRPr>
-            </a:pPr>
-            <a:r>
-              <a:rPr sz="1650">
-                <a:solidFill>
-                  <a:srgbClr val="4F5661"/>
-                </a:solidFill>
-              </a:rPr>
-              <a:t>Predators sample that belief inside a short Monte-Carlo lookahead.</a:t>
-            </a:r>
-          </a:p>
-        </p:txBody>
-      </p:sp>
-      <p:sp>
-        <p:nvSpPr>
-          <p:cNvPr id="13" name="">
-            <a:extLst xmlns:a="http://schemas.openxmlformats.org/drawingml/2006/main">
-              <a:ext uri="{FF2B5EF4-FFF2-40B4-BE49-F238E27FC236}">
-                <a16:creationId xmlns:a16="http://schemas.microsoft.com/office/drawing/2014/main" id="{B8E37F12-9396-484B-B98C-1174458E9028}"/>
-              </a:ext>
-            </a:extLst>
-          </p:cNvPr>
-          <p:cNvSpPr>
-            <a:spLocks xmlns:a="http://schemas.openxmlformats.org/drawingml/2006/main" noGrp="1"/>
-          </p:cNvSpPr>
-          <p:nvPr/>
-        </p:nvSpPr>
-        <p:spPr>
-          <a:xfrm xmlns:a="http://schemas.openxmlformats.org/drawingml/2006/main">
-            <a:off x="533400" y="5200650"/>
-            <a:ext cx="685800" cy="38100"/>
-          </a:xfrm>
-          <a:prstGeom xmlns:a="http://schemas.openxmlformats.org/drawingml/2006/main" prst="rect">
-            <a:avLst/>
-          </a:prstGeom>
-          <a:solidFill xmlns:a="http://schemas.openxmlformats.org/drawingml/2006/main">
-            <a:srgbClr val="C84C2A"/>
-          </a:solidFill>
-          <a:ln xmlns:a="http://schemas.openxmlformats.org/drawingml/2006/main" w="0">
-            <a:solidFill>
-              <a:srgbClr val="C84C2A"/>
-            </a:solidFill>
-            <a:prstDash val="solid"/>
-          </a:ln>
-        </p:spPr>
-      </p:sp>
-      <p:sp>
-        <p:nvSpPr>
-          <p:cNvPr id="14" name="">
-            <a:extLst xmlns:a="http://schemas.openxmlformats.org/drawingml/2006/main">
-              <a:ext uri="{FF2B5EF4-FFF2-40B4-BE49-F238E27FC236}">
-                <a16:creationId xmlns:a16="http://schemas.microsoft.com/office/drawing/2014/main" id="{8C13AB94-9C6C-4D99-9082-4A2C84B532B3}"/>
-              </a:ext>
-            </a:extLst>
-          </p:cNvPr>
-          <p:cNvSpPr>
-            <a:spLocks xmlns:a="http://schemas.openxmlformats.org/drawingml/2006/main" noGrp="1"/>
-          </p:cNvSpPr>
-          <p:nvPr/>
-        </p:nvSpPr>
-        <p:spPr>
-          <a:xfrm xmlns:a="http://schemas.openxmlformats.org/drawingml/2006/main">
-            <a:off x="1466850" y="5067300"/>
-            <a:ext cx="2095500" cy="323850"/>
-          </a:xfrm>
-          <a:prstGeom xmlns:a="http://schemas.openxmlformats.org/drawingml/2006/main" prst="rect">
-            <a:avLst/>
-          </a:prstGeom>
-          <a:noFill xmlns:a="http://schemas.openxmlformats.org/drawingml/2006/main"/>
-          <a:ln xmlns:a="http://schemas.openxmlformats.org/drawingml/2006/main" w="0">
-            <a:noFill/>
-            <a:prstDash val="solid"/>
-          </a:ln>
-        </p:spPr>
-        <p:txBody>
-          <a:bodyPr xmlns:a="http://schemas.openxmlformats.org/drawingml/2006/main"/>
-          <a:lstStyle xmlns:a="http://schemas.openxmlformats.org/drawingml/2006/main"/>
-          <a:p xmlns:a="http://schemas.openxmlformats.org/drawingml/2006/main">
-            <a:pPr>
-              <a:defRPr sz="1650" b="1">
-                <a:solidFill>
-                  <a:srgbClr val="0A0A0A"/>
-                </a:solidFill>
-              </a:defRPr>
-            </a:pPr>
-            <a:r>
-              <a:rPr sz="1650" b="1">
-                <a:solidFill>
-                  <a:srgbClr val="0A0A0A"/>
-                </a:solidFill>
-              </a:rPr>
-              <a:t>Claim boundary</a:t>
-            </a:r>
-          </a:p>
-        </p:txBody>
-      </p:sp>
-      <p:sp>
-        <p:nvSpPr>
-          <p:cNvPr id="15" name="">
-            <a:extLst xmlns:a="http://schemas.openxmlformats.org/drawingml/2006/main">
-              <a:ext uri="{FF2B5EF4-FFF2-40B4-BE49-F238E27FC236}">
-                <a16:creationId xmlns:a16="http://schemas.microsoft.com/office/drawing/2014/main" id="{19F8400B-8B14-4F40-886D-2428371746ED}"/>
-              </a:ext>
-            </a:extLst>
-          </p:cNvPr>
-          <p:cNvSpPr>
-            <a:spLocks xmlns:a="http://schemas.openxmlformats.org/drawingml/2006/main" noGrp="1"/>
-          </p:cNvSpPr>
-          <p:nvPr/>
-        </p:nvSpPr>
-        <p:spPr>
-          <a:xfrm xmlns:a="http://schemas.openxmlformats.org/drawingml/2006/main">
-            <a:off x="3790950" y="5067300"/>
-            <a:ext cx="6858000" cy="514350"/>
-          </a:xfrm>
-          <a:prstGeom xmlns:a="http://schemas.openxmlformats.org/drawingml/2006/main" prst="rect">
-            <a:avLst/>
-          </a:prstGeom>
-          <a:noFill xmlns:a="http://schemas.openxmlformats.org/drawingml/2006/main"/>
-          <a:ln xmlns:a="http://schemas.openxmlformats.org/drawingml/2006/main" w="0">
-            <a:noFill/>
-            <a:prstDash val="solid"/>
-          </a:ln>
-        </p:spPr>
-        <p:txBody>
-          <a:bodyPr xmlns:a="http://schemas.openxmlformats.org/drawingml/2006/main"/>
-          <a:lstStyle xmlns:a="http://schemas.openxmlformats.org/drawingml/2006/main"/>
-          <a:p xmlns:a="http://schemas.openxmlformats.org/drawingml/2006/main">
-            <a:pPr>
-              <a:defRPr sz="1650">
-                <a:solidFill>
-                  <a:srgbClr val="4F5661"/>
-                </a:solidFill>
-              </a:defRPr>
-            </a:pPr>
-            <a:r>
-              <a:rPr sz="1650">
-                <a:solidFill>
-                  <a:srgbClr val="4F5661"/>
-                </a:solidFill>
-              </a:rPr>
-              <a:t>The opponent is static within an episode; adaptive or switching prey is next.</a:t>
-            </a:r>
-          </a:p>
-        </p:txBody>
-      </p:sp>
-      <p:sp>
-        <p:nvSpPr>
-          <p:cNvPr id="16" name="">
-            <a:extLst xmlns:a="http://schemas.openxmlformats.org/drawingml/2006/main">
-              <a:ext uri="{FF2B5EF4-FFF2-40B4-BE49-F238E27FC236}">
-                <a16:creationId xmlns:a16="http://schemas.microsoft.com/office/drawing/2014/main" id="{15EE428F-A93A-450F-9FE8-22E2E3E8F42A}"/>
+                <a16:creationId xmlns:a16="http://schemas.microsoft.com/office/drawing/2014/main" id="{7AF76EDA-1664-4020-A826-D2DF8DC70D64}"/>
               </a:ext>
             </a:extLst>
           </p:cNvPr>
@@ -2912,7 +4765,7 @@
     </p:spTree>
     <p:extLst>
       <p:ext uri="{BB962C8B-B14F-4D97-AF65-F5344CB8AC3E}">
-        <p14:creationId xmlns:p14="http://schemas.microsoft.com/office/powerpoint/2010/main" val="1417839517"/>
+        <p14:creationId xmlns:p14="http://schemas.microsoft.com/office/powerpoint/2010/main" val="1940632912"/>
       </p:ext>
     </p:extLst>
   </p:cSld>
@@ -2943,7 +4796,7 @@
           <p:cNvPr id="1" name="">
             <a:extLst xmlns:a="http://schemas.openxmlformats.org/drawingml/2006/main">
               <a:ext uri="{FF2B5EF4-FFF2-40B4-BE49-F238E27FC236}">
-                <a16:creationId xmlns:a16="http://schemas.microsoft.com/office/drawing/2014/main" id="{C5DB2E17-A439-4F3E-9752-6916CC080388}"/>
+                <a16:creationId xmlns:a16="http://schemas.microsoft.com/office/drawing/2014/main" id="{4C94118F-DD73-4AA2-A04F-92BADB04E0E8}"/>
               </a:ext>
             </a:extLst>
           </p:cNvPr>
@@ -2983,7 +4836,7 @@
                   <a:srgbClr val="4F5661"/>
                 </a:solidFill>
               </a:rPr>
-              <a:t>PART 1</a:t>
+              <a:t>SETUP</a:t>
             </a:r>
           </a:p>
         </p:txBody>
@@ -2993,7 +4846,7 @@
           <p:cNvPr id="2" name="">
             <a:extLst xmlns:a="http://schemas.openxmlformats.org/drawingml/2006/main">
               <a:ext uri="{FF2B5EF4-FFF2-40B4-BE49-F238E27FC236}">
-                <a16:creationId xmlns:a16="http://schemas.microsoft.com/office/drawing/2014/main" id="{9DA8AC3A-A8A0-40B2-8BAC-B601C0A6B2A0}"/>
+                <a16:creationId xmlns:a16="http://schemas.microsoft.com/office/drawing/2014/main" id="{1BC11552-7A9D-43D3-9FD9-F31C550B2EED}"/>
               </a:ext>
             </a:extLst>
           </p:cNvPr>
@@ -3005,7 +4858,7 @@
         <p:spPr>
           <a:xfrm xmlns:a="http://schemas.openxmlformats.org/drawingml/2006/main">
             <a:off x="533400" y="590550"/>
-            <a:ext cx="10287000" cy="914400"/>
+            <a:ext cx="10287000" cy="933450"/>
           </a:xfrm>
           <a:prstGeom xmlns:a="http://schemas.openxmlformats.org/drawingml/2006/main" prst="rect">
             <a:avLst/>
@@ -3033,7 +4886,7 @@
                   <a:srgbClr val="0A0A0A"/>
                 </a:solidFill>
               </a:rPr>
-              <a:t>The belief becomes useful evidence quickly</a:t>
+              <a:t>The task hides strategy inside the prey</a:t>
             </a:r>
           </a:p>
         </p:txBody>
@@ -3043,124 +4896,19 @@
           <p:cNvPr id="3" name="">
             <a:extLst xmlns:a="http://schemas.openxmlformats.org/drawingml/2006/main">
               <a:ext uri="{FF2B5EF4-FFF2-40B4-BE49-F238E27FC236}">
-                <a16:creationId xmlns:a16="http://schemas.microsoft.com/office/drawing/2014/main" id="{AD354F98-B26B-4943-9445-F8E8EF7BE8FD}"/>
-              </a:ext>
-            </a:extLst>
-          </p:cNvPr>
-          <p:cNvSpPr>
-            <a:spLocks xmlns:a="http://schemas.openxmlformats.org/drawingml/2006/main" noGrp="1"/>
-          </p:cNvSpPr>
-          <p:nvPr/>
-        </p:nvSpPr>
-        <p:spPr>
-          <a:xfrm xmlns:a="http://schemas.openxmlformats.org/drawingml/2006/main">
-            <a:off x="11277600" y="6267450"/>
-            <a:ext cx="457200" cy="228600"/>
-          </a:xfrm>
-          <a:prstGeom xmlns:a="http://schemas.openxmlformats.org/drawingml/2006/main" prst="rect">
-            <a:avLst/>
-          </a:prstGeom>
-          <a:noFill xmlns:a="http://schemas.openxmlformats.org/drawingml/2006/main"/>
-          <a:ln xmlns:a="http://schemas.openxmlformats.org/drawingml/2006/main" w="0">
-            <a:noFill/>
-            <a:prstDash val="solid"/>
-          </a:ln>
-        </p:spPr>
-        <p:txBody>
-          <a:bodyPr xmlns:a="http://schemas.openxmlformats.org/drawingml/2006/main"/>
-          <a:lstStyle xmlns:a="http://schemas.openxmlformats.org/drawingml/2006/main"/>
-          <a:p xmlns:a="http://schemas.openxmlformats.org/drawingml/2006/main">
-            <a:pPr algn="r">
-              <a:defRPr sz="1050">
-                <a:solidFill>
-                  <a:srgbClr val="4F5661"/>
-                </a:solidFill>
-              </a:defRPr>
-            </a:pPr>
-            <a:r>
-              <a:rPr sz="1050">
-                <a:solidFill>
-                  <a:srgbClr val="4F5661"/>
-                </a:solidFill>
-              </a:rPr>
-              <a:t>03</a:t>
-            </a:r>
-          </a:p>
-        </p:txBody>
-      </p:sp>
-      <p:sp>
-        <p:nvSpPr>
-          <p:cNvPr id="4" name="">
-            <a:extLst xmlns:a="http://schemas.openxmlformats.org/drawingml/2006/main">
-              <a:ext uri="{FF2B5EF4-FFF2-40B4-BE49-F238E27FC236}">
-                <a16:creationId xmlns:a16="http://schemas.microsoft.com/office/drawing/2014/main" id="{3CC857AC-3F21-43D0-8AB2-F0D9782B129D}"/>
-              </a:ext>
-            </a:extLst>
-          </p:cNvPr>
-          <p:cNvSpPr>
-            <a:spLocks xmlns:a="http://schemas.openxmlformats.org/drawingml/2006/main" noGrp="1"/>
-          </p:cNvSpPr>
-          <p:nvPr/>
-        </p:nvSpPr>
-        <p:spPr>
-          <a:xfrm xmlns:a="http://schemas.openxmlformats.org/drawingml/2006/main">
-            <a:off x="533400" y="1581150"/>
-            <a:ext cx="6762750" cy="4114800"/>
-          </a:xfrm>
-          <a:prstGeom xmlns:a="http://schemas.openxmlformats.org/drawingml/2006/main" prst="rect">
-            <a:avLst/>
-          </a:prstGeom>
-          <a:solidFill xmlns:a="http://schemas.openxmlformats.org/drawingml/2006/main">
-            <a:srgbClr val="F4F5F7"/>
-          </a:solidFill>
-          <a:ln xmlns:a="http://schemas.openxmlformats.org/drawingml/2006/main" w="0">
-            <a:solidFill>
-              <a:srgbClr val="F4F5F7"/>
-            </a:solidFill>
-            <a:prstDash val="solid"/>
-          </a:ln>
-        </p:spPr>
-      </p:sp>
-      <p:pic>
-        <p:nvPicPr>
-          <p:cNvPr id="13" name=""/>
-          <p:cNvPicPr>
-            <a:picLocks xmlns:a="http://schemas.openxmlformats.org/drawingml/2006/main" noChangeAspect="1"/>
-          </p:cNvPicPr>
-          <p:nvPr/>
-        </p:nvPicPr>
-        <p:blipFill>
-          <a:blip xmlns:r="http://schemas.openxmlformats.org/officeDocument/2006/relationships" xmlns:a="http://schemas.openxmlformats.org/drawingml/2006/main" r:embed="Rb10461d5f9814d74"/>
-          <a:stretch xmlns:a="http://schemas.openxmlformats.org/drawingml/2006/main"/>
-        </p:blipFill>
-        <p:spPr>
-          <a:xfrm xmlns:a="http://schemas.openxmlformats.org/drawingml/2006/main">
-            <a:off x="685800" y="2680274"/>
-            <a:ext cx="6457950" cy="1916553"/>
-          </a:xfrm>
-          <a:prstGeom xmlns:a="http://schemas.openxmlformats.org/drawingml/2006/main" prst="rect">
-            <a:avLst/>
-          </a:prstGeom>
-        </p:spPr>
-      </p:pic>
-      <p:sp>
-        <p:nvSpPr>
-          <p:cNvPr id="6" name="">
-            <a:extLst xmlns:a="http://schemas.openxmlformats.org/drawingml/2006/main">
-              <a:ext uri="{FF2B5EF4-FFF2-40B4-BE49-F238E27FC236}">
-                <a16:creationId xmlns:a16="http://schemas.microsoft.com/office/drawing/2014/main" id="{437A2904-23AD-480A-9B69-2C9AE7AD44CC}"/>
-              </a:ext>
-            </a:extLst>
-          </p:cNvPr>
-          <p:cNvSpPr>
-            <a:spLocks xmlns:a="http://schemas.openxmlformats.org/drawingml/2006/main" noGrp="1"/>
-          </p:cNvSpPr>
-          <p:nvPr/>
-        </p:nvSpPr>
-        <p:spPr>
-          <a:xfrm xmlns:a="http://schemas.openxmlformats.org/drawingml/2006/main">
-            <a:off x="7696200" y="1752600"/>
-            <a:ext cx="57150" cy="2152650"/>
+                <a16:creationId xmlns:a16="http://schemas.microsoft.com/office/drawing/2014/main" id="{E8F9A293-01BE-4B64-BAB8-524AC4081725}"/>
+              </a:ext>
+            </a:extLst>
+          </p:cNvPr>
+          <p:cNvSpPr>
+            <a:spLocks xmlns:a="http://schemas.openxmlformats.org/drawingml/2006/main" noGrp="1"/>
+          </p:cNvSpPr>
+          <p:nvPr/>
+        </p:nvSpPr>
+        <p:spPr>
+          <a:xfrm xmlns:a="http://schemas.openxmlformats.org/drawingml/2006/main">
+            <a:off x="685800" y="1943100"/>
+            <a:ext cx="819150" cy="38100"/>
           </a:xfrm>
           <a:prstGeom xmlns:a="http://schemas.openxmlformats.org/drawingml/2006/main" prst="rect">
             <a:avLst/>
@@ -3178,84 +4926,183 @@
       </p:sp>
       <p:sp>
         <p:nvSpPr>
+          <p:cNvPr id="4" name="">
+            <a:extLst xmlns:a="http://schemas.openxmlformats.org/drawingml/2006/main">
+              <a:ext uri="{FF2B5EF4-FFF2-40B4-BE49-F238E27FC236}">
+                <a16:creationId xmlns:a16="http://schemas.microsoft.com/office/drawing/2014/main" id="{C9368710-7411-4F23-AE20-2ABF560D3568}"/>
+              </a:ext>
+            </a:extLst>
+          </p:cNvPr>
+          <p:cNvSpPr>
+            <a:spLocks xmlns:a="http://schemas.openxmlformats.org/drawingml/2006/main" noGrp="1"/>
+          </p:cNvSpPr>
+          <p:nvPr/>
+        </p:nvSpPr>
+        <p:spPr>
+          <a:xfrm xmlns:a="http://schemas.openxmlformats.org/drawingml/2006/main">
+            <a:off x="1809750" y="1790700"/>
+            <a:ext cx="2286000" cy="381000"/>
+          </a:xfrm>
+          <a:prstGeom xmlns:a="http://schemas.openxmlformats.org/drawingml/2006/main" prst="rect">
+            <a:avLst/>
+          </a:prstGeom>
+          <a:noFill xmlns:a="http://schemas.openxmlformats.org/drawingml/2006/main"/>
+          <a:ln xmlns:a="http://schemas.openxmlformats.org/drawingml/2006/main" w="0">
+            <a:noFill/>
+            <a:prstDash val="solid"/>
+          </a:ln>
+        </p:spPr>
+        <p:txBody>
+          <a:bodyPr xmlns:a="http://schemas.openxmlformats.org/drawingml/2006/main"/>
+          <a:lstStyle xmlns:a="http://schemas.openxmlformats.org/drawingml/2006/main"/>
+          <a:p xmlns:a="http://schemas.openxmlformats.org/drawingml/2006/main">
+            <a:pPr>
+              <a:defRPr sz="1800" b="1">
+                <a:solidFill>
+                  <a:srgbClr val="0A0A0A"/>
+                </a:solidFill>
+              </a:defRPr>
+            </a:pPr>
+            <a:r>
+              <a:rPr sz="1800" b="1">
+                <a:solidFill>
+                  <a:srgbClr val="0A0A0A"/>
+                </a:solidFill>
+              </a:rPr>
+              <a:t>Episode draw</a:t>
+            </a:r>
+          </a:p>
+        </p:txBody>
+      </p:sp>
+      <p:sp>
+        <p:nvSpPr>
+          <p:cNvPr id="5" name="">
+            <a:extLst xmlns:a="http://schemas.openxmlformats.org/drawingml/2006/main">
+              <a:ext uri="{FF2B5EF4-FFF2-40B4-BE49-F238E27FC236}">
+                <a16:creationId xmlns:a16="http://schemas.microsoft.com/office/drawing/2014/main" id="{D39AD77F-A09A-46C3-B55D-4096AD088E2D}"/>
+              </a:ext>
+            </a:extLst>
+          </p:cNvPr>
+          <p:cNvSpPr>
+            <a:spLocks xmlns:a="http://schemas.openxmlformats.org/drawingml/2006/main" noGrp="1"/>
+          </p:cNvSpPr>
+          <p:nvPr/>
+        </p:nvSpPr>
+        <p:spPr>
+          <a:xfrm xmlns:a="http://schemas.openxmlformats.org/drawingml/2006/main">
+            <a:off x="4381500" y="1790700"/>
+            <a:ext cx="6286500" cy="438150"/>
+          </a:xfrm>
+          <a:prstGeom xmlns:a="http://schemas.openxmlformats.org/drawingml/2006/main" prst="rect">
+            <a:avLst/>
+          </a:prstGeom>
+          <a:noFill xmlns:a="http://schemas.openxmlformats.org/drawingml/2006/main"/>
+          <a:ln xmlns:a="http://schemas.openxmlformats.org/drawingml/2006/main" w="0">
+            <a:noFill/>
+            <a:prstDash val="solid"/>
+          </a:ln>
+        </p:spPr>
+        <p:txBody>
+          <a:bodyPr xmlns:a="http://schemas.openxmlformats.org/drawingml/2006/main"/>
+          <a:lstStyle xmlns:a="http://schemas.openxmlformats.org/drawingml/2006/main"/>
+          <a:p xmlns:a="http://schemas.openxmlformats.org/drawingml/2006/main">
+            <a:pPr>
+              <a:defRPr sz="1800">
+                <a:solidFill>
+                  <a:srgbClr val="4F5661"/>
+                </a:solidFill>
+              </a:defRPr>
+            </a:pPr>
+            <a:r>
+              <a:rPr sz="1800">
+                <a:solidFill>
+                  <a:srgbClr val="4F5661"/>
+                </a:solidFill>
+              </a:rPr>
+              <a:t>The prey receives one hidden corner intent at reset.</a:t>
+            </a:r>
+          </a:p>
+        </p:txBody>
+      </p:sp>
+      <p:sp>
+        <p:nvSpPr>
+          <p:cNvPr id="6" name="">
+            <a:extLst xmlns:a="http://schemas.openxmlformats.org/drawingml/2006/main">
+              <a:ext uri="{FF2B5EF4-FFF2-40B4-BE49-F238E27FC236}">
+                <a16:creationId xmlns:a16="http://schemas.microsoft.com/office/drawing/2014/main" id="{1E9112C6-A179-4CF5-9D72-B96C7B189AEF}"/>
+              </a:ext>
+            </a:extLst>
+          </p:cNvPr>
+          <p:cNvSpPr>
+            <a:spLocks xmlns:a="http://schemas.openxmlformats.org/drawingml/2006/main" noGrp="1"/>
+          </p:cNvSpPr>
+          <p:nvPr/>
+        </p:nvSpPr>
+        <p:spPr>
+          <a:xfrm xmlns:a="http://schemas.openxmlformats.org/drawingml/2006/main">
+            <a:off x="685800" y="2781300"/>
+            <a:ext cx="819150" cy="38100"/>
+          </a:xfrm>
+          <a:prstGeom xmlns:a="http://schemas.openxmlformats.org/drawingml/2006/main" prst="rect">
+            <a:avLst/>
+          </a:prstGeom>
+          <a:solidFill xmlns:a="http://schemas.openxmlformats.org/drawingml/2006/main">
+            <a:srgbClr val="0D6E7A"/>
+          </a:solidFill>
+          <a:ln xmlns:a="http://schemas.openxmlformats.org/drawingml/2006/main" w="0">
+            <a:solidFill>
+              <a:srgbClr val="0D6E7A"/>
+            </a:solidFill>
+            <a:prstDash val="solid"/>
+          </a:ln>
+        </p:spPr>
+      </p:sp>
+      <p:sp>
+        <p:nvSpPr>
           <p:cNvPr id="7" name="">
             <a:extLst xmlns:a="http://schemas.openxmlformats.org/drawingml/2006/main">
               <a:ext uri="{FF2B5EF4-FFF2-40B4-BE49-F238E27FC236}">
-                <a16:creationId xmlns:a16="http://schemas.microsoft.com/office/drawing/2014/main" id="{3B311F83-2778-478C-B6C6-99946E784B07}"/>
-              </a:ext>
-            </a:extLst>
-          </p:cNvPr>
-          <p:cNvSpPr>
-            <a:spLocks xmlns:a="http://schemas.openxmlformats.org/drawingml/2006/main" noGrp="1"/>
-          </p:cNvSpPr>
-          <p:nvPr/>
-        </p:nvSpPr>
-        <p:spPr>
-          <a:xfrm xmlns:a="http://schemas.openxmlformats.org/drawingml/2006/main">
-            <a:off x="7905750" y="1733550"/>
-            <a:ext cx="3219450" cy="2152650"/>
-          </a:xfrm>
-          <a:prstGeom xmlns:a="http://schemas.openxmlformats.org/drawingml/2006/main" prst="rect">
-            <a:avLst/>
-          </a:prstGeom>
-          <a:noFill xmlns:a="http://schemas.openxmlformats.org/drawingml/2006/main"/>
-          <a:ln xmlns:a="http://schemas.openxmlformats.org/drawingml/2006/main" w="0">
-            <a:noFill/>
-            <a:prstDash val="solid"/>
-          </a:ln>
-        </p:spPr>
-        <p:txBody>
-          <a:bodyPr xmlns:a="http://schemas.openxmlformats.org/drawingml/2006/main"/>
-          <a:lstStyle xmlns:a="http://schemas.openxmlformats.org/drawingml/2006/main"/>
-          <a:p xmlns:a="http://schemas.openxmlformats.org/drawingml/2006/main">
-            <a:pPr>
-              <a:defRPr sz="1650">
-                <a:solidFill>
-                  <a:srgbClr val="4F5661"/>
-                </a:solidFill>
-              </a:defRPr>
-            </a:pPr>
-            <a:r>
-              <a:rPr sz="1650">
-                <a:solidFill>
-                  <a:srgbClr val="4F5661"/>
-                </a:solidFill>
-              </a:rPr>
-              <a:t>- Accuracy rises from 0.37 at 3 steps to 0.97 at 25 steps.</a:t>
-            </a:r>
-          </a:p>
-          <a:p xmlns:a="http://schemas.openxmlformats.org/drawingml/2006/main">
-            <a:pPr>
-              <a:defRPr sz="1650">
-                <a:solidFill>
-                  <a:srgbClr val="4F5661"/>
-                </a:solidFill>
-              </a:defRPr>
-            </a:pPr>
-            <a:r>
-              <a:rPr sz="1650">
-                <a:solidFill>
-                  <a:srgbClr val="4F5661"/>
-                </a:solidFill>
-              </a:rPr>
-              <a:t>- Entropy falls from 1.35 to 0.03 nats.</a:t>
-            </a:r>
-          </a:p>
-          <a:p xmlns:a="http://schemas.openxmlformats.org/drawingml/2006/main">
-            <a:pPr>
-              <a:defRPr sz="1650">
-                <a:solidFill>
-                  <a:srgbClr val="4F5661"/>
-                </a:solidFill>
-              </a:defRPr>
-            </a:pPr>
-            <a:r>
-              <a:rPr sz="1650">
-                <a:solidFill>
-                  <a:srgbClr val="4F5661"/>
-                </a:solidFill>
-              </a:rPr>
-              <a:t>- A wrong hard guess drops captures from 2.68 to 1.42.</a:t>
+                <a16:creationId xmlns:a16="http://schemas.microsoft.com/office/drawing/2014/main" id="{E58E30AE-ABDB-41F7-BC4B-8F43643B344F}"/>
+              </a:ext>
+            </a:extLst>
+          </p:cNvPr>
+          <p:cNvSpPr>
+            <a:spLocks xmlns:a="http://schemas.openxmlformats.org/drawingml/2006/main" noGrp="1"/>
+          </p:cNvSpPr>
+          <p:nvPr/>
+        </p:nvSpPr>
+        <p:spPr>
+          <a:xfrm xmlns:a="http://schemas.openxmlformats.org/drawingml/2006/main">
+            <a:off x="1809750" y="2628900"/>
+            <a:ext cx="2286000" cy="381000"/>
+          </a:xfrm>
+          <a:prstGeom xmlns:a="http://schemas.openxmlformats.org/drawingml/2006/main" prst="rect">
+            <a:avLst/>
+          </a:prstGeom>
+          <a:noFill xmlns:a="http://schemas.openxmlformats.org/drawingml/2006/main"/>
+          <a:ln xmlns:a="http://schemas.openxmlformats.org/drawingml/2006/main" w="0">
+            <a:noFill/>
+            <a:prstDash val="solid"/>
+          </a:ln>
+        </p:spPr>
+        <p:txBody>
+          <a:bodyPr xmlns:a="http://schemas.openxmlformats.org/drawingml/2006/main"/>
+          <a:lstStyle xmlns:a="http://schemas.openxmlformats.org/drawingml/2006/main"/>
+          <a:p xmlns:a="http://schemas.openxmlformats.org/drawingml/2006/main">
+            <a:pPr>
+              <a:defRPr sz="1800" b="1">
+                <a:solidFill>
+                  <a:srgbClr val="0A0A0A"/>
+                </a:solidFill>
+              </a:defRPr>
+            </a:pPr>
+            <a:r>
+              <a:rPr sz="1800" b="1">
+                <a:solidFill>
+                  <a:srgbClr val="0A0A0A"/>
+                </a:solidFill>
+              </a:rPr>
+              <a:t>Observation</a:t>
             </a:r>
           </a:p>
         </p:txBody>
@@ -3265,47 +5112,413 @@
           <p:cNvPr id="8" name="">
             <a:extLst xmlns:a="http://schemas.openxmlformats.org/drawingml/2006/main">
               <a:ext uri="{FF2B5EF4-FFF2-40B4-BE49-F238E27FC236}">
-                <a16:creationId xmlns:a16="http://schemas.microsoft.com/office/drawing/2014/main" id="{CB29A1B3-8E98-4D08-A339-7D1962949C3C}"/>
-              </a:ext>
-            </a:extLst>
-          </p:cNvPr>
-          <p:cNvSpPr>
-            <a:spLocks xmlns:a="http://schemas.openxmlformats.org/drawingml/2006/main" noGrp="1"/>
-          </p:cNvSpPr>
-          <p:nvPr/>
-        </p:nvSpPr>
-        <p:spPr>
-          <a:xfrm xmlns:a="http://schemas.openxmlformats.org/drawingml/2006/main">
-            <a:off x="7696200" y="4457700"/>
-            <a:ext cx="3429000" cy="895350"/>
-          </a:xfrm>
-          <a:prstGeom xmlns:a="http://schemas.openxmlformats.org/drawingml/2006/main" prst="rect">
-            <a:avLst/>
-          </a:prstGeom>
-          <a:noFill xmlns:a="http://schemas.openxmlformats.org/drawingml/2006/main"/>
-          <a:ln xmlns:a="http://schemas.openxmlformats.org/drawingml/2006/main" w="0">
-            <a:noFill/>
-            <a:prstDash val="solid"/>
-          </a:ln>
-        </p:spPr>
-        <p:txBody>
-          <a:bodyPr xmlns:a="http://schemas.openxmlformats.org/drawingml/2006/main"/>
-          <a:lstStyle xmlns:a="http://schemas.openxmlformats.org/drawingml/2006/main"/>
-          <a:p xmlns:a="http://schemas.openxmlformats.org/drawingml/2006/main">
-            <a:pPr>
-              <a:defRPr sz="1950" b="1">
+                <a16:creationId xmlns:a16="http://schemas.microsoft.com/office/drawing/2014/main" id="{3538C459-5A8D-4DA4-9C78-99C7FC684F57}"/>
+              </a:ext>
+            </a:extLst>
+          </p:cNvPr>
+          <p:cNvSpPr>
+            <a:spLocks xmlns:a="http://schemas.openxmlformats.org/drawingml/2006/main" noGrp="1"/>
+          </p:cNvSpPr>
+          <p:nvPr/>
+        </p:nvSpPr>
+        <p:spPr>
+          <a:xfrm xmlns:a="http://schemas.openxmlformats.org/drawingml/2006/main">
+            <a:off x="4381500" y="2628900"/>
+            <a:ext cx="6286500" cy="438150"/>
+          </a:xfrm>
+          <a:prstGeom xmlns:a="http://schemas.openxmlformats.org/drawingml/2006/main" prst="rect">
+            <a:avLst/>
+          </a:prstGeom>
+          <a:noFill xmlns:a="http://schemas.openxmlformats.org/drawingml/2006/main"/>
+          <a:ln xmlns:a="http://schemas.openxmlformats.org/drawingml/2006/main" w="0">
+            <a:noFill/>
+            <a:prstDash val="solid"/>
+          </a:ln>
+        </p:spPr>
+        <p:txBody>
+          <a:bodyPr xmlns:a="http://schemas.openxmlformats.org/drawingml/2006/main"/>
+          <a:lstStyle xmlns:a="http://schemas.openxmlformats.org/drawingml/2006/main"/>
+          <a:p xmlns:a="http://schemas.openxmlformats.org/drawingml/2006/main">
+            <a:pPr>
+              <a:defRPr sz="1800">
+                <a:solidFill>
+                  <a:srgbClr val="4F5661"/>
+                </a:solidFill>
+              </a:defRPr>
+            </a:pPr>
+            <a:r>
+              <a:rPr sz="1800">
+                <a:solidFill>
+                  <a:srgbClr val="4F5661"/>
+                </a:solidFill>
+              </a:rPr>
+              <a:t>Predators see motion, positions, obstacles, and rewards.</a:t>
+            </a:r>
+          </a:p>
+        </p:txBody>
+      </p:sp>
+      <p:sp>
+        <p:nvSpPr>
+          <p:cNvPr id="9" name="">
+            <a:extLst xmlns:a="http://schemas.openxmlformats.org/drawingml/2006/main">
+              <a:ext uri="{FF2B5EF4-FFF2-40B4-BE49-F238E27FC236}">
+                <a16:creationId xmlns:a16="http://schemas.microsoft.com/office/drawing/2014/main" id="{A359693B-966D-422A-80FA-6B6A85B7A477}"/>
+              </a:ext>
+            </a:extLst>
+          </p:cNvPr>
+          <p:cNvSpPr>
+            <a:spLocks xmlns:a="http://schemas.openxmlformats.org/drawingml/2006/main" noGrp="1"/>
+          </p:cNvSpPr>
+          <p:nvPr/>
+        </p:nvSpPr>
+        <p:spPr>
+          <a:xfrm xmlns:a="http://schemas.openxmlformats.org/drawingml/2006/main">
+            <a:off x="685800" y="3619500"/>
+            <a:ext cx="819150" cy="38100"/>
+          </a:xfrm>
+          <a:prstGeom xmlns:a="http://schemas.openxmlformats.org/drawingml/2006/main" prst="rect">
+            <a:avLst/>
+          </a:prstGeom>
+          <a:solidFill xmlns:a="http://schemas.openxmlformats.org/drawingml/2006/main">
+            <a:srgbClr val="0D6E7A"/>
+          </a:solidFill>
+          <a:ln xmlns:a="http://schemas.openxmlformats.org/drawingml/2006/main" w="0">
+            <a:solidFill>
+              <a:srgbClr val="0D6E7A"/>
+            </a:solidFill>
+            <a:prstDash val="solid"/>
+          </a:ln>
+        </p:spPr>
+      </p:sp>
+      <p:sp>
+        <p:nvSpPr>
+          <p:cNvPr id="10" name="">
+            <a:extLst xmlns:a="http://schemas.openxmlformats.org/drawingml/2006/main">
+              <a:ext uri="{FF2B5EF4-FFF2-40B4-BE49-F238E27FC236}">
+                <a16:creationId xmlns:a16="http://schemas.microsoft.com/office/drawing/2014/main" id="{BB6CBF86-867E-49CA-ABC2-F31F9AB2B016}"/>
+              </a:ext>
+            </a:extLst>
+          </p:cNvPr>
+          <p:cNvSpPr>
+            <a:spLocks xmlns:a="http://schemas.openxmlformats.org/drawingml/2006/main" noGrp="1"/>
+          </p:cNvSpPr>
+          <p:nvPr/>
+        </p:nvSpPr>
+        <p:spPr>
+          <a:xfrm xmlns:a="http://schemas.openxmlformats.org/drawingml/2006/main">
+            <a:off x="1809750" y="3467100"/>
+            <a:ext cx="2286000" cy="381000"/>
+          </a:xfrm>
+          <a:prstGeom xmlns:a="http://schemas.openxmlformats.org/drawingml/2006/main" prst="rect">
+            <a:avLst/>
+          </a:prstGeom>
+          <a:noFill xmlns:a="http://schemas.openxmlformats.org/drawingml/2006/main"/>
+          <a:ln xmlns:a="http://schemas.openxmlformats.org/drawingml/2006/main" w="0">
+            <a:noFill/>
+            <a:prstDash val="solid"/>
+          </a:ln>
+        </p:spPr>
+        <p:txBody>
+          <a:bodyPr xmlns:a="http://schemas.openxmlformats.org/drawingml/2006/main"/>
+          <a:lstStyle xmlns:a="http://schemas.openxmlformats.org/drawingml/2006/main"/>
+          <a:p xmlns:a="http://schemas.openxmlformats.org/drawingml/2006/main">
+            <a:pPr>
+              <a:defRPr sz="1800" b="1">
                 <a:solidFill>
                   <a:srgbClr val="0A0A0A"/>
                 </a:solidFill>
               </a:defRPr>
             </a:pPr>
             <a:r>
-              <a:rPr sz="1950" b="1">
+              <a:rPr sz="1800" b="1">
                 <a:solidFill>
                   <a:srgbClr val="0A0A0A"/>
                 </a:solidFill>
               </a:rPr>
-              <a:t>Uncertainty is not decoration. It is the difference between useful evidence and a brittle guess.</a:t>
+              <a:t>Belief</a:t>
+            </a:r>
+          </a:p>
+        </p:txBody>
+      </p:sp>
+      <p:sp>
+        <p:nvSpPr>
+          <p:cNvPr id="11" name="">
+            <a:extLst xmlns:a="http://schemas.openxmlformats.org/drawingml/2006/main">
+              <a:ext uri="{FF2B5EF4-FFF2-40B4-BE49-F238E27FC236}">
+                <a16:creationId xmlns:a16="http://schemas.microsoft.com/office/drawing/2014/main" id="{16328150-8071-40C8-8C33-D5F233DAAD50}"/>
+              </a:ext>
+            </a:extLst>
+          </p:cNvPr>
+          <p:cNvSpPr>
+            <a:spLocks xmlns:a="http://schemas.openxmlformats.org/drawingml/2006/main" noGrp="1"/>
+          </p:cNvSpPr>
+          <p:nvPr/>
+        </p:nvSpPr>
+        <p:spPr>
+          <a:xfrm xmlns:a="http://schemas.openxmlformats.org/drawingml/2006/main">
+            <a:off x="4381500" y="3467100"/>
+            <a:ext cx="6286500" cy="438150"/>
+          </a:xfrm>
+          <a:prstGeom xmlns:a="http://schemas.openxmlformats.org/drawingml/2006/main" prst="rect">
+            <a:avLst/>
+          </a:prstGeom>
+          <a:noFill xmlns:a="http://schemas.openxmlformats.org/drawingml/2006/main"/>
+          <a:ln xmlns:a="http://schemas.openxmlformats.org/drawingml/2006/main" w="0">
+            <a:noFill/>
+            <a:prstDash val="solid"/>
+          </a:ln>
+        </p:spPr>
+        <p:txBody>
+          <a:bodyPr xmlns:a="http://schemas.openxmlformats.org/drawingml/2006/main"/>
+          <a:lstStyle xmlns:a="http://schemas.openxmlformats.org/drawingml/2006/main"/>
+          <a:p xmlns:a="http://schemas.openxmlformats.org/drawingml/2006/main">
+            <a:pPr>
+              <a:defRPr sz="1800">
+                <a:solidFill>
+                  <a:srgbClr val="4F5661"/>
+                </a:solidFill>
+              </a:defRPr>
+            </a:pPr>
+            <a:r>
+              <a:rPr sz="1800">
+                <a:solidFill>
+                  <a:srgbClr val="4F5661"/>
+                </a:solidFill>
+              </a:rPr>
+              <a:t>The first k prey steps produce a posterior over four intents.</a:t>
+            </a:r>
+          </a:p>
+        </p:txBody>
+      </p:sp>
+      <p:sp>
+        <p:nvSpPr>
+          <p:cNvPr id="12" name="">
+            <a:extLst xmlns:a="http://schemas.openxmlformats.org/drawingml/2006/main">
+              <a:ext uri="{FF2B5EF4-FFF2-40B4-BE49-F238E27FC236}">
+                <a16:creationId xmlns:a16="http://schemas.microsoft.com/office/drawing/2014/main" id="{9449CB77-E7D7-429F-8792-D9872D8E4969}"/>
+              </a:ext>
+            </a:extLst>
+          </p:cNvPr>
+          <p:cNvSpPr>
+            <a:spLocks xmlns:a="http://schemas.openxmlformats.org/drawingml/2006/main" noGrp="1"/>
+          </p:cNvSpPr>
+          <p:nvPr/>
+        </p:nvSpPr>
+        <p:spPr>
+          <a:xfrm xmlns:a="http://schemas.openxmlformats.org/drawingml/2006/main">
+            <a:off x="685800" y="4457700"/>
+            <a:ext cx="819150" cy="38100"/>
+          </a:xfrm>
+          <a:prstGeom xmlns:a="http://schemas.openxmlformats.org/drawingml/2006/main" prst="rect">
+            <a:avLst/>
+          </a:prstGeom>
+          <a:solidFill xmlns:a="http://schemas.openxmlformats.org/drawingml/2006/main">
+            <a:srgbClr val="0D6E7A"/>
+          </a:solidFill>
+          <a:ln xmlns:a="http://schemas.openxmlformats.org/drawingml/2006/main" w="0">
+            <a:solidFill>
+              <a:srgbClr val="0D6E7A"/>
+            </a:solidFill>
+            <a:prstDash val="solid"/>
+          </a:ln>
+        </p:spPr>
+      </p:sp>
+      <p:sp>
+        <p:nvSpPr>
+          <p:cNvPr id="13" name="">
+            <a:extLst xmlns:a="http://schemas.openxmlformats.org/drawingml/2006/main">
+              <a:ext uri="{FF2B5EF4-FFF2-40B4-BE49-F238E27FC236}">
+                <a16:creationId xmlns:a16="http://schemas.microsoft.com/office/drawing/2014/main" id="{E6101140-A8BB-40B7-8A3F-B601C75ACC64}"/>
+              </a:ext>
+            </a:extLst>
+          </p:cNvPr>
+          <p:cNvSpPr>
+            <a:spLocks xmlns:a="http://schemas.openxmlformats.org/drawingml/2006/main" noGrp="1"/>
+          </p:cNvSpPr>
+          <p:nvPr/>
+        </p:nvSpPr>
+        <p:spPr>
+          <a:xfrm xmlns:a="http://schemas.openxmlformats.org/drawingml/2006/main">
+            <a:off x="1809750" y="4305300"/>
+            <a:ext cx="2286000" cy="381000"/>
+          </a:xfrm>
+          <a:prstGeom xmlns:a="http://schemas.openxmlformats.org/drawingml/2006/main" prst="rect">
+            <a:avLst/>
+          </a:prstGeom>
+          <a:noFill xmlns:a="http://schemas.openxmlformats.org/drawingml/2006/main"/>
+          <a:ln xmlns:a="http://schemas.openxmlformats.org/drawingml/2006/main" w="0">
+            <a:noFill/>
+            <a:prstDash val="solid"/>
+          </a:ln>
+        </p:spPr>
+        <p:txBody>
+          <a:bodyPr xmlns:a="http://schemas.openxmlformats.org/drawingml/2006/main"/>
+          <a:lstStyle xmlns:a="http://schemas.openxmlformats.org/drawingml/2006/main"/>
+          <a:p xmlns:a="http://schemas.openxmlformats.org/drawingml/2006/main">
+            <a:pPr>
+              <a:defRPr sz="1800" b="1">
+                <a:solidFill>
+                  <a:srgbClr val="0A0A0A"/>
+                </a:solidFill>
+              </a:defRPr>
+            </a:pPr>
+            <a:r>
+              <a:rPr sz="1800" b="1">
+                <a:solidFill>
+                  <a:srgbClr val="0A0A0A"/>
+                </a:solidFill>
+              </a:rPr>
+              <a:t>Control</a:t>
+            </a:r>
+          </a:p>
+        </p:txBody>
+      </p:sp>
+      <p:sp>
+        <p:nvSpPr>
+          <p:cNvPr id="14" name="">
+            <a:extLst xmlns:a="http://schemas.openxmlformats.org/drawingml/2006/main">
+              <a:ext uri="{FF2B5EF4-FFF2-40B4-BE49-F238E27FC236}">
+                <a16:creationId xmlns:a16="http://schemas.microsoft.com/office/drawing/2014/main" id="{1AA85942-4EC8-4F2B-80B1-A9B889CD6AFD}"/>
+              </a:ext>
+            </a:extLst>
+          </p:cNvPr>
+          <p:cNvSpPr>
+            <a:spLocks xmlns:a="http://schemas.openxmlformats.org/drawingml/2006/main" noGrp="1"/>
+          </p:cNvSpPr>
+          <p:nvPr/>
+        </p:nvSpPr>
+        <p:spPr>
+          <a:xfrm xmlns:a="http://schemas.openxmlformats.org/drawingml/2006/main">
+            <a:off x="4381500" y="4305300"/>
+            <a:ext cx="6286500" cy="438150"/>
+          </a:xfrm>
+          <a:prstGeom xmlns:a="http://schemas.openxmlformats.org/drawingml/2006/main" prst="rect">
+            <a:avLst/>
+          </a:prstGeom>
+          <a:noFill xmlns:a="http://schemas.openxmlformats.org/drawingml/2006/main"/>
+          <a:ln xmlns:a="http://schemas.openxmlformats.org/drawingml/2006/main" w="0">
+            <a:noFill/>
+            <a:prstDash val="solid"/>
+          </a:ln>
+        </p:spPr>
+        <p:txBody>
+          <a:bodyPr xmlns:a="http://schemas.openxmlformats.org/drawingml/2006/main"/>
+          <a:lstStyle xmlns:a="http://schemas.openxmlformats.org/drawingml/2006/main"/>
+          <a:p xmlns:a="http://schemas.openxmlformats.org/drawingml/2006/main">
+            <a:pPr>
+              <a:defRPr sz="1800">
+                <a:solidFill>
+                  <a:srgbClr val="4F5661"/>
+                </a:solidFill>
+              </a:defRPr>
+            </a:pPr>
+            <a:r>
+              <a:rPr sz="1800">
+                <a:solidFill>
+                  <a:srgbClr val="4F5661"/>
+                </a:solidFill>
+              </a:rPr>
+              <a:t>The planner samples that posterior during lookahead.</a:t>
+            </a:r>
+          </a:p>
+        </p:txBody>
+      </p:sp>
+      <p:sp>
+        <p:nvSpPr>
+          <p:cNvPr id="15" name="">
+            <a:extLst xmlns:a="http://schemas.openxmlformats.org/drawingml/2006/main">
+              <a:ext uri="{FF2B5EF4-FFF2-40B4-BE49-F238E27FC236}">
+                <a16:creationId xmlns:a16="http://schemas.microsoft.com/office/drawing/2014/main" id="{196251DF-079F-4C56-8BC4-7065E0064F1F}"/>
+              </a:ext>
+            </a:extLst>
+          </p:cNvPr>
+          <p:cNvSpPr>
+            <a:spLocks xmlns:a="http://schemas.openxmlformats.org/drawingml/2006/main" noGrp="1"/>
+          </p:cNvSpPr>
+          <p:nvPr/>
+        </p:nvSpPr>
+        <p:spPr>
+          <a:xfrm xmlns:a="http://schemas.openxmlformats.org/drawingml/2006/main">
+            <a:off x="685800" y="5543550"/>
+            <a:ext cx="8858250" cy="419100"/>
+          </a:xfrm>
+          <a:prstGeom xmlns:a="http://schemas.openxmlformats.org/drawingml/2006/main" prst="rect">
+            <a:avLst/>
+          </a:prstGeom>
+          <a:noFill xmlns:a="http://schemas.openxmlformats.org/drawingml/2006/main"/>
+          <a:ln xmlns:a="http://schemas.openxmlformats.org/drawingml/2006/main" w="0">
+            <a:noFill/>
+            <a:prstDash val="solid"/>
+          </a:ln>
+        </p:spPr>
+        <p:txBody>
+          <a:bodyPr xmlns:a="http://schemas.openxmlformats.org/drawingml/2006/main"/>
+          <a:lstStyle xmlns:a="http://schemas.openxmlformats.org/drawingml/2006/main"/>
+          <a:p xmlns:a="http://schemas.openxmlformats.org/drawingml/2006/main">
+            <a:pPr>
+              <a:defRPr sz="1800" b="1">
+                <a:solidFill>
+                  <a:srgbClr val="0A0A0A"/>
+                </a:solidFill>
+              </a:defRPr>
+            </a:pPr>
+            <a:r>
+              <a:rPr sz="1800" b="1">
+                <a:solidFill>
+                  <a:srgbClr val="0A0A0A"/>
+                </a:solidFill>
+              </a:rPr>
+              <a:t>This setup keeps the map fixed. Any lift must come from reading behavior and using the belief.</a:t>
+            </a:r>
+          </a:p>
+        </p:txBody>
+      </p:sp>
+      <p:sp>
+        <p:nvSpPr>
+          <p:cNvPr id="16" name="">
+            <a:extLst xmlns:a="http://schemas.openxmlformats.org/drawingml/2006/main">
+              <a:ext uri="{FF2B5EF4-FFF2-40B4-BE49-F238E27FC236}">
+                <a16:creationId xmlns:a16="http://schemas.microsoft.com/office/drawing/2014/main" id="{88B32EB8-FE91-4D17-BA8B-A0FA81CCED67}"/>
+              </a:ext>
+            </a:extLst>
+          </p:cNvPr>
+          <p:cNvSpPr>
+            <a:spLocks xmlns:a="http://schemas.openxmlformats.org/drawingml/2006/main" noGrp="1"/>
+          </p:cNvSpPr>
+          <p:nvPr/>
+        </p:nvSpPr>
+        <p:spPr>
+          <a:xfrm xmlns:a="http://schemas.openxmlformats.org/drawingml/2006/main">
+            <a:off x="11277600" y="6267450"/>
+            <a:ext cx="457200" cy="228600"/>
+          </a:xfrm>
+          <a:prstGeom xmlns:a="http://schemas.openxmlformats.org/drawingml/2006/main" prst="rect">
+            <a:avLst/>
+          </a:prstGeom>
+          <a:noFill xmlns:a="http://schemas.openxmlformats.org/drawingml/2006/main"/>
+          <a:ln xmlns:a="http://schemas.openxmlformats.org/drawingml/2006/main" w="0">
+            <a:noFill/>
+            <a:prstDash val="solid"/>
+          </a:ln>
+        </p:spPr>
+        <p:txBody>
+          <a:bodyPr xmlns:a="http://schemas.openxmlformats.org/drawingml/2006/main"/>
+          <a:lstStyle xmlns:a="http://schemas.openxmlformats.org/drawingml/2006/main"/>
+          <a:p xmlns:a="http://schemas.openxmlformats.org/drawingml/2006/main">
+            <a:pPr algn="r">
+              <a:defRPr sz="1050">
+                <a:solidFill>
+                  <a:srgbClr val="4F5661"/>
+                </a:solidFill>
+              </a:defRPr>
+            </a:pPr>
+            <a:r>
+              <a:rPr sz="1050">
+                <a:solidFill>
+                  <a:srgbClr val="4F5661"/>
+                </a:solidFill>
+              </a:rPr>
+              <a:t>03</a:t>
             </a:r>
           </a:p>
         </p:txBody>
@@ -3313,7 +5526,7 @@
     </p:spTree>
     <p:extLst>
       <p:ext uri="{BB962C8B-B14F-4D97-AF65-F5344CB8AC3E}">
-        <p14:creationId xmlns:p14="http://schemas.microsoft.com/office/powerpoint/2010/main" val="1839847245"/>
+        <p14:creationId xmlns:p14="http://schemas.microsoft.com/office/powerpoint/2010/main" val="541375450"/>
       </p:ext>
     </p:extLst>
   </p:cSld>
@@ -3344,7 +5557,7 @@
           <p:cNvPr id="1" name="">
             <a:extLst xmlns:a="http://schemas.openxmlformats.org/drawingml/2006/main">
               <a:ext uri="{FF2B5EF4-FFF2-40B4-BE49-F238E27FC236}">
-                <a16:creationId xmlns:a16="http://schemas.microsoft.com/office/drawing/2014/main" id="{0B1E262D-FB91-419B-B779-19FF553B1B72}"/>
+                <a16:creationId xmlns:a16="http://schemas.microsoft.com/office/drawing/2014/main" id="{9FE12766-802A-44A7-9402-ED44FC2D40EF}"/>
               </a:ext>
             </a:extLst>
           </p:cNvPr>
@@ -3384,7 +5597,7 @@
                   <a:srgbClr val="4F5661"/>
                 </a:solidFill>
               </a:rPr>
-              <a:t>PART 2</a:t>
+              <a:t>PART 1</a:t>
             </a:r>
           </a:p>
         </p:txBody>
@@ -3394,7 +5607,7 @@
           <p:cNvPr id="2" name="">
             <a:extLst xmlns:a="http://schemas.openxmlformats.org/drawingml/2006/main">
               <a:ext uri="{FF2B5EF4-FFF2-40B4-BE49-F238E27FC236}">
-                <a16:creationId xmlns:a16="http://schemas.microsoft.com/office/drawing/2014/main" id="{32E0FF83-5A92-4401-9B5E-BA8A0EBD10D6}"/>
+                <a16:creationId xmlns:a16="http://schemas.microsoft.com/office/drawing/2014/main" id="{20FEA239-64C0-4723-BC07-1F39E465884C}"/>
               </a:ext>
             </a:extLst>
           </p:cNvPr>
@@ -3406,7 +5619,7 @@
         <p:spPr>
           <a:xfrm xmlns:a="http://schemas.openxmlformats.org/drawingml/2006/main">
             <a:off x="533400" y="590550"/>
-            <a:ext cx="10287000" cy="914400"/>
+            <a:ext cx="10287000" cy="933450"/>
           </a:xfrm>
           <a:prstGeom xmlns:a="http://schemas.openxmlformats.org/drawingml/2006/main" prst="rect">
             <a:avLst/>
@@ -3434,7 +5647,7 @@
                   <a:srgbClr val="0A0A0A"/>
                 </a:solidFill>
               </a:rPr>
-              <a:t>Planning over the belief is the core result</a:t>
+              <a:t>The belief signal becomes measurable</a:t>
             </a:r>
           </a:p>
         </p:txBody>
@@ -3444,7 +5657,7 @@
           <p:cNvPr id="3" name="">
             <a:extLst xmlns:a="http://schemas.openxmlformats.org/drawingml/2006/main">
               <a:ext uri="{FF2B5EF4-FFF2-40B4-BE49-F238E27FC236}">
-                <a16:creationId xmlns:a16="http://schemas.microsoft.com/office/drawing/2014/main" id="{9D2A676A-4EE5-4FDC-B030-8574197CD2E5}"/>
+                <a16:creationId xmlns:a16="http://schemas.microsoft.com/office/drawing/2014/main" id="{496263B6-4770-42CB-B157-88C77D242956}"/>
               </a:ext>
             </a:extLst>
           </p:cNvPr>
@@ -3494,7 +5707,7 @@
           <p:cNvPr id="4" name="">
             <a:extLst xmlns:a="http://schemas.openxmlformats.org/drawingml/2006/main">
               <a:ext uri="{FF2B5EF4-FFF2-40B4-BE49-F238E27FC236}">
-                <a16:creationId xmlns:a16="http://schemas.microsoft.com/office/drawing/2014/main" id="{31A9B5F4-5C88-459C-9BB1-CF2A1A2CB0F2}"/>
+                <a16:creationId xmlns:a16="http://schemas.microsoft.com/office/drawing/2014/main" id="{7B65C3DC-0DBB-4529-A87A-81D18FBA1C32}"/>
               </a:ext>
             </a:extLst>
           </p:cNvPr>
@@ -3506,7 +5719,7 @@
         <p:spPr>
           <a:xfrm xmlns:a="http://schemas.openxmlformats.org/drawingml/2006/main">
             <a:off x="533400" y="1581150"/>
-            <a:ext cx="6572250" cy="4114800"/>
+            <a:ext cx="6705600" cy="4114800"/>
           </a:xfrm>
           <a:prstGeom xmlns:a="http://schemas.openxmlformats.org/drawingml/2006/main" prst="rect">
             <a:avLst/>
@@ -3531,13 +5744,13 @@
           <p:nvPr/>
         </p:nvPicPr>
         <p:blipFill>
-          <a:blip xmlns:r="http://schemas.openxmlformats.org/officeDocument/2006/relationships" xmlns:a="http://schemas.openxmlformats.org/drawingml/2006/main" r:embed="Rcd33eb6d853543b0"/>
+          <a:blip xmlns:r="http://schemas.openxmlformats.org/officeDocument/2006/relationships" xmlns:a="http://schemas.openxmlformats.org/drawingml/2006/main" r:embed="R07093cb16dcc4191"/>
           <a:stretch xmlns:a="http://schemas.openxmlformats.org/drawingml/2006/main"/>
         </p:blipFill>
         <p:spPr>
           <a:xfrm xmlns:a="http://schemas.openxmlformats.org/drawingml/2006/main">
-            <a:off x="685800" y="1847850"/>
-            <a:ext cx="6267450" cy="3581400"/>
+            <a:off x="685800" y="2688754"/>
+            <a:ext cx="6400800" cy="1899592"/>
           </a:xfrm>
           <a:prstGeom xmlns:a="http://schemas.openxmlformats.org/drawingml/2006/main" prst="rect">
             <a:avLst/>
@@ -3549,19 +5762,19 @@
           <p:cNvPr id="6" name="">
             <a:extLst xmlns:a="http://schemas.openxmlformats.org/drawingml/2006/main">
               <a:ext uri="{FF2B5EF4-FFF2-40B4-BE49-F238E27FC236}">
-                <a16:creationId xmlns:a16="http://schemas.microsoft.com/office/drawing/2014/main" id="{B292C7AD-DACD-4EA4-AC13-A1EB09E62FC8}"/>
-              </a:ext>
-            </a:extLst>
-          </p:cNvPr>
-          <p:cNvSpPr>
-            <a:spLocks xmlns:a="http://schemas.openxmlformats.org/drawingml/2006/main" noGrp="1"/>
-          </p:cNvSpPr>
-          <p:nvPr/>
-        </p:nvSpPr>
-        <p:spPr>
-          <a:xfrm xmlns:a="http://schemas.openxmlformats.org/drawingml/2006/main">
-            <a:off x="7524750" y="1752600"/>
-            <a:ext cx="57150" cy="2095500"/>
+                <a16:creationId xmlns:a16="http://schemas.microsoft.com/office/drawing/2014/main" id="{2F765836-9962-45DE-BCA0-8842B178130B}"/>
+              </a:ext>
+            </a:extLst>
+          </p:cNvPr>
+          <p:cNvSpPr>
+            <a:spLocks xmlns:a="http://schemas.openxmlformats.org/drawingml/2006/main" noGrp="1"/>
+          </p:cNvSpPr>
+          <p:nvPr/>
+        </p:nvSpPr>
+        <p:spPr>
+          <a:xfrm xmlns:a="http://schemas.openxmlformats.org/drawingml/2006/main">
+            <a:off x="7620000" y="1752600"/>
+            <a:ext cx="57150" cy="2000250"/>
           </a:xfrm>
           <a:prstGeom xmlns:a="http://schemas.openxmlformats.org/drawingml/2006/main" prst="rect">
             <a:avLst/>
@@ -3582,19 +5795,19 @@
           <p:cNvPr id="7" name="">
             <a:extLst xmlns:a="http://schemas.openxmlformats.org/drawingml/2006/main">
               <a:ext uri="{FF2B5EF4-FFF2-40B4-BE49-F238E27FC236}">
-                <a16:creationId xmlns:a16="http://schemas.microsoft.com/office/drawing/2014/main" id="{1512E996-58F2-4716-A3D4-353B8D8815F6}"/>
-              </a:ext>
-            </a:extLst>
-          </p:cNvPr>
-          <p:cNvSpPr>
-            <a:spLocks xmlns:a="http://schemas.openxmlformats.org/drawingml/2006/main" noGrp="1"/>
-          </p:cNvSpPr>
-          <p:nvPr/>
-        </p:nvSpPr>
-        <p:spPr>
-          <a:xfrm xmlns:a="http://schemas.openxmlformats.org/drawingml/2006/main">
-            <a:off x="7734300" y="1733550"/>
-            <a:ext cx="3429000" cy="2095500"/>
+                <a16:creationId xmlns:a16="http://schemas.microsoft.com/office/drawing/2014/main" id="{0A57A3F7-1045-4D8C-8916-097C8BA03F99}"/>
+              </a:ext>
+            </a:extLst>
+          </p:cNvPr>
+          <p:cNvSpPr>
+            <a:spLocks xmlns:a="http://schemas.openxmlformats.org/drawingml/2006/main" noGrp="1"/>
+          </p:cNvSpPr>
+          <p:nvPr/>
+        </p:nvSpPr>
+        <p:spPr>
+          <a:xfrm xmlns:a="http://schemas.openxmlformats.org/drawingml/2006/main">
+            <a:off x="7829550" y="1733550"/>
+            <a:ext cx="3314700" cy="2000250"/>
           </a:xfrm>
           <a:prstGeom xmlns:a="http://schemas.openxmlformats.org/drawingml/2006/main" prst="rect">
             <a:avLst/>
@@ -3622,7 +5835,7 @@
                   <a:srgbClr val="4F5661"/>
                 </a:solidFill>
               </a:rPr>
-              <a:t>- Flat-belief planner: 3.07 captures/episode.</a:t>
+              <a:t>- Accuracy rises from 0.37 at 3 observed steps to 0.97 at 25.</a:t>
             </a:r>
           </a:p>
           <a:p xmlns:a="http://schemas.openxmlformats.org/drawingml/2006/main">
@@ -3639,7 +5852,7 @@
                   <a:srgbClr val="4F5661"/>
                 </a:solidFill>
               </a:rPr>
-              <a:t>- Reactive oracle with true intent: 4.05.</a:t>
+              <a:t>- Posterior entropy falls from 1.35 to 0.03 nats.</a:t>
             </a:r>
           </a:p>
           <a:p xmlns:a="http://schemas.openxmlformats.org/drawingml/2006/main">
@@ -3656,7 +5869,7 @@
                   <a:srgbClr val="4F5661"/>
                 </a:solidFill>
               </a:rPr>
-              <a:t>- Planner + inferred belief: 4.31.</a:t>
+              <a:t>- The belief sharpens before the episode ends.</a:t>
             </a:r>
           </a:p>
         </p:txBody>
@@ -3666,47 +5879,47 @@
           <p:cNvPr id="8" name="">
             <a:extLst xmlns:a="http://schemas.openxmlformats.org/drawingml/2006/main">
               <a:ext uri="{FF2B5EF4-FFF2-40B4-BE49-F238E27FC236}">
-                <a16:creationId xmlns:a16="http://schemas.microsoft.com/office/drawing/2014/main" id="{BB1A2AB0-3ED6-4339-802C-2BFC1FF5A308}"/>
-              </a:ext>
-            </a:extLst>
-          </p:cNvPr>
-          <p:cNvSpPr>
-            <a:spLocks xmlns:a="http://schemas.openxmlformats.org/drawingml/2006/main" noGrp="1"/>
-          </p:cNvSpPr>
-          <p:nvPr/>
-        </p:nvSpPr>
-        <p:spPr>
-          <a:xfrm xmlns:a="http://schemas.openxmlformats.org/drawingml/2006/main">
-            <a:off x="7524750" y="4438650"/>
-            <a:ext cx="3752850" cy="914400"/>
-          </a:xfrm>
-          <a:prstGeom xmlns:a="http://schemas.openxmlformats.org/drawingml/2006/main" prst="rect">
-            <a:avLst/>
-          </a:prstGeom>
-          <a:noFill xmlns:a="http://schemas.openxmlformats.org/drawingml/2006/main"/>
-          <a:ln xmlns:a="http://schemas.openxmlformats.org/drawingml/2006/main" w="0">
-            <a:noFill/>
-            <a:prstDash val="solid"/>
-          </a:ln>
-        </p:spPr>
-        <p:txBody>
-          <a:bodyPr xmlns:a="http://schemas.openxmlformats.org/drawingml/2006/main"/>
-          <a:lstStyle xmlns:a="http://schemas.openxmlformats.org/drawingml/2006/main"/>
-          <a:p xmlns:a="http://schemas.openxmlformats.org/drawingml/2006/main">
-            <a:pPr>
-              <a:defRPr sz="1950" b="1">
+                <a16:creationId xmlns:a16="http://schemas.microsoft.com/office/drawing/2014/main" id="{22928C6B-5FC7-4473-9BCB-2BF21DDCDEFC}"/>
+              </a:ext>
+            </a:extLst>
+          </p:cNvPr>
+          <p:cNvSpPr>
+            <a:spLocks xmlns:a="http://schemas.openxmlformats.org/drawingml/2006/main" noGrp="1"/>
+          </p:cNvSpPr>
+          <p:nvPr/>
+        </p:nvSpPr>
+        <p:spPr>
+          <a:xfrm xmlns:a="http://schemas.openxmlformats.org/drawingml/2006/main">
+            <a:off x="7620000" y="4514850"/>
+            <a:ext cx="3543300" cy="819150"/>
+          </a:xfrm>
+          <a:prstGeom xmlns:a="http://schemas.openxmlformats.org/drawingml/2006/main" prst="rect">
+            <a:avLst/>
+          </a:prstGeom>
+          <a:noFill xmlns:a="http://schemas.openxmlformats.org/drawingml/2006/main"/>
+          <a:ln xmlns:a="http://schemas.openxmlformats.org/drawingml/2006/main" w="0">
+            <a:noFill/>
+            <a:prstDash val="solid"/>
+          </a:ln>
+        </p:spPr>
+        <p:txBody>
+          <a:bodyPr xmlns:a="http://schemas.openxmlformats.org/drawingml/2006/main"/>
+          <a:lstStyle xmlns:a="http://schemas.openxmlformats.org/drawingml/2006/main"/>
+          <a:p xmlns:a="http://schemas.openxmlformats.org/drawingml/2006/main">
+            <a:pPr>
+              <a:defRPr sz="1875" b="1">
                 <a:solidFill>
                   <a:srgbClr val="0A0A0A"/>
                 </a:solidFill>
               </a:defRPr>
             </a:pPr>
             <a:r>
-              <a:rPr sz="1950" b="1">
+              <a:rPr sz="1875" b="1">
                 <a:solidFill>
                   <a:srgbClr val="0A0A0A"/>
                 </a:solidFill>
               </a:rPr>
-              <a:t>The result is not just having a model. It is sampling a calibrated opponent belief inside lookahead.</a:t>
+              <a:t>This validates the Part 1 encoder: early motion carries the hidden intent.</a:t>
             </a:r>
           </a:p>
         </p:txBody>
@@ -3714,7 +5927,7 @@
     </p:spTree>
     <p:extLst>
       <p:ext uri="{BB962C8B-B14F-4D97-AF65-F5344CB8AC3E}">
-        <p14:creationId xmlns:p14="http://schemas.microsoft.com/office/powerpoint/2010/main" val="520827212"/>
+        <p14:creationId xmlns:p14="http://schemas.microsoft.com/office/powerpoint/2010/main" val="581774050"/>
       </p:ext>
     </p:extLst>
   </p:cSld>
@@ -3745,7 +5958,7 @@
           <p:cNvPr id="1" name="">
             <a:extLst xmlns:a="http://schemas.openxmlformats.org/drawingml/2006/main">
               <a:ext uri="{FF2B5EF4-FFF2-40B4-BE49-F238E27FC236}">
-                <a16:creationId xmlns:a16="http://schemas.microsoft.com/office/drawing/2014/main" id="{537B0B7D-5ECE-4A77-B592-EC2885F09F13}"/>
+                <a16:creationId xmlns:a16="http://schemas.microsoft.com/office/drawing/2014/main" id="{49CB5FE1-265B-4691-80AF-74D2A0CB2C6E}"/>
               </a:ext>
             </a:extLst>
           </p:cNvPr>
@@ -3785,7 +5998,7 @@
                   <a:srgbClr val="4F5661"/>
                 </a:solidFill>
               </a:rPr>
-              <a:t>REPRESENTATION</a:t>
+              <a:t>ABLATION</a:t>
             </a:r>
           </a:p>
         </p:txBody>
@@ -3795,7 +6008,7 @@
           <p:cNvPr id="2" name="">
             <a:extLst xmlns:a="http://schemas.openxmlformats.org/drawingml/2006/main">
               <a:ext uri="{FF2B5EF4-FFF2-40B4-BE49-F238E27FC236}">
-                <a16:creationId xmlns:a16="http://schemas.microsoft.com/office/drawing/2014/main" id="{35C3FB67-C1BE-4939-AC00-61C72C957C71}"/>
+                <a16:creationId xmlns:a16="http://schemas.microsoft.com/office/drawing/2014/main" id="{E6C6C82C-5948-4A97-AF64-AC052A77B654}"/>
               </a:ext>
             </a:extLst>
           </p:cNvPr>
@@ -3807,7 +6020,7 @@
         <p:spPr>
           <a:xfrm xmlns:a="http://schemas.openxmlformats.org/drawingml/2006/main">
             <a:off x="533400" y="590550"/>
-            <a:ext cx="10287000" cy="914400"/>
+            <a:ext cx="10287000" cy="933450"/>
           </a:xfrm>
           <a:prstGeom xmlns:a="http://schemas.openxmlformats.org/drawingml/2006/main" prst="rect">
             <a:avLst/>
@@ -3835,7 +6048,7 @@
                   <a:srgbClr val="0A0A0A"/>
                 </a:solidFill>
               </a:rPr>
-              <a:t>JEPA makes the belief label-free</a:t>
+              <a:t>Hard intent labels can damage control</a:t>
             </a:r>
           </a:p>
         </p:txBody>
@@ -3845,69 +6058,19 @@
           <p:cNvPr id="3" name="">
             <a:extLst xmlns:a="http://schemas.openxmlformats.org/drawingml/2006/main">
               <a:ext uri="{FF2B5EF4-FFF2-40B4-BE49-F238E27FC236}">
-                <a16:creationId xmlns:a16="http://schemas.microsoft.com/office/drawing/2014/main" id="{09C3DE1A-D1F2-4D0B-8778-B17D1C37E9BC}"/>
-              </a:ext>
-            </a:extLst>
-          </p:cNvPr>
-          <p:cNvSpPr>
-            <a:spLocks xmlns:a="http://schemas.openxmlformats.org/drawingml/2006/main" noGrp="1"/>
-          </p:cNvSpPr>
-          <p:nvPr/>
-        </p:nvSpPr>
-        <p:spPr>
-          <a:xfrm xmlns:a="http://schemas.openxmlformats.org/drawingml/2006/main">
-            <a:off x="11277600" y="6267450"/>
-            <a:ext cx="457200" cy="228600"/>
-          </a:xfrm>
-          <a:prstGeom xmlns:a="http://schemas.openxmlformats.org/drawingml/2006/main" prst="rect">
-            <a:avLst/>
-          </a:prstGeom>
-          <a:noFill xmlns:a="http://schemas.openxmlformats.org/drawingml/2006/main"/>
-          <a:ln xmlns:a="http://schemas.openxmlformats.org/drawingml/2006/main" w="0">
-            <a:noFill/>
-            <a:prstDash val="solid"/>
-          </a:ln>
-        </p:spPr>
-        <p:txBody>
-          <a:bodyPr xmlns:a="http://schemas.openxmlformats.org/drawingml/2006/main"/>
-          <a:lstStyle xmlns:a="http://schemas.openxmlformats.org/drawingml/2006/main"/>
-          <a:p xmlns:a="http://schemas.openxmlformats.org/drawingml/2006/main">
-            <a:pPr algn="r">
-              <a:defRPr sz="1050">
-                <a:solidFill>
-                  <a:srgbClr val="4F5661"/>
-                </a:solidFill>
-              </a:defRPr>
-            </a:pPr>
-            <a:r>
-              <a:rPr sz="1050">
-                <a:solidFill>
-                  <a:srgbClr val="4F5661"/>
-                </a:solidFill>
-              </a:rPr>
-              <a:t>05</a:t>
-            </a:r>
-          </a:p>
-        </p:txBody>
-      </p:sp>
-      <p:sp>
-        <p:nvSpPr>
-          <p:cNvPr id="4" name="">
-            <a:extLst xmlns:a="http://schemas.openxmlformats.org/drawingml/2006/main">
-              <a:ext uri="{FF2B5EF4-FFF2-40B4-BE49-F238E27FC236}">
-                <a16:creationId xmlns:a16="http://schemas.microsoft.com/office/drawing/2014/main" id="{B02A1C8A-D54F-4DD3-A493-D279F8262226}"/>
-              </a:ext>
-            </a:extLst>
-          </p:cNvPr>
-          <p:cNvSpPr>
-            <a:spLocks xmlns:a="http://schemas.openxmlformats.org/drawingml/2006/main" noGrp="1"/>
-          </p:cNvSpPr>
-          <p:nvPr/>
-        </p:nvSpPr>
-        <p:spPr>
-          <a:xfrm xmlns:a="http://schemas.openxmlformats.org/drawingml/2006/main">
-            <a:off x="533400" y="1581150"/>
-            <a:ext cx="6743700" cy="4114800"/>
+                <a16:creationId xmlns:a16="http://schemas.microsoft.com/office/drawing/2014/main" id="{E0D6F1C9-7786-47F3-A4A6-71AA875385D1}"/>
+              </a:ext>
+            </a:extLst>
+          </p:cNvPr>
+          <p:cNvSpPr>
+            <a:spLocks xmlns:a="http://schemas.openxmlformats.org/drawingml/2006/main" noGrp="1"/>
+          </p:cNvSpPr>
+          <p:nvPr/>
+        </p:nvSpPr>
+        <p:spPr>
+          <a:xfrm xmlns:a="http://schemas.openxmlformats.org/drawingml/2006/main">
+            <a:off x="685800" y="1809750"/>
+            <a:ext cx="3105150" cy="2305050"/>
           </a:xfrm>
           <a:prstGeom xmlns:a="http://schemas.openxmlformats.org/drawingml/2006/main" prst="rect">
             <a:avLst/>
@@ -3923,56 +6086,400 @@
           </a:ln>
         </p:spPr>
       </p:sp>
-      <p:pic>
-        <p:nvPicPr>
-          <p:cNvPr id="13" name=""/>
-          <p:cNvPicPr>
-            <a:picLocks xmlns:a="http://schemas.openxmlformats.org/drawingml/2006/main" noChangeAspect="1"/>
-          </p:cNvPicPr>
-          <p:nvPr/>
-        </p:nvPicPr>
-        <p:blipFill>
-          <a:blip xmlns:r="http://schemas.openxmlformats.org/officeDocument/2006/relationships" xmlns:a="http://schemas.openxmlformats.org/drawingml/2006/main" r:embed="Rfc1579fb8960409d"/>
-          <a:stretch xmlns:a="http://schemas.openxmlformats.org/drawingml/2006/main"/>
-        </p:blipFill>
-        <p:spPr>
-          <a:xfrm xmlns:a="http://schemas.openxmlformats.org/drawingml/2006/main">
-            <a:off x="685800" y="2651252"/>
-            <a:ext cx="6438900" cy="1974596"/>
-          </a:xfrm>
-          <a:prstGeom xmlns:a="http://schemas.openxmlformats.org/drawingml/2006/main" prst="rect">
-            <a:avLst/>
-          </a:prstGeom>
-        </p:spPr>
-      </p:pic>
+      <p:sp>
+        <p:nvSpPr>
+          <p:cNvPr id="4" name="">
+            <a:extLst xmlns:a="http://schemas.openxmlformats.org/drawingml/2006/main">
+              <a:ext uri="{FF2B5EF4-FFF2-40B4-BE49-F238E27FC236}">
+                <a16:creationId xmlns:a16="http://schemas.microsoft.com/office/drawing/2014/main" id="{93D9E52C-97B2-477A-8CF3-4BC24C78584B}"/>
+              </a:ext>
+            </a:extLst>
+          </p:cNvPr>
+          <p:cNvSpPr>
+            <a:spLocks xmlns:a="http://schemas.openxmlformats.org/drawingml/2006/main" noGrp="1"/>
+          </p:cNvSpPr>
+          <p:nvPr/>
+        </p:nvSpPr>
+        <p:spPr>
+          <a:xfrm xmlns:a="http://schemas.openxmlformats.org/drawingml/2006/main">
+            <a:off x="4533900" y="1809750"/>
+            <a:ext cx="3105150" cy="2305050"/>
+          </a:xfrm>
+          <a:prstGeom xmlns:a="http://schemas.openxmlformats.org/drawingml/2006/main" prst="rect">
+            <a:avLst/>
+          </a:prstGeom>
+          <a:solidFill xmlns:a="http://schemas.openxmlformats.org/drawingml/2006/main">
+            <a:srgbClr val="F4F5F7"/>
+          </a:solidFill>
+          <a:ln xmlns:a="http://schemas.openxmlformats.org/drawingml/2006/main" w="0">
+            <a:solidFill>
+              <a:srgbClr val="F4F5F7"/>
+            </a:solidFill>
+            <a:prstDash val="solid"/>
+          </a:ln>
+        </p:spPr>
+      </p:sp>
+      <p:sp>
+        <p:nvSpPr>
+          <p:cNvPr id="5" name="">
+            <a:extLst xmlns:a="http://schemas.openxmlformats.org/drawingml/2006/main">
+              <a:ext uri="{FF2B5EF4-FFF2-40B4-BE49-F238E27FC236}">
+                <a16:creationId xmlns:a16="http://schemas.microsoft.com/office/drawing/2014/main" id="{773E0E45-8E1D-46E6-B557-5BC272EB51CC}"/>
+              </a:ext>
+            </a:extLst>
+          </p:cNvPr>
+          <p:cNvSpPr>
+            <a:spLocks xmlns:a="http://schemas.openxmlformats.org/drawingml/2006/main" noGrp="1"/>
+          </p:cNvSpPr>
+          <p:nvPr/>
+        </p:nvSpPr>
+        <p:spPr>
+          <a:xfrm xmlns:a="http://schemas.openxmlformats.org/drawingml/2006/main">
+            <a:off x="8382000" y="1809750"/>
+            <a:ext cx="3105150" cy="2305050"/>
+          </a:xfrm>
+          <a:prstGeom xmlns:a="http://schemas.openxmlformats.org/drawingml/2006/main" prst="rect">
+            <a:avLst/>
+          </a:prstGeom>
+          <a:solidFill xmlns:a="http://schemas.openxmlformats.org/drawingml/2006/main">
+            <a:srgbClr val="F4F5F7"/>
+          </a:solidFill>
+          <a:ln xmlns:a="http://schemas.openxmlformats.org/drawingml/2006/main" w="0">
+            <a:solidFill>
+              <a:srgbClr val="F4F5F7"/>
+            </a:solidFill>
+            <a:prstDash val="solid"/>
+          </a:ln>
+        </p:spPr>
+      </p:sp>
       <p:sp>
         <p:nvSpPr>
           <p:cNvPr id="6" name="">
             <a:extLst xmlns:a="http://schemas.openxmlformats.org/drawingml/2006/main">
               <a:ext uri="{FF2B5EF4-FFF2-40B4-BE49-F238E27FC236}">
-                <a16:creationId xmlns:a16="http://schemas.microsoft.com/office/drawing/2014/main" id="{FD666EB1-DE4A-4D5D-AF07-9D4D38CED5E2}"/>
-              </a:ext>
-            </a:extLst>
-          </p:cNvPr>
-          <p:cNvSpPr>
-            <a:spLocks xmlns:a="http://schemas.openxmlformats.org/drawingml/2006/main" noGrp="1"/>
-          </p:cNvSpPr>
-          <p:nvPr/>
-        </p:nvSpPr>
-        <p:spPr>
-          <a:xfrm xmlns:a="http://schemas.openxmlformats.org/drawingml/2006/main">
-            <a:off x="7696200" y="1752600"/>
-            <a:ext cx="57150" cy="2095500"/>
+                <a16:creationId xmlns:a16="http://schemas.microsoft.com/office/drawing/2014/main" id="{C71915D6-EA9B-46D1-BE95-10122B2B4537}"/>
+              </a:ext>
+            </a:extLst>
+          </p:cNvPr>
+          <p:cNvSpPr>
+            <a:spLocks xmlns:a="http://schemas.openxmlformats.org/drawingml/2006/main" noGrp="1"/>
+          </p:cNvSpPr>
+          <p:nvPr/>
+        </p:nvSpPr>
+        <p:spPr>
+          <a:xfrm xmlns:a="http://schemas.openxmlformats.org/drawingml/2006/main">
+            <a:off x="990600" y="2171700"/>
+            <a:ext cx="2381250" cy="666750"/>
+          </a:xfrm>
+          <a:prstGeom xmlns:a="http://schemas.openxmlformats.org/drawingml/2006/main" prst="rect">
+            <a:avLst/>
+          </a:prstGeom>
+          <a:noFill xmlns:a="http://schemas.openxmlformats.org/drawingml/2006/main"/>
+          <a:ln xmlns:a="http://schemas.openxmlformats.org/drawingml/2006/main" w="0">
+            <a:noFill/>
+            <a:prstDash val="solid"/>
+          </a:ln>
+        </p:spPr>
+        <p:txBody>
+          <a:bodyPr xmlns:a="http://schemas.openxmlformats.org/drawingml/2006/main"/>
+          <a:lstStyle xmlns:a="http://schemas.openxmlformats.org/drawingml/2006/main"/>
+          <a:p xmlns:a="http://schemas.openxmlformats.org/drawingml/2006/main">
+            <a:pPr>
+              <a:defRPr sz="4200" b="1">
+                <a:solidFill>
+                  <a:srgbClr val="0D6E7A"/>
+                </a:solidFill>
+              </a:defRPr>
+            </a:pPr>
+            <a:r>
+              <a:rPr sz="4200" b="1">
+                <a:solidFill>
+                  <a:srgbClr val="0D6E7A"/>
+                </a:solidFill>
+              </a:rPr>
+              <a:t>2.68</a:t>
+            </a:r>
+          </a:p>
+        </p:txBody>
+      </p:sp>
+      <p:sp>
+        <p:nvSpPr>
+          <p:cNvPr id="7" name="">
+            <a:extLst xmlns:a="http://schemas.openxmlformats.org/drawingml/2006/main">
+              <a:ext uri="{FF2B5EF4-FFF2-40B4-BE49-F238E27FC236}">
+                <a16:creationId xmlns:a16="http://schemas.microsoft.com/office/drawing/2014/main" id="{55483CEC-FFC5-4B15-92FB-8CF65C6365DA}"/>
+              </a:ext>
+            </a:extLst>
+          </p:cNvPr>
+          <p:cNvSpPr>
+            <a:spLocks xmlns:a="http://schemas.openxmlformats.org/drawingml/2006/main" noGrp="1"/>
+          </p:cNvSpPr>
+          <p:nvPr/>
+        </p:nvSpPr>
+        <p:spPr>
+          <a:xfrm xmlns:a="http://schemas.openxmlformats.org/drawingml/2006/main">
+            <a:off x="990600" y="2838450"/>
+            <a:ext cx="2381250" cy="666750"/>
+          </a:xfrm>
+          <a:prstGeom xmlns:a="http://schemas.openxmlformats.org/drawingml/2006/main" prst="rect">
+            <a:avLst/>
+          </a:prstGeom>
+          <a:noFill xmlns:a="http://schemas.openxmlformats.org/drawingml/2006/main"/>
+          <a:ln xmlns:a="http://schemas.openxmlformats.org/drawingml/2006/main" w="0">
+            <a:noFill/>
+            <a:prstDash val="solid"/>
+          </a:ln>
+        </p:spPr>
+        <p:txBody>
+          <a:bodyPr xmlns:a="http://schemas.openxmlformats.org/drawingml/2006/main"/>
+          <a:lstStyle xmlns:a="http://schemas.openxmlformats.org/drawingml/2006/main"/>
+          <a:p xmlns:a="http://schemas.openxmlformats.org/drawingml/2006/main">
+            <a:pPr>
+              <a:defRPr sz="1425">
+                <a:solidFill>
+                  <a:srgbClr val="4F5661"/>
+                </a:solidFill>
+              </a:defRPr>
+            </a:pPr>
+            <a:r>
+              <a:rPr sz="1425">
+                <a:solidFill>
+                  <a:srgbClr val="4F5661"/>
+                </a:solidFill>
+              </a:rPr>
+              <a:t>opponent-blind baseline</a:t>
+            </a:r>
+          </a:p>
+        </p:txBody>
+      </p:sp>
+      <p:sp>
+        <p:nvSpPr>
+          <p:cNvPr id="8" name="">
+            <a:extLst xmlns:a="http://schemas.openxmlformats.org/drawingml/2006/main">
+              <a:ext uri="{FF2B5EF4-FFF2-40B4-BE49-F238E27FC236}">
+                <a16:creationId xmlns:a16="http://schemas.microsoft.com/office/drawing/2014/main" id="{B176061D-FE99-4CFA-9376-16FAFD84F46B}"/>
+              </a:ext>
+            </a:extLst>
+          </p:cNvPr>
+          <p:cNvSpPr>
+            <a:spLocks xmlns:a="http://schemas.openxmlformats.org/drawingml/2006/main" noGrp="1"/>
+          </p:cNvSpPr>
+          <p:nvPr/>
+        </p:nvSpPr>
+        <p:spPr>
+          <a:xfrm xmlns:a="http://schemas.openxmlformats.org/drawingml/2006/main">
+            <a:off x="4838700" y="2171700"/>
+            <a:ext cx="2381250" cy="666750"/>
+          </a:xfrm>
+          <a:prstGeom xmlns:a="http://schemas.openxmlformats.org/drawingml/2006/main" prst="rect">
+            <a:avLst/>
+          </a:prstGeom>
+          <a:noFill xmlns:a="http://schemas.openxmlformats.org/drawingml/2006/main"/>
+          <a:ln xmlns:a="http://schemas.openxmlformats.org/drawingml/2006/main" w="0">
+            <a:noFill/>
+            <a:prstDash val="solid"/>
+          </a:ln>
+        </p:spPr>
+        <p:txBody>
+          <a:bodyPr xmlns:a="http://schemas.openxmlformats.org/drawingml/2006/main"/>
+          <a:lstStyle xmlns:a="http://schemas.openxmlformats.org/drawingml/2006/main"/>
+          <a:p xmlns:a="http://schemas.openxmlformats.org/drawingml/2006/main">
+            <a:pPr>
+              <a:defRPr sz="4200" b="1">
+                <a:solidFill>
+                  <a:srgbClr val="0A0A0A"/>
+                </a:solidFill>
+              </a:defRPr>
+            </a:pPr>
+            <a:r>
+              <a:rPr sz="4200" b="1">
+                <a:solidFill>
+                  <a:srgbClr val="0A0A0A"/>
+                </a:solidFill>
+              </a:rPr>
+              <a:t>2.56</a:t>
+            </a:r>
+          </a:p>
+        </p:txBody>
+      </p:sp>
+      <p:sp>
+        <p:nvSpPr>
+          <p:cNvPr id="9" name="">
+            <a:extLst xmlns:a="http://schemas.openxmlformats.org/drawingml/2006/main">
+              <a:ext uri="{FF2B5EF4-FFF2-40B4-BE49-F238E27FC236}">
+                <a16:creationId xmlns:a16="http://schemas.microsoft.com/office/drawing/2014/main" id="{E62CBC45-7801-4446-98EB-4B1A734819D3}"/>
+              </a:ext>
+            </a:extLst>
+          </p:cNvPr>
+          <p:cNvSpPr>
+            <a:spLocks xmlns:a="http://schemas.openxmlformats.org/drawingml/2006/main" noGrp="1"/>
+          </p:cNvSpPr>
+          <p:nvPr/>
+        </p:nvSpPr>
+        <p:spPr>
+          <a:xfrm xmlns:a="http://schemas.openxmlformats.org/drawingml/2006/main">
+            <a:off x="4838700" y="2838450"/>
+            <a:ext cx="2381250" cy="666750"/>
+          </a:xfrm>
+          <a:prstGeom xmlns:a="http://schemas.openxmlformats.org/drawingml/2006/main" prst="rect">
+            <a:avLst/>
+          </a:prstGeom>
+          <a:noFill xmlns:a="http://schemas.openxmlformats.org/drawingml/2006/main"/>
+          <a:ln xmlns:a="http://schemas.openxmlformats.org/drawingml/2006/main" w="0">
+            <a:noFill/>
+            <a:prstDash val="solid"/>
+          </a:ln>
+        </p:spPr>
+        <p:txBody>
+          <a:bodyPr xmlns:a="http://schemas.openxmlformats.org/drawingml/2006/main"/>
+          <a:lstStyle xmlns:a="http://schemas.openxmlformats.org/drawingml/2006/main"/>
+          <a:p xmlns:a="http://schemas.openxmlformats.org/drawingml/2006/main">
+            <a:pPr>
+              <a:defRPr sz="1425">
+                <a:solidFill>
+                  <a:srgbClr val="4F5661"/>
+                </a:solidFill>
+              </a:defRPr>
+            </a:pPr>
+            <a:r>
+              <a:rPr sz="1425">
+                <a:solidFill>
+                  <a:srgbClr val="4F5661"/>
+                </a:solidFill>
+              </a:rPr>
+              <a:t>hard intent inferred at k=8</a:t>
+            </a:r>
+          </a:p>
+        </p:txBody>
+      </p:sp>
+      <p:sp>
+        <p:nvSpPr>
+          <p:cNvPr id="10" name="">
+            <a:extLst xmlns:a="http://schemas.openxmlformats.org/drawingml/2006/main">
+              <a:ext uri="{FF2B5EF4-FFF2-40B4-BE49-F238E27FC236}">
+                <a16:creationId xmlns:a16="http://schemas.microsoft.com/office/drawing/2014/main" id="{8ABC439D-68E9-4D95-BB4D-8CC3D0EB8A90}"/>
+              </a:ext>
+            </a:extLst>
+          </p:cNvPr>
+          <p:cNvSpPr>
+            <a:spLocks xmlns:a="http://schemas.openxmlformats.org/drawingml/2006/main" noGrp="1"/>
+          </p:cNvSpPr>
+          <p:nvPr/>
+        </p:nvSpPr>
+        <p:spPr>
+          <a:xfrm xmlns:a="http://schemas.openxmlformats.org/drawingml/2006/main">
+            <a:off x="8686800" y="2171700"/>
+            <a:ext cx="2381250" cy="666750"/>
+          </a:xfrm>
+          <a:prstGeom xmlns:a="http://schemas.openxmlformats.org/drawingml/2006/main" prst="rect">
+            <a:avLst/>
+          </a:prstGeom>
+          <a:noFill xmlns:a="http://schemas.openxmlformats.org/drawingml/2006/main"/>
+          <a:ln xmlns:a="http://schemas.openxmlformats.org/drawingml/2006/main" w="0">
+            <a:noFill/>
+            <a:prstDash val="solid"/>
+          </a:ln>
+        </p:spPr>
+        <p:txBody>
+          <a:bodyPr xmlns:a="http://schemas.openxmlformats.org/drawingml/2006/main"/>
+          <a:lstStyle xmlns:a="http://schemas.openxmlformats.org/drawingml/2006/main"/>
+          <a:p xmlns:a="http://schemas.openxmlformats.org/drawingml/2006/main">
+            <a:pPr>
+              <a:defRPr sz="4200" b="1">
+                <a:solidFill>
+                  <a:srgbClr val="C84C2A"/>
+                </a:solidFill>
+              </a:defRPr>
+            </a:pPr>
+            <a:r>
+              <a:rPr sz="4200" b="1">
+                <a:solidFill>
+                  <a:srgbClr val="C84C2A"/>
+                </a:solidFill>
+              </a:rPr>
+              <a:t>1.42</a:t>
+            </a:r>
+          </a:p>
+        </p:txBody>
+      </p:sp>
+      <p:sp>
+        <p:nvSpPr>
+          <p:cNvPr id="11" name="">
+            <a:extLst xmlns:a="http://schemas.openxmlformats.org/drawingml/2006/main">
+              <a:ext uri="{FF2B5EF4-FFF2-40B4-BE49-F238E27FC236}">
+                <a16:creationId xmlns:a16="http://schemas.microsoft.com/office/drawing/2014/main" id="{C63C7FAB-8E48-49A4-A26C-E71E56E04690}"/>
+              </a:ext>
+            </a:extLst>
+          </p:cNvPr>
+          <p:cNvSpPr>
+            <a:spLocks xmlns:a="http://schemas.openxmlformats.org/drawingml/2006/main" noGrp="1"/>
+          </p:cNvSpPr>
+          <p:nvPr/>
+        </p:nvSpPr>
+        <p:spPr>
+          <a:xfrm xmlns:a="http://schemas.openxmlformats.org/drawingml/2006/main">
+            <a:off x="8686800" y="2838450"/>
+            <a:ext cx="2381250" cy="666750"/>
+          </a:xfrm>
+          <a:prstGeom xmlns:a="http://schemas.openxmlformats.org/drawingml/2006/main" prst="rect">
+            <a:avLst/>
+          </a:prstGeom>
+          <a:noFill xmlns:a="http://schemas.openxmlformats.org/drawingml/2006/main"/>
+          <a:ln xmlns:a="http://schemas.openxmlformats.org/drawingml/2006/main" w="0">
+            <a:noFill/>
+            <a:prstDash val="solid"/>
+          </a:ln>
+        </p:spPr>
+        <p:txBody>
+          <a:bodyPr xmlns:a="http://schemas.openxmlformats.org/drawingml/2006/main"/>
+          <a:lstStyle xmlns:a="http://schemas.openxmlformats.org/drawingml/2006/main"/>
+          <a:p xmlns:a="http://schemas.openxmlformats.org/drawingml/2006/main">
+            <a:pPr>
+              <a:defRPr sz="1425">
+                <a:solidFill>
+                  <a:srgbClr val="4F5661"/>
+                </a:solidFill>
+              </a:defRPr>
+            </a:pPr>
+            <a:r>
+              <a:rPr sz="1425">
+                <a:solidFill>
+                  <a:srgbClr val="4F5661"/>
+                </a:solidFill>
+              </a:rPr>
+              <a:t>confident wrong intent</a:t>
+            </a:r>
+          </a:p>
+        </p:txBody>
+      </p:sp>
+      <p:sp>
+        <p:nvSpPr>
+          <p:cNvPr id="12" name="">
+            <a:extLst xmlns:a="http://schemas.openxmlformats.org/drawingml/2006/main">
+              <a:ext uri="{FF2B5EF4-FFF2-40B4-BE49-F238E27FC236}">
+                <a16:creationId xmlns:a16="http://schemas.microsoft.com/office/drawing/2014/main" id="{6091DDFD-DE94-4E18-800B-C41D0DAC941D}"/>
+              </a:ext>
+            </a:extLst>
+          </p:cNvPr>
+          <p:cNvSpPr>
+            <a:spLocks xmlns:a="http://schemas.openxmlformats.org/drawingml/2006/main" noGrp="1"/>
+          </p:cNvSpPr>
+          <p:nvPr/>
+        </p:nvSpPr>
+        <p:spPr>
+          <a:xfrm xmlns:a="http://schemas.openxmlformats.org/drawingml/2006/main">
+            <a:off x="819150" y="4914900"/>
+            <a:ext cx="66675" cy="704850"/>
           </a:xfrm>
           <a:prstGeom xmlns:a="http://schemas.openxmlformats.org/drawingml/2006/main" prst="rect">
             <a:avLst/>
           </a:prstGeom>
           <a:solidFill xmlns:a="http://schemas.openxmlformats.org/drawingml/2006/main">
-            <a:srgbClr val="0D6E7A"/>
+            <a:srgbClr val="C84C2A"/>
           </a:solidFill>
           <a:ln xmlns:a="http://schemas.openxmlformats.org/drawingml/2006/main" w="0">
             <a:solidFill>
-              <a:srgbClr val="0D6E7A"/>
+              <a:srgbClr val="C84C2A"/>
             </a:solidFill>
             <a:prstDash val="solid"/>
           </a:ln>
@@ -3980,151 +6487,100 @@
       </p:sp>
       <p:sp>
         <p:nvSpPr>
-          <p:cNvPr id="7" name="">
-            <a:extLst xmlns:a="http://schemas.openxmlformats.org/drawingml/2006/main">
-              <a:ext uri="{FF2B5EF4-FFF2-40B4-BE49-F238E27FC236}">
-                <a16:creationId xmlns:a16="http://schemas.microsoft.com/office/drawing/2014/main" id="{18B3C619-03D6-4932-ABC6-C33E9A57D1E5}"/>
-              </a:ext>
-            </a:extLst>
-          </p:cNvPr>
-          <p:cNvSpPr>
-            <a:spLocks xmlns:a="http://schemas.openxmlformats.org/drawingml/2006/main" noGrp="1"/>
-          </p:cNvSpPr>
-          <p:nvPr/>
-        </p:nvSpPr>
-        <p:spPr>
-          <a:xfrm xmlns:a="http://schemas.openxmlformats.org/drawingml/2006/main">
-            <a:off x="7905750" y="1733550"/>
-            <a:ext cx="3219450" cy="2095500"/>
-          </a:xfrm>
-          <a:prstGeom xmlns:a="http://schemas.openxmlformats.org/drawingml/2006/main" prst="rect">
-            <a:avLst/>
-          </a:prstGeom>
-          <a:noFill xmlns:a="http://schemas.openxmlformats.org/drawingml/2006/main"/>
-          <a:ln xmlns:a="http://schemas.openxmlformats.org/drawingml/2006/main" w="0">
-            <a:noFill/>
-            <a:prstDash val="solid"/>
-          </a:ln>
-        </p:spPr>
-        <p:txBody>
-          <a:bodyPr xmlns:a="http://schemas.openxmlformats.org/drawingml/2006/main"/>
-          <a:lstStyle xmlns:a="http://schemas.openxmlformats.org/drawingml/2006/main"/>
-          <a:p xmlns:a="http://schemas.openxmlformats.org/drawingml/2006/main">
-            <a:pPr>
-              <a:defRPr sz="1650">
-                <a:solidFill>
-                  <a:srgbClr val="4F5661"/>
-                </a:solidFill>
-              </a:defRPr>
-            </a:pPr>
-            <a:r>
-              <a:rPr sz="1650">
-                <a:solidFill>
-                  <a:srgbClr val="4F5661"/>
-                </a:solidFill>
-              </a:rPr>
-              <a:t>- Same trajectories, same 2-D latent, no strategy labels.</a:t>
-            </a:r>
-          </a:p>
-          <a:p xmlns:a="http://schemas.openxmlformats.org/drawingml/2006/main">
-            <a:pPr>
-              <a:defRPr sz="1650">
-                <a:solidFill>
-                  <a:srgbClr val="4F5661"/>
-                </a:solidFill>
-              </a:defRPr>
-            </a:pPr>
-            <a:r>
-              <a:rPr sz="1650">
-                <a:solidFill>
-                  <a:srgbClr val="4F5661"/>
-                </a:solidFill>
-              </a:rPr>
-              <a:t>- JEPA probe: 0.89 vs VAE: 0.53.</a:t>
-            </a:r>
-          </a:p>
-          <a:p xmlns:a="http://schemas.openxmlformats.org/drawingml/2006/main">
-            <a:pPr>
-              <a:defRPr sz="1650">
-                <a:solidFill>
-                  <a:srgbClr val="4F5661"/>
-                </a:solidFill>
-              </a:defRPr>
-            </a:pPr>
-            <a:r>
-              <a:rPr sz="1650">
-                <a:solidFill>
-                  <a:srgbClr val="4F5661"/>
-                </a:solidFill>
-              </a:rPr>
-              <a:t>- ARI: 0.65 vs 0.14.</a:t>
-            </a:r>
-          </a:p>
-          <a:p xmlns:a="http://schemas.openxmlformats.org/drawingml/2006/main">
-            <a:pPr>
-              <a:defRPr sz="1650">
-                <a:solidFill>
-                  <a:srgbClr val="4F5661"/>
-                </a:solidFill>
-              </a:defRPr>
-            </a:pPr>
-            <a:r>
-              <a:rPr sz="1650">
-                <a:solidFill>
-                  <a:srgbClr val="4F5661"/>
-                </a:solidFill>
-              </a:rPr>
-              <a:t>- JEPA belief planner reaches 4.08 captures/episode.</a:t>
-            </a:r>
-          </a:p>
-        </p:txBody>
-      </p:sp>
-      <p:sp>
-        <p:nvSpPr>
-          <p:cNvPr id="8" name="">
-            <a:extLst xmlns:a="http://schemas.openxmlformats.org/drawingml/2006/main">
-              <a:ext uri="{FF2B5EF4-FFF2-40B4-BE49-F238E27FC236}">
-                <a16:creationId xmlns:a16="http://schemas.microsoft.com/office/drawing/2014/main" id="{81F064C9-4528-4F45-BCE2-4895895F6C05}"/>
-              </a:ext>
-            </a:extLst>
-          </p:cNvPr>
-          <p:cNvSpPr>
-            <a:spLocks xmlns:a="http://schemas.openxmlformats.org/drawingml/2006/main" noGrp="1"/>
-          </p:cNvSpPr>
-          <p:nvPr/>
-        </p:nvSpPr>
-        <p:spPr>
-          <a:xfrm xmlns:a="http://schemas.openxmlformats.org/drawingml/2006/main">
-            <a:off x="7696200" y="4591050"/>
-            <a:ext cx="3524250" cy="762000"/>
-          </a:xfrm>
-          <a:prstGeom xmlns:a="http://schemas.openxmlformats.org/drawingml/2006/main" prst="rect">
-            <a:avLst/>
-          </a:prstGeom>
-          <a:noFill xmlns:a="http://schemas.openxmlformats.org/drawingml/2006/main"/>
-          <a:ln xmlns:a="http://schemas.openxmlformats.org/drawingml/2006/main" w="0">
-            <a:noFill/>
-            <a:prstDash val="solid"/>
-          </a:ln>
-        </p:spPr>
-        <p:txBody>
-          <a:bodyPr xmlns:a="http://schemas.openxmlformats.org/drawingml/2006/main"/>
-          <a:lstStyle xmlns:a="http://schemas.openxmlformats.org/drawingml/2006/main"/>
-          <a:p xmlns:a="http://schemas.openxmlformats.org/drawingml/2006/main">
-            <a:pPr>
-              <a:defRPr sz="1950" b="1">
+          <p:cNvPr id="13" name="">
+            <a:extLst xmlns:a="http://schemas.openxmlformats.org/drawingml/2006/main">
+              <a:ext uri="{FF2B5EF4-FFF2-40B4-BE49-F238E27FC236}">
+                <a16:creationId xmlns:a16="http://schemas.microsoft.com/office/drawing/2014/main" id="{BC16AE0E-CB14-4C42-AA9F-549DB3FA955A}"/>
+              </a:ext>
+            </a:extLst>
+          </p:cNvPr>
+          <p:cNvSpPr>
+            <a:spLocks xmlns:a="http://schemas.openxmlformats.org/drawingml/2006/main" noGrp="1"/>
+          </p:cNvSpPr>
+          <p:nvPr/>
+        </p:nvSpPr>
+        <p:spPr>
+          <a:xfrm xmlns:a="http://schemas.openxmlformats.org/drawingml/2006/main">
+            <a:off x="1066800" y="4838700"/>
+            <a:ext cx="8763000" cy="742950"/>
+          </a:xfrm>
+          <a:prstGeom xmlns:a="http://schemas.openxmlformats.org/drawingml/2006/main" prst="rect">
+            <a:avLst/>
+          </a:prstGeom>
+          <a:noFill xmlns:a="http://schemas.openxmlformats.org/drawingml/2006/main"/>
+          <a:ln xmlns:a="http://schemas.openxmlformats.org/drawingml/2006/main" w="0">
+            <a:noFill/>
+            <a:prstDash val="solid"/>
+          </a:ln>
+        </p:spPr>
+        <p:txBody>
+          <a:bodyPr xmlns:a="http://schemas.openxmlformats.org/drawingml/2006/main"/>
+          <a:lstStyle xmlns:a="http://schemas.openxmlformats.org/drawingml/2006/main"/>
+          <a:p xmlns:a="http://schemas.openxmlformats.org/drawingml/2006/main">
+            <a:pPr>
+              <a:defRPr sz="2025" b="1">
                 <a:solidFill>
                   <a:srgbClr val="0A0A0A"/>
                 </a:solidFill>
               </a:defRPr>
             </a:pPr>
             <a:r>
-              <a:rPr sz="1950" b="1">
+              <a:rPr sz="2025" b="1">
                 <a:solidFill>
                   <a:srgbClr val="0A0A0A"/>
                 </a:solidFill>
               </a:rPr>
-              <a:t>Predicting future behavior keeps the useful intent signal and drops evasion noise.</a:t>
+              <a:t>A point estimate throws away uncertainty. When the estimate is wrong, the predators move toward the wrong interception.</a:t>
+            </a:r>
+          </a:p>
+        </p:txBody>
+      </p:sp>
+      <p:sp>
+        <p:nvSpPr>
+          <p:cNvPr id="14" name="">
+            <a:extLst xmlns:a="http://schemas.openxmlformats.org/drawingml/2006/main">
+              <a:ext uri="{FF2B5EF4-FFF2-40B4-BE49-F238E27FC236}">
+                <a16:creationId xmlns:a16="http://schemas.microsoft.com/office/drawing/2014/main" id="{A37B081E-8850-4C17-966F-75969A67F80A}"/>
+              </a:ext>
+            </a:extLst>
+          </p:cNvPr>
+          <p:cNvSpPr>
+            <a:spLocks xmlns:a="http://schemas.openxmlformats.org/drawingml/2006/main" noGrp="1"/>
+          </p:cNvSpPr>
+          <p:nvPr/>
+        </p:nvSpPr>
+        <p:spPr>
+          <a:xfrm xmlns:a="http://schemas.openxmlformats.org/drawingml/2006/main">
+            <a:off x="11277600" y="6267450"/>
+            <a:ext cx="457200" cy="228600"/>
+          </a:xfrm>
+          <a:prstGeom xmlns:a="http://schemas.openxmlformats.org/drawingml/2006/main" prst="rect">
+            <a:avLst/>
+          </a:prstGeom>
+          <a:noFill xmlns:a="http://schemas.openxmlformats.org/drawingml/2006/main"/>
+          <a:ln xmlns:a="http://schemas.openxmlformats.org/drawingml/2006/main" w="0">
+            <a:noFill/>
+            <a:prstDash val="solid"/>
+          </a:ln>
+        </p:spPr>
+        <p:txBody>
+          <a:bodyPr xmlns:a="http://schemas.openxmlformats.org/drawingml/2006/main"/>
+          <a:lstStyle xmlns:a="http://schemas.openxmlformats.org/drawingml/2006/main"/>
+          <a:p xmlns:a="http://schemas.openxmlformats.org/drawingml/2006/main">
+            <a:pPr algn="r">
+              <a:defRPr sz="1050">
+                <a:solidFill>
+                  <a:srgbClr val="4F5661"/>
+                </a:solidFill>
+              </a:defRPr>
+            </a:pPr>
+            <a:r>
+              <a:rPr sz="1050">
+                <a:solidFill>
+                  <a:srgbClr val="4F5661"/>
+                </a:solidFill>
+              </a:rPr>
+              <a:t>05</a:t>
             </a:r>
           </a:p>
         </p:txBody>
@@ -4132,7 +6588,7 @@
     </p:spTree>
     <p:extLst>
       <p:ext uri="{BB962C8B-B14F-4D97-AF65-F5344CB8AC3E}">
-        <p14:creationId xmlns:p14="http://schemas.microsoft.com/office/powerpoint/2010/main" val="1248801649"/>
+        <p14:creationId xmlns:p14="http://schemas.microsoft.com/office/powerpoint/2010/main" val="1859245527"/>
       </p:ext>
     </p:extLst>
   </p:cSld>
@@ -4163,7 +6619,7 @@
           <p:cNvPr id="1" name="">
             <a:extLst xmlns:a="http://schemas.openxmlformats.org/drawingml/2006/main">
               <a:ext uri="{FF2B5EF4-FFF2-40B4-BE49-F238E27FC236}">
-                <a16:creationId xmlns:a16="http://schemas.microsoft.com/office/drawing/2014/main" id="{A9E86014-B67B-4A6C-A966-5F8A05F65926}"/>
+                <a16:creationId xmlns:a16="http://schemas.microsoft.com/office/drawing/2014/main" id="{857DFF60-88CA-4BAA-8E8E-7344EC1AE9FE}"/>
               </a:ext>
             </a:extLst>
           </p:cNvPr>
@@ -4203,7 +6659,7 @@
                   <a:srgbClr val="4F5661"/>
                 </a:solidFill>
               </a:rPr>
-              <a:t>BOUNDARY</a:t>
+              <a:t>PART 2</a:t>
             </a:r>
           </a:p>
         </p:txBody>
@@ -4213,7 +6669,7 @@
           <p:cNvPr id="2" name="">
             <a:extLst xmlns:a="http://schemas.openxmlformats.org/drawingml/2006/main">
               <a:ext uri="{FF2B5EF4-FFF2-40B4-BE49-F238E27FC236}">
-                <a16:creationId xmlns:a16="http://schemas.microsoft.com/office/drawing/2014/main" id="{C070F503-6E98-480F-BF73-2A06FB3CDDB3}"/>
+                <a16:creationId xmlns:a16="http://schemas.microsoft.com/office/drawing/2014/main" id="{02FC33F2-5FD3-405B-87BF-B3A9268AA100}"/>
               </a:ext>
             </a:extLst>
           </p:cNvPr>
@@ -4225,7 +6681,7 @@
         <p:spPr>
           <a:xfrm xmlns:a="http://schemas.openxmlformats.org/drawingml/2006/main">
             <a:off x="533400" y="590550"/>
-            <a:ext cx="10287000" cy="914400"/>
+            <a:ext cx="10287000" cy="933450"/>
           </a:xfrm>
           <a:prstGeom xmlns:a="http://schemas.openxmlformats.org/drawingml/2006/main" prst="rect">
             <a:avLst/>
@@ -4253,7 +6709,7 @@
                   <a:srgbClr val="0A0A0A"/>
                 </a:solidFill>
               </a:rPr>
-              <a:t>The main caveat is dynamics, not representation</a:t>
+              <a:t>The planner gets value from the whole belief</a:t>
             </a:r>
           </a:p>
         </p:txBody>
@@ -4263,7 +6719,7 @@
           <p:cNvPr id="3" name="">
             <a:extLst xmlns:a="http://schemas.openxmlformats.org/drawingml/2006/main">
               <a:ext uri="{FF2B5EF4-FFF2-40B4-BE49-F238E27FC236}">
-                <a16:creationId xmlns:a16="http://schemas.microsoft.com/office/drawing/2014/main" id="{44DCF3AC-595F-491F-A90C-8AD16CE6F35A}"/>
+                <a16:creationId xmlns:a16="http://schemas.microsoft.com/office/drawing/2014/main" id="{FF32EF74-A0A6-46DD-95B6-DBA0364BD094}"/>
               </a:ext>
             </a:extLst>
           </p:cNvPr>
@@ -4313,7 +6769,7 @@
           <p:cNvPr id="4" name="">
             <a:extLst xmlns:a="http://schemas.openxmlformats.org/drawingml/2006/main">
               <a:ext uri="{FF2B5EF4-FFF2-40B4-BE49-F238E27FC236}">
-                <a16:creationId xmlns:a16="http://schemas.microsoft.com/office/drawing/2014/main" id="{91579FA4-38A9-447C-83D0-A62761731161}"/>
+                <a16:creationId xmlns:a16="http://schemas.microsoft.com/office/drawing/2014/main" id="{C8B627D1-9814-4C3B-8D8A-E06A8BAEFCF1}"/>
               </a:ext>
             </a:extLst>
           </p:cNvPr>
@@ -4350,13 +6806,13 @@
           <p:nvPr/>
         </p:nvPicPr>
         <p:blipFill>
-          <a:blip xmlns:r="http://schemas.openxmlformats.org/officeDocument/2006/relationships" xmlns:a="http://schemas.openxmlformats.org/drawingml/2006/main" r:embed="R0ce6d5671a8741ac"/>
+          <a:blip xmlns:r="http://schemas.openxmlformats.org/officeDocument/2006/relationships" xmlns:a="http://schemas.openxmlformats.org/drawingml/2006/main" r:embed="R7de016b5a6144926"/>
           <a:stretch xmlns:a="http://schemas.openxmlformats.org/drawingml/2006/main"/>
         </p:blipFill>
         <p:spPr>
           <a:xfrm xmlns:a="http://schemas.openxmlformats.org/drawingml/2006/main">
-            <a:off x="723900" y="1733550"/>
-            <a:ext cx="6191250" cy="3810000"/>
+            <a:off x="685800" y="1847850"/>
+            <a:ext cx="6267450" cy="3581400"/>
           </a:xfrm>
           <a:prstGeom xmlns:a="http://schemas.openxmlformats.org/drawingml/2006/main" prst="rect">
             <a:avLst/>
@@ -4368,7 +6824,7 @@
           <p:cNvPr id="6" name="">
             <a:extLst xmlns:a="http://schemas.openxmlformats.org/drawingml/2006/main">
               <a:ext uri="{FF2B5EF4-FFF2-40B4-BE49-F238E27FC236}">
-                <a16:creationId xmlns:a16="http://schemas.microsoft.com/office/drawing/2014/main" id="{CCBF9B9F-A5AA-43B6-AE50-EB08F9862734}"/>
+                <a16:creationId xmlns:a16="http://schemas.microsoft.com/office/drawing/2014/main" id="{566AE27D-2076-4FC4-91D7-338F6291A153}"/>
               </a:ext>
             </a:extLst>
           </p:cNvPr>
@@ -4380,7 +6836,7 @@
         <p:spPr>
           <a:xfrm xmlns:a="http://schemas.openxmlformats.org/drawingml/2006/main">
             <a:off x="7524750" y="1752600"/>
-            <a:ext cx="57150" cy="2247900"/>
+            <a:ext cx="57150" cy="2095500"/>
           </a:xfrm>
           <a:prstGeom xmlns:a="http://schemas.openxmlformats.org/drawingml/2006/main" prst="rect">
             <a:avLst/>
@@ -4401,7 +6857,7 @@
           <p:cNvPr id="7" name="">
             <a:extLst xmlns:a="http://schemas.openxmlformats.org/drawingml/2006/main">
               <a:ext uri="{FF2B5EF4-FFF2-40B4-BE49-F238E27FC236}">
-                <a16:creationId xmlns:a16="http://schemas.microsoft.com/office/drawing/2014/main" id="{5A99755C-C121-4CA2-9BDF-B62C2AF85EB0}"/>
+                <a16:creationId xmlns:a16="http://schemas.microsoft.com/office/drawing/2014/main" id="{ADBCAD13-A404-4467-9272-A9DE3343F8E9}"/>
               </a:ext>
             </a:extLst>
           </p:cNvPr>
@@ -4413,7 +6869,7 @@
         <p:spPr>
           <a:xfrm xmlns:a="http://schemas.openxmlformats.org/drawingml/2006/main">
             <a:off x="7734300" y="1733550"/>
-            <a:ext cx="3467100" cy="2247900"/>
+            <a:ext cx="3429000" cy="2095500"/>
           </a:xfrm>
           <a:prstGeom xmlns:a="http://schemas.openxmlformats.org/drawingml/2006/main" prst="rect">
             <a:avLst/>
@@ -4441,7 +6897,7 @@
                   <a:srgbClr val="4F5661"/>
                 </a:solidFill>
               </a:rPr>
-              <a:t>- Self-supervised belief works in the simulator planner.</a:t>
+              <a:t>- Flat-belief planner: 3.07 captures/episode.</a:t>
             </a:r>
           </a:p>
           <a:p xmlns:a="http://schemas.openxmlformats.org/drawingml/2006/main">
@@ -4458,7 +6914,7 @@
                   <a:srgbClr val="4F5661"/>
                 </a:solidFill>
               </a:rPr>
-              <a:t>- The learned latent world planner reaches only 0.57 captures.</a:t>
+              <a:t>- Reactive oracle with true intent: 4.05.</a:t>
             </a:r>
           </a:p>
           <a:p xmlns:a="http://schemas.openxmlformats.org/drawingml/2006/main">
@@ -4475,7 +6931,7 @@
                   <a:srgbClr val="4F5661"/>
                 </a:solidFill>
               </a:rPr>
-              <a:t>- So the paper should claim opponent belief and planning, not solved learned dynamics.</a:t>
+              <a:t>- Planner with inferred belief: 4.31.</a:t>
             </a:r>
           </a:p>
         </p:txBody>
@@ -4485,47 +6941,47 @@
           <p:cNvPr id="8" name="">
             <a:extLst xmlns:a="http://schemas.openxmlformats.org/drawingml/2006/main">
               <a:ext uri="{FF2B5EF4-FFF2-40B4-BE49-F238E27FC236}">
-                <a16:creationId xmlns:a16="http://schemas.microsoft.com/office/drawing/2014/main" id="{3306E1DB-650A-4E5C-8FF5-EF15C9875CB9}"/>
-              </a:ext>
-            </a:extLst>
-          </p:cNvPr>
-          <p:cNvSpPr>
-            <a:spLocks xmlns:a="http://schemas.openxmlformats.org/drawingml/2006/main" noGrp="1"/>
-          </p:cNvSpPr>
-          <p:nvPr/>
-        </p:nvSpPr>
-        <p:spPr>
-          <a:xfrm xmlns:a="http://schemas.openxmlformats.org/drawingml/2006/main">
-            <a:off x="7524750" y="4552950"/>
-            <a:ext cx="3676650" cy="800100"/>
-          </a:xfrm>
-          <a:prstGeom xmlns:a="http://schemas.openxmlformats.org/drawingml/2006/main" prst="rect">
-            <a:avLst/>
-          </a:prstGeom>
-          <a:noFill xmlns:a="http://schemas.openxmlformats.org/drawingml/2006/main"/>
-          <a:ln xmlns:a="http://schemas.openxmlformats.org/drawingml/2006/main" w="0">
-            <a:noFill/>
-            <a:prstDash val="solid"/>
-          </a:ln>
-        </p:spPr>
-        <p:txBody>
-          <a:bodyPr xmlns:a="http://schemas.openxmlformats.org/drawingml/2006/main"/>
-          <a:lstStyle xmlns:a="http://schemas.openxmlformats.org/drawingml/2006/main"/>
-          <a:p xmlns:a="http://schemas.openxmlformats.org/drawingml/2006/main">
-            <a:pPr>
-              <a:defRPr sz="1950" b="1">
+                <a16:creationId xmlns:a16="http://schemas.microsoft.com/office/drawing/2014/main" id="{A82FCF55-8BDE-4734-B5BA-69821DEF9D6D}"/>
+              </a:ext>
+            </a:extLst>
+          </p:cNvPr>
+          <p:cNvSpPr>
+            <a:spLocks xmlns:a="http://schemas.openxmlformats.org/drawingml/2006/main" noGrp="1"/>
+          </p:cNvSpPr>
+          <p:nvPr/>
+        </p:nvSpPr>
+        <p:spPr>
+          <a:xfrm xmlns:a="http://schemas.openxmlformats.org/drawingml/2006/main">
+            <a:off x="7524750" y="4476750"/>
+            <a:ext cx="3752850" cy="876300"/>
+          </a:xfrm>
+          <a:prstGeom xmlns:a="http://schemas.openxmlformats.org/drawingml/2006/main" prst="rect">
+            <a:avLst/>
+          </a:prstGeom>
+          <a:noFill xmlns:a="http://schemas.openxmlformats.org/drawingml/2006/main"/>
+          <a:ln xmlns:a="http://schemas.openxmlformats.org/drawingml/2006/main" w="0">
+            <a:noFill/>
+            <a:prstDash val="solid"/>
+          </a:ln>
+        </p:spPr>
+        <p:txBody>
+          <a:bodyPr xmlns:a="http://schemas.openxmlformats.org/drawingml/2006/main"/>
+          <a:lstStyle xmlns:a="http://schemas.openxmlformats.org/drawingml/2006/main"/>
+          <a:p xmlns:a="http://schemas.openxmlformats.org/drawingml/2006/main">
+            <a:pPr>
+              <a:defRPr sz="1875" b="1">
                 <a:solidFill>
                   <a:srgbClr val="0A0A0A"/>
                 </a:solidFill>
               </a:defRPr>
             </a:pPr>
             <a:r>
-              <a:rPr sz="1950" b="1">
+              <a:rPr sz="1875" b="1">
                 <a:solidFill>
                   <a:srgbClr val="0A0A0A"/>
                 </a:solidFill>
               </a:rPr>
-              <a:t>The negative result is useful: it tells reviewers exactly where the next engineering risk is.</a:t>
+              <a:t>The lift comes from inference plus lookahead, measured against a flat-belief ablation.</a:t>
             </a:r>
           </a:p>
         </p:txBody>
@@ -4533,7 +6989,7 @@
     </p:spTree>
     <p:extLst>
       <p:ext uri="{BB962C8B-B14F-4D97-AF65-F5344CB8AC3E}">
-        <p14:creationId xmlns:p14="http://schemas.microsoft.com/office/powerpoint/2010/main" val="476257425"/>
+        <p14:creationId xmlns:p14="http://schemas.microsoft.com/office/powerpoint/2010/main" val="2126629988"/>
       </p:ext>
     </p:extLst>
   </p:cSld>
@@ -4564,7 +7020,7 @@
           <p:cNvPr id="1" name="">
             <a:extLst xmlns:a="http://schemas.openxmlformats.org/drawingml/2006/main">
               <a:ext uri="{FF2B5EF4-FFF2-40B4-BE49-F238E27FC236}">
-                <a16:creationId xmlns:a16="http://schemas.microsoft.com/office/drawing/2014/main" id="{8DC48964-9AA2-449B-9C70-3DA90319797E}"/>
+                <a16:creationId xmlns:a16="http://schemas.microsoft.com/office/drawing/2014/main" id="{16C592FD-BE74-4D42-A458-576E7EA66824}"/>
               </a:ext>
             </a:extLst>
           </p:cNvPr>
@@ -4604,7 +7060,7 @@
                   <a:srgbClr val="4F5661"/>
                 </a:solidFill>
               </a:rPr>
-              <a:t>SECONDARY EVIDENCE</a:t>
+              <a:t>INTERPRETATION</a:t>
             </a:r>
           </a:p>
         </p:txBody>
@@ -4614,7 +7070,7 @@
           <p:cNvPr id="2" name="">
             <a:extLst xmlns:a="http://schemas.openxmlformats.org/drawingml/2006/main">
               <a:ext uri="{FF2B5EF4-FFF2-40B4-BE49-F238E27FC236}">
-                <a16:creationId xmlns:a16="http://schemas.microsoft.com/office/drawing/2014/main" id="{8EED05F0-5F88-4882-9D31-4227D1EB48D7}"/>
+                <a16:creationId xmlns:a16="http://schemas.microsoft.com/office/drawing/2014/main" id="{9B1EBAEF-5F1C-495B-8571-B9DB8967523A}"/>
               </a:ext>
             </a:extLst>
           </p:cNvPr>
@@ -4626,7 +7082,7 @@
         <p:spPr>
           <a:xfrm xmlns:a="http://schemas.openxmlformats.org/drawingml/2006/main">
             <a:off x="533400" y="590550"/>
-            <a:ext cx="10287000" cy="914400"/>
+            <a:ext cx="10287000" cy="933450"/>
           </a:xfrm>
           <a:prstGeom xmlns:a="http://schemas.openxmlformats.org/drawingml/2006/main" prst="rect">
             <a:avLst/>
@@ -4654,7 +7110,7 @@
                   <a:srgbClr val="0A0A0A"/>
                 </a:solidFill>
               </a:rPr>
-              <a:t>The BC follow-up says strategy information has value</a:t>
+              <a:t>The oracle comparison needs precise wording</a:t>
             </a:r>
           </a:p>
         </p:txBody>
@@ -4664,29 +7120,29 @@
           <p:cNvPr id="3" name="">
             <a:extLst xmlns:a="http://schemas.openxmlformats.org/drawingml/2006/main">
               <a:ext uri="{FF2B5EF4-FFF2-40B4-BE49-F238E27FC236}">
-                <a16:creationId xmlns:a16="http://schemas.microsoft.com/office/drawing/2014/main" id="{ABAE74A7-7180-4FDE-8A81-F70552EB5849}"/>
-              </a:ext>
-            </a:extLst>
-          </p:cNvPr>
-          <p:cNvSpPr>
-            <a:spLocks xmlns:a="http://schemas.openxmlformats.org/drawingml/2006/main" noGrp="1"/>
-          </p:cNvSpPr>
-          <p:nvPr/>
-        </p:nvSpPr>
-        <p:spPr>
-          <a:xfrm xmlns:a="http://schemas.openxmlformats.org/drawingml/2006/main">
-            <a:off x="533400" y="1581150"/>
-            <a:ext cx="5067300" cy="3448050"/>
+                <a16:creationId xmlns:a16="http://schemas.microsoft.com/office/drawing/2014/main" id="{33AE94C1-20A9-4F4B-AB8A-4AAB1E9F7A3C}"/>
+              </a:ext>
+            </a:extLst>
+          </p:cNvPr>
+          <p:cNvSpPr>
+            <a:spLocks xmlns:a="http://schemas.openxmlformats.org/drawingml/2006/main" noGrp="1"/>
+          </p:cNvSpPr>
+          <p:nvPr/>
+        </p:nvSpPr>
+        <p:spPr>
+          <a:xfrm xmlns:a="http://schemas.openxmlformats.org/drawingml/2006/main">
+            <a:off x="685800" y="1847850"/>
+            <a:ext cx="800100" cy="57150"/>
           </a:xfrm>
           <a:prstGeom xmlns:a="http://schemas.openxmlformats.org/drawingml/2006/main" prst="rect">
             <a:avLst/>
           </a:prstGeom>
           <a:solidFill xmlns:a="http://schemas.openxmlformats.org/drawingml/2006/main">
-            <a:srgbClr val="F4F5F7"/>
+            <a:srgbClr val="0A0A0A"/>
           </a:solidFill>
           <a:ln xmlns:a="http://schemas.openxmlformats.org/drawingml/2006/main" w="0">
             <a:solidFill>
-              <a:srgbClr val="F4F5F7"/>
+              <a:srgbClr val="0A0A0A"/>
             </a:solidFill>
             <a:prstDash val="solid"/>
           </a:ln>
@@ -4697,141 +7153,180 @@
           <p:cNvPr id="4" name="">
             <a:extLst xmlns:a="http://schemas.openxmlformats.org/drawingml/2006/main">
               <a:ext uri="{FF2B5EF4-FFF2-40B4-BE49-F238E27FC236}">
-                <a16:creationId xmlns:a16="http://schemas.microsoft.com/office/drawing/2014/main" id="{45616D12-2A75-4332-A27C-EC845EE78D36}"/>
-              </a:ext>
-            </a:extLst>
-          </p:cNvPr>
-          <p:cNvSpPr>
-            <a:spLocks xmlns:a="http://schemas.openxmlformats.org/drawingml/2006/main" noGrp="1"/>
-          </p:cNvSpPr>
-          <p:nvPr/>
-        </p:nvSpPr>
-        <p:spPr>
-          <a:xfrm xmlns:a="http://schemas.openxmlformats.org/drawingml/2006/main">
-            <a:off x="6210300" y="1581150"/>
-            <a:ext cx="5067300" cy="3448050"/>
+                <a16:creationId xmlns:a16="http://schemas.microsoft.com/office/drawing/2014/main" id="{F14F6E8D-AEE3-4BE8-BD18-CE8D09270590}"/>
+              </a:ext>
+            </a:extLst>
+          </p:cNvPr>
+          <p:cNvSpPr>
+            <a:spLocks xmlns:a="http://schemas.openxmlformats.org/drawingml/2006/main" noGrp="1"/>
+          </p:cNvSpPr>
+          <p:nvPr/>
+        </p:nvSpPr>
+        <p:spPr>
+          <a:xfrm xmlns:a="http://schemas.openxmlformats.org/drawingml/2006/main">
+            <a:off x="685800" y="2114550"/>
+            <a:ext cx="2914650" cy="419100"/>
+          </a:xfrm>
+          <a:prstGeom xmlns:a="http://schemas.openxmlformats.org/drawingml/2006/main" prst="rect">
+            <a:avLst/>
+          </a:prstGeom>
+          <a:noFill xmlns:a="http://schemas.openxmlformats.org/drawingml/2006/main"/>
+          <a:ln xmlns:a="http://schemas.openxmlformats.org/drawingml/2006/main" w="0">
+            <a:noFill/>
+            <a:prstDash val="solid"/>
+          </a:ln>
+        </p:spPr>
+        <p:txBody>
+          <a:bodyPr xmlns:a="http://schemas.openxmlformats.org/drawingml/2006/main"/>
+          <a:lstStyle xmlns:a="http://schemas.openxmlformats.org/drawingml/2006/main"/>
+          <a:p xmlns:a="http://schemas.openxmlformats.org/drawingml/2006/main">
+            <a:pPr>
+              <a:defRPr sz="1875" b="1">
+                <a:solidFill>
+                  <a:srgbClr val="0A0A0A"/>
+                </a:solidFill>
+              </a:defRPr>
+            </a:pPr>
+            <a:r>
+              <a:rPr sz="1875" b="1">
+                <a:solidFill>
+                  <a:srgbClr val="0A0A0A"/>
+                </a:solidFill>
+              </a:rPr>
+              <a:t>Oracle policy</a:t>
+            </a:r>
+          </a:p>
+        </p:txBody>
+      </p:sp>
+      <p:sp>
+        <p:nvSpPr>
+          <p:cNvPr id="5" name="">
+            <a:extLst xmlns:a="http://schemas.openxmlformats.org/drawingml/2006/main">
+              <a:ext uri="{FF2B5EF4-FFF2-40B4-BE49-F238E27FC236}">
+                <a16:creationId xmlns:a16="http://schemas.microsoft.com/office/drawing/2014/main" id="{5ED0477E-9B78-4647-B427-30D1B9D57717}"/>
+              </a:ext>
+            </a:extLst>
+          </p:cNvPr>
+          <p:cNvSpPr>
+            <a:spLocks xmlns:a="http://schemas.openxmlformats.org/drawingml/2006/main" noGrp="1"/>
+          </p:cNvSpPr>
+          <p:nvPr/>
+        </p:nvSpPr>
+        <p:spPr>
+          <a:xfrm xmlns:a="http://schemas.openxmlformats.org/drawingml/2006/main">
+            <a:off x="685800" y="2667000"/>
+            <a:ext cx="2914650" cy="2000250"/>
+          </a:xfrm>
+          <a:prstGeom xmlns:a="http://schemas.openxmlformats.org/drawingml/2006/main" prst="rect">
+            <a:avLst/>
+          </a:prstGeom>
+          <a:noFill xmlns:a="http://schemas.openxmlformats.org/drawingml/2006/main"/>
+          <a:ln xmlns:a="http://schemas.openxmlformats.org/drawingml/2006/main" w="0">
+            <a:noFill/>
+            <a:prstDash val="solid"/>
+          </a:ln>
+        </p:spPr>
+        <p:txBody>
+          <a:bodyPr xmlns:a="http://schemas.openxmlformats.org/drawingml/2006/main"/>
+          <a:lstStyle xmlns:a="http://schemas.openxmlformats.org/drawingml/2006/main"/>
+          <a:p xmlns:a="http://schemas.openxmlformats.org/drawingml/2006/main">
+            <a:pPr>
+              <a:defRPr sz="1650">
+                <a:solidFill>
+                  <a:srgbClr val="4F5661"/>
+                </a:solidFill>
+              </a:defRPr>
+            </a:pPr>
+            <a:r>
+              <a:rPr sz="1650">
+                <a:solidFill>
+                  <a:srgbClr val="4F5661"/>
+                </a:solidFill>
+              </a:rPr>
+              <a:t>Receives the true intent, then reacts with the trained policy. It has perfect intent information.</a:t>
+            </a:r>
+          </a:p>
+        </p:txBody>
+      </p:sp>
+      <p:sp>
+        <p:nvSpPr>
+          <p:cNvPr id="6" name="">
+            <a:extLst xmlns:a="http://schemas.openxmlformats.org/drawingml/2006/main">
+              <a:ext uri="{FF2B5EF4-FFF2-40B4-BE49-F238E27FC236}">
+                <a16:creationId xmlns:a16="http://schemas.microsoft.com/office/drawing/2014/main" id="{0D8D7C8D-49E8-4C25-BD72-FAC21DBF7717}"/>
+              </a:ext>
+            </a:extLst>
+          </p:cNvPr>
+          <p:cNvSpPr>
+            <a:spLocks xmlns:a="http://schemas.openxmlformats.org/drawingml/2006/main" noGrp="1"/>
+          </p:cNvSpPr>
+          <p:nvPr/>
+        </p:nvSpPr>
+        <p:spPr>
+          <a:xfrm xmlns:a="http://schemas.openxmlformats.org/drawingml/2006/main">
+            <a:off x="4648200" y="1847850"/>
+            <a:ext cx="800100" cy="57150"/>
           </a:xfrm>
           <a:prstGeom xmlns:a="http://schemas.openxmlformats.org/drawingml/2006/main" prst="rect">
             <a:avLst/>
           </a:prstGeom>
           <a:solidFill xmlns:a="http://schemas.openxmlformats.org/drawingml/2006/main">
-            <a:srgbClr val="F4F5F7"/>
+            <a:srgbClr val="0D6E7A"/>
           </a:solidFill>
           <a:ln xmlns:a="http://schemas.openxmlformats.org/drawingml/2006/main" w="0">
             <a:solidFill>
-              <a:srgbClr val="F4F5F7"/>
+              <a:srgbClr val="0D6E7A"/>
             </a:solidFill>
             <a:prstDash val="solid"/>
           </a:ln>
         </p:spPr>
       </p:sp>
-      <p:pic>
-        <p:nvPicPr>
-          <p:cNvPr id="13" name=""/>
-          <p:cNvPicPr>
-            <a:picLocks xmlns:a="http://schemas.openxmlformats.org/drawingml/2006/main" noChangeAspect="1"/>
-          </p:cNvPicPr>
-          <p:nvPr/>
-        </p:nvPicPr>
-        <p:blipFill>
-          <a:blip xmlns:r="http://schemas.openxmlformats.org/officeDocument/2006/relationships" xmlns:a="http://schemas.openxmlformats.org/drawingml/2006/main" r:embed="R6a1555b77f584f37"/>
-          <a:stretch xmlns:a="http://schemas.openxmlformats.org/drawingml/2006/main"/>
-        </p:blipFill>
-        <p:spPr>
-          <a:xfrm xmlns:a="http://schemas.openxmlformats.org/drawingml/2006/main">
-            <a:off x="685800" y="1863892"/>
-            <a:ext cx="4762500" cy="2882566"/>
-          </a:xfrm>
-          <a:prstGeom xmlns:a="http://schemas.openxmlformats.org/drawingml/2006/main" prst="rect">
-            <a:avLst/>
-          </a:prstGeom>
-        </p:spPr>
-      </p:pic>
-      <p:pic>
-        <p:nvPicPr>
-          <p:cNvPr id="14" name=""/>
-          <p:cNvPicPr>
-            <a:picLocks xmlns:a="http://schemas.openxmlformats.org/drawingml/2006/main" noChangeAspect="1"/>
-          </p:cNvPicPr>
-          <p:nvPr/>
-        </p:nvPicPr>
-        <p:blipFill>
-          <a:blip xmlns:r="http://schemas.openxmlformats.org/officeDocument/2006/relationships" xmlns:a="http://schemas.openxmlformats.org/drawingml/2006/main" r:embed="Rad3fb6de4d16487f"/>
-          <a:stretch xmlns:a="http://schemas.openxmlformats.org/drawingml/2006/main"/>
-        </p:blipFill>
-        <p:spPr>
-          <a:xfrm xmlns:a="http://schemas.openxmlformats.org/drawingml/2006/main">
-            <a:off x="6362700" y="1940312"/>
-            <a:ext cx="4762500" cy="2729726"/>
-          </a:xfrm>
-          <a:prstGeom xmlns:a="http://schemas.openxmlformats.org/drawingml/2006/main" prst="rect">
-            <a:avLst/>
-          </a:prstGeom>
-        </p:spPr>
-      </p:pic>
       <p:sp>
         <p:nvSpPr>
           <p:cNvPr id="7" name="">
             <a:extLst xmlns:a="http://schemas.openxmlformats.org/drawingml/2006/main">
               <a:ext uri="{FF2B5EF4-FFF2-40B4-BE49-F238E27FC236}">
-                <a16:creationId xmlns:a16="http://schemas.microsoft.com/office/drawing/2014/main" id="{B131A434-AA39-4A4A-8B89-358F60162951}"/>
-              </a:ext>
-            </a:extLst>
-          </p:cNvPr>
-          <p:cNvSpPr>
-            <a:spLocks xmlns:a="http://schemas.openxmlformats.org/drawingml/2006/main" noGrp="1"/>
-          </p:cNvSpPr>
-          <p:nvPr/>
-        </p:nvSpPr>
-        <p:spPr>
-          <a:xfrm xmlns:a="http://schemas.openxmlformats.org/drawingml/2006/main">
-            <a:off x="838200" y="5295900"/>
-            <a:ext cx="9525000" cy="685800"/>
-          </a:xfrm>
-          <a:prstGeom xmlns:a="http://schemas.openxmlformats.org/drawingml/2006/main" prst="rect">
-            <a:avLst/>
-          </a:prstGeom>
-          <a:noFill xmlns:a="http://schemas.openxmlformats.org/drawingml/2006/main"/>
-          <a:ln xmlns:a="http://schemas.openxmlformats.org/drawingml/2006/main" w="0">
-            <a:noFill/>
-            <a:prstDash val="solid"/>
-          </a:ln>
-        </p:spPr>
-        <p:txBody>
-          <a:bodyPr xmlns:a="http://schemas.openxmlformats.org/drawingml/2006/main"/>
-          <a:lstStyle xmlns:a="http://schemas.openxmlformats.org/drawingml/2006/main"/>
-          <a:p xmlns:a="http://schemas.openxmlformats.org/drawingml/2006/main">
-            <a:pPr>
-              <a:defRPr sz="1575">
-                <a:solidFill>
-                  <a:srgbClr val="4F5661"/>
-                </a:solidFill>
-              </a:defRPr>
-            </a:pPr>
-            <a:r>
-              <a:rPr sz="1575">
-                <a:solidFill>
-                  <a:srgbClr val="4F5661"/>
-                </a:solidFill>
-              </a:rPr>
-              <a:t>- BC recovers most of the expert edge: 1.22 captures vs 1.35 expert and 0.40 random.</a:t>
-            </a:r>
-          </a:p>
-          <a:p xmlns:a="http://schemas.openxmlformats.org/drawingml/2006/main">
-            <a:pPr>
-              <a:defRPr sz="1575">
-                <a:solidFill>
-                  <a:srgbClr val="4F5661"/>
-                </a:solidFill>
-              </a:defRPr>
-            </a:pPr>
-            <a:r>
-              <a:rPr sz="1575">
-                <a:solidFill>
-                  <a:srgbClr val="4F5661"/>
-                </a:solidFill>
-              </a:rPr>
-              <a:t>- Oracle placement improves deployed captures; the current unsupervised latent gain is modest.</a:t>
+                <a16:creationId xmlns:a16="http://schemas.microsoft.com/office/drawing/2014/main" id="{BB32E10F-2804-4AA1-BA44-A737ACE86B76}"/>
+              </a:ext>
+            </a:extLst>
+          </p:cNvPr>
+          <p:cNvSpPr>
+            <a:spLocks xmlns:a="http://schemas.openxmlformats.org/drawingml/2006/main" noGrp="1"/>
+          </p:cNvSpPr>
+          <p:nvPr/>
+        </p:nvSpPr>
+        <p:spPr>
+          <a:xfrm xmlns:a="http://schemas.openxmlformats.org/drawingml/2006/main">
+            <a:off x="4648200" y="2114550"/>
+            <a:ext cx="2914650" cy="419100"/>
+          </a:xfrm>
+          <a:prstGeom xmlns:a="http://schemas.openxmlformats.org/drawingml/2006/main" prst="rect">
+            <a:avLst/>
+          </a:prstGeom>
+          <a:noFill xmlns:a="http://schemas.openxmlformats.org/drawingml/2006/main"/>
+          <a:ln xmlns:a="http://schemas.openxmlformats.org/drawingml/2006/main" w="0">
+            <a:noFill/>
+            <a:prstDash val="solid"/>
+          </a:ln>
+        </p:spPr>
+        <p:txBody>
+          <a:bodyPr xmlns:a="http://schemas.openxmlformats.org/drawingml/2006/main"/>
+          <a:lstStyle xmlns:a="http://schemas.openxmlformats.org/drawingml/2006/main"/>
+          <a:p xmlns:a="http://schemas.openxmlformats.org/drawingml/2006/main">
+            <a:pPr>
+              <a:defRPr sz="1875" b="1">
+                <a:solidFill>
+                  <a:srgbClr val="0A0A0A"/>
+                </a:solidFill>
+              </a:defRPr>
+            </a:pPr>
+            <a:r>
+              <a:rPr sz="1875" b="1">
+                <a:solidFill>
+                  <a:srgbClr val="0A0A0A"/>
+                </a:solidFill>
+              </a:rPr>
+              <a:t>Belief planner</a:t>
             </a:r>
           </a:p>
         </p:txBody>
@@ -4841,7 +7336,240 @@
           <p:cNvPr id="8" name="">
             <a:extLst xmlns:a="http://schemas.openxmlformats.org/drawingml/2006/main">
               <a:ext uri="{FF2B5EF4-FFF2-40B4-BE49-F238E27FC236}">
-                <a16:creationId xmlns:a16="http://schemas.microsoft.com/office/drawing/2014/main" id="{CF27C1A5-2A43-45B0-9B8F-D85BA13DCCAE}"/>
+                <a16:creationId xmlns:a16="http://schemas.microsoft.com/office/drawing/2014/main" id="{E0146389-B14C-4E47-B5DE-A7A070D0F93C}"/>
+              </a:ext>
+            </a:extLst>
+          </p:cNvPr>
+          <p:cNvSpPr>
+            <a:spLocks xmlns:a="http://schemas.openxmlformats.org/drawingml/2006/main" noGrp="1"/>
+          </p:cNvSpPr>
+          <p:nvPr/>
+        </p:nvSpPr>
+        <p:spPr>
+          <a:xfrm xmlns:a="http://schemas.openxmlformats.org/drawingml/2006/main">
+            <a:off x="4648200" y="2667000"/>
+            <a:ext cx="2914650" cy="2000250"/>
+          </a:xfrm>
+          <a:prstGeom xmlns:a="http://schemas.openxmlformats.org/drawingml/2006/main" prst="rect">
+            <a:avLst/>
+          </a:prstGeom>
+          <a:noFill xmlns:a="http://schemas.openxmlformats.org/drawingml/2006/main"/>
+          <a:ln xmlns:a="http://schemas.openxmlformats.org/drawingml/2006/main" w="0">
+            <a:noFill/>
+            <a:prstDash val="solid"/>
+          </a:ln>
+        </p:spPr>
+        <p:txBody>
+          <a:bodyPr xmlns:a="http://schemas.openxmlformats.org/drawingml/2006/main"/>
+          <a:lstStyle xmlns:a="http://schemas.openxmlformats.org/drawingml/2006/main"/>
+          <a:p xmlns:a="http://schemas.openxmlformats.org/drawingml/2006/main">
+            <a:pPr>
+              <a:defRPr sz="1650">
+                <a:solidFill>
+                  <a:srgbClr val="4F5661"/>
+                </a:solidFill>
+              </a:defRPr>
+            </a:pPr>
+            <a:r>
+              <a:rPr sz="1650">
+                <a:solidFill>
+                  <a:srgbClr val="4F5661"/>
+                </a:solidFill>
+              </a:rPr>
+              <a:t>Receives an inferred distribution, then searches short futures with simulator dynamics.</a:t>
+            </a:r>
+          </a:p>
+        </p:txBody>
+      </p:sp>
+      <p:sp>
+        <p:nvSpPr>
+          <p:cNvPr id="9" name="">
+            <a:extLst xmlns:a="http://schemas.openxmlformats.org/drawingml/2006/main">
+              <a:ext uri="{FF2B5EF4-FFF2-40B4-BE49-F238E27FC236}">
+                <a16:creationId xmlns:a16="http://schemas.microsoft.com/office/drawing/2014/main" id="{1ECE68E4-7D1D-4F70-96AB-3BD983B3AD7C}"/>
+              </a:ext>
+            </a:extLst>
+          </p:cNvPr>
+          <p:cNvSpPr>
+            <a:spLocks xmlns:a="http://schemas.openxmlformats.org/drawingml/2006/main" noGrp="1"/>
+          </p:cNvSpPr>
+          <p:nvPr/>
+        </p:nvSpPr>
+        <p:spPr>
+          <a:xfrm xmlns:a="http://schemas.openxmlformats.org/drawingml/2006/main">
+            <a:off x="8610600" y="1847850"/>
+            <a:ext cx="800100" cy="57150"/>
+          </a:xfrm>
+          <a:prstGeom xmlns:a="http://schemas.openxmlformats.org/drawingml/2006/main" prst="rect">
+            <a:avLst/>
+          </a:prstGeom>
+          <a:solidFill xmlns:a="http://schemas.openxmlformats.org/drawingml/2006/main">
+            <a:srgbClr val="C84C2A"/>
+          </a:solidFill>
+          <a:ln xmlns:a="http://schemas.openxmlformats.org/drawingml/2006/main" w="0">
+            <a:solidFill>
+              <a:srgbClr val="C84C2A"/>
+            </a:solidFill>
+            <a:prstDash val="solid"/>
+          </a:ln>
+        </p:spPr>
+      </p:sp>
+      <p:sp>
+        <p:nvSpPr>
+          <p:cNvPr id="10" name="">
+            <a:extLst xmlns:a="http://schemas.openxmlformats.org/drawingml/2006/main">
+              <a:ext uri="{FF2B5EF4-FFF2-40B4-BE49-F238E27FC236}">
+                <a16:creationId xmlns:a16="http://schemas.microsoft.com/office/drawing/2014/main" id="{49EB4FA0-6935-43C4-AF77-1D3F243EB679}"/>
+              </a:ext>
+            </a:extLst>
+          </p:cNvPr>
+          <p:cNvSpPr>
+            <a:spLocks xmlns:a="http://schemas.openxmlformats.org/drawingml/2006/main" noGrp="1"/>
+          </p:cNvSpPr>
+          <p:nvPr/>
+        </p:nvSpPr>
+        <p:spPr>
+          <a:xfrm xmlns:a="http://schemas.openxmlformats.org/drawingml/2006/main">
+            <a:off x="8610600" y="2114550"/>
+            <a:ext cx="2914650" cy="419100"/>
+          </a:xfrm>
+          <a:prstGeom xmlns:a="http://schemas.openxmlformats.org/drawingml/2006/main" prst="rect">
+            <a:avLst/>
+          </a:prstGeom>
+          <a:noFill xmlns:a="http://schemas.openxmlformats.org/drawingml/2006/main"/>
+          <a:ln xmlns:a="http://schemas.openxmlformats.org/drawingml/2006/main" w="0">
+            <a:noFill/>
+            <a:prstDash val="solid"/>
+          </a:ln>
+        </p:spPr>
+        <p:txBody>
+          <a:bodyPr xmlns:a="http://schemas.openxmlformats.org/drawingml/2006/main"/>
+          <a:lstStyle xmlns:a="http://schemas.openxmlformats.org/drawingml/2006/main"/>
+          <a:p xmlns:a="http://schemas.openxmlformats.org/drawingml/2006/main">
+            <a:pPr>
+              <a:defRPr sz="1875" b="1">
+                <a:solidFill>
+                  <a:srgbClr val="0A0A0A"/>
+                </a:solidFill>
+              </a:defRPr>
+            </a:pPr>
+            <a:r>
+              <a:rPr sz="1875" b="1">
+                <a:solidFill>
+                  <a:srgbClr val="0A0A0A"/>
+                </a:solidFill>
+              </a:rPr>
+              <a:t>Reviewer line</a:t>
+            </a:r>
+          </a:p>
+        </p:txBody>
+      </p:sp>
+      <p:sp>
+        <p:nvSpPr>
+          <p:cNvPr id="11" name="">
+            <a:extLst xmlns:a="http://schemas.openxmlformats.org/drawingml/2006/main">
+              <a:ext uri="{FF2B5EF4-FFF2-40B4-BE49-F238E27FC236}">
+                <a16:creationId xmlns:a16="http://schemas.microsoft.com/office/drawing/2014/main" id="{70327D8B-C94D-4B13-ADEF-9A460E30D8E8}"/>
+              </a:ext>
+            </a:extLst>
+          </p:cNvPr>
+          <p:cNvSpPr>
+            <a:spLocks xmlns:a="http://schemas.openxmlformats.org/drawingml/2006/main" noGrp="1"/>
+          </p:cNvSpPr>
+          <p:nvPr/>
+        </p:nvSpPr>
+        <p:spPr>
+          <a:xfrm xmlns:a="http://schemas.openxmlformats.org/drawingml/2006/main">
+            <a:off x="8610600" y="2667000"/>
+            <a:ext cx="2914650" cy="2000250"/>
+          </a:xfrm>
+          <a:prstGeom xmlns:a="http://schemas.openxmlformats.org/drawingml/2006/main" prst="rect">
+            <a:avLst/>
+          </a:prstGeom>
+          <a:noFill xmlns:a="http://schemas.openxmlformats.org/drawingml/2006/main"/>
+          <a:ln xmlns:a="http://schemas.openxmlformats.org/drawingml/2006/main" w="0">
+            <a:noFill/>
+            <a:prstDash val="solid"/>
+          </a:ln>
+        </p:spPr>
+        <p:txBody>
+          <a:bodyPr xmlns:a="http://schemas.openxmlformats.org/drawingml/2006/main"/>
+          <a:lstStyle xmlns:a="http://schemas.openxmlformats.org/drawingml/2006/main"/>
+          <a:p xmlns:a="http://schemas.openxmlformats.org/drawingml/2006/main">
+            <a:pPr>
+              <a:defRPr sz="1650">
+                <a:solidFill>
+                  <a:srgbClr val="4F5661"/>
+                </a:solidFill>
+              </a:defRPr>
+            </a:pPr>
+            <a:r>
+              <a:rPr sz="1650">
+                <a:solidFill>
+                  <a:srgbClr val="4F5661"/>
+                </a:solidFill>
+              </a:rPr>
+              <a:t>Say it exceeds a reactive oracle. An oracle planner remains the real ceiling experiment.</a:t>
+            </a:r>
+          </a:p>
+        </p:txBody>
+      </p:sp>
+      <p:sp>
+        <p:nvSpPr>
+          <p:cNvPr id="12" name="">
+            <a:extLst xmlns:a="http://schemas.openxmlformats.org/drawingml/2006/main">
+              <a:ext uri="{FF2B5EF4-FFF2-40B4-BE49-F238E27FC236}">
+                <a16:creationId xmlns:a16="http://schemas.microsoft.com/office/drawing/2014/main" id="{7A9AD3C4-1CCA-40D2-806B-A981B49C4E24}"/>
+              </a:ext>
+            </a:extLst>
+          </p:cNvPr>
+          <p:cNvSpPr>
+            <a:spLocks xmlns:a="http://schemas.openxmlformats.org/drawingml/2006/main" noGrp="1"/>
+          </p:cNvSpPr>
+          <p:nvPr/>
+        </p:nvSpPr>
+        <p:spPr>
+          <a:xfrm xmlns:a="http://schemas.openxmlformats.org/drawingml/2006/main">
+            <a:off x="685800" y="5581650"/>
+            <a:ext cx="8953500" cy="457200"/>
+          </a:xfrm>
+          <a:prstGeom xmlns:a="http://schemas.openxmlformats.org/drawingml/2006/main" prst="rect">
+            <a:avLst/>
+          </a:prstGeom>
+          <a:noFill xmlns:a="http://schemas.openxmlformats.org/drawingml/2006/main"/>
+          <a:ln xmlns:a="http://schemas.openxmlformats.org/drawingml/2006/main" w="0">
+            <a:noFill/>
+            <a:prstDash val="solid"/>
+          </a:ln>
+        </p:spPr>
+        <p:txBody>
+          <a:bodyPr xmlns:a="http://schemas.openxmlformats.org/drawingml/2006/main"/>
+          <a:lstStyle xmlns:a="http://schemas.openxmlformats.org/drawingml/2006/main"/>
+          <a:p xmlns:a="http://schemas.openxmlformats.org/drawingml/2006/main">
+            <a:pPr>
+              <a:defRPr sz="1950" b="1">
+                <a:solidFill>
+                  <a:srgbClr val="0A0A0A"/>
+                </a:solidFill>
+              </a:defRPr>
+            </a:pPr>
+            <a:r>
+              <a:rPr sz="1950" b="1">
+                <a:solidFill>
+                  <a:srgbClr val="0A0A0A"/>
+                </a:solidFill>
+              </a:rPr>
+              <a:t>This wording preserves the strongest result without overstating the comparator.</a:t>
+            </a:r>
+          </a:p>
+        </p:txBody>
+      </p:sp>
+      <p:sp>
+        <p:nvSpPr>
+          <p:cNvPr id="13" name="">
+            <a:extLst xmlns:a="http://schemas.openxmlformats.org/drawingml/2006/main">
+              <a:ext uri="{FF2B5EF4-FFF2-40B4-BE49-F238E27FC236}">
+                <a16:creationId xmlns:a16="http://schemas.microsoft.com/office/drawing/2014/main" id="{B02AEBDF-F013-479E-9A3A-4077AD8F56E8}"/>
               </a:ext>
             </a:extLst>
           </p:cNvPr>
@@ -4889,7 +7617,7 @@
     </p:spTree>
     <p:extLst>
       <p:ext uri="{BB962C8B-B14F-4D97-AF65-F5344CB8AC3E}">
-        <p14:creationId xmlns:p14="http://schemas.microsoft.com/office/powerpoint/2010/main" val="714156024"/>
+        <p14:creationId xmlns:p14="http://schemas.microsoft.com/office/powerpoint/2010/main" val="648852077"/>
       </p:ext>
     </p:extLst>
   </p:cSld>
@@ -4920,7 +7648,7 @@
           <p:cNvPr id="1" name="">
             <a:extLst xmlns:a="http://schemas.openxmlformats.org/drawingml/2006/main">
               <a:ext uri="{FF2B5EF4-FFF2-40B4-BE49-F238E27FC236}">
-                <a16:creationId xmlns:a16="http://schemas.microsoft.com/office/drawing/2014/main" id="{4B6A4167-6868-428F-93E9-AADAE8E48299}"/>
+                <a16:creationId xmlns:a16="http://schemas.microsoft.com/office/drawing/2014/main" id="{EAB615D5-96A7-49BE-BB35-CD26291467F7}"/>
               </a:ext>
             </a:extLst>
           </p:cNvPr>
@@ -4960,7 +7688,7 @@
                   <a:srgbClr val="4F5661"/>
                 </a:solidFill>
               </a:rPr>
-              <a:t>CLOSE</a:t>
+              <a:t>REPRESENTATION</a:t>
             </a:r>
           </a:p>
         </p:txBody>
@@ -4970,7 +7698,7 @@
           <p:cNvPr id="2" name="">
             <a:extLst xmlns:a="http://schemas.openxmlformats.org/drawingml/2006/main">
               <a:ext uri="{FF2B5EF4-FFF2-40B4-BE49-F238E27FC236}">
-                <a16:creationId xmlns:a16="http://schemas.microsoft.com/office/drawing/2014/main" id="{0E740713-90D7-4870-8B7D-9CD82244E4A3}"/>
+                <a16:creationId xmlns:a16="http://schemas.microsoft.com/office/drawing/2014/main" id="{2A84A702-9F84-40AB-9299-CE6AB6A8616B}"/>
               </a:ext>
             </a:extLst>
           </p:cNvPr>
@@ -4982,7 +7710,7 @@
         <p:spPr>
           <a:xfrm xmlns:a="http://schemas.openxmlformats.org/drawingml/2006/main">
             <a:off x="533400" y="590550"/>
-            <a:ext cx="10287000" cy="914400"/>
+            <a:ext cx="10287000" cy="933450"/>
           </a:xfrm>
           <a:prstGeom xmlns:a="http://schemas.openxmlformats.org/drawingml/2006/main" prst="rect">
             <a:avLst/>
@@ -5010,7 +7738,7 @@
                   <a:srgbClr val="0A0A0A"/>
                 </a:solidFill>
               </a:rPr>
-              <a:t>What to say, and what not to overclaim</a:t>
+              <a:t>JEPA recovers the belief without intent labels</a:t>
             </a:r>
           </a:p>
         </p:txBody>
@@ -5020,19 +7748,124 @@
           <p:cNvPr id="3" name="">
             <a:extLst xmlns:a="http://schemas.openxmlformats.org/drawingml/2006/main">
               <a:ext uri="{FF2B5EF4-FFF2-40B4-BE49-F238E27FC236}">
-                <a16:creationId xmlns:a16="http://schemas.microsoft.com/office/drawing/2014/main" id="{B0777FB1-94A4-4292-8B15-942CEBAAFB53}"/>
-              </a:ext>
-            </a:extLst>
-          </p:cNvPr>
-          <p:cNvSpPr>
-            <a:spLocks xmlns:a="http://schemas.openxmlformats.org/drawingml/2006/main" noGrp="1"/>
-          </p:cNvSpPr>
-          <p:nvPr/>
-        </p:nvSpPr>
-        <p:spPr>
-          <a:xfrm xmlns:a="http://schemas.openxmlformats.org/drawingml/2006/main">
-            <a:off x="533400" y="1790700"/>
-            <a:ext cx="800100" cy="57150"/>
+                <a16:creationId xmlns:a16="http://schemas.microsoft.com/office/drawing/2014/main" id="{42ACBBDC-253D-42FE-A4B1-A43E59E2D503}"/>
+              </a:ext>
+            </a:extLst>
+          </p:cNvPr>
+          <p:cNvSpPr>
+            <a:spLocks xmlns:a="http://schemas.openxmlformats.org/drawingml/2006/main" noGrp="1"/>
+          </p:cNvSpPr>
+          <p:nvPr/>
+        </p:nvSpPr>
+        <p:spPr>
+          <a:xfrm xmlns:a="http://schemas.openxmlformats.org/drawingml/2006/main">
+            <a:off x="11277600" y="6267450"/>
+            <a:ext cx="457200" cy="228600"/>
+          </a:xfrm>
+          <a:prstGeom xmlns:a="http://schemas.openxmlformats.org/drawingml/2006/main" prst="rect">
+            <a:avLst/>
+          </a:prstGeom>
+          <a:noFill xmlns:a="http://schemas.openxmlformats.org/drawingml/2006/main"/>
+          <a:ln xmlns:a="http://schemas.openxmlformats.org/drawingml/2006/main" w="0">
+            <a:noFill/>
+            <a:prstDash val="solid"/>
+          </a:ln>
+        </p:spPr>
+        <p:txBody>
+          <a:bodyPr xmlns:a="http://schemas.openxmlformats.org/drawingml/2006/main"/>
+          <a:lstStyle xmlns:a="http://schemas.openxmlformats.org/drawingml/2006/main"/>
+          <a:p xmlns:a="http://schemas.openxmlformats.org/drawingml/2006/main">
+            <a:pPr algn="r">
+              <a:defRPr sz="1050">
+                <a:solidFill>
+                  <a:srgbClr val="4F5661"/>
+                </a:solidFill>
+              </a:defRPr>
+            </a:pPr>
+            <a:r>
+              <a:rPr sz="1050">
+                <a:solidFill>
+                  <a:srgbClr val="4F5661"/>
+                </a:solidFill>
+              </a:rPr>
+              <a:t>08</a:t>
+            </a:r>
+          </a:p>
+        </p:txBody>
+      </p:sp>
+      <p:sp>
+        <p:nvSpPr>
+          <p:cNvPr id="4" name="">
+            <a:extLst xmlns:a="http://schemas.openxmlformats.org/drawingml/2006/main">
+              <a:ext uri="{FF2B5EF4-FFF2-40B4-BE49-F238E27FC236}">
+                <a16:creationId xmlns:a16="http://schemas.microsoft.com/office/drawing/2014/main" id="{AE795CA8-E513-495F-B7F3-A47AF0EF8E7F}"/>
+              </a:ext>
+            </a:extLst>
+          </p:cNvPr>
+          <p:cNvSpPr>
+            <a:spLocks xmlns:a="http://schemas.openxmlformats.org/drawingml/2006/main" noGrp="1"/>
+          </p:cNvSpPr>
+          <p:nvPr/>
+        </p:nvSpPr>
+        <p:spPr>
+          <a:xfrm xmlns:a="http://schemas.openxmlformats.org/drawingml/2006/main">
+            <a:off x="533400" y="1581150"/>
+            <a:ext cx="6743700" cy="4114800"/>
+          </a:xfrm>
+          <a:prstGeom xmlns:a="http://schemas.openxmlformats.org/drawingml/2006/main" prst="rect">
+            <a:avLst/>
+          </a:prstGeom>
+          <a:solidFill xmlns:a="http://schemas.openxmlformats.org/drawingml/2006/main">
+            <a:srgbClr val="F4F5F7"/>
+          </a:solidFill>
+          <a:ln xmlns:a="http://schemas.openxmlformats.org/drawingml/2006/main" w="0">
+            <a:solidFill>
+              <a:srgbClr val="F4F5F7"/>
+            </a:solidFill>
+            <a:prstDash val="solid"/>
+          </a:ln>
+        </p:spPr>
+      </p:sp>
+      <p:pic>
+        <p:nvPicPr>
+          <p:cNvPr id="13" name=""/>
+          <p:cNvPicPr>
+            <a:picLocks xmlns:a="http://schemas.openxmlformats.org/drawingml/2006/main" noChangeAspect="1"/>
+          </p:cNvPicPr>
+          <p:nvPr/>
+        </p:nvPicPr>
+        <p:blipFill>
+          <a:blip xmlns:r="http://schemas.openxmlformats.org/officeDocument/2006/relationships" xmlns:a="http://schemas.openxmlformats.org/drawingml/2006/main" r:embed="R1ae4d801a9db4fb1"/>
+          <a:stretch xmlns:a="http://schemas.openxmlformats.org/drawingml/2006/main"/>
+        </p:blipFill>
+        <p:spPr>
+          <a:xfrm xmlns:a="http://schemas.openxmlformats.org/drawingml/2006/main">
+            <a:off x="685800" y="2651252"/>
+            <a:ext cx="6438900" cy="1974596"/>
+          </a:xfrm>
+          <a:prstGeom xmlns:a="http://schemas.openxmlformats.org/drawingml/2006/main" prst="rect">
+            <a:avLst/>
+          </a:prstGeom>
+        </p:spPr>
+      </p:pic>
+      <p:sp>
+        <p:nvSpPr>
+          <p:cNvPr id="6" name="">
+            <a:extLst xmlns:a="http://schemas.openxmlformats.org/drawingml/2006/main">
+              <a:ext uri="{FF2B5EF4-FFF2-40B4-BE49-F238E27FC236}">
+                <a16:creationId xmlns:a16="http://schemas.microsoft.com/office/drawing/2014/main" id="{183EF68C-EE41-437A-B994-3ABBE8D03D37}"/>
+              </a:ext>
+            </a:extLst>
+          </p:cNvPr>
+          <p:cNvSpPr>
+            <a:spLocks xmlns:a="http://schemas.openxmlformats.org/drawingml/2006/main" noGrp="1"/>
+          </p:cNvSpPr>
+          <p:nvPr/>
+        </p:nvSpPr>
+        <p:spPr>
+          <a:xfrm xmlns:a="http://schemas.openxmlformats.org/drawingml/2006/main">
+            <a:off x="7696200" y="1752600"/>
+            <a:ext cx="57150" cy="2266950"/>
           </a:xfrm>
           <a:prstGeom xmlns:a="http://schemas.openxmlformats.org/drawingml/2006/main" prst="rect">
             <a:avLst/>
@@ -5050,466 +7883,134 @@
       </p:sp>
       <p:sp>
         <p:nvSpPr>
-          <p:cNvPr id="4" name="">
-            <a:extLst xmlns:a="http://schemas.openxmlformats.org/drawingml/2006/main">
-              <a:ext uri="{FF2B5EF4-FFF2-40B4-BE49-F238E27FC236}">
-                <a16:creationId xmlns:a16="http://schemas.microsoft.com/office/drawing/2014/main" id="{B8725EC6-43B3-4B49-947E-9DD39C947AC3}"/>
-              </a:ext>
-            </a:extLst>
-          </p:cNvPr>
-          <p:cNvSpPr>
-            <a:spLocks xmlns:a="http://schemas.openxmlformats.org/drawingml/2006/main" noGrp="1"/>
-          </p:cNvSpPr>
-          <p:nvPr/>
-        </p:nvSpPr>
-        <p:spPr>
-          <a:xfrm xmlns:a="http://schemas.openxmlformats.org/drawingml/2006/main">
-            <a:off x="533400" y="2038350"/>
-            <a:ext cx="2857500" cy="381000"/>
-          </a:xfrm>
-          <a:prstGeom xmlns:a="http://schemas.openxmlformats.org/drawingml/2006/main" prst="rect">
-            <a:avLst/>
-          </a:prstGeom>
-          <a:noFill xmlns:a="http://schemas.openxmlformats.org/drawingml/2006/main"/>
-          <a:ln xmlns:a="http://schemas.openxmlformats.org/drawingml/2006/main" w="0">
-            <a:noFill/>
-            <a:prstDash val="solid"/>
-          </a:ln>
-        </p:spPr>
-        <p:txBody>
-          <a:bodyPr xmlns:a="http://schemas.openxmlformats.org/drawingml/2006/main"/>
-          <a:lstStyle xmlns:a="http://schemas.openxmlformats.org/drawingml/2006/main"/>
-          <a:p xmlns:a="http://schemas.openxmlformats.org/drawingml/2006/main">
-            <a:pPr>
-              <a:defRPr sz="1950" b="1">
+          <p:cNvPr id="7" name="">
+            <a:extLst xmlns:a="http://schemas.openxmlformats.org/drawingml/2006/main">
+              <a:ext uri="{FF2B5EF4-FFF2-40B4-BE49-F238E27FC236}">
+                <a16:creationId xmlns:a16="http://schemas.microsoft.com/office/drawing/2014/main" id="{5CB3DE5F-5792-45CB-84A5-F3EDAF273C5D}"/>
+              </a:ext>
+            </a:extLst>
+          </p:cNvPr>
+          <p:cNvSpPr>
+            <a:spLocks xmlns:a="http://schemas.openxmlformats.org/drawingml/2006/main" noGrp="1"/>
+          </p:cNvSpPr>
+          <p:nvPr/>
+        </p:nvSpPr>
+        <p:spPr>
+          <a:xfrm xmlns:a="http://schemas.openxmlformats.org/drawingml/2006/main">
+            <a:off x="7905750" y="1733550"/>
+            <a:ext cx="3219450" cy="2266950"/>
+          </a:xfrm>
+          <a:prstGeom xmlns:a="http://schemas.openxmlformats.org/drawingml/2006/main" prst="rect">
+            <a:avLst/>
+          </a:prstGeom>
+          <a:noFill xmlns:a="http://schemas.openxmlformats.org/drawingml/2006/main"/>
+          <a:ln xmlns:a="http://schemas.openxmlformats.org/drawingml/2006/main" w="0">
+            <a:noFill/>
+            <a:prstDash val="solid"/>
+          </a:ln>
+        </p:spPr>
+        <p:txBody>
+          <a:bodyPr xmlns:a="http://schemas.openxmlformats.org/drawingml/2006/main"/>
+          <a:lstStyle xmlns:a="http://schemas.openxmlformats.org/drawingml/2006/main"/>
+          <a:p xmlns:a="http://schemas.openxmlformats.org/drawingml/2006/main">
+            <a:pPr>
+              <a:defRPr sz="1650">
+                <a:solidFill>
+                  <a:srgbClr val="4F5661"/>
+                </a:solidFill>
+              </a:defRPr>
+            </a:pPr>
+            <a:r>
+              <a:rPr sz="1650">
+                <a:solidFill>
+                  <a:srgbClr val="4F5661"/>
+                </a:solidFill>
+              </a:rPr>
+              <a:t>- Same trajectory data and the same 2-D latent size.</a:t>
+            </a:r>
+          </a:p>
+          <a:p xmlns:a="http://schemas.openxmlformats.org/drawingml/2006/main">
+            <a:pPr>
+              <a:defRPr sz="1650">
+                <a:solidFill>
+                  <a:srgbClr val="4F5661"/>
+                </a:solidFill>
+              </a:defRPr>
+            </a:pPr>
+            <a:r>
+              <a:rPr sz="1650">
+                <a:solidFill>
+                  <a:srgbClr val="4F5661"/>
+                </a:solidFill>
+              </a:rPr>
+              <a:t>- JEPA probe accuracy: 0.89. VAE probe accuracy: 0.53.</a:t>
+            </a:r>
+          </a:p>
+          <a:p xmlns:a="http://schemas.openxmlformats.org/drawingml/2006/main">
+            <a:pPr>
+              <a:defRPr sz="1650">
+                <a:solidFill>
+                  <a:srgbClr val="4F5661"/>
+                </a:solidFill>
+              </a:defRPr>
+            </a:pPr>
+            <a:r>
+              <a:rPr sz="1650">
+                <a:solidFill>
+                  <a:srgbClr val="4F5661"/>
+                </a:solidFill>
+              </a:rPr>
+              <a:t>- JEPA belief planner reaches 4.08 captures/episode.</a:t>
+            </a:r>
+          </a:p>
+        </p:txBody>
+      </p:sp>
+      <p:sp>
+        <p:nvSpPr>
+          <p:cNvPr id="8" name="">
+            <a:extLst xmlns:a="http://schemas.openxmlformats.org/drawingml/2006/main">
+              <a:ext uri="{FF2B5EF4-FFF2-40B4-BE49-F238E27FC236}">
+                <a16:creationId xmlns:a16="http://schemas.microsoft.com/office/drawing/2014/main" id="{27DAE3CD-A310-4672-A087-2E96C4DBE119}"/>
+              </a:ext>
+            </a:extLst>
+          </p:cNvPr>
+          <p:cNvSpPr>
+            <a:spLocks xmlns:a="http://schemas.openxmlformats.org/drawingml/2006/main" noGrp="1"/>
+          </p:cNvSpPr>
+          <p:nvPr/>
+        </p:nvSpPr>
+        <p:spPr>
+          <a:xfrm xmlns:a="http://schemas.openxmlformats.org/drawingml/2006/main">
+            <a:off x="7696200" y="4724400"/>
+            <a:ext cx="3524250" cy="628650"/>
+          </a:xfrm>
+          <a:prstGeom xmlns:a="http://schemas.openxmlformats.org/drawingml/2006/main" prst="rect">
+            <a:avLst/>
+          </a:prstGeom>
+          <a:noFill xmlns:a="http://schemas.openxmlformats.org/drawingml/2006/main"/>
+          <a:ln xmlns:a="http://schemas.openxmlformats.org/drawingml/2006/main" w="0">
+            <a:noFill/>
+            <a:prstDash val="solid"/>
+          </a:ln>
+        </p:spPr>
+        <p:txBody>
+          <a:bodyPr xmlns:a="http://schemas.openxmlformats.org/drawingml/2006/main"/>
+          <a:lstStyle xmlns:a="http://schemas.openxmlformats.org/drawingml/2006/main"/>
+          <a:p xmlns:a="http://schemas.openxmlformats.org/drawingml/2006/main">
+            <a:pPr>
+              <a:defRPr sz="1875" b="1">
                 <a:solidFill>
                   <a:srgbClr val="0A0A0A"/>
                 </a:solidFill>
               </a:defRPr>
             </a:pPr>
             <a:r>
-              <a:rPr sz="1950" b="1">
+              <a:rPr sz="1875" b="1">
                 <a:solidFill>
                   <a:srgbClr val="0A0A0A"/>
                 </a:solidFill>
               </a:rPr>
-              <a:t>Claim now</a:t>
-            </a:r>
-          </a:p>
-        </p:txBody>
-      </p:sp>
-      <p:sp>
-        <p:nvSpPr>
-          <p:cNvPr id="5" name="">
-            <a:extLst xmlns:a="http://schemas.openxmlformats.org/drawingml/2006/main">
-              <a:ext uri="{FF2B5EF4-FFF2-40B4-BE49-F238E27FC236}">
-                <a16:creationId xmlns:a16="http://schemas.microsoft.com/office/drawing/2014/main" id="{DA43F88A-0646-4368-B8AD-7D63771A06B4}"/>
-              </a:ext>
-            </a:extLst>
-          </p:cNvPr>
-          <p:cNvSpPr>
-            <a:spLocks xmlns:a="http://schemas.openxmlformats.org/drawingml/2006/main" noGrp="1"/>
-          </p:cNvSpPr>
-          <p:nvPr/>
-        </p:nvSpPr>
-        <p:spPr>
-          <a:xfrm xmlns:a="http://schemas.openxmlformats.org/drawingml/2006/main">
-            <a:off x="533400" y="2590800"/>
-            <a:ext cx="2952750" cy="2190750"/>
-          </a:xfrm>
-          <a:prstGeom xmlns:a="http://schemas.openxmlformats.org/drawingml/2006/main" prst="rect">
-            <a:avLst/>
-          </a:prstGeom>
-          <a:noFill xmlns:a="http://schemas.openxmlformats.org/drawingml/2006/main"/>
-          <a:ln xmlns:a="http://schemas.openxmlformats.org/drawingml/2006/main" w="0">
-            <a:noFill/>
-            <a:prstDash val="solid"/>
-          </a:ln>
-        </p:spPr>
-        <p:txBody>
-          <a:bodyPr xmlns:a="http://schemas.openxmlformats.org/drawingml/2006/main"/>
-          <a:lstStyle xmlns:a="http://schemas.openxmlformats.org/drawingml/2006/main"/>
-          <a:p xmlns:a="http://schemas.openxmlformats.org/drawingml/2006/main">
-            <a:pPr>
-              <a:defRPr sz="1800">
-                <a:solidFill>
-                  <a:srgbClr val="4F5661"/>
-                </a:solidFill>
-              </a:defRPr>
-            </a:pPr>
-            <a:r>
-              <a:rPr sz="1800">
-                <a:solidFill>
-                  <a:srgbClr val="4F5661"/>
-                </a:solidFill>
-              </a:rPr>
-              <a:t>In a controlled hidden-intent MARL game, calibrated opponent belief plus lookahead is stronger than blind reaction or hard guessed intent.</a:t>
-            </a:r>
-          </a:p>
-        </p:txBody>
-      </p:sp>
-      <p:sp>
-        <p:nvSpPr>
-          <p:cNvPr id="6" name="">
-            <a:extLst xmlns:a="http://schemas.openxmlformats.org/drawingml/2006/main">
-              <a:ext uri="{FF2B5EF4-FFF2-40B4-BE49-F238E27FC236}">
-                <a16:creationId xmlns:a16="http://schemas.microsoft.com/office/drawing/2014/main" id="{009C44C1-F373-44E0-8BF2-B17909298AC5}"/>
-              </a:ext>
-            </a:extLst>
-          </p:cNvPr>
-          <p:cNvSpPr>
-            <a:spLocks xmlns:a="http://schemas.openxmlformats.org/drawingml/2006/main" noGrp="1"/>
-          </p:cNvSpPr>
-          <p:nvPr/>
-        </p:nvSpPr>
-        <p:spPr>
-          <a:xfrm xmlns:a="http://schemas.openxmlformats.org/drawingml/2006/main">
-            <a:off x="4343400" y="1790700"/>
-            <a:ext cx="800100" cy="57150"/>
-          </a:xfrm>
-          <a:prstGeom xmlns:a="http://schemas.openxmlformats.org/drawingml/2006/main" prst="rect">
-            <a:avLst/>
-          </a:prstGeom>
-          <a:solidFill xmlns:a="http://schemas.openxmlformats.org/drawingml/2006/main">
-            <a:srgbClr val="C84C2A"/>
-          </a:solidFill>
-          <a:ln xmlns:a="http://schemas.openxmlformats.org/drawingml/2006/main" w="0">
-            <a:solidFill>
-              <a:srgbClr val="C84C2A"/>
-            </a:solidFill>
-            <a:prstDash val="solid"/>
-          </a:ln>
-        </p:spPr>
-      </p:sp>
-      <p:sp>
-        <p:nvSpPr>
-          <p:cNvPr id="7" name="">
-            <a:extLst xmlns:a="http://schemas.openxmlformats.org/drawingml/2006/main">
-              <a:ext uri="{FF2B5EF4-FFF2-40B4-BE49-F238E27FC236}">
-                <a16:creationId xmlns:a16="http://schemas.microsoft.com/office/drawing/2014/main" id="{E8974D52-8D6C-44DE-A7B1-22BD36FC4744}"/>
-              </a:ext>
-            </a:extLst>
-          </p:cNvPr>
-          <p:cNvSpPr>
-            <a:spLocks xmlns:a="http://schemas.openxmlformats.org/drawingml/2006/main" noGrp="1"/>
-          </p:cNvSpPr>
-          <p:nvPr/>
-        </p:nvSpPr>
-        <p:spPr>
-          <a:xfrm xmlns:a="http://schemas.openxmlformats.org/drawingml/2006/main">
-            <a:off x="4343400" y="2038350"/>
-            <a:ext cx="2857500" cy="381000"/>
-          </a:xfrm>
-          <a:prstGeom xmlns:a="http://schemas.openxmlformats.org/drawingml/2006/main" prst="rect">
-            <a:avLst/>
-          </a:prstGeom>
-          <a:noFill xmlns:a="http://schemas.openxmlformats.org/drawingml/2006/main"/>
-          <a:ln xmlns:a="http://schemas.openxmlformats.org/drawingml/2006/main" w="0">
-            <a:noFill/>
-            <a:prstDash val="solid"/>
-          </a:ln>
-        </p:spPr>
-        <p:txBody>
-          <a:bodyPr xmlns:a="http://schemas.openxmlformats.org/drawingml/2006/main"/>
-          <a:lstStyle xmlns:a="http://schemas.openxmlformats.org/drawingml/2006/main"/>
-          <a:p xmlns:a="http://schemas.openxmlformats.org/drawingml/2006/main">
-            <a:pPr>
-              <a:defRPr sz="1950" b="1">
-                <a:solidFill>
-                  <a:srgbClr val="0A0A0A"/>
-                </a:solidFill>
-              </a:defRPr>
-            </a:pPr>
-            <a:r>
-              <a:rPr sz="1950" b="1">
-                <a:solidFill>
-                  <a:srgbClr val="0A0A0A"/>
-                </a:solidFill>
-              </a:rPr>
-              <a:t>Say carefully</a:t>
-            </a:r>
-          </a:p>
-        </p:txBody>
-      </p:sp>
-      <p:sp>
-        <p:nvSpPr>
-          <p:cNvPr id="8" name="">
-            <a:extLst xmlns:a="http://schemas.openxmlformats.org/drawingml/2006/main">
-              <a:ext uri="{FF2B5EF4-FFF2-40B4-BE49-F238E27FC236}">
-                <a16:creationId xmlns:a16="http://schemas.microsoft.com/office/drawing/2014/main" id="{E9A8F424-3BEB-4596-AE9E-AAB8A9BAB0F3}"/>
-              </a:ext>
-            </a:extLst>
-          </p:cNvPr>
-          <p:cNvSpPr>
-            <a:spLocks xmlns:a="http://schemas.openxmlformats.org/drawingml/2006/main" noGrp="1"/>
-          </p:cNvSpPr>
-          <p:nvPr/>
-        </p:nvSpPr>
-        <p:spPr>
-          <a:xfrm xmlns:a="http://schemas.openxmlformats.org/drawingml/2006/main">
-            <a:off x="4343400" y="2590800"/>
-            <a:ext cx="2952750" cy="2190750"/>
-          </a:xfrm>
-          <a:prstGeom xmlns:a="http://schemas.openxmlformats.org/drawingml/2006/main" prst="rect">
-            <a:avLst/>
-          </a:prstGeom>
-          <a:noFill xmlns:a="http://schemas.openxmlformats.org/drawingml/2006/main"/>
-          <a:ln xmlns:a="http://schemas.openxmlformats.org/drawingml/2006/main" w="0">
-            <a:noFill/>
-            <a:prstDash val="solid"/>
-          </a:ln>
-        </p:spPr>
-        <p:txBody>
-          <a:bodyPr xmlns:a="http://schemas.openxmlformats.org/drawingml/2006/main"/>
-          <a:lstStyle xmlns:a="http://schemas.openxmlformats.org/drawingml/2006/main"/>
-          <a:p xmlns:a="http://schemas.openxmlformats.org/drawingml/2006/main">
-            <a:pPr>
-              <a:defRPr sz="1800">
-                <a:solidFill>
-                  <a:srgbClr val="4F5661"/>
-                </a:solidFill>
-              </a:defRPr>
-            </a:pPr>
-            <a:r>
-              <a:rPr sz="1800">
-                <a:solidFill>
-                  <a:srgbClr val="4F5661"/>
-                </a:solidFill>
-              </a:rPr>
-              <a:t>The opponent is static within each episode, the strongest planner uses simulator dynamics, and the oracle comparison is reactive.</a:t>
-            </a:r>
-          </a:p>
-        </p:txBody>
-      </p:sp>
-      <p:sp>
-        <p:nvSpPr>
-          <p:cNvPr id="9" name="">
-            <a:extLst xmlns:a="http://schemas.openxmlformats.org/drawingml/2006/main">
-              <a:ext uri="{FF2B5EF4-FFF2-40B4-BE49-F238E27FC236}">
-                <a16:creationId xmlns:a16="http://schemas.microsoft.com/office/drawing/2014/main" id="{D0BEE944-D3ED-4E07-8969-B07FFFECD5AA}"/>
-              </a:ext>
-            </a:extLst>
-          </p:cNvPr>
-          <p:cNvSpPr>
-            <a:spLocks xmlns:a="http://schemas.openxmlformats.org/drawingml/2006/main" noGrp="1"/>
-          </p:cNvSpPr>
-          <p:nvPr/>
-        </p:nvSpPr>
-        <p:spPr>
-          <a:xfrm xmlns:a="http://schemas.openxmlformats.org/drawingml/2006/main">
-            <a:off x="8153400" y="1790700"/>
-            <a:ext cx="800100" cy="57150"/>
-          </a:xfrm>
-          <a:prstGeom xmlns:a="http://schemas.openxmlformats.org/drawingml/2006/main" prst="rect">
-            <a:avLst/>
-          </a:prstGeom>
-          <a:solidFill xmlns:a="http://schemas.openxmlformats.org/drawingml/2006/main">
-            <a:srgbClr val="0A0A0A"/>
-          </a:solidFill>
-          <a:ln xmlns:a="http://schemas.openxmlformats.org/drawingml/2006/main" w="0">
-            <a:solidFill>
-              <a:srgbClr val="0A0A0A"/>
-            </a:solidFill>
-            <a:prstDash val="solid"/>
-          </a:ln>
-        </p:spPr>
-      </p:sp>
-      <p:sp>
-        <p:nvSpPr>
-          <p:cNvPr id="10" name="">
-            <a:extLst xmlns:a="http://schemas.openxmlformats.org/drawingml/2006/main">
-              <a:ext uri="{FF2B5EF4-FFF2-40B4-BE49-F238E27FC236}">
-                <a16:creationId xmlns:a16="http://schemas.microsoft.com/office/drawing/2014/main" id="{12FB4BB6-CC02-47BC-8E28-EF473341D8A9}"/>
-              </a:ext>
-            </a:extLst>
-          </p:cNvPr>
-          <p:cNvSpPr>
-            <a:spLocks xmlns:a="http://schemas.openxmlformats.org/drawingml/2006/main" noGrp="1"/>
-          </p:cNvSpPr>
-          <p:nvPr/>
-        </p:nvSpPr>
-        <p:spPr>
-          <a:xfrm xmlns:a="http://schemas.openxmlformats.org/drawingml/2006/main">
-            <a:off x="8153400" y="2038350"/>
-            <a:ext cx="2857500" cy="381000"/>
-          </a:xfrm>
-          <a:prstGeom xmlns:a="http://schemas.openxmlformats.org/drawingml/2006/main" prst="rect">
-            <a:avLst/>
-          </a:prstGeom>
-          <a:noFill xmlns:a="http://schemas.openxmlformats.org/drawingml/2006/main"/>
-          <a:ln xmlns:a="http://schemas.openxmlformats.org/drawingml/2006/main" w="0">
-            <a:noFill/>
-            <a:prstDash val="solid"/>
-          </a:ln>
-        </p:spPr>
-        <p:txBody>
-          <a:bodyPr xmlns:a="http://schemas.openxmlformats.org/drawingml/2006/main"/>
-          <a:lstStyle xmlns:a="http://schemas.openxmlformats.org/drawingml/2006/main"/>
-          <a:p xmlns:a="http://schemas.openxmlformats.org/drawingml/2006/main">
-            <a:pPr>
-              <a:defRPr sz="1950" b="1">
-                <a:solidFill>
-                  <a:srgbClr val="0A0A0A"/>
-                </a:solidFill>
-              </a:defRPr>
-            </a:pPr>
-            <a:r>
-              <a:rPr sz="1950" b="1">
-                <a:solidFill>
-                  <a:srgbClr val="0A0A0A"/>
-                </a:solidFill>
-              </a:rPr>
-              <a:t>Run next</a:t>
-            </a:r>
-          </a:p>
-        </p:txBody>
-      </p:sp>
-      <p:sp>
-        <p:nvSpPr>
-          <p:cNvPr id="11" name="">
-            <a:extLst xmlns:a="http://schemas.openxmlformats.org/drawingml/2006/main">
-              <a:ext uri="{FF2B5EF4-FFF2-40B4-BE49-F238E27FC236}">
-                <a16:creationId xmlns:a16="http://schemas.microsoft.com/office/drawing/2014/main" id="{43FD9D82-3185-4281-BDDA-87550AA33B0B}"/>
-              </a:ext>
-            </a:extLst>
-          </p:cNvPr>
-          <p:cNvSpPr>
-            <a:spLocks xmlns:a="http://schemas.openxmlformats.org/drawingml/2006/main" noGrp="1"/>
-          </p:cNvSpPr>
-          <p:nvPr/>
-        </p:nvSpPr>
-        <p:spPr>
-          <a:xfrm xmlns:a="http://schemas.openxmlformats.org/drawingml/2006/main">
-            <a:off x="8153400" y="2590800"/>
-            <a:ext cx="2952750" cy="2190750"/>
-          </a:xfrm>
-          <a:prstGeom xmlns:a="http://schemas.openxmlformats.org/drawingml/2006/main" prst="rect">
-            <a:avLst/>
-          </a:prstGeom>
-          <a:noFill xmlns:a="http://schemas.openxmlformats.org/drawingml/2006/main"/>
-          <a:ln xmlns:a="http://schemas.openxmlformats.org/drawingml/2006/main" w="0">
-            <a:noFill/>
-            <a:prstDash val="solid"/>
-          </a:ln>
-        </p:spPr>
-        <p:txBody>
-          <a:bodyPr xmlns:a="http://schemas.openxmlformats.org/drawingml/2006/main"/>
-          <a:lstStyle xmlns:a="http://schemas.openxmlformats.org/drawingml/2006/main"/>
-          <a:p xmlns:a="http://schemas.openxmlformats.org/drawingml/2006/main">
-            <a:pPr>
-              <a:defRPr sz="1800">
-                <a:solidFill>
-                  <a:srgbClr val="4F5661"/>
-                </a:solidFill>
-              </a:defRPr>
-            </a:pPr>
-            <a:r>
-              <a:rPr sz="1800">
-                <a:solidFill>
-                  <a:srgbClr val="4F5661"/>
-                </a:solidFill>
-              </a:rPr>
-              <a:t>Adaptive or switching opponents; oracle planner; HOP, MAZero, MAMBA, MARIE, MATWM, MBOM, and AORPO baselines.</a:t>
-            </a:r>
-          </a:p>
-        </p:txBody>
-      </p:sp>
-      <p:sp>
-        <p:nvSpPr>
-          <p:cNvPr id="12" name="">
-            <a:extLst xmlns:a="http://schemas.openxmlformats.org/drawingml/2006/main">
-              <a:ext uri="{FF2B5EF4-FFF2-40B4-BE49-F238E27FC236}">
-                <a16:creationId xmlns:a16="http://schemas.microsoft.com/office/drawing/2014/main" id="{D1762DB3-CFFE-48E2-82E2-028AF5863218}"/>
-              </a:ext>
-            </a:extLst>
-          </p:cNvPr>
-          <p:cNvSpPr>
-            <a:spLocks xmlns:a="http://schemas.openxmlformats.org/drawingml/2006/main" noGrp="1"/>
-          </p:cNvSpPr>
-          <p:nvPr/>
-        </p:nvSpPr>
-        <p:spPr>
-          <a:xfrm xmlns:a="http://schemas.openxmlformats.org/drawingml/2006/main">
-            <a:off x="533400" y="5467350"/>
-            <a:ext cx="10001250" cy="552450"/>
-          </a:xfrm>
-          <a:prstGeom xmlns:a="http://schemas.openxmlformats.org/drawingml/2006/main" prst="rect">
-            <a:avLst/>
-          </a:prstGeom>
-          <a:noFill xmlns:a="http://schemas.openxmlformats.org/drawingml/2006/main"/>
-          <a:ln xmlns:a="http://schemas.openxmlformats.org/drawingml/2006/main" w="0">
-            <a:noFill/>
-            <a:prstDash val="solid"/>
-          </a:ln>
-        </p:spPr>
-        <p:txBody>
-          <a:bodyPr xmlns:a="http://schemas.openxmlformats.org/drawingml/2006/main"/>
-          <a:lstStyle xmlns:a="http://schemas.openxmlformats.org/drawingml/2006/main"/>
-          <a:p xmlns:a="http://schemas.openxmlformats.org/drawingml/2006/main">
-            <a:pPr>
-              <a:defRPr sz="1875" b="1">
-                <a:solidFill>
-                  <a:srgbClr val="0A0A0A"/>
-                </a:solidFill>
-              </a:defRPr>
-            </a:pPr>
-            <a:r>
-              <a:rPr sz="1875" b="1">
-                <a:solidFill>
-                  <a:srgbClr val="0A0A0A"/>
-                </a:solidFill>
-              </a:rPr>
-              <a:t>A strong paper pitch is not "we solved MARL." It is "we isolated the value of calibrated opponent belief, then showed why planning should consume the whole belief."</a:t>
-            </a:r>
-          </a:p>
-        </p:txBody>
-      </p:sp>
-      <p:sp>
-        <p:nvSpPr>
-          <p:cNvPr id="13" name="">
-            <a:extLst xmlns:a="http://schemas.openxmlformats.org/drawingml/2006/main">
-              <a:ext uri="{FF2B5EF4-FFF2-40B4-BE49-F238E27FC236}">
-                <a16:creationId xmlns:a16="http://schemas.microsoft.com/office/drawing/2014/main" id="{CCE35C40-E245-4E55-A810-3E38BE8B17D3}"/>
-              </a:ext>
-            </a:extLst>
-          </p:cNvPr>
-          <p:cNvSpPr>
-            <a:spLocks xmlns:a="http://schemas.openxmlformats.org/drawingml/2006/main" noGrp="1"/>
-          </p:cNvSpPr>
-          <p:nvPr/>
-        </p:nvSpPr>
-        <p:spPr>
-          <a:xfrm xmlns:a="http://schemas.openxmlformats.org/drawingml/2006/main">
-            <a:off x="11277600" y="6267450"/>
-            <a:ext cx="457200" cy="228600"/>
-          </a:xfrm>
-          <a:prstGeom xmlns:a="http://schemas.openxmlformats.org/drawingml/2006/main" prst="rect">
-            <a:avLst/>
-          </a:prstGeom>
-          <a:noFill xmlns:a="http://schemas.openxmlformats.org/drawingml/2006/main"/>
-          <a:ln xmlns:a="http://schemas.openxmlformats.org/drawingml/2006/main" w="0">
-            <a:noFill/>
-            <a:prstDash val="solid"/>
-          </a:ln>
-        </p:spPr>
-        <p:txBody>
-          <a:bodyPr xmlns:a="http://schemas.openxmlformats.org/drawingml/2006/main"/>
-          <a:lstStyle xmlns:a="http://schemas.openxmlformats.org/drawingml/2006/main"/>
-          <a:p xmlns:a="http://schemas.openxmlformats.org/drawingml/2006/main">
-            <a:pPr algn="r">
-              <a:defRPr sz="1050">
-                <a:solidFill>
-                  <a:srgbClr val="4F5661"/>
-                </a:solidFill>
-              </a:defRPr>
-            </a:pPr>
-            <a:r>
-              <a:rPr sz="1050">
-                <a:solidFill>
-                  <a:srgbClr val="4F5661"/>
-                </a:solidFill>
-              </a:rPr>
-              <a:t>08</a:t>
+              <a:t>Predicting future behavior keeps the stable intent signal.</a:t>
             </a:r>
           </a:p>
         </p:txBody>
@@ -5517,7 +8018,408 @@
     </p:spTree>
     <p:extLst>
       <p:ext uri="{BB962C8B-B14F-4D97-AF65-F5344CB8AC3E}">
-        <p14:creationId xmlns:p14="http://schemas.microsoft.com/office/powerpoint/2010/main" val="1599804882"/>
+        <p14:creationId xmlns:p14="http://schemas.microsoft.com/office/powerpoint/2010/main" val="1541390086"/>
+      </p:ext>
+    </p:extLst>
+  </p:cSld>
+</p:sld>
+</file>
+
+<file path=ppt/slides/slide9.xml><?xml version="1.0" encoding="utf-8"?>
+<p:sld xmlns:p="http://schemas.openxmlformats.org/presentationml/2006/main">
+  <p:cSld>
+    <p:bg>
+      <p:bgPr>
+        <a:solidFill xmlns:a="http://schemas.openxmlformats.org/drawingml/2006/main">
+          <a:srgbClr val="FFFFFF"/>
+        </a:solidFill>
+      </p:bgPr>
+    </p:bg>
+    <p:spTree>
+      <p:nvGrpSpPr>
+        <p:cNvPr id="1" name=""/>
+        <p:cNvGrpSpPr/>
+        <p:nvPr/>
+      </p:nvGrpSpPr>
+      <p:grpSpPr>
+        <a:xfrm xmlns:a="http://schemas.openxmlformats.org/drawingml/2006/main"/>
+      </p:grpSpPr>
+      <p:sp>
+        <p:nvSpPr>
+          <p:cNvPr id="1" name="">
+            <a:extLst xmlns:a="http://schemas.openxmlformats.org/drawingml/2006/main">
+              <a:ext uri="{FF2B5EF4-FFF2-40B4-BE49-F238E27FC236}">
+                <a16:creationId xmlns:a16="http://schemas.microsoft.com/office/drawing/2014/main" id="{36EA7D74-8C6B-4DC8-863C-A4140350349E}"/>
+              </a:ext>
+            </a:extLst>
+          </p:cNvPr>
+          <p:cNvSpPr>
+            <a:spLocks xmlns:a="http://schemas.openxmlformats.org/drawingml/2006/main" noGrp="1"/>
+          </p:cNvSpPr>
+          <p:nvPr/>
+        </p:nvSpPr>
+        <p:spPr>
+          <a:xfrm xmlns:a="http://schemas.openxmlformats.org/drawingml/2006/main">
+            <a:off x="533400" y="323850"/>
+            <a:ext cx="6858000" cy="228600"/>
+          </a:xfrm>
+          <a:prstGeom xmlns:a="http://schemas.openxmlformats.org/drawingml/2006/main" prst="rect">
+            <a:avLst/>
+          </a:prstGeom>
+          <a:noFill xmlns:a="http://schemas.openxmlformats.org/drawingml/2006/main"/>
+          <a:ln xmlns:a="http://schemas.openxmlformats.org/drawingml/2006/main" w="0">
+            <a:noFill/>
+            <a:prstDash val="solid"/>
+          </a:ln>
+        </p:spPr>
+        <p:txBody>
+          <a:bodyPr xmlns:a="http://schemas.openxmlformats.org/drawingml/2006/main"/>
+          <a:lstStyle xmlns:a="http://schemas.openxmlformats.org/drawingml/2006/main"/>
+          <a:p xmlns:a="http://schemas.openxmlformats.org/drawingml/2006/main">
+            <a:pPr>
+              <a:defRPr sz="975" b="1">
+                <a:solidFill>
+                  <a:srgbClr val="4F5661"/>
+                </a:solidFill>
+              </a:defRPr>
+            </a:pPr>
+            <a:r>
+              <a:rPr sz="975" b="1">
+                <a:solidFill>
+                  <a:srgbClr val="4F5661"/>
+                </a:solidFill>
+              </a:rPr>
+              <a:t>BOUNDARY</a:t>
+            </a:r>
+          </a:p>
+        </p:txBody>
+      </p:sp>
+      <p:sp>
+        <p:nvSpPr>
+          <p:cNvPr id="2" name="">
+            <a:extLst xmlns:a="http://schemas.openxmlformats.org/drawingml/2006/main">
+              <a:ext uri="{FF2B5EF4-FFF2-40B4-BE49-F238E27FC236}">
+                <a16:creationId xmlns:a16="http://schemas.microsoft.com/office/drawing/2014/main" id="{40C03E9F-B750-474E-9F6F-98B379FA39AD}"/>
+              </a:ext>
+            </a:extLst>
+          </p:cNvPr>
+          <p:cNvSpPr>
+            <a:spLocks xmlns:a="http://schemas.openxmlformats.org/drawingml/2006/main" noGrp="1"/>
+          </p:cNvSpPr>
+          <p:nvPr/>
+        </p:nvSpPr>
+        <p:spPr>
+          <a:xfrm xmlns:a="http://schemas.openxmlformats.org/drawingml/2006/main">
+            <a:off x="533400" y="590550"/>
+            <a:ext cx="10287000" cy="933450"/>
+          </a:xfrm>
+          <a:prstGeom xmlns:a="http://schemas.openxmlformats.org/drawingml/2006/main" prst="rect">
+            <a:avLst/>
+          </a:prstGeom>
+          <a:noFill xmlns:a="http://schemas.openxmlformats.org/drawingml/2006/main"/>
+          <a:ln xmlns:a="http://schemas.openxmlformats.org/drawingml/2006/main" w="0">
+            <a:noFill/>
+            <a:prstDash val="solid"/>
+          </a:ln>
+        </p:spPr>
+        <p:txBody>
+          <a:bodyPr xmlns:a="http://schemas.openxmlformats.org/drawingml/2006/main"/>
+          <a:lstStyle xmlns:a="http://schemas.openxmlformats.org/drawingml/2006/main"/>
+          <a:p xmlns:a="http://schemas.openxmlformats.org/drawingml/2006/main">
+            <a:pPr>
+              <a:defRPr sz="3150" b="1">
+                <a:solidFill>
+                  <a:srgbClr val="0A0A0A"/>
+                </a:solidFill>
+              </a:defRPr>
+            </a:pPr>
+            <a:r>
+              <a:rPr sz="3150" b="1">
+                <a:solidFill>
+                  <a:srgbClr val="0A0A0A"/>
+                </a:solidFill>
+              </a:rPr>
+              <a:t>Learned dynamics failed the control test</a:t>
+            </a:r>
+          </a:p>
+        </p:txBody>
+      </p:sp>
+      <p:sp>
+        <p:nvSpPr>
+          <p:cNvPr id="3" name="">
+            <a:extLst xmlns:a="http://schemas.openxmlformats.org/drawingml/2006/main">
+              <a:ext uri="{FF2B5EF4-FFF2-40B4-BE49-F238E27FC236}">
+                <a16:creationId xmlns:a16="http://schemas.microsoft.com/office/drawing/2014/main" id="{718EC59C-26E3-4ECB-9FB0-94AF9E12F1AD}"/>
+              </a:ext>
+            </a:extLst>
+          </p:cNvPr>
+          <p:cNvSpPr>
+            <a:spLocks xmlns:a="http://schemas.openxmlformats.org/drawingml/2006/main" noGrp="1"/>
+          </p:cNvSpPr>
+          <p:nvPr/>
+        </p:nvSpPr>
+        <p:spPr>
+          <a:xfrm xmlns:a="http://schemas.openxmlformats.org/drawingml/2006/main">
+            <a:off x="11277600" y="6267450"/>
+            <a:ext cx="457200" cy="228600"/>
+          </a:xfrm>
+          <a:prstGeom xmlns:a="http://schemas.openxmlformats.org/drawingml/2006/main" prst="rect">
+            <a:avLst/>
+          </a:prstGeom>
+          <a:noFill xmlns:a="http://schemas.openxmlformats.org/drawingml/2006/main"/>
+          <a:ln xmlns:a="http://schemas.openxmlformats.org/drawingml/2006/main" w="0">
+            <a:noFill/>
+            <a:prstDash val="solid"/>
+          </a:ln>
+        </p:spPr>
+        <p:txBody>
+          <a:bodyPr xmlns:a="http://schemas.openxmlformats.org/drawingml/2006/main"/>
+          <a:lstStyle xmlns:a="http://schemas.openxmlformats.org/drawingml/2006/main"/>
+          <a:p xmlns:a="http://schemas.openxmlformats.org/drawingml/2006/main">
+            <a:pPr algn="r">
+              <a:defRPr sz="1050">
+                <a:solidFill>
+                  <a:srgbClr val="4F5661"/>
+                </a:solidFill>
+              </a:defRPr>
+            </a:pPr>
+            <a:r>
+              <a:rPr sz="1050">
+                <a:solidFill>
+                  <a:srgbClr val="4F5661"/>
+                </a:solidFill>
+              </a:rPr>
+              <a:t>09</a:t>
+            </a:r>
+          </a:p>
+        </p:txBody>
+      </p:sp>
+      <p:sp>
+        <p:nvSpPr>
+          <p:cNvPr id="4" name="">
+            <a:extLst xmlns:a="http://schemas.openxmlformats.org/drawingml/2006/main">
+              <a:ext uri="{FF2B5EF4-FFF2-40B4-BE49-F238E27FC236}">
+                <a16:creationId xmlns:a16="http://schemas.microsoft.com/office/drawing/2014/main" id="{9CB8E267-9A84-4D35-9BA7-391FDEB821AB}"/>
+              </a:ext>
+            </a:extLst>
+          </p:cNvPr>
+          <p:cNvSpPr>
+            <a:spLocks xmlns:a="http://schemas.openxmlformats.org/drawingml/2006/main" noGrp="1"/>
+          </p:cNvSpPr>
+          <p:nvPr/>
+        </p:nvSpPr>
+        <p:spPr>
+          <a:xfrm xmlns:a="http://schemas.openxmlformats.org/drawingml/2006/main">
+            <a:off x="533400" y="1581150"/>
+            <a:ext cx="6572250" cy="4114800"/>
+          </a:xfrm>
+          <a:prstGeom xmlns:a="http://schemas.openxmlformats.org/drawingml/2006/main" prst="rect">
+            <a:avLst/>
+          </a:prstGeom>
+          <a:solidFill xmlns:a="http://schemas.openxmlformats.org/drawingml/2006/main">
+            <a:srgbClr val="F4F5F7"/>
+          </a:solidFill>
+          <a:ln xmlns:a="http://schemas.openxmlformats.org/drawingml/2006/main" w="0">
+            <a:solidFill>
+              <a:srgbClr val="F4F5F7"/>
+            </a:solidFill>
+            <a:prstDash val="solid"/>
+          </a:ln>
+        </p:spPr>
+      </p:sp>
+      <p:pic>
+        <p:nvPicPr>
+          <p:cNvPr id="13" name=""/>
+          <p:cNvPicPr>
+            <a:picLocks xmlns:a="http://schemas.openxmlformats.org/drawingml/2006/main" noChangeAspect="1"/>
+          </p:cNvPicPr>
+          <p:nvPr/>
+        </p:nvPicPr>
+        <p:blipFill>
+          <a:blip xmlns:r="http://schemas.openxmlformats.org/officeDocument/2006/relationships" xmlns:a="http://schemas.openxmlformats.org/drawingml/2006/main" r:embed="R2bf498cbca6f4108"/>
+          <a:stretch xmlns:a="http://schemas.openxmlformats.org/drawingml/2006/main"/>
+        </p:blipFill>
+        <p:spPr>
+          <a:xfrm xmlns:a="http://schemas.openxmlformats.org/drawingml/2006/main">
+            <a:off x="723900" y="1733550"/>
+            <a:ext cx="6191250" cy="3810000"/>
+          </a:xfrm>
+          <a:prstGeom xmlns:a="http://schemas.openxmlformats.org/drawingml/2006/main" prst="rect">
+            <a:avLst/>
+          </a:prstGeom>
+        </p:spPr>
+      </p:pic>
+      <p:sp>
+        <p:nvSpPr>
+          <p:cNvPr id="6" name="">
+            <a:extLst xmlns:a="http://schemas.openxmlformats.org/drawingml/2006/main">
+              <a:ext uri="{FF2B5EF4-FFF2-40B4-BE49-F238E27FC236}">
+                <a16:creationId xmlns:a16="http://schemas.microsoft.com/office/drawing/2014/main" id="{63169FED-1A1A-452C-8AAB-40C1108B8F63}"/>
+              </a:ext>
+            </a:extLst>
+          </p:cNvPr>
+          <p:cNvSpPr>
+            <a:spLocks xmlns:a="http://schemas.openxmlformats.org/drawingml/2006/main" noGrp="1"/>
+          </p:cNvSpPr>
+          <p:nvPr/>
+        </p:nvSpPr>
+        <p:spPr>
+          <a:xfrm xmlns:a="http://schemas.openxmlformats.org/drawingml/2006/main">
+            <a:off x="7524750" y="1752600"/>
+            <a:ext cx="57150" cy="2247900"/>
+          </a:xfrm>
+          <a:prstGeom xmlns:a="http://schemas.openxmlformats.org/drawingml/2006/main" prst="rect">
+            <a:avLst/>
+          </a:prstGeom>
+          <a:solidFill xmlns:a="http://schemas.openxmlformats.org/drawingml/2006/main">
+            <a:srgbClr val="0D6E7A"/>
+          </a:solidFill>
+          <a:ln xmlns:a="http://schemas.openxmlformats.org/drawingml/2006/main" w="0">
+            <a:solidFill>
+              <a:srgbClr val="0D6E7A"/>
+            </a:solidFill>
+            <a:prstDash val="solid"/>
+          </a:ln>
+        </p:spPr>
+      </p:sp>
+      <p:sp>
+        <p:nvSpPr>
+          <p:cNvPr id="7" name="">
+            <a:extLst xmlns:a="http://schemas.openxmlformats.org/drawingml/2006/main">
+              <a:ext uri="{FF2B5EF4-FFF2-40B4-BE49-F238E27FC236}">
+                <a16:creationId xmlns:a16="http://schemas.microsoft.com/office/drawing/2014/main" id="{9A7FDCAB-5E90-4798-A0E3-47BCA6918645}"/>
+              </a:ext>
+            </a:extLst>
+          </p:cNvPr>
+          <p:cNvSpPr>
+            <a:spLocks xmlns:a="http://schemas.openxmlformats.org/drawingml/2006/main" noGrp="1"/>
+          </p:cNvSpPr>
+          <p:nvPr/>
+        </p:nvSpPr>
+        <p:spPr>
+          <a:xfrm xmlns:a="http://schemas.openxmlformats.org/drawingml/2006/main">
+            <a:off x="7734300" y="1733550"/>
+            <a:ext cx="3467100" cy="2247900"/>
+          </a:xfrm>
+          <a:prstGeom xmlns:a="http://schemas.openxmlformats.org/drawingml/2006/main" prst="rect">
+            <a:avLst/>
+          </a:prstGeom>
+          <a:noFill xmlns:a="http://schemas.openxmlformats.org/drawingml/2006/main"/>
+          <a:ln xmlns:a="http://schemas.openxmlformats.org/drawingml/2006/main" w="0">
+            <a:noFill/>
+            <a:prstDash val="solid"/>
+          </a:ln>
+        </p:spPr>
+        <p:txBody>
+          <a:bodyPr xmlns:a="http://schemas.openxmlformats.org/drawingml/2006/main"/>
+          <a:lstStyle xmlns:a="http://schemas.openxmlformats.org/drawingml/2006/main"/>
+          <a:p xmlns:a="http://schemas.openxmlformats.org/drawingml/2006/main">
+            <a:pPr>
+              <a:defRPr sz="1650">
+                <a:solidFill>
+                  <a:srgbClr val="4F5661"/>
+                </a:solidFill>
+              </a:defRPr>
+            </a:pPr>
+            <a:r>
+              <a:rPr sz="1650">
+                <a:solidFill>
+                  <a:srgbClr val="4F5661"/>
+                </a:solidFill>
+              </a:rPr>
+              <a:t>- Simulator belief planning works.</a:t>
+            </a:r>
+          </a:p>
+          <a:p xmlns:a="http://schemas.openxmlformats.org/drawingml/2006/main">
+            <a:pPr>
+              <a:defRPr sz="1650">
+                <a:solidFill>
+                  <a:srgbClr val="4F5661"/>
+                </a:solidFill>
+              </a:defRPr>
+            </a:pPr>
+            <a:r>
+              <a:rPr sz="1650">
+                <a:solidFill>
+                  <a:srgbClr val="4F5661"/>
+                </a:solidFill>
+              </a:rPr>
+              <a:t>- The latent world planner reaches 0.57 captures/episode.</a:t>
+            </a:r>
+          </a:p>
+          <a:p xmlns:a="http://schemas.openxmlformats.org/drawingml/2006/main">
+            <a:pPr>
+              <a:defRPr sz="1650">
+                <a:solidFill>
+                  <a:srgbClr val="4F5661"/>
+                </a:solidFill>
+              </a:defRPr>
+            </a:pPr>
+            <a:r>
+              <a:rPr sz="1650">
+                <a:solidFill>
+                  <a:srgbClr val="4F5661"/>
+                </a:solidFill>
+              </a:rPr>
+              <a:t>- The control bottleneck is dynamics fidelity.</a:t>
+            </a:r>
+          </a:p>
+        </p:txBody>
+      </p:sp>
+      <p:sp>
+        <p:nvSpPr>
+          <p:cNvPr id="8" name="">
+            <a:extLst xmlns:a="http://schemas.openxmlformats.org/drawingml/2006/main">
+              <a:ext uri="{FF2B5EF4-FFF2-40B4-BE49-F238E27FC236}">
+                <a16:creationId xmlns:a16="http://schemas.microsoft.com/office/drawing/2014/main" id="{863DA49C-A045-437C-B567-41136E8B46C7}"/>
+              </a:ext>
+            </a:extLst>
+          </p:cNvPr>
+          <p:cNvSpPr>
+            <a:spLocks xmlns:a="http://schemas.openxmlformats.org/drawingml/2006/main" noGrp="1"/>
+          </p:cNvSpPr>
+          <p:nvPr/>
+        </p:nvSpPr>
+        <p:spPr>
+          <a:xfrm xmlns:a="http://schemas.openxmlformats.org/drawingml/2006/main">
+            <a:off x="7524750" y="4552950"/>
+            <a:ext cx="3676650" cy="800100"/>
+          </a:xfrm>
+          <a:prstGeom xmlns:a="http://schemas.openxmlformats.org/drawingml/2006/main" prst="rect">
+            <a:avLst/>
+          </a:prstGeom>
+          <a:noFill xmlns:a="http://schemas.openxmlformats.org/drawingml/2006/main"/>
+          <a:ln xmlns:a="http://schemas.openxmlformats.org/drawingml/2006/main" w="0">
+            <a:noFill/>
+            <a:prstDash val="solid"/>
+          </a:ln>
+        </p:spPr>
+        <p:txBody>
+          <a:bodyPr xmlns:a="http://schemas.openxmlformats.org/drawingml/2006/main"/>
+          <a:lstStyle xmlns:a="http://schemas.openxmlformats.org/drawingml/2006/main"/>
+          <a:p xmlns:a="http://schemas.openxmlformats.org/drawingml/2006/main">
+            <a:pPr>
+              <a:defRPr sz="1875" b="1">
+                <a:solidFill>
+                  <a:srgbClr val="0A0A0A"/>
+                </a:solidFill>
+              </a:defRPr>
+            </a:pPr>
+            <a:r>
+              <a:rPr sz="1875" b="1">
+                <a:solidFill>
+                  <a:srgbClr val="0A0A0A"/>
+                </a:solidFill>
+              </a:rPr>
+              <a:t>Keep this negative result in the talk. It tells reviewers where the method breaks today.</a:t>
+            </a:r>
+          </a:p>
+        </p:txBody>
+      </p:sp>
+    </p:spTree>
+    <p:extLst>
+      <p:ext uri="{BB962C8B-B14F-4D97-AF65-F5344CB8AC3E}">
+        <p14:creationId xmlns:p14="http://schemas.microsoft.com/office/powerpoint/2010/main" val="976870286"/>
       </p:ext>
     </p:extLst>
   </p:cSld>

--- a/marl_opp_aware_results.pptx
+++ b/marl_opp_aware_results.pptx
@@ -24,6 +24,8 @@
     <p:sldId id="272" r:id="rId24"/>
     <p:sldId id="273" r:id="rId25"/>
     <p:sldId id="274" r:id="rId26"/>
+    <p:sldId id="275" r:id="rId27"/>
+    <p:sldId id="276" r:id="rId28"/>
   </p:sldIdLst>
   <p:sldSz cx="12191695" cy="6858000" type="screen4x3"/>
   <p:notesSz cx="6858000" cy="9144000"/>
@@ -1220,7 +1222,7 @@
           <a:lstStyle/>
           <a:p>
             <a:r>
-              <a:t>Close on specific work. The repo has code hygiene, tests, result checks, and this deck. The scientific gap is the next experiment set: the oracle planner ceiling, a switching prey to test belief tracking, the HOP baseline, a genuinely distinct placement (snake path), and archived raw runs pinned to a release DOI. End with the concrete ask: accept the controlled result, fund the baseline and switching-opponent runs.</a:t>
+              <a:t>Anticipated questions — answer crisply, then stop. These are the sharpest ones the plots invite; each answer concedes what's honest and states the claim precisely. Full set with figures on the /present page's Figure guide.</a:t>
             </a:r>
           </a:p>
         </p:txBody>
@@ -1291,6 +1293,146 @@
           <a:p>
             <a:r>
               <a:t>Use this slide to state the exact claim. The evidence is captures per episode, not action accuracy. 4.31 is the main positive result. 1.42 explains why hard labels can hurt control. 4.08 shows the belief survives removing intent labels.</a:t>
+            </a:r>
+          </a:p>
+        </p:txBody>
+      </p:sp>
+      <p:sp>
+        <p:nvSpPr>
+          <p:cNvPr id="4" name="Slide Number Placeholder 3"/>
+          <p:cNvSpPr>
+            <a:spLocks noGrp="1"/>
+          </p:cNvSpPr>
+          <p:nvPr>
+            <p:ph type="sldNum" idx="5" sz="quarter"/>
+          </p:nvPr>
+        </p:nvSpPr>
+        <p:spPr/>
+      </p:sp>
+    </p:spTree>
+  </p:cSld>
+  <p:clrMapOvr>
+    <a:masterClrMapping/>
+  </p:clrMapOvr>
+</p:notes>
+</file>
+
+<file path=ppt/notesSlides/notesSlide20.xml><?xml version="1.0" encoding="utf-8"?>
+<p:notes xmlns:a="http://schemas.openxmlformats.org/drawingml/2006/main" xmlns:p="http://schemas.openxmlformats.org/presentationml/2006/main" xmlns:r="http://schemas.openxmlformats.org/officeDocument/2006/relationships">
+  <p:cSld>
+    <p:spTree>
+      <p:nvGrpSpPr>
+        <p:cNvPr id="1" name=""/>
+        <p:cNvGrpSpPr/>
+        <p:nvPr/>
+      </p:nvGrpSpPr>
+      <p:grpSpPr>
+        <a:xfrm>
+          <a:off x="0" y="0"/>
+          <a:ext cx="0" cy="0"/>
+          <a:chOff x="0" y="0"/>
+          <a:chExt cx="0" cy="0"/>
+        </a:xfrm>
+      </p:grpSpPr>
+      <p:sp>
+        <p:nvSpPr>
+          <p:cNvPr id="2" name="Slide Image Placeholder 1"/>
+          <p:cNvSpPr>
+            <a:spLocks noGrp="1"/>
+          </p:cNvSpPr>
+          <p:nvPr>
+            <p:ph type="sldImg" idx="2"/>
+          </p:nvPr>
+        </p:nvSpPr>
+        <p:spPr/>
+      </p:sp>
+      <p:sp>
+        <p:nvSpPr>
+          <p:cNvPr id="3" name="Notes Placeholder 2"/>
+          <p:cNvSpPr>
+            <a:spLocks noGrp="1"/>
+          </p:cNvSpPr>
+          <p:nvPr>
+            <p:ph type="body" idx="3" sz="quarter"/>
+          </p:nvPr>
+        </p:nvSpPr>
+        <p:spPr/>
+        <p:txBody>
+          <a:bodyPr/>
+          <a:lstStyle/>
+          <a:p>
+            <a:r>
+              <a:t>Anticipated questions — answer crisply, then stop. These are the sharpest ones the plots invite; each answer concedes what's honest and states the claim precisely. Full set with figures on the /present page's Figure guide.</a:t>
+            </a:r>
+          </a:p>
+        </p:txBody>
+      </p:sp>
+      <p:sp>
+        <p:nvSpPr>
+          <p:cNvPr id="4" name="Slide Number Placeholder 3"/>
+          <p:cNvSpPr>
+            <a:spLocks noGrp="1"/>
+          </p:cNvSpPr>
+          <p:nvPr>
+            <p:ph type="sldNum" idx="5" sz="quarter"/>
+          </p:nvPr>
+        </p:nvSpPr>
+        <p:spPr/>
+      </p:sp>
+    </p:spTree>
+  </p:cSld>
+  <p:clrMapOvr>
+    <a:masterClrMapping/>
+  </p:clrMapOvr>
+</p:notes>
+</file>
+
+<file path=ppt/notesSlides/notesSlide21.xml><?xml version="1.0" encoding="utf-8"?>
+<p:notes xmlns:a="http://schemas.openxmlformats.org/drawingml/2006/main" xmlns:p="http://schemas.openxmlformats.org/presentationml/2006/main" xmlns:r="http://schemas.openxmlformats.org/officeDocument/2006/relationships">
+  <p:cSld>
+    <p:spTree>
+      <p:nvGrpSpPr>
+        <p:cNvPr id="1" name=""/>
+        <p:cNvGrpSpPr/>
+        <p:nvPr/>
+      </p:nvGrpSpPr>
+      <p:grpSpPr>
+        <a:xfrm>
+          <a:off x="0" y="0"/>
+          <a:ext cx="0" cy="0"/>
+          <a:chOff x="0" y="0"/>
+          <a:chExt cx="0" cy="0"/>
+        </a:xfrm>
+      </p:grpSpPr>
+      <p:sp>
+        <p:nvSpPr>
+          <p:cNvPr id="2" name="Slide Image Placeholder 1"/>
+          <p:cNvSpPr>
+            <a:spLocks noGrp="1"/>
+          </p:cNvSpPr>
+          <p:nvPr>
+            <p:ph type="sldImg" idx="2"/>
+          </p:nvPr>
+        </p:nvSpPr>
+        <p:spPr/>
+      </p:sp>
+      <p:sp>
+        <p:nvSpPr>
+          <p:cNvPr id="3" name="Notes Placeholder 2"/>
+          <p:cNvSpPr>
+            <a:spLocks noGrp="1"/>
+          </p:cNvSpPr>
+          <p:nvPr>
+            <p:ph type="body" idx="3" sz="quarter"/>
+          </p:nvPr>
+        </p:nvSpPr>
+        <p:spPr/>
+        <p:txBody>
+          <a:bodyPr/>
+          <a:lstStyle/>
+          <a:p>
+            <a:r>
+              <a:t>Close on specific work. The repo has code hygiene, tests, result checks, and this deck. The scientific gap is the next experiment set: the oracle planner ceiling, a switching prey to test belief tracking, the HOP baseline, a genuinely distinct placement (snake path), and archived raw runs pinned to a release DOI. End with the concrete ask: accept the controlled result, fund the baseline and switching-opponent runs.</a:t>
             </a:r>
           </a:p>
         </p:txBody>
@@ -7142,7 +7284,7 @@
               </a:defRPr>
             </a:pPr>
             <a:r>
-              <a:t>CLOSE</a:t>
+              <a:t>DEFENSE</a:t>
             </a:r>
           </a:p>
         </p:txBody>
@@ -7177,7 +7319,7 @@
               </a:defRPr>
             </a:pPr>
             <a:r>
-              <a:t>Before submission, run the missing tests</a:t>
+              <a:t>Questions they'll ask</a:t>
             </a:r>
           </a:p>
         </p:txBody>
@@ -7190,29 +7332,29 @@
         </p:nvSpPr>
         <p:spPr>
           <a:xfrm>
-            <a:off x="822960" y="1554480"/>
-            <a:ext cx="2834640" cy="411480"/>
-          </a:xfrm>
-          <a:prstGeom prst="rect">
-            <a:avLst/>
-          </a:prstGeom>
-          <a:noFill/>
-        </p:spPr>
-        <p:txBody>
-          <a:bodyPr wrap="square">
-            <a:spAutoFit/>
-          </a:bodyPr>
-          <a:lstStyle/>
-          <a:p>
-            <a:pPr>
-              <a:defRPr sz="1800" b="1">
-                <a:solidFill>
-                  <a:srgbClr val="171717"/>
-                </a:solidFill>
-              </a:defRPr>
-            </a:pPr>
-            <a:r>
-              <a:t>Oracle planner</a:t>
+            <a:off x="640080" y="1417320"/>
+            <a:ext cx="10972800" cy="457200"/>
+          </a:xfrm>
+          <a:prstGeom prst="rect">
+            <a:avLst/>
+          </a:prstGeom>
+          <a:noFill/>
+        </p:spPr>
+        <p:txBody>
+          <a:bodyPr wrap="square">
+            <a:spAutoFit/>
+          </a:bodyPr>
+          <a:lstStyle/>
+          <a:p>
+            <a:pPr>
+              <a:defRPr sz="1600" b="1">
+                <a:solidFill>
+                  <a:srgbClr val="0D6E7A"/>
+                </a:solidFill>
+              </a:defRPr>
+            </a:pPr>
+            <a:r>
+              <a:t>Q  Beating the oracle looks too good — is it real?</a:t>
             </a:r>
           </a:p>
         </p:txBody>
@@ -7225,29 +7367,29 @@
         </p:nvSpPr>
         <p:spPr>
           <a:xfrm>
-            <a:off x="3840480" y="1554480"/>
-            <a:ext cx="7680960" cy="502920"/>
-          </a:xfrm>
-          <a:prstGeom prst="rect">
-            <a:avLst/>
-          </a:prstGeom>
-          <a:noFill/>
-        </p:spPr>
-        <p:txBody>
-          <a:bodyPr wrap="square">
-            <a:spAutoFit/>
-          </a:bodyPr>
-          <a:lstStyle/>
-          <a:p>
-            <a:pPr>
-              <a:defRPr sz="1700" b="0">
+            <a:off x="640080" y="1874519"/>
+            <a:ext cx="10972800" cy="731520"/>
+          </a:xfrm>
+          <a:prstGeom prst="rect">
+            <a:avLst/>
+          </a:prstGeom>
+          <a:noFill/>
+        </p:spPr>
+        <p:txBody>
+          <a:bodyPr wrap="square">
+            <a:spAutoFit/>
+          </a:bodyPr>
+          <a:lstStyle/>
+          <a:p>
+            <a:pPr>
+              <a:defRPr sz="1400" b="0">
                 <a:solidFill>
                   <a:srgbClr val="4A4A4A"/>
                 </a:solidFill>
               </a:defRPr>
             </a:pPr>
             <a:r>
-              <a:t>Measures the true planning ceiling with known intent.</a:t>
+              <a:t>A  It exceeds a REACTIVE oracle (true intent, no lookahead). Planning pre-positions, so 4.31 &gt; 4.05. An oracle PLANNER is the true ceiling, and it's on the to-run list.</a:t>
             </a:r>
           </a:p>
         </p:txBody>
@@ -7260,29 +7402,29 @@
         </p:nvSpPr>
         <p:spPr>
           <a:xfrm>
-            <a:off x="822960" y="2267712"/>
-            <a:ext cx="2834640" cy="411480"/>
-          </a:xfrm>
-          <a:prstGeom prst="rect">
-            <a:avLst/>
-          </a:prstGeom>
-          <a:noFill/>
-        </p:spPr>
-        <p:txBody>
-          <a:bodyPr wrap="square">
-            <a:spAutoFit/>
-          </a:bodyPr>
-          <a:lstStyle/>
-          <a:p>
-            <a:pPr>
-              <a:defRPr sz="1800" b="1">
-                <a:solidFill>
-                  <a:srgbClr val="171717"/>
-                </a:solidFill>
-              </a:defRPr>
-            </a:pPr>
-            <a:r>
-              <a:t>Switching prey</a:t>
+            <a:off x="640080" y="2715768"/>
+            <a:ext cx="10972800" cy="457200"/>
+          </a:xfrm>
+          <a:prstGeom prst="rect">
+            <a:avLst/>
+          </a:prstGeom>
+          <a:noFill/>
+        </p:spPr>
+        <p:txBody>
+          <a:bodyPr wrap="square">
+            <a:spAutoFit/>
+          </a:bodyPr>
+          <a:lstStyle/>
+          <a:p>
+            <a:pPr>
+              <a:defRPr sz="1600" b="1">
+                <a:solidFill>
+                  <a:srgbClr val="0D6E7A"/>
+                </a:solidFill>
+              </a:defRPr>
+            </a:pPr>
+            <a:r>
+              <a:t>Q  Why does an honestly inferred hard intent (2.56) lose to blind (2.68)?</a:t>
             </a:r>
           </a:p>
         </p:txBody>
@@ -7295,29 +7437,29 @@
         </p:nvSpPr>
         <p:spPr>
           <a:xfrm>
-            <a:off x="3840480" y="2267712"/>
-            <a:ext cx="7680960" cy="502920"/>
-          </a:xfrm>
-          <a:prstGeom prst="rect">
-            <a:avLst/>
-          </a:prstGeom>
-          <a:noFill/>
-        </p:spPr>
-        <p:txBody>
-          <a:bodyPr wrap="square">
-            <a:spAutoFit/>
-          </a:bodyPr>
-          <a:lstStyle/>
-          <a:p>
-            <a:pPr>
-              <a:defRPr sz="1700" b="0">
+            <a:off x="640080" y="3172968"/>
+            <a:ext cx="10972800" cy="731520"/>
+          </a:xfrm>
+          <a:prstGeom prst="rect">
+            <a:avLst/>
+          </a:prstGeom>
+          <a:noFill/>
+        </p:spPr>
+        <p:txBody>
+          <a:bodyPr wrap="square">
+            <a:spAutoFit/>
+          </a:bodyPr>
+          <a:lstStyle/>
+          <a:p>
+            <a:pPr>
+              <a:defRPr sz="1400" b="0">
                 <a:solidFill>
                   <a:srgbClr val="4A4A4A"/>
                 </a:solidFill>
               </a:defRPr>
             </a:pPr>
             <a:r>
-              <a:t>Tests whether the belief tracks a strategy change mid-episode.</a:t>
+              <a:t>A  The argmax at k=8 is ~74% accurate; committing to a wrong corner costs more than hedging. That's the whole case for carrying the distribution, not a point estimate.</a:t>
             </a:r>
           </a:p>
         </p:txBody>
@@ -7330,29 +7472,29 @@
         </p:nvSpPr>
         <p:spPr>
           <a:xfrm>
-            <a:off x="822960" y="2980944"/>
-            <a:ext cx="2834640" cy="411480"/>
-          </a:xfrm>
-          <a:prstGeom prst="rect">
-            <a:avLst/>
-          </a:prstGeom>
-          <a:noFill/>
-        </p:spPr>
-        <p:txBody>
-          <a:bodyPr wrap="square">
-            <a:spAutoFit/>
-          </a:bodyPr>
-          <a:lstStyle/>
-          <a:p>
-            <a:pPr>
-              <a:defRPr sz="1800" b="1">
-                <a:solidFill>
-                  <a:srgbClr val="171717"/>
-                </a:solidFill>
-              </a:defRPr>
-            </a:pPr>
-            <a:r>
-              <a:t>HOP baseline</a:t>
+            <a:off x="640080" y="4014215"/>
+            <a:ext cx="10972800" cy="457200"/>
+          </a:xfrm>
+          <a:prstGeom prst="rect">
+            <a:avLst/>
+          </a:prstGeom>
+          <a:noFill/>
+        </p:spPr>
+        <p:txBody>
+          <a:bodyPr wrap="square">
+            <a:spAutoFit/>
+          </a:bodyPr>
+          <a:lstStyle/>
+          <a:p>
+            <a:pPr>
+              <a:defRPr sz="1600" b="1">
+                <a:solidFill>
+                  <a:srgbClr val="0D6E7A"/>
+                </a:solidFill>
+              </a:defRPr>
+            </a:pPr>
+            <a:r>
+              <a:t>Q  Probe vs ARI — what's the difference?</a:t>
             </a:r>
           </a:p>
         </p:txBody>
@@ -7365,29 +7507,29 @@
         </p:nvSpPr>
         <p:spPr>
           <a:xfrm>
-            <a:off x="3840480" y="2980944"/>
-            <a:ext cx="7680960" cy="502920"/>
-          </a:xfrm>
-          <a:prstGeom prst="rect">
-            <a:avLst/>
-          </a:prstGeom>
-          <a:noFill/>
-        </p:spPr>
-        <p:txBody>
-          <a:bodyPr wrap="square">
-            <a:spAutoFit/>
-          </a:bodyPr>
-          <a:lstStyle/>
-          <a:p>
-            <a:pPr>
-              <a:defRPr sz="1700" b="0">
+            <a:off x="640080" y="4471416"/>
+            <a:ext cx="10972800" cy="731520"/>
+          </a:xfrm>
+          <a:prstGeom prst="rect">
+            <a:avLst/>
+          </a:prstGeom>
+          <a:noFill/>
+        </p:spPr>
+        <p:txBody>
+          <a:bodyPr wrap="square">
+            <a:spAutoFit/>
+          </a:bodyPr>
+          <a:lstStyle/>
+          <a:p>
+            <a:pPr>
+              <a:defRPr sz="1400" b="0">
                 <a:solidFill>
                   <a:srgbClr val="4A4A4A"/>
                 </a:solidFill>
               </a:defRPr>
             </a:pPr>
             <a:r>
-              <a:t>Checks the closest belief-search comparator.</a:t>
+              <a:t>A  Probe = can a LINEAR readout with labels decode the latent (chance 0.25). ARI = does it cluster WITHOUT labels. On intent both are high; on circle-vs-corners only the probe is.</a:t>
             </a:r>
           </a:p>
         </p:txBody>
@@ -7400,29 +7542,29 @@
         </p:nvSpPr>
         <p:spPr>
           <a:xfrm>
-            <a:off x="822960" y="3694176"/>
-            <a:ext cx="2834640" cy="411480"/>
-          </a:xfrm>
-          <a:prstGeom prst="rect">
-            <a:avLst/>
-          </a:prstGeom>
-          <a:noFill/>
-        </p:spPr>
-        <p:txBody>
-          <a:bodyPr wrap="square">
-            <a:spAutoFit/>
-          </a:bodyPr>
-          <a:lstStyle/>
-          <a:p>
-            <a:pPr>
-              <a:defRPr sz="1800" b="1">
-                <a:solidFill>
-                  <a:srgbClr val="171717"/>
-                </a:solidFill>
-              </a:defRPr>
-            </a:pPr>
-            <a:r>
-              <a:t>Snake placement</a:t>
+            <a:off x="640080" y="5312664"/>
+            <a:ext cx="10972800" cy="457200"/>
+          </a:xfrm>
+          <a:prstGeom prst="rect">
+            <a:avLst/>
+          </a:prstGeom>
+          <a:noFill/>
+        </p:spPr>
+        <p:txBody>
+          <a:bodyPr wrap="square">
+            <a:spAutoFit/>
+          </a:bodyPr>
+          <a:lstStyle/>
+          <a:p>
+            <a:pPr>
+              <a:defRPr sz="1600" b="1">
+                <a:solidFill>
+                  <a:srgbClr val="0D6E7A"/>
+                </a:solidFill>
+              </a:defRPr>
+            </a:pPr>
+            <a:r>
+              <a:t>Q  Isn't JEPA just a better-tuned VAE?</a:t>
             </a:r>
           </a:p>
         </p:txBody>
@@ -7435,134 +7577,29 @@
         </p:nvSpPr>
         <p:spPr>
           <a:xfrm>
-            <a:off x="3840480" y="3694176"/>
-            <a:ext cx="7680960" cy="502920"/>
-          </a:xfrm>
-          <a:prstGeom prst="rect">
-            <a:avLst/>
-          </a:prstGeom>
-          <a:noFill/>
-        </p:spPr>
-        <p:txBody>
-          <a:bodyPr wrap="square">
-            <a:spAutoFit/>
-          </a:bodyPr>
-          <a:lstStyle/>
-          <a:p>
-            <a:pPr>
-              <a:defRPr sz="1700" b="0">
+            <a:off x="640080" y="5769864"/>
+            <a:ext cx="10972800" cy="731520"/>
+          </a:xfrm>
+          <a:prstGeom prst="rect">
+            <a:avLst/>
+          </a:prstGeom>
+          <a:noFill/>
+        </p:spPr>
+        <p:txBody>
+          <a:bodyPr wrap="square">
+            <a:spAutoFit/>
+          </a:bodyPr>
+          <a:lstStyle/>
+          <a:p>
+            <a:pPr>
+              <a:defRPr sz="1400" b="0">
                 <a:solidFill>
                   <a:srgbClr val="4A4A4A"/>
                 </a:solidFill>
               </a:defRPr>
             </a:pPr>
             <a:r>
-              <a:t>A genuinely distinct behaviour class, so clusters can exist.</a:t>
-            </a:r>
-          </a:p>
-        </p:txBody>
-      </p:sp>
-      <p:sp>
-        <p:nvSpPr>
-          <p:cNvPr id="13" name="TextBox 12"/>
-          <p:cNvSpPr txBox="1"/>
-          <p:nvPr/>
-        </p:nvSpPr>
-        <p:spPr>
-          <a:xfrm>
-            <a:off x="822960" y="4407408"/>
-            <a:ext cx="2834640" cy="411480"/>
-          </a:xfrm>
-          <a:prstGeom prst="rect">
-            <a:avLst/>
-          </a:prstGeom>
-          <a:noFill/>
-        </p:spPr>
-        <p:txBody>
-          <a:bodyPr wrap="square">
-            <a:spAutoFit/>
-          </a:bodyPr>
-          <a:lstStyle/>
-          <a:p>
-            <a:pPr>
-              <a:defRPr sz="1800" b="1">
-                <a:solidFill>
-                  <a:srgbClr val="171717"/>
-                </a:solidFill>
-              </a:defRPr>
-            </a:pPr>
-            <a:r>
-              <a:t>Raw artifact archive</a:t>
-            </a:r>
-          </a:p>
-        </p:txBody>
-      </p:sp>
-      <p:sp>
-        <p:nvSpPr>
-          <p:cNvPr id="14" name="TextBox 13"/>
-          <p:cNvSpPr txBox="1"/>
-          <p:nvPr/>
-        </p:nvSpPr>
-        <p:spPr>
-          <a:xfrm>
-            <a:off x="3840480" y="4407408"/>
-            <a:ext cx="7680960" cy="502920"/>
-          </a:xfrm>
-          <a:prstGeom prst="rect">
-            <a:avLst/>
-          </a:prstGeom>
-          <a:noFill/>
-        </p:spPr>
-        <p:txBody>
-          <a:bodyPr wrap="square">
-            <a:spAutoFit/>
-          </a:bodyPr>
-          <a:lstStyle/>
-          <a:p>
-            <a:pPr>
-              <a:defRPr sz="1700" b="0">
-                <a:solidFill>
-                  <a:srgbClr val="4A4A4A"/>
-                </a:solidFill>
-              </a:defRPr>
-            </a:pPr>
-            <a:r>
-              <a:t>Pins checkpoints, logs, and metrics to a release DOI.</a:t>
-            </a:r>
-          </a:p>
-        </p:txBody>
-      </p:sp>
-      <p:sp>
-        <p:nvSpPr>
-          <p:cNvPr id="15" name="TextBox 14"/>
-          <p:cNvSpPr txBox="1"/>
-          <p:nvPr/>
-        </p:nvSpPr>
-        <p:spPr>
-          <a:xfrm>
-            <a:off x="822960" y="5349240"/>
-            <a:ext cx="10607040" cy="548640"/>
-          </a:xfrm>
-          <a:prstGeom prst="rect">
-            <a:avLst/>
-          </a:prstGeom>
-          <a:noFill/>
-        </p:spPr>
-        <p:txBody>
-          <a:bodyPr wrap="square">
-            <a:spAutoFit/>
-          </a:bodyPr>
-          <a:lstStyle/>
-          <a:p>
-            <a:pPr>
-              <a:defRPr sz="1800" b="1">
-                <a:solidFill>
-                  <a:srgbClr val="171717"/>
-                </a:solidFill>
-              </a:defRPr>
-            </a:pPr>
-            <a:r>
-              <a:t>End with a concrete ask: accept the controlled result, then fund the baseline and switching-opponent run.</a:t>
+              <a:t>A  Same data, latent size, and budget. JEPA predicts the future representation (no decoder); the VAE reconstructs. The gap (0.89 vs 0.53) is the objective, not the tuning.</a:t>
             </a:r>
           </a:p>
         </p:txBody>
@@ -7931,6 +7968,917 @@
             </a:pPr>
             <a:r>
               <a:t>captures/episode with the label-free JEPA belief</a:t>
+            </a:r>
+          </a:p>
+        </p:txBody>
+      </p:sp>
+    </p:spTree>
+  </p:cSld>
+  <p:clrMapOvr>
+    <a:masterClrMapping/>
+  </p:clrMapOvr>
+</p:sld>
+</file>
+
+<file path=ppt/slides/slide20.xml><?xml version="1.0" encoding="utf-8"?>
+<p:sld xmlns:a="http://schemas.openxmlformats.org/drawingml/2006/main" xmlns:p="http://schemas.openxmlformats.org/presentationml/2006/main" xmlns:r="http://schemas.openxmlformats.org/officeDocument/2006/relationships">
+  <p:cSld>
+    <p:spTree>
+      <p:nvGrpSpPr>
+        <p:cNvPr id="1" name=""/>
+        <p:cNvGrpSpPr/>
+        <p:nvPr/>
+      </p:nvGrpSpPr>
+      <p:grpSpPr/>
+      <p:sp>
+        <p:nvSpPr>
+          <p:cNvPr id="2" name="TextBox 1"/>
+          <p:cNvSpPr txBox="1"/>
+          <p:nvPr/>
+        </p:nvSpPr>
+        <p:spPr>
+          <a:xfrm>
+            <a:off x="11368735" y="6400800"/>
+            <a:ext cx="548640" cy="274320"/>
+          </a:xfrm>
+          <a:prstGeom prst="rect">
+            <a:avLst/>
+          </a:prstGeom>
+          <a:noFill/>
+        </p:spPr>
+        <p:txBody>
+          <a:bodyPr wrap="none">
+            <a:spAutoFit/>
+          </a:bodyPr>
+          <a:lstStyle/>
+          <a:p>
+            <a:pPr>
+              <a:defRPr sz="1100">
+                <a:solidFill>
+                  <a:srgbClr val="4A4A4A"/>
+                </a:solidFill>
+              </a:defRPr>
+            </a:pPr>
+            <a:r>
+              <a:t>20</a:t>
+            </a:r>
+          </a:p>
+        </p:txBody>
+      </p:sp>
+      <p:sp>
+        <p:nvSpPr>
+          <p:cNvPr id="3" name="TextBox 2"/>
+          <p:cNvSpPr txBox="1"/>
+          <p:nvPr/>
+        </p:nvSpPr>
+        <p:spPr>
+          <a:xfrm>
+            <a:off x="502920" y="256032"/>
+            <a:ext cx="3657600" cy="320040"/>
+          </a:xfrm>
+          <a:prstGeom prst="rect">
+            <a:avLst/>
+          </a:prstGeom>
+          <a:noFill/>
+        </p:spPr>
+        <p:txBody>
+          <a:bodyPr wrap="square">
+            <a:spAutoFit/>
+          </a:bodyPr>
+          <a:lstStyle/>
+          <a:p>
+            <a:pPr>
+              <a:defRPr sz="1200" b="1">
+                <a:solidFill>
+                  <a:srgbClr val="0D6E7A"/>
+                </a:solidFill>
+              </a:defRPr>
+            </a:pPr>
+            <a:r>
+              <a:t>DEFENSE</a:t>
+            </a:r>
+          </a:p>
+        </p:txBody>
+      </p:sp>
+      <p:sp>
+        <p:nvSpPr>
+          <p:cNvPr id="4" name="TextBox 3"/>
+          <p:cNvSpPr txBox="1"/>
+          <p:nvPr/>
+        </p:nvSpPr>
+        <p:spPr>
+          <a:xfrm>
+            <a:off x="502920" y="502920"/>
+            <a:ext cx="11185855" cy="822960"/>
+          </a:xfrm>
+          <a:prstGeom prst="rect">
+            <a:avLst/>
+          </a:prstGeom>
+          <a:noFill/>
+        </p:spPr>
+        <p:txBody>
+          <a:bodyPr wrap="square">
+            <a:spAutoFit/>
+          </a:bodyPr>
+          <a:lstStyle/>
+          <a:p>
+            <a:pPr>
+              <a:defRPr sz="2700" b="1">
+                <a:solidFill>
+                  <a:srgbClr val="171717"/>
+                </a:solidFill>
+              </a:defRPr>
+            </a:pPr>
+            <a:r>
+              <a:t>Questions they'll ask (cont.)</a:t>
+            </a:r>
+          </a:p>
+        </p:txBody>
+      </p:sp>
+      <p:sp>
+        <p:nvSpPr>
+          <p:cNvPr id="5" name="TextBox 4"/>
+          <p:cNvSpPr txBox="1"/>
+          <p:nvPr/>
+        </p:nvSpPr>
+        <p:spPr>
+          <a:xfrm>
+            <a:off x="640080" y="1417320"/>
+            <a:ext cx="10972800" cy="457200"/>
+          </a:xfrm>
+          <a:prstGeom prst="rect">
+            <a:avLst/>
+          </a:prstGeom>
+          <a:noFill/>
+        </p:spPr>
+        <p:txBody>
+          <a:bodyPr wrap="square">
+            <a:spAutoFit/>
+          </a:bodyPr>
+          <a:lstStyle/>
+          <a:p>
+            <a:pPr>
+              <a:defRPr sz="1600" b="1">
+                <a:solidFill>
+                  <a:srgbClr val="0D6E7A"/>
+                </a:solidFill>
+              </a:defRPr>
+            </a:pPr>
+            <a:r>
+              <a:t>Q  Aren't circles just squares? (the meeting challenge)</a:t>
+            </a:r>
+          </a:p>
+        </p:txBody>
+      </p:sp>
+      <p:sp>
+        <p:nvSpPr>
+          <p:cNvPr id="6" name="TextBox 5"/>
+          <p:cNvSpPr txBox="1"/>
+          <p:nvPr/>
+        </p:nvSpPr>
+        <p:spPr>
+          <a:xfrm>
+            <a:off x="640080" y="1874519"/>
+            <a:ext cx="10972800" cy="731520"/>
+          </a:xfrm>
+          <a:prstGeom prst="rect">
+            <a:avLst/>
+          </a:prstGeom>
+          <a:noFill/>
+        </p:spPr>
+        <p:txBody>
+          <a:bodyPr wrap="square">
+            <a:spAutoFit/>
+          </a:bodyPr>
+          <a:lstStyle/>
+          <a:p>
+            <a:pPr>
+              <a:defRPr sz="1400" b="0">
+                <a:solidFill>
+                  <a:srgbClr val="4A4A4A"/>
+                </a:solidFill>
+              </a:defRPr>
+            </a:pPr>
+            <a:r>
+              <a:t>A  Geometrically yes — 4 points on a circle are a small square. Behaviourally no: corners commit to 4 sharp spots, the circle smears a diffuse ring (cosine 0.42). The circle signal is just weak.</a:t>
+            </a:r>
+          </a:p>
+        </p:txBody>
+      </p:sp>
+      <p:sp>
+        <p:nvSpPr>
+          <p:cNvPr id="7" name="TextBox 6"/>
+          <p:cNvSpPr txBox="1"/>
+          <p:nvPr/>
+        </p:nvSpPr>
+        <p:spPr>
+          <a:xfrm>
+            <a:off x="640080" y="2715768"/>
+            <a:ext cx="10972800" cy="457200"/>
+          </a:xfrm>
+          <a:prstGeom prst="rect">
+            <a:avLst/>
+          </a:prstGeom>
+          <a:noFill/>
+        </p:spPr>
+        <p:txBody>
+          <a:bodyPr wrap="square">
+            <a:spAutoFit/>
+          </a:bodyPr>
+          <a:lstStyle/>
+          <a:p>
+            <a:pPr>
+              <a:defRPr sz="1600" b="1">
+                <a:solidFill>
+                  <a:srgbClr val="0D6E7A"/>
+                </a:solidFill>
+              </a:defRPr>
+            </a:pPr>
+            <a:r>
+              <a:t>Q  If it's decodable (0.93), why doesn't it cluster (ARI≈0)?</a:t>
+            </a:r>
+          </a:p>
+        </p:txBody>
+      </p:sp>
+      <p:sp>
+        <p:nvSpPr>
+          <p:cNvPr id="8" name="TextBox 7"/>
+          <p:cNvSpPr txBox="1"/>
+          <p:nvPr/>
+        </p:nvSpPr>
+        <p:spPr>
+          <a:xfrm>
+            <a:off x="640080" y="3172968"/>
+            <a:ext cx="10972800" cy="731520"/>
+          </a:xfrm>
+          <a:prstGeom prst="rect">
+            <a:avLst/>
+          </a:prstGeom>
+          <a:noFill/>
+        </p:spPr>
+        <p:txBody>
+          <a:bodyPr wrap="square">
+            <a:spAutoFit/>
+          </a:bodyPr>
+          <a:lstStyle/>
+          <a:p>
+            <a:pPr>
+              <a:defRPr sz="1400" b="0">
+                <a:solidFill>
+                  <a:srgbClr val="4A4A4A"/>
+                </a:solidFill>
+              </a:defRPr>
+            </a:pPr>
+            <a:r>
+              <a:t>A  Linear separability ≠ two modes. The placement is a DIRECTION in latent space, not two blobs. Shaping it to cluster (contrastive / equivariant) is the open problem.</a:t>
+            </a:r>
+          </a:p>
+        </p:txBody>
+      </p:sp>
+      <p:sp>
+        <p:nvSpPr>
+          <p:cNvPr id="9" name="TextBox 8"/>
+          <p:cNvSpPr txBox="1"/>
+          <p:nvPr/>
+        </p:nvSpPr>
+        <p:spPr>
+          <a:xfrm>
+            <a:off x="640080" y="4014215"/>
+            <a:ext cx="10972800" cy="457200"/>
+          </a:xfrm>
+          <a:prstGeom prst="rect">
+            <a:avLst/>
+          </a:prstGeom>
+          <a:noFill/>
+        </p:spPr>
+        <p:txBody>
+          <a:bodyPr wrap="square">
+            <a:spAutoFit/>
+          </a:bodyPr>
+          <a:lstStyle/>
+          <a:p>
+            <a:pPr>
+              <a:defRPr sz="1600" b="1">
+                <a:solidFill>
+                  <a:srgbClr val="0D6E7A"/>
+                </a:solidFill>
+              </a:defRPr>
+            </a:pPr>
+            <a:r>
+              <a:t>Q  Is the latent-BC sweep gain just averaging over more episodes?</a:t>
+            </a:r>
+          </a:p>
+        </p:txBody>
+      </p:sp>
+      <p:sp>
+        <p:nvSpPr>
+          <p:cNvPr id="10" name="TextBox 9"/>
+          <p:cNvSpPr txBox="1"/>
+          <p:nvPr/>
+        </p:nvSpPr>
+        <p:spPr>
+          <a:xfrm>
+            <a:off x="640080" y="4471416"/>
+            <a:ext cx="10972800" cy="731520"/>
+          </a:xfrm>
+          <a:prstGeom prst="rect">
+            <a:avLst/>
+          </a:prstGeom>
+          <a:noFill/>
+        </p:spPr>
+        <p:txBody>
+          <a:bodyPr wrap="square">
+            <a:spAutoFit/>
+          </a:bodyPr>
+          <a:lstStyle/>
+          <a:p>
+            <a:pPr>
+              <a:defRPr sz="1400" b="0">
+                <a:solidFill>
+                  <a:srgbClr val="4A4A4A"/>
+                </a:solidFill>
+              </a:defRPr>
+            </a:pPr>
+            <a:r>
+              <a:t>A  Largely yes, and I say so: the placement is FIXED, so longer observation is a better occupancy ESTIMATE, not a strategy unfolding. It's a scaling-with-observation result.</a:t>
+            </a:r>
+          </a:p>
+        </p:txBody>
+      </p:sp>
+      <p:sp>
+        <p:nvSpPr>
+          <p:cNvPr id="11" name="TextBox 10"/>
+          <p:cNvSpPr txBox="1"/>
+          <p:nvPr/>
+        </p:nvSpPr>
+        <p:spPr>
+          <a:xfrm>
+            <a:off x="640080" y="5312664"/>
+            <a:ext cx="10972800" cy="457200"/>
+          </a:xfrm>
+          <a:prstGeom prst="rect">
+            <a:avLst/>
+          </a:prstGeom>
+          <a:noFill/>
+        </p:spPr>
+        <p:txBody>
+          <a:bodyPr wrap="square">
+            <a:spAutoFit/>
+          </a:bodyPr>
+          <a:lstStyle/>
+          <a:p>
+            <a:pPr>
+              <a:defRPr sz="1600" b="1">
+                <a:solidFill>
+                  <a:srgbClr val="0D6E7A"/>
+                </a:solidFill>
+              </a:defRPr>
+            </a:pPr>
+            <a:r>
+              <a:t>Q  The BC-failure GIF — cherry-picked?</a:t>
+            </a:r>
+          </a:p>
+        </p:txBody>
+      </p:sp>
+      <p:sp>
+        <p:nvSpPr>
+          <p:cNvPr id="12" name="TextBox 11"/>
+          <p:cNvSpPr txBox="1"/>
+          <p:nvPr/>
+        </p:nvSpPr>
+        <p:spPr>
+          <a:xfrm>
+            <a:off x="640080" y="5769864"/>
+            <a:ext cx="10972800" cy="731520"/>
+          </a:xfrm>
+          <a:prstGeom prst="rect">
+            <a:avLst/>
+          </a:prstGeom>
+          <a:noFill/>
+        </p:spPr>
+        <p:txBody>
+          <a:bodyPr wrap="square">
+            <a:spAutoFit/>
+          </a:bodyPr>
+          <a:lstStyle/>
+          <a:p>
+            <a:pPr>
+              <a:defRPr sz="1400" b="0">
+                <a:solidFill>
+                  <a:srgbClr val="4A4A4A"/>
+                </a:solidFill>
+              </a:defRPr>
+            </a:pPr>
+            <a:r>
+              <a:t>A  Deliberately: tail episodes chosen to show the mechanism. The average is the table (86% recovery, +2.4 accuracy pts). The GIF explains WHY, the table is the claim.</a:t>
+            </a:r>
+          </a:p>
+        </p:txBody>
+      </p:sp>
+    </p:spTree>
+  </p:cSld>
+  <p:clrMapOvr>
+    <a:masterClrMapping/>
+  </p:clrMapOvr>
+</p:sld>
+</file>
+
+<file path=ppt/slides/slide21.xml><?xml version="1.0" encoding="utf-8"?>
+<p:sld xmlns:a="http://schemas.openxmlformats.org/drawingml/2006/main" xmlns:p="http://schemas.openxmlformats.org/presentationml/2006/main" xmlns:r="http://schemas.openxmlformats.org/officeDocument/2006/relationships">
+  <p:cSld>
+    <p:spTree>
+      <p:nvGrpSpPr>
+        <p:cNvPr id="1" name=""/>
+        <p:cNvGrpSpPr/>
+        <p:nvPr/>
+      </p:nvGrpSpPr>
+      <p:grpSpPr/>
+      <p:sp>
+        <p:nvSpPr>
+          <p:cNvPr id="2" name="TextBox 1"/>
+          <p:cNvSpPr txBox="1"/>
+          <p:nvPr/>
+        </p:nvSpPr>
+        <p:spPr>
+          <a:xfrm>
+            <a:off x="11368735" y="6400800"/>
+            <a:ext cx="548640" cy="274320"/>
+          </a:xfrm>
+          <a:prstGeom prst="rect">
+            <a:avLst/>
+          </a:prstGeom>
+          <a:noFill/>
+        </p:spPr>
+        <p:txBody>
+          <a:bodyPr wrap="none">
+            <a:spAutoFit/>
+          </a:bodyPr>
+          <a:lstStyle/>
+          <a:p>
+            <a:pPr>
+              <a:defRPr sz="1100">
+                <a:solidFill>
+                  <a:srgbClr val="4A4A4A"/>
+                </a:solidFill>
+              </a:defRPr>
+            </a:pPr>
+            <a:r>
+              <a:t>21</a:t>
+            </a:r>
+          </a:p>
+        </p:txBody>
+      </p:sp>
+      <p:sp>
+        <p:nvSpPr>
+          <p:cNvPr id="3" name="TextBox 2"/>
+          <p:cNvSpPr txBox="1"/>
+          <p:nvPr/>
+        </p:nvSpPr>
+        <p:spPr>
+          <a:xfrm>
+            <a:off x="502920" y="256032"/>
+            <a:ext cx="3657600" cy="320040"/>
+          </a:xfrm>
+          <a:prstGeom prst="rect">
+            <a:avLst/>
+          </a:prstGeom>
+          <a:noFill/>
+        </p:spPr>
+        <p:txBody>
+          <a:bodyPr wrap="square">
+            <a:spAutoFit/>
+          </a:bodyPr>
+          <a:lstStyle/>
+          <a:p>
+            <a:pPr>
+              <a:defRPr sz="1200" b="1">
+                <a:solidFill>
+                  <a:srgbClr val="0D6E7A"/>
+                </a:solidFill>
+              </a:defRPr>
+            </a:pPr>
+            <a:r>
+              <a:t>CLOSE</a:t>
+            </a:r>
+          </a:p>
+        </p:txBody>
+      </p:sp>
+      <p:sp>
+        <p:nvSpPr>
+          <p:cNvPr id="4" name="TextBox 3"/>
+          <p:cNvSpPr txBox="1"/>
+          <p:nvPr/>
+        </p:nvSpPr>
+        <p:spPr>
+          <a:xfrm>
+            <a:off x="502920" y="502920"/>
+            <a:ext cx="11185855" cy="822960"/>
+          </a:xfrm>
+          <a:prstGeom prst="rect">
+            <a:avLst/>
+          </a:prstGeom>
+          <a:noFill/>
+        </p:spPr>
+        <p:txBody>
+          <a:bodyPr wrap="square">
+            <a:spAutoFit/>
+          </a:bodyPr>
+          <a:lstStyle/>
+          <a:p>
+            <a:pPr>
+              <a:defRPr sz="2700" b="1">
+                <a:solidFill>
+                  <a:srgbClr val="171717"/>
+                </a:solidFill>
+              </a:defRPr>
+            </a:pPr>
+            <a:r>
+              <a:t>Before submission, run the missing tests</a:t>
+            </a:r>
+          </a:p>
+        </p:txBody>
+      </p:sp>
+      <p:sp>
+        <p:nvSpPr>
+          <p:cNvPr id="5" name="TextBox 4"/>
+          <p:cNvSpPr txBox="1"/>
+          <p:nvPr/>
+        </p:nvSpPr>
+        <p:spPr>
+          <a:xfrm>
+            <a:off x="822960" y="1554480"/>
+            <a:ext cx="2834640" cy="411480"/>
+          </a:xfrm>
+          <a:prstGeom prst="rect">
+            <a:avLst/>
+          </a:prstGeom>
+          <a:noFill/>
+        </p:spPr>
+        <p:txBody>
+          <a:bodyPr wrap="square">
+            <a:spAutoFit/>
+          </a:bodyPr>
+          <a:lstStyle/>
+          <a:p>
+            <a:pPr>
+              <a:defRPr sz="1800" b="1">
+                <a:solidFill>
+                  <a:srgbClr val="171717"/>
+                </a:solidFill>
+              </a:defRPr>
+            </a:pPr>
+            <a:r>
+              <a:t>Oracle planner</a:t>
+            </a:r>
+          </a:p>
+        </p:txBody>
+      </p:sp>
+      <p:sp>
+        <p:nvSpPr>
+          <p:cNvPr id="6" name="TextBox 5"/>
+          <p:cNvSpPr txBox="1"/>
+          <p:nvPr/>
+        </p:nvSpPr>
+        <p:spPr>
+          <a:xfrm>
+            <a:off x="3840480" y="1554480"/>
+            <a:ext cx="7680960" cy="502920"/>
+          </a:xfrm>
+          <a:prstGeom prst="rect">
+            <a:avLst/>
+          </a:prstGeom>
+          <a:noFill/>
+        </p:spPr>
+        <p:txBody>
+          <a:bodyPr wrap="square">
+            <a:spAutoFit/>
+          </a:bodyPr>
+          <a:lstStyle/>
+          <a:p>
+            <a:pPr>
+              <a:defRPr sz="1700" b="0">
+                <a:solidFill>
+                  <a:srgbClr val="4A4A4A"/>
+                </a:solidFill>
+              </a:defRPr>
+            </a:pPr>
+            <a:r>
+              <a:t>Measures the true planning ceiling with known intent.</a:t>
+            </a:r>
+          </a:p>
+        </p:txBody>
+      </p:sp>
+      <p:sp>
+        <p:nvSpPr>
+          <p:cNvPr id="7" name="TextBox 6"/>
+          <p:cNvSpPr txBox="1"/>
+          <p:nvPr/>
+        </p:nvSpPr>
+        <p:spPr>
+          <a:xfrm>
+            <a:off x="822960" y="2267712"/>
+            <a:ext cx="2834640" cy="411480"/>
+          </a:xfrm>
+          <a:prstGeom prst="rect">
+            <a:avLst/>
+          </a:prstGeom>
+          <a:noFill/>
+        </p:spPr>
+        <p:txBody>
+          <a:bodyPr wrap="square">
+            <a:spAutoFit/>
+          </a:bodyPr>
+          <a:lstStyle/>
+          <a:p>
+            <a:pPr>
+              <a:defRPr sz="1800" b="1">
+                <a:solidFill>
+                  <a:srgbClr val="171717"/>
+                </a:solidFill>
+              </a:defRPr>
+            </a:pPr>
+            <a:r>
+              <a:t>Switching prey</a:t>
+            </a:r>
+          </a:p>
+        </p:txBody>
+      </p:sp>
+      <p:sp>
+        <p:nvSpPr>
+          <p:cNvPr id="8" name="TextBox 7"/>
+          <p:cNvSpPr txBox="1"/>
+          <p:nvPr/>
+        </p:nvSpPr>
+        <p:spPr>
+          <a:xfrm>
+            <a:off x="3840480" y="2267712"/>
+            <a:ext cx="7680960" cy="502920"/>
+          </a:xfrm>
+          <a:prstGeom prst="rect">
+            <a:avLst/>
+          </a:prstGeom>
+          <a:noFill/>
+        </p:spPr>
+        <p:txBody>
+          <a:bodyPr wrap="square">
+            <a:spAutoFit/>
+          </a:bodyPr>
+          <a:lstStyle/>
+          <a:p>
+            <a:pPr>
+              <a:defRPr sz="1700" b="0">
+                <a:solidFill>
+                  <a:srgbClr val="4A4A4A"/>
+                </a:solidFill>
+              </a:defRPr>
+            </a:pPr>
+            <a:r>
+              <a:t>Tests whether the belief tracks a strategy change mid-episode.</a:t>
+            </a:r>
+          </a:p>
+        </p:txBody>
+      </p:sp>
+      <p:sp>
+        <p:nvSpPr>
+          <p:cNvPr id="9" name="TextBox 8"/>
+          <p:cNvSpPr txBox="1"/>
+          <p:nvPr/>
+        </p:nvSpPr>
+        <p:spPr>
+          <a:xfrm>
+            <a:off x="822960" y="2980944"/>
+            <a:ext cx="2834640" cy="411480"/>
+          </a:xfrm>
+          <a:prstGeom prst="rect">
+            <a:avLst/>
+          </a:prstGeom>
+          <a:noFill/>
+        </p:spPr>
+        <p:txBody>
+          <a:bodyPr wrap="square">
+            <a:spAutoFit/>
+          </a:bodyPr>
+          <a:lstStyle/>
+          <a:p>
+            <a:pPr>
+              <a:defRPr sz="1800" b="1">
+                <a:solidFill>
+                  <a:srgbClr val="171717"/>
+                </a:solidFill>
+              </a:defRPr>
+            </a:pPr>
+            <a:r>
+              <a:t>HOP baseline</a:t>
+            </a:r>
+          </a:p>
+        </p:txBody>
+      </p:sp>
+      <p:sp>
+        <p:nvSpPr>
+          <p:cNvPr id="10" name="TextBox 9"/>
+          <p:cNvSpPr txBox="1"/>
+          <p:nvPr/>
+        </p:nvSpPr>
+        <p:spPr>
+          <a:xfrm>
+            <a:off x="3840480" y="2980944"/>
+            <a:ext cx="7680960" cy="502920"/>
+          </a:xfrm>
+          <a:prstGeom prst="rect">
+            <a:avLst/>
+          </a:prstGeom>
+          <a:noFill/>
+        </p:spPr>
+        <p:txBody>
+          <a:bodyPr wrap="square">
+            <a:spAutoFit/>
+          </a:bodyPr>
+          <a:lstStyle/>
+          <a:p>
+            <a:pPr>
+              <a:defRPr sz="1700" b="0">
+                <a:solidFill>
+                  <a:srgbClr val="4A4A4A"/>
+                </a:solidFill>
+              </a:defRPr>
+            </a:pPr>
+            <a:r>
+              <a:t>Checks the closest belief-search comparator.</a:t>
+            </a:r>
+          </a:p>
+        </p:txBody>
+      </p:sp>
+      <p:sp>
+        <p:nvSpPr>
+          <p:cNvPr id="11" name="TextBox 10"/>
+          <p:cNvSpPr txBox="1"/>
+          <p:nvPr/>
+        </p:nvSpPr>
+        <p:spPr>
+          <a:xfrm>
+            <a:off x="822960" y="3694176"/>
+            <a:ext cx="2834640" cy="411480"/>
+          </a:xfrm>
+          <a:prstGeom prst="rect">
+            <a:avLst/>
+          </a:prstGeom>
+          <a:noFill/>
+        </p:spPr>
+        <p:txBody>
+          <a:bodyPr wrap="square">
+            <a:spAutoFit/>
+          </a:bodyPr>
+          <a:lstStyle/>
+          <a:p>
+            <a:pPr>
+              <a:defRPr sz="1800" b="1">
+                <a:solidFill>
+                  <a:srgbClr val="171717"/>
+                </a:solidFill>
+              </a:defRPr>
+            </a:pPr>
+            <a:r>
+              <a:t>Snake placement</a:t>
+            </a:r>
+          </a:p>
+        </p:txBody>
+      </p:sp>
+      <p:sp>
+        <p:nvSpPr>
+          <p:cNvPr id="12" name="TextBox 11"/>
+          <p:cNvSpPr txBox="1"/>
+          <p:nvPr/>
+        </p:nvSpPr>
+        <p:spPr>
+          <a:xfrm>
+            <a:off x="3840480" y="3694176"/>
+            <a:ext cx="7680960" cy="502920"/>
+          </a:xfrm>
+          <a:prstGeom prst="rect">
+            <a:avLst/>
+          </a:prstGeom>
+          <a:noFill/>
+        </p:spPr>
+        <p:txBody>
+          <a:bodyPr wrap="square">
+            <a:spAutoFit/>
+          </a:bodyPr>
+          <a:lstStyle/>
+          <a:p>
+            <a:pPr>
+              <a:defRPr sz="1700" b="0">
+                <a:solidFill>
+                  <a:srgbClr val="4A4A4A"/>
+                </a:solidFill>
+              </a:defRPr>
+            </a:pPr>
+            <a:r>
+              <a:t>A genuinely distinct behaviour class, so clusters can exist.</a:t>
+            </a:r>
+          </a:p>
+        </p:txBody>
+      </p:sp>
+      <p:sp>
+        <p:nvSpPr>
+          <p:cNvPr id="13" name="TextBox 12"/>
+          <p:cNvSpPr txBox="1"/>
+          <p:nvPr/>
+        </p:nvSpPr>
+        <p:spPr>
+          <a:xfrm>
+            <a:off x="822960" y="4407408"/>
+            <a:ext cx="2834640" cy="411480"/>
+          </a:xfrm>
+          <a:prstGeom prst="rect">
+            <a:avLst/>
+          </a:prstGeom>
+          <a:noFill/>
+        </p:spPr>
+        <p:txBody>
+          <a:bodyPr wrap="square">
+            <a:spAutoFit/>
+          </a:bodyPr>
+          <a:lstStyle/>
+          <a:p>
+            <a:pPr>
+              <a:defRPr sz="1800" b="1">
+                <a:solidFill>
+                  <a:srgbClr val="171717"/>
+                </a:solidFill>
+              </a:defRPr>
+            </a:pPr>
+            <a:r>
+              <a:t>Raw artifact archive</a:t>
+            </a:r>
+          </a:p>
+        </p:txBody>
+      </p:sp>
+      <p:sp>
+        <p:nvSpPr>
+          <p:cNvPr id="14" name="TextBox 13"/>
+          <p:cNvSpPr txBox="1"/>
+          <p:nvPr/>
+        </p:nvSpPr>
+        <p:spPr>
+          <a:xfrm>
+            <a:off x="3840480" y="4407408"/>
+            <a:ext cx="7680960" cy="502920"/>
+          </a:xfrm>
+          <a:prstGeom prst="rect">
+            <a:avLst/>
+          </a:prstGeom>
+          <a:noFill/>
+        </p:spPr>
+        <p:txBody>
+          <a:bodyPr wrap="square">
+            <a:spAutoFit/>
+          </a:bodyPr>
+          <a:lstStyle/>
+          <a:p>
+            <a:pPr>
+              <a:defRPr sz="1700" b="0">
+                <a:solidFill>
+                  <a:srgbClr val="4A4A4A"/>
+                </a:solidFill>
+              </a:defRPr>
+            </a:pPr>
+            <a:r>
+              <a:t>Pins checkpoints, logs, and metrics to a release DOI.</a:t>
+            </a:r>
+          </a:p>
+        </p:txBody>
+      </p:sp>
+      <p:sp>
+        <p:nvSpPr>
+          <p:cNvPr id="15" name="TextBox 14"/>
+          <p:cNvSpPr txBox="1"/>
+          <p:nvPr/>
+        </p:nvSpPr>
+        <p:spPr>
+          <a:xfrm>
+            <a:off x="822960" y="5349240"/>
+            <a:ext cx="10607040" cy="548640"/>
+          </a:xfrm>
+          <a:prstGeom prst="rect">
+            <a:avLst/>
+          </a:prstGeom>
+          <a:noFill/>
+        </p:spPr>
+        <p:txBody>
+          <a:bodyPr wrap="square">
+            <a:spAutoFit/>
+          </a:bodyPr>
+          <a:lstStyle/>
+          <a:p>
+            <a:pPr>
+              <a:defRPr sz="1800" b="1">
+                <a:solidFill>
+                  <a:srgbClr val="171717"/>
+                </a:solidFill>
+              </a:defRPr>
+            </a:pPr>
+            <a:r>
+              <a:t>End with a concrete ask: accept the controlled result, then fund the baseline and switching-opponent run.</a:t>
             </a:r>
           </a:p>
         </p:txBody>
